--- a/static/ppts/G6_Sci_T1_Data_Graphs.pptx
+++ b/static/ppts/G6_Sci_T1_Data_Graphs.pptx
@@ -10,10 +10,9 @@
     <p:sldId id="258" r:id="rId4"/>
     <p:sldId id="259" r:id="rId5"/>
     <p:sldId id="260" r:id="rId6"/>
-    <p:sldId id="261" r:id="rId7"/>
   </p:sldIdLst>
   <p:notesMasterIdLst>
-    <p:notesMasterId r:id="rId8"/>
+    <p:notesMasterId r:id="rId7"/>
   </p:notesMasterIdLst>
   <p:sldSz cx="9144000" cy="5143500"/>
   <p:notesSz cx="5143500" cy="9144000"/>
@@ -901,94 +900,6 @@
 </p:notes>
 </file>
 
-<file path=ppt/notesSlides/notesSlide6.xml><?xml version="1.0" encoding="utf-8"?>
-<p:notes xmlns:a="http://schemas.openxmlformats.org/drawingml/2006/main" xmlns:r="http://schemas.openxmlformats.org/officeDocument/2006/relationships" xmlns:p="http://schemas.openxmlformats.org/presentationml/2006/main">
-  <p:cSld>
-    <p:spTree>
-      <p:nvGrpSpPr>
-        <p:cNvPr id="1" name=""/>
-        <p:cNvGrpSpPr/>
-        <p:nvPr/>
-      </p:nvGrpSpPr>
-      <p:grpSpPr>
-        <a:xfrm>
-          <a:off x="0" y="0"/>
-          <a:ext cx="0" cy="0"/>
-          <a:chOff x="0" y="0"/>
-          <a:chExt cx="0" cy="0"/>
-        </a:xfrm>
-      </p:grpSpPr>
-      <p:sp>
-        <p:nvSpPr>
-          <p:cNvPr id="2" name="Slide Image Placeholder 1"/>
-          <p:cNvSpPr>
-            <a:spLocks noGrp="1" noRot="1" noChangeAspect="1"/>
-          </p:cNvSpPr>
-          <p:nvPr>
-            <p:ph type="sldImg"/>
-          </p:nvPr>
-        </p:nvSpPr>
-        <p:spPr/>
-      </p:sp>
-      <p:sp>
-        <p:nvSpPr>
-          <p:cNvPr id="3" name="Notes Placeholder 2"/>
-          <p:cNvSpPr>
-            <a:spLocks noGrp="1"/>
-          </p:cNvSpPr>
-          <p:nvPr>
-            <p:ph type="body" idx="1"/>
-          </p:nvPr>
-        </p:nvSpPr>
-        <p:spPr/>
-        <p:txBody>
-          <a:bodyPr/>
-          <a:lstStyle/>
-          <a:p>
-            <a:r>
-              <a:rPr lang="en-US" dirty="0"/>
-              <a:t/>
-            </a:r>
-            <a:endParaRPr lang="en-US" dirty="0"/>
-          </a:p>
-        </p:txBody>
-      </p:sp>
-      <p:sp>
-        <p:nvSpPr>
-          <p:cNvPr id="4" name="Slide Number Placeholder 3"/>
-          <p:cNvSpPr>
-            <a:spLocks noGrp="1"/>
-          </p:cNvSpPr>
-          <p:nvPr>
-            <p:ph type="sldNum" sz="quarter" idx="10"/>
-          </p:nvPr>
-        </p:nvSpPr>
-        <p:spPr/>
-        <p:txBody>
-          <a:bodyPr/>
-          <a:lstStyle/>
-          <a:p>
-            <a:fld id="{F7021451-1387-4CA6-816F-3879F97B5CBC}" type="slidenum">
-              <a:rPr lang="en-US"/>
-              <a:t>6</a:t>
-            </a:fld>
-            <a:endParaRPr lang="en-US"/>
-          </a:p>
-        </p:txBody>
-      </p:sp>
-    </p:spTree>
-    <p:extLst>
-      <p:ext uri="{BB962C8B-B14F-4D97-AF65-F5344CB8AC3E}">
-        <p14:creationId xmlns:p14="http://schemas.microsoft.com/office/powerpoint/2010/main" val="1024086991"/>
-      </p:ext>
-    </p:extLst>
-  </p:cSld>
-  <p:clrMapOvr>
-    <a:masterClrMapping/>
-  </p:clrMapOvr>
-</p:notes>
-</file>
-
 <file path=ppt/slideLayouts/slideLayout1.xml><?xml version="1.0" encoding="utf-8"?>
 <p:sldLayout xmlns:a="http://schemas.openxmlformats.org/drawingml/2006/main" xmlns:r="http://schemas.openxmlformats.org/officeDocument/2006/relationships" xmlns:p="http://schemas.openxmlformats.org/presentationml/2006/main" preserve="1">
   <p:cSld name="DEFAULT">
@@ -1302,7 +1213,7 @@
     <p:bg>
       <p:bgPr>
         <a:solidFill>
-          <a:srgbClr val="1A7A6F"/>
+          <a:srgbClr val="1B2A4A"/>
         </a:solidFill>
       </p:bgPr>
     </p:bg>
@@ -1322,14 +1233,34 @@
       </p:grpSpPr>
       <p:sp>
         <p:nvSpPr>
-          <p:cNvPr id="2" name="Text 0"/>
+          <p:cNvPr id="2" name="Shape 0"/>
           <p:cNvSpPr/>
           <p:nvPr/>
         </p:nvSpPr>
         <p:spPr>
           <a:xfrm>
-            <a:off x="731520" y="1371600"/>
-            <a:ext cx="7680960" cy="1371600"/>
+            <a:off x="0" y="0"/>
+            <a:ext cx="109728" cy="5143500"/>
+          </a:xfrm>
+          <a:prstGeom prst="rect">
+            <a:avLst/>
+          </a:prstGeom>
+          <a:solidFill>
+            <a:srgbClr val="2A9D8F"/>
+          </a:solidFill>
+          <a:ln/>
+        </p:spPr>
+      </p:sp>
+      <p:sp>
+        <p:nvSpPr>
+          <p:cNvPr id="3" name="Text 1"/>
+          <p:cNvSpPr/>
+          <p:nvPr/>
+        </p:nvSpPr>
+        <p:spPr>
+          <a:xfrm>
+            <a:off x="731520" y="1280160"/>
+            <a:ext cx="7772400" cy="1371600"/>
           </a:xfrm>
           <a:prstGeom prst="rect">
             <a:avLst/>
@@ -1345,30 +1276,69 @@
               <a:buNone/>
             </a:pPr>
             <a:r>
-              <a:rPr lang="en-US" sz="4000" b="1" dirty="0">
+              <a:rPr lang="en-US" sz="3600" b="1" dirty="0">
                 <a:solidFill>
                   <a:srgbClr val="FFFFFF"/>
+                </a:solidFill>
+                <a:latin typeface="Georgia" pitchFamily="34" charset="0"/>
+                <a:ea typeface="Georgia" pitchFamily="34" charset="-122"/>
+                <a:cs typeface="Georgia" pitchFamily="34" charset="-120"/>
+              </a:rPr>
+              <a:t>Data &amp; Graphs</a:t>
+            </a:r>
+            <a:endParaRPr lang="en-US" sz="3600" dirty="0"/>
+          </a:p>
+        </p:txBody>
+      </p:sp>
+      <p:sp>
+        <p:nvSpPr>
+          <p:cNvPr id="4" name="Text 2"/>
+          <p:cNvSpPr/>
+          <p:nvPr/>
+        </p:nvSpPr>
+        <p:spPr>
+          <a:xfrm>
+            <a:off x="731520" y="2743200"/>
+            <a:ext cx="7772400" cy="548640"/>
+          </a:xfrm>
+          <a:prstGeom prst="rect">
+            <a:avLst/>
+          </a:prstGeom>
+          <a:noFill/>
+          <a:ln/>
+        </p:spPr>
+        <p:txBody>
+          <a:bodyPr wrap="square" rtlCol="0" anchor="ctr"/>
+          <a:lstStyle/>
+          <a:p>
+            <a:pPr indent="0" marL="0">
+              <a:buNone/>
+            </a:pPr>
+            <a:r>
+              <a:rPr lang="en-US" sz="1600" dirty="0">
+                <a:solidFill>
+                  <a:srgbClr val="9B9690"/>
                 </a:solidFill>
                 <a:latin typeface="Calibri" pitchFamily="34" charset="0"/>
                 <a:ea typeface="Calibri" pitchFamily="34" charset="-122"/>
                 <a:cs typeface="Calibri" pitchFamily="34" charset="-120"/>
               </a:rPr>
-              <a:t>Data &amp; Graphs</a:t>
-            </a:r>
-            <a:endParaRPr lang="en-US" sz="4000" dirty="0"/>
-          </a:p>
-        </p:txBody>
-      </p:sp>
-      <p:sp>
-        <p:nvSpPr>
-          <p:cNvPr id="3" name="Text 1"/>
+              <a:t>G6 Science · Scientific Skills</a:t>
+            </a:r>
+            <a:endParaRPr lang="en-US" sz="1600" dirty="0"/>
+          </a:p>
+        </p:txBody>
+      </p:sp>
+      <p:sp>
+        <p:nvSpPr>
+          <p:cNvPr id="5" name="Text 3"/>
           <p:cNvSpPr/>
           <p:nvPr/>
         </p:nvSpPr>
         <p:spPr>
           <a:xfrm>
-            <a:off x="731520" y="2926080"/>
-            <a:ext cx="7680960" cy="548640"/>
+            <a:off x="731520" y="4389120"/>
+            <a:ext cx="7772400" cy="457200"/>
           </a:xfrm>
           <a:prstGeom prst="rect">
             <a:avLst/>
@@ -1384,17 +1354,17 @@
               <a:buNone/>
             </a:pPr>
             <a:r>
-              <a:rPr lang="en-US" sz="1600" i="1" dirty="0">
-                <a:solidFill>
-                  <a:srgbClr val="FFFFFF"/>
+              <a:rPr lang="en-US" sz="1000" dirty="0">
+                <a:solidFill>
+                  <a:srgbClr val="6B6660"/>
                 </a:solidFill>
                 <a:latin typeface="Calibri" pitchFamily="34" charset="0"/>
                 <a:ea typeface="Calibri" pitchFamily="34" charset="-122"/>
                 <a:cs typeface="Calibri" pitchFamily="34" charset="-120"/>
               </a:rPr>
-              <a:t>Grade 6 Science · Mr Zocchi</a:t>
-            </a:r>
-            <a:endParaRPr lang="en-US" sz="1600" dirty="0"/>
+              <a:t>Mr Zocchi · mrzocchi.com</a:t>
+            </a:r>
+            <a:endParaRPr lang="en-US" sz="1000" dirty="0"/>
           </a:p>
         </p:txBody>
       </p:sp>
@@ -1409,6 +1379,13 @@
 <file path=ppt/slides/slide2.xml><?xml version="1.0" encoding="utf-8"?>
 <p:sld xmlns:a="http://schemas.openxmlformats.org/drawingml/2006/main" xmlns:r="http://schemas.openxmlformats.org/officeDocument/2006/relationships" xmlns:p="http://schemas.openxmlformats.org/presentationml/2006/main">
   <p:cSld name="Slide 2">
+    <p:bg>
+      <p:bgPr>
+        <a:solidFill>
+          <a:srgbClr val="FFFFFF"/>
+        </a:solidFill>
+      </p:bgPr>
+    </p:bg>
     <p:spTree>
       <p:nvGrpSpPr>
         <p:cNvPr id="1" name=""/>
@@ -1432,13 +1409,13 @@
         <p:spPr>
           <a:xfrm>
             <a:off x="0" y="0"/>
-            <a:ext cx="9144000" cy="548640"/>
-          </a:xfrm>
-          <a:prstGeom prst="rect">
-            <a:avLst/>
-          </a:prstGeom>
-          <a:solidFill>
-            <a:srgbClr val="1A7A6F"/>
+            <a:ext cx="9144000" cy="54864"/>
+          </a:xfrm>
+          <a:prstGeom prst="rect">
+            <a:avLst/>
+          </a:prstGeom>
+          <a:solidFill>
+            <a:srgbClr val="2A9D8F"/>
           </a:solidFill>
           <a:ln/>
         </p:spPr>
@@ -1451,8 +1428,8 @@
         </p:nvSpPr>
         <p:spPr>
           <a:xfrm>
-            <a:off x="457200" y="45720"/>
-            <a:ext cx="8229600" cy="457200"/>
+            <a:off x="548640" y="274320"/>
+            <a:ext cx="8046720" cy="640080"/>
           </a:xfrm>
           <a:prstGeom prst="rect">
             <a:avLst/>
@@ -1461,125 +1438,207 @@
           <a:ln/>
         </p:spPr>
         <p:txBody>
-          <a:bodyPr wrap="square" rtlCol="0" anchor="ctr"/>
+          <a:bodyPr wrap="square" lIns="0" tIns="0" rIns="0" bIns="0" rtlCol="0" anchor="ctr"/>
           <a:lstStyle/>
           <a:p>
             <a:pPr indent="0" marL="0">
               <a:buNone/>
             </a:pPr>
             <a:r>
-              <a:rPr lang="en-US" sz="1800" b="1" dirty="0">
-                <a:solidFill>
-                  <a:srgbClr val="FFFFFF"/>
+              <a:rPr lang="en-US" sz="2600" b="1" dirty="0">
+                <a:solidFill>
+                  <a:srgbClr val="1B2A4A"/>
+                </a:solidFill>
+                <a:latin typeface="Georgia" pitchFamily="34" charset="0"/>
+                <a:ea typeface="Georgia" pitchFamily="34" charset="-122"/>
+                <a:cs typeface="Georgia" pitchFamily="34" charset="-120"/>
+              </a:rPr>
+              <a:t>Recording Data</a:t>
+            </a:r>
+            <a:endParaRPr lang="en-US" sz="2600" dirty="0"/>
+          </a:p>
+        </p:txBody>
+      </p:sp>
+      <p:sp>
+        <p:nvSpPr>
+          <p:cNvPr id="4" name="Text 2"/>
+          <p:cNvSpPr/>
+          <p:nvPr/>
+        </p:nvSpPr>
+        <p:spPr>
+          <a:xfrm>
+            <a:off x="548640" y="1097280"/>
+            <a:ext cx="8046720" cy="3474720"/>
+          </a:xfrm>
+          <a:prstGeom prst="rect">
+            <a:avLst/>
+          </a:prstGeom>
+          <a:noFill/>
+          <a:ln/>
+        </p:spPr>
+        <p:txBody>
+          <a:bodyPr wrap="square" rtlCol="0" anchor="t"/>
+          <a:lstStyle/>
+          <a:p>
+            <a:pPr marL="342900" indent="-342900">
+              <a:spcAft>
+                <a:spcPts val="800"/>
+              </a:spcAft>
+              <a:buSzPct val="100000"/>
+              <a:buChar char="•"/>
+            </a:pPr>
+            <a:r>
+              <a:rPr lang="en-US" sz="1500" dirty="0">
+                <a:solidFill>
+                  <a:srgbClr val="3D3A36"/>
                 </a:solidFill>
                 <a:latin typeface="Calibri" pitchFamily="34" charset="0"/>
                 <a:ea typeface="Calibri" pitchFamily="34" charset="-122"/>
                 <a:cs typeface="Calibri" pitchFamily="34" charset="-120"/>
               </a:rPr>
-              <a:t>Tables: structure &amp; rules</a:t>
-            </a:r>
-            <a:endParaRPr lang="en-US" sz="1800" dirty="0"/>
-          </a:p>
-        </p:txBody>
-      </p:sp>
-      <p:sp>
-        <p:nvSpPr>
-          <p:cNvPr id="4" name="Text 2"/>
-          <p:cNvSpPr/>
-          <p:nvPr/>
-        </p:nvSpPr>
-        <p:spPr>
-          <a:xfrm>
-            <a:off x="731520" y="1097280"/>
-            <a:ext cx="7680960" cy="3200400"/>
-          </a:xfrm>
-          <a:prstGeom prst="rect">
-            <a:avLst/>
-          </a:prstGeom>
-          <a:noFill/>
-          <a:ln/>
-        </p:spPr>
-        <p:txBody>
-          <a:bodyPr wrap="square" rtlCol="0" anchor="ctr"/>
-          <a:lstStyle/>
-          <a:p>
-            <a:pPr indent="0" marL="0">
-              <a:buNone/>
-            </a:pPr>
-            <a:r>
-              <a:rPr lang="en-US" sz="1600" dirty="0">
-                <a:solidFill>
-                  <a:srgbClr val="363636"/>
+              <a:t>Use a table with clear headings and units</a:t>
+            </a:r>
+            <a:endParaRPr lang="en-US" sz="1500" dirty="0"/>
+          </a:p>
+          <a:p>
+            <a:pPr marL="342900" indent="-342900">
+              <a:spcAft>
+                <a:spcPts val="800"/>
+              </a:spcAft>
+              <a:buSzPct val="100000"/>
+              <a:buChar char="•"/>
+            </a:pPr>
+            <a:r>
+              <a:rPr lang="en-US" sz="1500" dirty="0">
+                <a:solidFill>
+                  <a:srgbClr val="3D3A36"/>
                 </a:solidFill>
                 <a:latin typeface="Calibri" pitchFamily="34" charset="0"/>
                 <a:ea typeface="Calibri" pitchFamily="34" charset="-122"/>
                 <a:cs typeface="Calibri" pitchFamily="34" charset="-120"/>
               </a:rPr>
-              <a:t>Content for: Tables: structure &amp; rules</a:t>
-            </a:r>
-            <a:endParaRPr lang="en-US" sz="1600" dirty="0"/>
-          </a:p>
-          <a:p>
-            <a:pPr indent="0" marL="0">
-              <a:buNone/>
-            </a:pPr>
-            <a:endParaRPr lang="en-US" sz="1600" dirty="0"/>
-          </a:p>
-          <a:p>
-            <a:pPr indent="0" marL="0">
-              <a:buNone/>
-            </a:pPr>
-            <a:r>
-              <a:rPr lang="en-US" sz="1600" dirty="0">
-                <a:solidFill>
-                  <a:srgbClr val="363636"/>
+              <a:t>Independent variable goes in the LEFT column</a:t>
+            </a:r>
+            <a:endParaRPr lang="en-US" sz="1500" dirty="0"/>
+          </a:p>
+          <a:p>
+            <a:pPr marL="342900" indent="-342900">
+              <a:spcAft>
+                <a:spcPts val="800"/>
+              </a:spcAft>
+              <a:buSzPct val="100000"/>
+              <a:buChar char="•"/>
+            </a:pPr>
+            <a:r>
+              <a:rPr lang="en-US" sz="1500" dirty="0">
+                <a:solidFill>
+                  <a:srgbClr val="3D3A36"/>
                 </a:solidFill>
                 <a:latin typeface="Calibri" pitchFamily="34" charset="0"/>
                 <a:ea typeface="Calibri" pitchFamily="34" charset="-122"/>
                 <a:cs typeface="Calibri" pitchFamily="34" charset="-120"/>
               </a:rPr>
-              <a:t>Key points will be covered in class.</a:t>
-            </a:r>
-            <a:endParaRPr lang="en-US" sz="1600" dirty="0"/>
-          </a:p>
-        </p:txBody>
-      </p:sp>
-      <p:sp>
-        <p:nvSpPr>
-          <p:cNvPr id="5" name="Text 3"/>
-          <p:cNvSpPr/>
-          <p:nvPr/>
-        </p:nvSpPr>
-        <p:spPr>
-          <a:xfrm>
-            <a:off x="7772400" y="4663440"/>
-            <a:ext cx="1097280" cy="365760"/>
-          </a:xfrm>
-          <a:prstGeom prst="rect">
-            <a:avLst/>
-          </a:prstGeom>
-          <a:noFill/>
-          <a:ln/>
-        </p:spPr>
-        <p:txBody>
-          <a:bodyPr wrap="square" rtlCol="0" anchor="ctr"/>
-          <a:lstStyle/>
-          <a:p>
-            <a:pPr algn="r" indent="0" marL="0">
-              <a:buNone/>
-            </a:pPr>
-            <a:r>
-              <a:rPr lang="en-US" sz="1000" dirty="0">
-                <a:solidFill>
-                  <a:srgbClr val="999999"/>
+              <a:t>Dependent variable goes in the RIGHT column</a:t>
+            </a:r>
+            <a:endParaRPr lang="en-US" sz="1500" dirty="0"/>
+          </a:p>
+          <a:p>
+            <a:pPr marL="342900" indent="-342900">
+              <a:spcAft>
+                <a:spcPts val="800"/>
+              </a:spcAft>
+              <a:buSzPct val="100000"/>
+              <a:buChar char="•"/>
+            </a:pPr>
+            <a:r>
+              <a:rPr lang="en-US" sz="1500" dirty="0">
+                <a:solidFill>
+                  <a:srgbClr val="3D3A36"/>
                 </a:solidFill>
                 <a:latin typeface="Calibri" pitchFamily="34" charset="0"/>
                 <a:ea typeface="Calibri" pitchFamily="34" charset="-122"/>
                 <a:cs typeface="Calibri" pitchFamily="34" charset="-120"/>
               </a:rPr>
-              <a:t>2 / 6</a:t>
-            </a:r>
-            <a:endParaRPr lang="en-US" sz="1000" dirty="0"/>
+              <a:t>Record data as you go — don't wait until the end</a:t>
+            </a:r>
+            <a:endParaRPr lang="en-US" sz="1500" dirty="0"/>
+          </a:p>
+          <a:p>
+            <a:pPr marL="342900" indent="-342900">
+              <a:spcAft>
+                <a:spcPts val="800"/>
+              </a:spcAft>
+              <a:buSzPct val="100000"/>
+              <a:buChar char="•"/>
+            </a:pPr>
+            <a:r>
+              <a:rPr lang="en-US" sz="1500" dirty="0">
+                <a:solidFill>
+                  <a:srgbClr val="3D3A36"/>
+                </a:solidFill>
+                <a:latin typeface="Calibri" pitchFamily="34" charset="0"/>
+                <a:ea typeface="Calibri" pitchFamily="34" charset="-122"/>
+                <a:cs typeface="Calibri" pitchFamily="34" charset="-120"/>
+              </a:rPr>
+              <a:t>Include units in column headings, not in each cell</a:t>
+            </a:r>
+            <a:endParaRPr lang="en-US" sz="1500" dirty="0"/>
+          </a:p>
+        </p:txBody>
+      </p:sp>
+      <p:sp>
+        <p:nvSpPr>
+          <p:cNvPr id="5" name="Shape 3"/>
+          <p:cNvSpPr/>
+          <p:nvPr/>
+        </p:nvSpPr>
+        <p:spPr>
+          <a:xfrm>
+            <a:off x="548640" y="4754880"/>
+            <a:ext cx="8046720" cy="9144"/>
+          </a:xfrm>
+          <a:prstGeom prst="rect">
+            <a:avLst/>
+          </a:prstGeom>
+          <a:solidFill>
+            <a:srgbClr val="F3F1EE"/>
+          </a:solidFill>
+          <a:ln/>
+        </p:spPr>
+      </p:sp>
+      <p:sp>
+        <p:nvSpPr>
+          <p:cNvPr id="6" name="Text 4"/>
+          <p:cNvSpPr/>
+          <p:nvPr/>
+        </p:nvSpPr>
+        <p:spPr>
+          <a:xfrm>
+            <a:off x="548640" y="4800600"/>
+            <a:ext cx="3657600" cy="274320"/>
+          </a:xfrm>
+          <a:prstGeom prst="rect">
+            <a:avLst/>
+          </a:prstGeom>
+          <a:noFill/>
+          <a:ln/>
+        </p:spPr>
+        <p:txBody>
+          <a:bodyPr wrap="square" rtlCol="0" anchor="ctr"/>
+          <a:lstStyle/>
+          <a:p>
+            <a:pPr indent="0" marL="0">
+              <a:buNone/>
+            </a:pPr>
+            <a:r>
+              <a:rPr lang="en-US" sz="800" dirty="0">
+                <a:solidFill>
+                  <a:srgbClr val="9B9690"/>
+                </a:solidFill>
+              </a:rPr>
+              <a:t>mrzocchi.com</a:t>
+            </a:r>
+            <a:endParaRPr lang="en-US" sz="800" dirty="0"/>
           </a:p>
         </p:txBody>
       </p:sp>
@@ -1594,6 +1653,13 @@
 <file path=ppt/slides/slide3.xml><?xml version="1.0" encoding="utf-8"?>
 <p:sld xmlns:a="http://schemas.openxmlformats.org/drawingml/2006/main" xmlns:r="http://schemas.openxmlformats.org/officeDocument/2006/relationships" xmlns:p="http://schemas.openxmlformats.org/presentationml/2006/main">
   <p:cSld name="Slide 3">
+    <p:bg>
+      <p:bgPr>
+        <a:solidFill>
+          <a:srgbClr val="FFFFFF"/>
+        </a:solidFill>
+      </p:bgPr>
+    </p:bg>
     <p:spTree>
       <p:nvGrpSpPr>
         <p:cNvPr id="1" name=""/>
@@ -1617,13 +1683,13 @@
         <p:spPr>
           <a:xfrm>
             <a:off x="0" y="0"/>
-            <a:ext cx="9144000" cy="548640"/>
-          </a:xfrm>
-          <a:prstGeom prst="rect">
-            <a:avLst/>
-          </a:prstGeom>
-          <a:solidFill>
-            <a:srgbClr val="1A7A6F"/>
+            <a:ext cx="9144000" cy="54864"/>
+          </a:xfrm>
+          <a:prstGeom prst="rect">
+            <a:avLst/>
+          </a:prstGeom>
+          <a:solidFill>
+            <a:srgbClr val="2A9D8F"/>
           </a:solidFill>
           <a:ln/>
         </p:spPr>
@@ -1636,8 +1702,8 @@
         </p:nvSpPr>
         <p:spPr>
           <a:xfrm>
-            <a:off x="457200" y="45720"/>
-            <a:ext cx="8229600" cy="457200"/>
+            <a:off x="548640" y="274320"/>
+            <a:ext cx="8046720" cy="640080"/>
           </a:xfrm>
           <a:prstGeom prst="rect">
             <a:avLst/>
@@ -1646,6 +1712,72 @@
           <a:ln/>
         </p:spPr>
         <p:txBody>
+          <a:bodyPr wrap="square" lIns="0" tIns="0" rIns="0" bIns="0" rtlCol="0" anchor="ctr"/>
+          <a:lstStyle/>
+          <a:p>
+            <a:pPr indent="0" marL="0">
+              <a:buNone/>
+            </a:pPr>
+            <a:r>
+              <a:rPr lang="en-US" sz="2600" b="1" dirty="0">
+                <a:solidFill>
+                  <a:srgbClr val="1B2A4A"/>
+                </a:solidFill>
+                <a:latin typeface="Georgia" pitchFamily="34" charset="0"/>
+                <a:ea typeface="Georgia" pitchFamily="34" charset="-122"/>
+                <a:cs typeface="Georgia" pitchFamily="34" charset="-120"/>
+              </a:rPr>
+              <a:t>Types of Graphs</a:t>
+            </a:r>
+            <a:endParaRPr lang="en-US" sz="2600" dirty="0"/>
+          </a:p>
+        </p:txBody>
+      </p:sp>
+      <p:sp>
+        <p:nvSpPr>
+          <p:cNvPr id="4" name="Shape 2"/>
+          <p:cNvSpPr/>
+          <p:nvPr/>
+        </p:nvSpPr>
+        <p:spPr>
+          <a:xfrm>
+            <a:off x="457200" y="1097280"/>
+            <a:ext cx="3840480" cy="3474720"/>
+          </a:xfrm>
+          <a:prstGeom prst="rect">
+            <a:avLst/>
+          </a:prstGeom>
+          <a:solidFill>
+            <a:srgbClr val="F3F1EE"/>
+          </a:solidFill>
+          <a:ln/>
+          <a:effectLst>
+            <a:outerShdw sx="100000" sy="100000" kx="0" ky="0" algn="bl" rotWithShape="0" blurRad="50800" dist="25400" dir="8100000">
+              <a:srgbClr val="000000">
+                <a:alpha val="10000"/>
+              </a:srgbClr>
+            </a:outerShdw>
+          </a:effectLst>
+        </p:spPr>
+      </p:sp>
+      <p:sp>
+        <p:nvSpPr>
+          <p:cNvPr id="5" name="Text 3"/>
+          <p:cNvSpPr/>
+          <p:nvPr/>
+        </p:nvSpPr>
+        <p:spPr>
+          <a:xfrm>
+            <a:off x="640080" y="1234440"/>
+            <a:ext cx="3474720" cy="411480"/>
+          </a:xfrm>
+          <a:prstGeom prst="rect">
+            <a:avLst/>
+          </a:prstGeom>
+          <a:noFill/>
+          <a:ln/>
+        </p:spPr>
+        <p:txBody>
           <a:bodyPr wrap="square" rtlCol="0" anchor="ctr"/>
           <a:lstStyle/>
           <a:p>
@@ -1653,118 +1785,331 @@
               <a:buNone/>
             </a:pPr>
             <a:r>
-              <a:rPr lang="en-US" sz="1800" b="1" dirty="0">
-                <a:solidFill>
-                  <a:srgbClr val="FFFFFF"/>
+              <a:rPr lang="en-US" sz="1600" b="1" dirty="0">
+                <a:solidFill>
+                  <a:srgbClr val="1B2A4A"/>
+                </a:solidFill>
+                <a:latin typeface="Georgia" pitchFamily="34" charset="0"/>
+                <a:ea typeface="Georgia" pitchFamily="34" charset="-122"/>
+                <a:cs typeface="Georgia" pitchFamily="34" charset="-120"/>
+              </a:rPr>
+              <a:t>Bar Chart</a:t>
+            </a:r>
+            <a:endParaRPr lang="en-US" sz="1600" dirty="0"/>
+          </a:p>
+        </p:txBody>
+      </p:sp>
+      <p:sp>
+        <p:nvSpPr>
+          <p:cNvPr id="6" name="Text 4"/>
+          <p:cNvSpPr/>
+          <p:nvPr/>
+        </p:nvSpPr>
+        <p:spPr>
+          <a:xfrm>
+            <a:off x="640080" y="1737360"/>
+            <a:ext cx="3474720" cy="2651760"/>
+          </a:xfrm>
+          <a:prstGeom prst="rect">
+            <a:avLst/>
+          </a:prstGeom>
+          <a:noFill/>
+          <a:ln/>
+        </p:spPr>
+        <p:txBody>
+          <a:bodyPr wrap="square" rtlCol="0" anchor="t"/>
+          <a:lstStyle/>
+          <a:p>
+            <a:pPr marL="342900" indent="-342900">
+              <a:spcAft>
+                <a:spcPts val="600"/>
+              </a:spcAft>
+              <a:buSzPct val="100000"/>
+              <a:buChar char="•"/>
+            </a:pPr>
+            <a:r>
+              <a:rPr lang="en-US" sz="1300" dirty="0">
+                <a:solidFill>
+                  <a:srgbClr val="3D3A36"/>
                 </a:solidFill>
                 <a:latin typeface="Calibri" pitchFamily="34" charset="0"/>
                 <a:ea typeface="Calibri" pitchFamily="34" charset="-122"/>
                 <a:cs typeface="Calibri" pitchFamily="34" charset="-120"/>
               </a:rPr>
-              <a:t>Types of graphs</a:t>
-            </a:r>
-            <a:endParaRPr lang="en-US" sz="1800" dirty="0"/>
-          </a:p>
-        </p:txBody>
-      </p:sp>
-      <p:sp>
-        <p:nvSpPr>
-          <p:cNvPr id="4" name="Text 2"/>
-          <p:cNvSpPr/>
-          <p:nvPr/>
-        </p:nvSpPr>
-        <p:spPr>
-          <a:xfrm>
-            <a:off x="731520" y="1097280"/>
-            <a:ext cx="7680960" cy="3200400"/>
-          </a:xfrm>
-          <a:prstGeom prst="rect">
-            <a:avLst/>
-          </a:prstGeom>
-          <a:noFill/>
-          <a:ln/>
-        </p:spPr>
-        <p:txBody>
-          <a:bodyPr wrap="square" rtlCol="0" anchor="ctr"/>
-          <a:lstStyle/>
-          <a:p>
-            <a:pPr indent="0" marL="0">
-              <a:buNone/>
-            </a:pPr>
-            <a:r>
-              <a:rPr lang="en-US" sz="1600" dirty="0">
-                <a:solidFill>
-                  <a:srgbClr val="363636"/>
+              <a:t>Used for categoric (named) data</a:t>
+            </a:r>
+            <a:endParaRPr lang="en-US" sz="1300" dirty="0"/>
+          </a:p>
+          <a:p>
+            <a:pPr marL="342900" indent="-342900">
+              <a:spcAft>
+                <a:spcPts val="600"/>
+              </a:spcAft>
+              <a:buSzPct val="100000"/>
+              <a:buChar char="•"/>
+            </a:pPr>
+            <a:r>
+              <a:rPr lang="en-US" sz="1300" dirty="0">
+                <a:solidFill>
+                  <a:srgbClr val="3D3A36"/>
                 </a:solidFill>
                 <a:latin typeface="Calibri" pitchFamily="34" charset="0"/>
                 <a:ea typeface="Calibri" pitchFamily="34" charset="-122"/>
                 <a:cs typeface="Calibri" pitchFamily="34" charset="-120"/>
               </a:rPr>
-              <a:t>Content for: Types of graphs</a:t>
-            </a:r>
-            <a:endParaRPr lang="en-US" sz="1600" dirty="0"/>
-          </a:p>
-          <a:p>
-            <a:pPr indent="0" marL="0">
-              <a:buNone/>
-            </a:pPr>
-            <a:endParaRPr lang="en-US" sz="1600" dirty="0"/>
-          </a:p>
-          <a:p>
-            <a:pPr indent="0" marL="0">
-              <a:buNone/>
-            </a:pPr>
-            <a:r>
-              <a:rPr lang="en-US" sz="1600" dirty="0">
-                <a:solidFill>
-                  <a:srgbClr val="363636"/>
+              <a:t>Bars don't touch</a:t>
+            </a:r>
+            <a:endParaRPr lang="en-US" sz="1300" dirty="0"/>
+          </a:p>
+          <a:p>
+            <a:pPr marL="342900" indent="-342900">
+              <a:spcAft>
+                <a:spcPts val="600"/>
+              </a:spcAft>
+              <a:buSzPct val="100000"/>
+              <a:buChar char="•"/>
+            </a:pPr>
+            <a:r>
+              <a:rPr lang="en-US" sz="1300" dirty="0">
+                <a:solidFill>
+                  <a:srgbClr val="3D3A36"/>
                 </a:solidFill>
                 <a:latin typeface="Calibri" pitchFamily="34" charset="0"/>
                 <a:ea typeface="Calibri" pitchFamily="34" charset="-122"/>
                 <a:cs typeface="Calibri" pitchFamily="34" charset="-120"/>
               </a:rPr>
-              <a:t>Key points will be covered in class.</a:t>
-            </a:r>
-            <a:endParaRPr lang="en-US" sz="1600" dirty="0"/>
-          </a:p>
-        </p:txBody>
-      </p:sp>
-      <p:sp>
-        <p:nvSpPr>
-          <p:cNvPr id="5" name="Text 3"/>
-          <p:cNvSpPr/>
-          <p:nvPr/>
-        </p:nvSpPr>
-        <p:spPr>
-          <a:xfrm>
-            <a:off x="7772400" y="4663440"/>
-            <a:ext cx="1097280" cy="365760"/>
-          </a:xfrm>
-          <a:prstGeom prst="rect">
-            <a:avLst/>
-          </a:prstGeom>
-          <a:noFill/>
-          <a:ln/>
-        </p:spPr>
-        <p:txBody>
-          <a:bodyPr wrap="square" rtlCol="0" anchor="ctr"/>
-          <a:lstStyle/>
-          <a:p>
-            <a:pPr algn="r" indent="0" marL="0">
-              <a:buNone/>
-            </a:pPr>
-            <a:r>
-              <a:rPr lang="en-US" sz="1000" dirty="0">
-                <a:solidFill>
-                  <a:srgbClr val="999999"/>
+              <a:t>Example: favourite colours in class</a:t>
+            </a:r>
+            <a:endParaRPr lang="en-US" sz="1300" dirty="0"/>
+          </a:p>
+          <a:p>
+            <a:pPr marL="342900" indent="-342900">
+              <a:spcAft>
+                <a:spcPts val="600"/>
+              </a:spcAft>
+              <a:buSzPct val="100000"/>
+              <a:buChar char="•"/>
+            </a:pPr>
+            <a:r>
+              <a:rPr lang="en-US" sz="1300" dirty="0">
+                <a:solidFill>
+                  <a:srgbClr val="3D3A36"/>
                 </a:solidFill>
                 <a:latin typeface="Calibri" pitchFamily="34" charset="0"/>
                 <a:ea typeface="Calibri" pitchFamily="34" charset="-122"/>
                 <a:cs typeface="Calibri" pitchFamily="34" charset="-120"/>
               </a:rPr>
-              <a:t>3 / 6</a:t>
-            </a:r>
-            <a:endParaRPr lang="en-US" sz="1000" dirty="0"/>
+              <a:t>Bars can be horizontal or vertical</a:t>
+            </a:r>
+            <a:endParaRPr lang="en-US" sz="1300" dirty="0"/>
+          </a:p>
+        </p:txBody>
+      </p:sp>
+      <p:sp>
+        <p:nvSpPr>
+          <p:cNvPr id="7" name="Shape 5"/>
+          <p:cNvSpPr/>
+          <p:nvPr/>
+        </p:nvSpPr>
+        <p:spPr>
+          <a:xfrm>
+            <a:off x="4846320" y="1097280"/>
+            <a:ext cx="3840480" cy="3474720"/>
+          </a:xfrm>
+          <a:prstGeom prst="rect">
+            <a:avLst/>
+          </a:prstGeom>
+          <a:solidFill>
+            <a:srgbClr val="F3F1EE"/>
+          </a:solidFill>
+          <a:ln/>
+          <a:effectLst>
+            <a:outerShdw sx="100000" sy="100000" kx="0" ky="0" algn="bl" rotWithShape="0" blurRad="50800" dist="25400" dir="8100000">
+              <a:srgbClr val="000000">
+                <a:alpha val="10000"/>
+              </a:srgbClr>
+            </a:outerShdw>
+          </a:effectLst>
+        </p:spPr>
+      </p:sp>
+      <p:sp>
+        <p:nvSpPr>
+          <p:cNvPr id="8" name="Text 6"/>
+          <p:cNvSpPr/>
+          <p:nvPr/>
+        </p:nvSpPr>
+        <p:spPr>
+          <a:xfrm>
+            <a:off x="5029200" y="1234440"/>
+            <a:ext cx="3474720" cy="411480"/>
+          </a:xfrm>
+          <a:prstGeom prst="rect">
+            <a:avLst/>
+          </a:prstGeom>
+          <a:noFill/>
+          <a:ln/>
+        </p:spPr>
+        <p:txBody>
+          <a:bodyPr wrap="square" rtlCol="0" anchor="ctr"/>
+          <a:lstStyle/>
+          <a:p>
+            <a:pPr indent="0" marL="0">
+              <a:buNone/>
+            </a:pPr>
+            <a:r>
+              <a:rPr lang="en-US" sz="1600" b="1" dirty="0">
+                <a:solidFill>
+                  <a:srgbClr val="1B2A4A"/>
+                </a:solidFill>
+                <a:latin typeface="Georgia" pitchFamily="34" charset="0"/>
+                <a:ea typeface="Georgia" pitchFamily="34" charset="-122"/>
+                <a:cs typeface="Georgia" pitchFamily="34" charset="-120"/>
+              </a:rPr>
+              <a:t>Line Graph</a:t>
+            </a:r>
+            <a:endParaRPr lang="en-US" sz="1600" dirty="0"/>
+          </a:p>
+        </p:txBody>
+      </p:sp>
+      <p:sp>
+        <p:nvSpPr>
+          <p:cNvPr id="9" name="Text 7"/>
+          <p:cNvSpPr/>
+          <p:nvPr/>
+        </p:nvSpPr>
+        <p:spPr>
+          <a:xfrm>
+            <a:off x="5029200" y="1737360"/>
+            <a:ext cx="3474720" cy="2651760"/>
+          </a:xfrm>
+          <a:prstGeom prst="rect">
+            <a:avLst/>
+          </a:prstGeom>
+          <a:noFill/>
+          <a:ln/>
+        </p:spPr>
+        <p:txBody>
+          <a:bodyPr wrap="square" rtlCol="0" anchor="t"/>
+          <a:lstStyle/>
+          <a:p>
+            <a:pPr marL="342900" indent="-342900">
+              <a:spcAft>
+                <a:spcPts val="600"/>
+              </a:spcAft>
+              <a:buSzPct val="100000"/>
+              <a:buChar char="•"/>
+            </a:pPr>
+            <a:r>
+              <a:rPr lang="en-US" sz="1300" dirty="0">
+                <a:solidFill>
+                  <a:srgbClr val="3D3A36"/>
+                </a:solidFill>
+                <a:latin typeface="Calibri" pitchFamily="34" charset="0"/>
+                <a:ea typeface="Calibri" pitchFamily="34" charset="-122"/>
+                <a:cs typeface="Calibri" pitchFamily="34" charset="-120"/>
+              </a:rPr>
+              <a:t>Used for continuous (number) data</a:t>
+            </a:r>
+            <a:endParaRPr lang="en-US" sz="1300" dirty="0"/>
+          </a:p>
+          <a:p>
+            <a:pPr marL="342900" indent="-342900">
+              <a:spcAft>
+                <a:spcPts val="600"/>
+              </a:spcAft>
+              <a:buSzPct val="100000"/>
+              <a:buChar char="•"/>
+            </a:pPr>
+            <a:r>
+              <a:rPr lang="en-US" sz="1300" dirty="0">
+                <a:solidFill>
+                  <a:srgbClr val="3D3A36"/>
+                </a:solidFill>
+                <a:latin typeface="Calibri" pitchFamily="34" charset="0"/>
+                <a:ea typeface="Calibri" pitchFamily="34" charset="-122"/>
+                <a:cs typeface="Calibri" pitchFamily="34" charset="-120"/>
+              </a:rPr>
+              <a:t>Plot points, then draw line of best fit</a:t>
+            </a:r>
+            <a:endParaRPr lang="en-US" sz="1300" dirty="0"/>
+          </a:p>
+          <a:p>
+            <a:pPr marL="342900" indent="-342900">
+              <a:spcAft>
+                <a:spcPts val="600"/>
+              </a:spcAft>
+              <a:buSzPct val="100000"/>
+              <a:buChar char="•"/>
+            </a:pPr>
+            <a:r>
+              <a:rPr lang="en-US" sz="1300" dirty="0">
+                <a:solidFill>
+                  <a:srgbClr val="3D3A36"/>
+                </a:solidFill>
+                <a:latin typeface="Calibri" pitchFamily="34" charset="0"/>
+                <a:ea typeface="Calibri" pitchFamily="34" charset="-122"/>
+                <a:cs typeface="Calibri" pitchFamily="34" charset="-120"/>
+              </a:rPr>
+              <a:t>Example: temperature over time</a:t>
+            </a:r>
+            <a:endParaRPr lang="en-US" sz="1300" dirty="0"/>
+          </a:p>
+          <a:p>
+            <a:pPr marL="342900" indent="-342900">
+              <a:spcAft>
+                <a:spcPts val="600"/>
+              </a:spcAft>
+              <a:buSzPct val="100000"/>
+              <a:buChar char="•"/>
+            </a:pPr>
+            <a:r>
+              <a:rPr lang="en-US" sz="1300" dirty="0">
+                <a:solidFill>
+                  <a:srgbClr val="3D3A36"/>
+                </a:solidFill>
+                <a:latin typeface="Calibri" pitchFamily="34" charset="0"/>
+                <a:ea typeface="Calibri" pitchFamily="34" charset="-122"/>
+                <a:cs typeface="Calibri" pitchFamily="34" charset="-120"/>
+              </a:rPr>
+              <a:t>Shows trends and patterns</a:t>
+            </a:r>
+            <a:endParaRPr lang="en-US" sz="1300" dirty="0"/>
+          </a:p>
+        </p:txBody>
+      </p:sp>
+      <p:sp>
+        <p:nvSpPr>
+          <p:cNvPr id="10" name="Text 8"/>
+          <p:cNvSpPr/>
+          <p:nvPr/>
+        </p:nvSpPr>
+        <p:spPr>
+          <a:xfrm>
+            <a:off x="548640" y="4800600"/>
+            <a:ext cx="3657600" cy="274320"/>
+          </a:xfrm>
+          <a:prstGeom prst="rect">
+            <a:avLst/>
+          </a:prstGeom>
+          <a:noFill/>
+          <a:ln/>
+        </p:spPr>
+        <p:txBody>
+          <a:bodyPr wrap="square" rtlCol="0" anchor="ctr"/>
+          <a:lstStyle/>
+          <a:p>
+            <a:pPr indent="0" marL="0">
+              <a:buNone/>
+            </a:pPr>
+            <a:r>
+              <a:rPr lang="en-US" sz="800" dirty="0">
+                <a:solidFill>
+                  <a:srgbClr val="9B9690"/>
+                </a:solidFill>
+              </a:rPr>
+              <a:t>mrzocchi.com</a:t>
+            </a:r>
+            <a:endParaRPr lang="en-US" sz="800" dirty="0"/>
           </a:p>
         </p:txBody>
       </p:sp>
@@ -1779,6 +2124,13 @@
 <file path=ppt/slides/slide4.xml><?xml version="1.0" encoding="utf-8"?>
 <p:sld xmlns:a="http://schemas.openxmlformats.org/drawingml/2006/main" xmlns:r="http://schemas.openxmlformats.org/officeDocument/2006/relationships" xmlns:p="http://schemas.openxmlformats.org/presentationml/2006/main">
   <p:cSld name="Slide 4">
+    <p:bg>
+      <p:bgPr>
+        <a:solidFill>
+          <a:srgbClr val="FFFFFF"/>
+        </a:solidFill>
+      </p:bgPr>
+    </p:bg>
     <p:spTree>
       <p:nvGrpSpPr>
         <p:cNvPr id="1" name=""/>
@@ -1802,13 +2154,13 @@
         <p:spPr>
           <a:xfrm>
             <a:off x="0" y="0"/>
-            <a:ext cx="9144000" cy="548640"/>
-          </a:xfrm>
-          <a:prstGeom prst="rect">
-            <a:avLst/>
-          </a:prstGeom>
-          <a:solidFill>
-            <a:srgbClr val="1A7A6F"/>
+            <a:ext cx="9144000" cy="54864"/>
+          </a:xfrm>
+          <a:prstGeom prst="rect">
+            <a:avLst/>
+          </a:prstGeom>
+          <a:solidFill>
+            <a:srgbClr val="2A9D8F"/>
           </a:solidFill>
           <a:ln/>
         </p:spPr>
@@ -1821,8 +2173,8 @@
         </p:nvSpPr>
         <p:spPr>
           <a:xfrm>
-            <a:off x="457200" y="45720"/>
-            <a:ext cx="8229600" cy="457200"/>
+            <a:off x="548640" y="274320"/>
+            <a:ext cx="8046720" cy="640080"/>
           </a:xfrm>
           <a:prstGeom prst="rect">
             <a:avLst/>
@@ -1831,125 +2183,228 @@
           <a:ln/>
         </p:spPr>
         <p:txBody>
-          <a:bodyPr wrap="square" rtlCol="0" anchor="ctr"/>
+          <a:bodyPr wrap="square" lIns="0" tIns="0" rIns="0" bIns="0" rtlCol="0" anchor="ctr"/>
           <a:lstStyle/>
           <a:p>
             <a:pPr indent="0" marL="0">
               <a:buNone/>
             </a:pPr>
             <a:r>
-              <a:rPr lang="en-US" sz="1800" b="1" dirty="0">
-                <a:solidFill>
-                  <a:srgbClr val="FFFFFF"/>
+              <a:rPr lang="en-US" sz="2600" b="1" dirty="0">
+                <a:solidFill>
+                  <a:srgbClr val="1B2A4A"/>
+                </a:solidFill>
+                <a:latin typeface="Georgia" pitchFamily="34" charset="0"/>
+                <a:ea typeface="Georgia" pitchFamily="34" charset="-122"/>
+                <a:cs typeface="Georgia" pitchFamily="34" charset="-120"/>
+              </a:rPr>
+              <a:t>Drawing Good Graphs</a:t>
+            </a:r>
+            <a:endParaRPr lang="en-US" sz="2600" dirty="0"/>
+          </a:p>
+        </p:txBody>
+      </p:sp>
+      <p:sp>
+        <p:nvSpPr>
+          <p:cNvPr id="4" name="Text 2"/>
+          <p:cNvSpPr/>
+          <p:nvPr/>
+        </p:nvSpPr>
+        <p:spPr>
+          <a:xfrm>
+            <a:off x="548640" y="1097280"/>
+            <a:ext cx="8046720" cy="3474720"/>
+          </a:xfrm>
+          <a:prstGeom prst="rect">
+            <a:avLst/>
+          </a:prstGeom>
+          <a:noFill/>
+          <a:ln/>
+        </p:spPr>
+        <p:txBody>
+          <a:bodyPr wrap="square" rtlCol="0" anchor="t"/>
+          <a:lstStyle/>
+          <a:p>
+            <a:pPr marL="342900" indent="-342900">
+              <a:spcAft>
+                <a:spcPts val="800"/>
+              </a:spcAft>
+              <a:buSzPct val="100000"/>
+              <a:buChar char="•"/>
+            </a:pPr>
+            <a:r>
+              <a:rPr lang="en-US" sz="1500" dirty="0">
+                <a:solidFill>
+                  <a:srgbClr val="3D3A36"/>
                 </a:solidFill>
                 <a:latin typeface="Calibri" pitchFamily="34" charset="0"/>
                 <a:ea typeface="Calibri" pitchFamily="34" charset="-122"/>
                 <a:cs typeface="Calibri" pitchFamily="34" charset="-120"/>
               </a:rPr>
-              <a:t>Drawing bar charts</a:t>
-            </a:r>
-            <a:endParaRPr lang="en-US" sz="1800" dirty="0"/>
-          </a:p>
-        </p:txBody>
-      </p:sp>
-      <p:sp>
-        <p:nvSpPr>
-          <p:cNvPr id="4" name="Text 2"/>
-          <p:cNvSpPr/>
-          <p:nvPr/>
-        </p:nvSpPr>
-        <p:spPr>
-          <a:xfrm>
-            <a:off x="731520" y="1097280"/>
-            <a:ext cx="7680960" cy="3200400"/>
-          </a:xfrm>
-          <a:prstGeom prst="rect">
-            <a:avLst/>
-          </a:prstGeom>
-          <a:noFill/>
-          <a:ln/>
-        </p:spPr>
-        <p:txBody>
-          <a:bodyPr wrap="square" rtlCol="0" anchor="ctr"/>
-          <a:lstStyle/>
-          <a:p>
-            <a:pPr indent="0" marL="0">
-              <a:buNone/>
-            </a:pPr>
-            <a:r>
-              <a:rPr lang="en-US" sz="1600" dirty="0">
-                <a:solidFill>
-                  <a:srgbClr val="363636"/>
+              <a:t>Title: what the graph shows (DV vs IV)</a:t>
+            </a:r>
+            <a:endParaRPr lang="en-US" sz="1500" dirty="0"/>
+          </a:p>
+          <a:p>
+            <a:pPr marL="342900" indent="-342900">
+              <a:spcAft>
+                <a:spcPts val="800"/>
+              </a:spcAft>
+              <a:buSzPct val="100000"/>
+              <a:buChar char="•"/>
+            </a:pPr>
+            <a:r>
+              <a:rPr lang="en-US" sz="1500" dirty="0">
+                <a:solidFill>
+                  <a:srgbClr val="3D3A36"/>
                 </a:solidFill>
                 <a:latin typeface="Calibri" pitchFamily="34" charset="0"/>
                 <a:ea typeface="Calibri" pitchFamily="34" charset="-122"/>
                 <a:cs typeface="Calibri" pitchFamily="34" charset="-120"/>
               </a:rPr>
-              <a:t>Content for: Drawing bar charts</a:t>
-            </a:r>
-            <a:endParaRPr lang="en-US" sz="1600" dirty="0"/>
-          </a:p>
-          <a:p>
-            <a:pPr indent="0" marL="0">
-              <a:buNone/>
-            </a:pPr>
-            <a:endParaRPr lang="en-US" sz="1600" dirty="0"/>
-          </a:p>
-          <a:p>
-            <a:pPr indent="0" marL="0">
-              <a:buNone/>
-            </a:pPr>
-            <a:r>
-              <a:rPr lang="en-US" sz="1600" dirty="0">
-                <a:solidFill>
-                  <a:srgbClr val="363636"/>
+              <a:t>X-axis: Independent Variable (what you changed)</a:t>
+            </a:r>
+            <a:endParaRPr lang="en-US" sz="1500" dirty="0"/>
+          </a:p>
+          <a:p>
+            <a:pPr marL="342900" indent="-342900">
+              <a:spcAft>
+                <a:spcPts val="800"/>
+              </a:spcAft>
+              <a:buSzPct val="100000"/>
+              <a:buChar char="•"/>
+            </a:pPr>
+            <a:r>
+              <a:rPr lang="en-US" sz="1500" dirty="0">
+                <a:solidFill>
+                  <a:srgbClr val="3D3A36"/>
                 </a:solidFill>
                 <a:latin typeface="Calibri" pitchFamily="34" charset="0"/>
                 <a:ea typeface="Calibri" pitchFamily="34" charset="-122"/>
                 <a:cs typeface="Calibri" pitchFamily="34" charset="-120"/>
               </a:rPr>
-              <a:t>Key points will be covered in class.</a:t>
-            </a:r>
-            <a:endParaRPr lang="en-US" sz="1600" dirty="0"/>
-          </a:p>
-        </p:txBody>
-      </p:sp>
-      <p:sp>
-        <p:nvSpPr>
-          <p:cNvPr id="5" name="Text 3"/>
-          <p:cNvSpPr/>
-          <p:nvPr/>
-        </p:nvSpPr>
-        <p:spPr>
-          <a:xfrm>
-            <a:off x="7772400" y="4663440"/>
-            <a:ext cx="1097280" cy="365760"/>
-          </a:xfrm>
-          <a:prstGeom prst="rect">
-            <a:avLst/>
-          </a:prstGeom>
-          <a:noFill/>
-          <a:ln/>
-        </p:spPr>
-        <p:txBody>
-          <a:bodyPr wrap="square" rtlCol="0" anchor="ctr"/>
-          <a:lstStyle/>
-          <a:p>
-            <a:pPr algn="r" indent="0" marL="0">
-              <a:buNone/>
-            </a:pPr>
-            <a:r>
-              <a:rPr lang="en-US" sz="1000" dirty="0">
-                <a:solidFill>
-                  <a:srgbClr val="999999"/>
+              <a:t>Y-axis: Dependent Variable (what you measured)</a:t>
+            </a:r>
+            <a:endParaRPr lang="en-US" sz="1500" dirty="0"/>
+          </a:p>
+          <a:p>
+            <a:pPr marL="342900" indent="-342900">
+              <a:spcAft>
+                <a:spcPts val="800"/>
+              </a:spcAft>
+              <a:buSzPct val="100000"/>
+              <a:buChar char="•"/>
+            </a:pPr>
+            <a:r>
+              <a:rPr lang="en-US" sz="1500" dirty="0">
+                <a:solidFill>
+                  <a:srgbClr val="3D3A36"/>
                 </a:solidFill>
                 <a:latin typeface="Calibri" pitchFamily="34" charset="0"/>
                 <a:ea typeface="Calibri" pitchFamily="34" charset="-122"/>
                 <a:cs typeface="Calibri" pitchFamily="34" charset="-120"/>
               </a:rPr>
-              <a:t>4 / 6</a:t>
-            </a:r>
-            <a:endParaRPr lang="en-US" sz="1000" dirty="0"/>
+              <a:t>Label both axes with name AND unit</a:t>
+            </a:r>
+            <a:endParaRPr lang="en-US" sz="1500" dirty="0"/>
+          </a:p>
+          <a:p>
+            <a:pPr marL="342900" indent="-342900">
+              <a:spcAft>
+                <a:spcPts val="800"/>
+              </a:spcAft>
+              <a:buSzPct val="100000"/>
+              <a:buChar char="•"/>
+            </a:pPr>
+            <a:r>
+              <a:rPr lang="en-US" sz="1500" dirty="0">
+                <a:solidFill>
+                  <a:srgbClr val="3D3A36"/>
+                </a:solidFill>
+                <a:latin typeface="Calibri" pitchFamily="34" charset="0"/>
+                <a:ea typeface="Calibri" pitchFamily="34" charset="-122"/>
+                <a:cs typeface="Calibri" pitchFamily="34" charset="-120"/>
+              </a:rPr>
+              <a:t>Use a ruler for straight lines and neat bars</a:t>
+            </a:r>
+            <a:endParaRPr lang="en-US" sz="1500" dirty="0"/>
+          </a:p>
+          <a:p>
+            <a:pPr marL="342900" indent="-342900">
+              <a:spcAft>
+                <a:spcPts val="800"/>
+              </a:spcAft>
+              <a:buSzPct val="100000"/>
+              <a:buChar char="•"/>
+            </a:pPr>
+            <a:r>
+              <a:rPr lang="en-US" sz="1500" dirty="0">
+                <a:solidFill>
+                  <a:srgbClr val="3D3A36"/>
+                </a:solidFill>
+                <a:latin typeface="Calibri" pitchFamily="34" charset="0"/>
+                <a:ea typeface="Calibri" pitchFamily="34" charset="-122"/>
+                <a:cs typeface="Calibri" pitchFamily="34" charset="-120"/>
+              </a:rPr>
+              <a:t>Fill at least half the graph paper with your data</a:t>
+            </a:r>
+            <a:endParaRPr lang="en-US" sz="1500" dirty="0"/>
+          </a:p>
+        </p:txBody>
+      </p:sp>
+      <p:sp>
+        <p:nvSpPr>
+          <p:cNvPr id="5" name="Shape 3"/>
+          <p:cNvSpPr/>
+          <p:nvPr/>
+        </p:nvSpPr>
+        <p:spPr>
+          <a:xfrm>
+            <a:off x="548640" y="4754880"/>
+            <a:ext cx="8046720" cy="9144"/>
+          </a:xfrm>
+          <a:prstGeom prst="rect">
+            <a:avLst/>
+          </a:prstGeom>
+          <a:solidFill>
+            <a:srgbClr val="F3F1EE"/>
+          </a:solidFill>
+          <a:ln/>
+        </p:spPr>
+      </p:sp>
+      <p:sp>
+        <p:nvSpPr>
+          <p:cNvPr id="6" name="Text 4"/>
+          <p:cNvSpPr/>
+          <p:nvPr/>
+        </p:nvSpPr>
+        <p:spPr>
+          <a:xfrm>
+            <a:off x="548640" y="4800600"/>
+            <a:ext cx="3657600" cy="274320"/>
+          </a:xfrm>
+          <a:prstGeom prst="rect">
+            <a:avLst/>
+          </a:prstGeom>
+          <a:noFill/>
+          <a:ln/>
+        </p:spPr>
+        <p:txBody>
+          <a:bodyPr wrap="square" rtlCol="0" anchor="ctr"/>
+          <a:lstStyle/>
+          <a:p>
+            <a:pPr indent="0" marL="0">
+              <a:buNone/>
+            </a:pPr>
+            <a:r>
+              <a:rPr lang="en-US" sz="800" dirty="0">
+                <a:solidFill>
+                  <a:srgbClr val="9B9690"/>
+                </a:solidFill>
+              </a:rPr>
+              <a:t>mrzocchi.com</a:t>
+            </a:r>
+            <a:endParaRPr lang="en-US" sz="800" dirty="0"/>
           </a:p>
         </p:txBody>
       </p:sp>
@@ -1964,6 +2419,13 @@
 <file path=ppt/slides/slide5.xml><?xml version="1.0" encoding="utf-8"?>
 <p:sld xmlns:a="http://schemas.openxmlformats.org/drawingml/2006/main" xmlns:r="http://schemas.openxmlformats.org/officeDocument/2006/relationships" xmlns:p="http://schemas.openxmlformats.org/presentationml/2006/main">
   <p:cSld name="Slide 5">
+    <p:bg>
+      <p:bgPr>
+        <a:solidFill>
+          <a:srgbClr val="1B2A4A"/>
+        </a:solidFill>
+      </p:bgPr>
+    </p:bg>
     <p:spTree>
       <p:nvGrpSpPr>
         <p:cNvPr id="1" name=""/>
@@ -1987,13 +2449,13 @@
         <p:spPr>
           <a:xfrm>
             <a:off x="0" y="0"/>
-            <a:ext cx="9144000" cy="548640"/>
-          </a:xfrm>
-          <a:prstGeom prst="rect">
-            <a:avLst/>
-          </a:prstGeom>
-          <a:solidFill>
-            <a:srgbClr val="1A7A6F"/>
+            <a:ext cx="9144000" cy="54864"/>
+          </a:xfrm>
+          <a:prstGeom prst="rect">
+            <a:avLst/>
+          </a:prstGeom>
+          <a:solidFill>
+            <a:srgbClr val="2A9D8F"/>
           </a:solidFill>
           <a:ln/>
         </p:spPr>
@@ -2006,8 +2468,8 @@
         </p:nvSpPr>
         <p:spPr>
           <a:xfrm>
-            <a:off x="457200" y="45720"/>
-            <a:ext cx="8229600" cy="457200"/>
+            <a:off x="548640" y="457200"/>
+            <a:ext cx="8046720" cy="640080"/>
           </a:xfrm>
           <a:prstGeom prst="rect">
             <a:avLst/>
@@ -2023,77 +2485,121 @@
               <a:buNone/>
             </a:pPr>
             <a:r>
-              <a:rPr lang="en-US" sz="1800" b="1" dirty="0">
+              <a:rPr lang="en-US" sz="2800" b="1" dirty="0">
                 <a:solidFill>
                   <a:srgbClr val="FFFFFF"/>
+                </a:solidFill>
+                <a:latin typeface="Georgia" pitchFamily="34" charset="0"/>
+                <a:ea typeface="Georgia" pitchFamily="34" charset="-122"/>
+                <a:cs typeface="Georgia" pitchFamily="34" charset="-120"/>
+              </a:rPr>
+              <a:t>Key Takeaways</a:t>
+            </a:r>
+            <a:endParaRPr lang="en-US" sz="2800" dirty="0"/>
+          </a:p>
+        </p:txBody>
+      </p:sp>
+      <p:sp>
+        <p:nvSpPr>
+          <p:cNvPr id="4" name="Text 2"/>
+          <p:cNvSpPr/>
+          <p:nvPr/>
+        </p:nvSpPr>
+        <p:spPr>
+          <a:xfrm>
+            <a:off x="731520" y="1371600"/>
+            <a:ext cx="7680960" cy="3200400"/>
+          </a:xfrm>
+          <a:prstGeom prst="rect">
+            <a:avLst/>
+          </a:prstGeom>
+          <a:noFill/>
+          <a:ln/>
+        </p:spPr>
+        <p:txBody>
+          <a:bodyPr wrap="square" rtlCol="0" anchor="t"/>
+          <a:lstStyle/>
+          <a:p>
+            <a:pPr marL="342900" indent="-342900">
+              <a:spcAft>
+                <a:spcPts val="1000"/>
+              </a:spcAft>
+              <a:buSzPct val="100000"/>
+              <a:buChar char="•"/>
+            </a:pPr>
+            <a:r>
+              <a:rPr lang="en-US" sz="1600" dirty="0">
+                <a:solidFill>
+                  <a:srgbClr val="CADCFC"/>
                 </a:solidFill>
                 <a:latin typeface="Calibri" pitchFamily="34" charset="0"/>
                 <a:ea typeface="Calibri" pitchFamily="34" charset="-122"/>
                 <a:cs typeface="Calibri" pitchFamily="34" charset="-120"/>
               </a:rPr>
-              <a:t>Drawing line graphs</a:t>
-            </a:r>
-            <a:endParaRPr lang="en-US" sz="1800" dirty="0"/>
-          </a:p>
-        </p:txBody>
-      </p:sp>
-      <p:sp>
-        <p:nvSpPr>
-          <p:cNvPr id="4" name="Text 2"/>
-          <p:cNvSpPr/>
-          <p:nvPr/>
-        </p:nvSpPr>
-        <p:spPr>
-          <a:xfrm>
-            <a:off x="731520" y="1097280"/>
-            <a:ext cx="7680960" cy="3200400"/>
-          </a:xfrm>
-          <a:prstGeom prst="rect">
-            <a:avLst/>
-          </a:prstGeom>
-          <a:noFill/>
-          <a:ln/>
-        </p:spPr>
-        <p:txBody>
-          <a:bodyPr wrap="square" rtlCol="0" anchor="ctr"/>
-          <a:lstStyle/>
-          <a:p>
-            <a:pPr indent="0" marL="0">
-              <a:buNone/>
+              <a:t>Tables: IV on left, DV on right, units in headings</a:t>
+            </a:r>
+            <a:endParaRPr lang="en-US" sz="1600" dirty="0"/>
+          </a:p>
+          <a:p>
+            <a:pPr marL="342900" indent="-342900">
+              <a:spcAft>
+                <a:spcPts val="1000"/>
+              </a:spcAft>
+              <a:buSzPct val="100000"/>
+              <a:buChar char="•"/>
             </a:pPr>
             <a:r>
               <a:rPr lang="en-US" sz="1600" dirty="0">
                 <a:solidFill>
-                  <a:srgbClr val="363636"/>
+                  <a:srgbClr val="CADCFC"/>
                 </a:solidFill>
                 <a:latin typeface="Calibri" pitchFamily="34" charset="0"/>
                 <a:ea typeface="Calibri" pitchFamily="34" charset="-122"/>
                 <a:cs typeface="Calibri" pitchFamily="34" charset="-120"/>
               </a:rPr>
-              <a:t>Content for: Drawing line graphs</a:t>
+              <a:t>Bar charts for categories, line graphs for continuous data</a:t>
             </a:r>
             <a:endParaRPr lang="en-US" sz="1600" dirty="0"/>
           </a:p>
           <a:p>
-            <a:pPr indent="0" marL="0">
-              <a:buNone/>
-            </a:pPr>
-            <a:endParaRPr lang="en-US" sz="1600" dirty="0"/>
-          </a:p>
-          <a:p>
-            <a:pPr indent="0" marL="0">
-              <a:buNone/>
+            <a:pPr marL="342900" indent="-342900">
+              <a:spcAft>
+                <a:spcPts val="1000"/>
+              </a:spcAft>
+              <a:buSzPct val="100000"/>
+              <a:buChar char="•"/>
             </a:pPr>
             <a:r>
               <a:rPr lang="en-US" sz="1600" dirty="0">
                 <a:solidFill>
-                  <a:srgbClr val="363636"/>
+                  <a:srgbClr val="CADCFC"/>
                 </a:solidFill>
                 <a:latin typeface="Calibri" pitchFamily="34" charset="0"/>
                 <a:ea typeface="Calibri" pitchFamily="34" charset="-122"/>
                 <a:cs typeface="Calibri" pitchFamily="34" charset="-120"/>
               </a:rPr>
-              <a:t>Key points will be covered in class.</a:t>
+              <a:t>Always label axes with variable name and unit</a:t>
+            </a:r>
+            <a:endParaRPr lang="en-US" sz="1600" dirty="0"/>
+          </a:p>
+          <a:p>
+            <a:pPr marL="342900" indent="-342900">
+              <a:spcAft>
+                <a:spcPts val="1000"/>
+              </a:spcAft>
+              <a:buSzPct val="100000"/>
+              <a:buChar char="•"/>
+            </a:pPr>
+            <a:r>
+              <a:rPr lang="en-US" sz="1600" dirty="0">
+                <a:solidFill>
+                  <a:srgbClr val="CADCFC"/>
+                </a:solidFill>
+                <a:latin typeface="Calibri" pitchFamily="34" charset="0"/>
+                <a:ea typeface="Calibri" pitchFamily="34" charset="-122"/>
+                <a:cs typeface="Calibri" pitchFamily="34" charset="-120"/>
+              </a:rPr>
+              <a:t>Title should describe what the graph shows</a:t>
             </a:r>
             <a:endParaRPr lang="en-US" sz="1600" dirty="0"/>
           </a:p>
@@ -2107,8 +2613,8 @@
         </p:nvSpPr>
         <p:spPr>
           <a:xfrm>
-            <a:off x="7772400" y="4663440"/>
-            <a:ext cx="1097280" cy="365760"/>
+            <a:off x="548640" y="4572000"/>
+            <a:ext cx="3657600" cy="274320"/>
           </a:xfrm>
           <a:prstGeom prst="rect">
             <a:avLst/>
@@ -2120,204 +2626,16 @@
           <a:bodyPr wrap="square" rtlCol="0" anchor="ctr"/>
           <a:lstStyle/>
           <a:p>
-            <a:pPr algn="r" indent="0" marL="0">
-              <a:buNone/>
-            </a:pPr>
-            <a:r>
-              <a:rPr lang="en-US" sz="1000" dirty="0">
-                <a:solidFill>
-                  <a:srgbClr val="999999"/>
-                </a:solidFill>
-                <a:latin typeface="Calibri" pitchFamily="34" charset="0"/>
-                <a:ea typeface="Calibri" pitchFamily="34" charset="-122"/>
-                <a:cs typeface="Calibri" pitchFamily="34" charset="-120"/>
-              </a:rPr>
-              <a:t>5 / 6</a:t>
-            </a:r>
-            <a:endParaRPr lang="en-US" sz="1000" dirty="0"/>
-          </a:p>
-        </p:txBody>
-      </p:sp>
-    </p:spTree>
-  </p:cSld>
-  <p:clrMapOvr>
-    <a:masterClrMapping/>
-  </p:clrMapOvr>
-</p:sld>
-</file>
-
-<file path=ppt/slides/slide6.xml><?xml version="1.0" encoding="utf-8"?>
-<p:sld xmlns:a="http://schemas.openxmlformats.org/drawingml/2006/main" xmlns:r="http://schemas.openxmlformats.org/officeDocument/2006/relationships" xmlns:p="http://schemas.openxmlformats.org/presentationml/2006/main">
-  <p:cSld name="Slide 6">
-    <p:spTree>
-      <p:nvGrpSpPr>
-        <p:cNvPr id="1" name=""/>
-        <p:cNvGrpSpPr/>
-        <p:nvPr/>
-      </p:nvGrpSpPr>
-      <p:grpSpPr>
-        <a:xfrm>
-          <a:off x="0" y="0"/>
-          <a:ext cx="0" cy="0"/>
-          <a:chOff x="0" y="0"/>
-          <a:chExt cx="0" cy="0"/>
-        </a:xfrm>
-      </p:grpSpPr>
-      <p:sp>
-        <p:nvSpPr>
-          <p:cNvPr id="2" name="Shape 0"/>
-          <p:cNvSpPr/>
-          <p:nvPr/>
-        </p:nvSpPr>
-        <p:spPr>
-          <a:xfrm>
-            <a:off x="0" y="0"/>
-            <a:ext cx="9144000" cy="548640"/>
-          </a:xfrm>
-          <a:prstGeom prst="rect">
-            <a:avLst/>
-          </a:prstGeom>
-          <a:solidFill>
-            <a:srgbClr val="1A7A6F"/>
-          </a:solidFill>
-          <a:ln/>
-        </p:spPr>
-      </p:sp>
-      <p:sp>
-        <p:nvSpPr>
-          <p:cNvPr id="3" name="Text 1"/>
-          <p:cNvSpPr/>
-          <p:nvPr/>
-        </p:nvSpPr>
-        <p:spPr>
-          <a:xfrm>
-            <a:off x="457200" y="45720"/>
-            <a:ext cx="8229600" cy="457200"/>
-          </a:xfrm>
-          <a:prstGeom prst="rect">
-            <a:avLst/>
-          </a:prstGeom>
-          <a:noFill/>
-          <a:ln/>
-        </p:spPr>
-        <p:txBody>
-          <a:bodyPr wrap="square" rtlCol="0" anchor="ctr"/>
-          <a:lstStyle/>
-          <a:p>
             <a:pPr indent="0" marL="0">
               <a:buNone/>
             </a:pPr>
             <a:r>
-              <a:rPr lang="en-US" sz="1800" b="1" dirty="0">
-                <a:solidFill>
-                  <a:srgbClr val="FFFFFF"/>
-                </a:solidFill>
-                <a:latin typeface="Calibri" pitchFamily="34" charset="0"/>
-                <a:ea typeface="Calibri" pitchFamily="34" charset="-122"/>
-                <a:cs typeface="Calibri" pitchFamily="34" charset="-120"/>
-              </a:rPr>
-              <a:t>Interpreting data</a:t>
-            </a:r>
-            <a:endParaRPr lang="en-US" sz="1800" dirty="0"/>
-          </a:p>
-        </p:txBody>
-      </p:sp>
-      <p:sp>
-        <p:nvSpPr>
-          <p:cNvPr id="4" name="Text 2"/>
-          <p:cNvSpPr/>
-          <p:nvPr/>
-        </p:nvSpPr>
-        <p:spPr>
-          <a:xfrm>
-            <a:off x="731520" y="1097280"/>
-            <a:ext cx="7680960" cy="3200400"/>
-          </a:xfrm>
-          <a:prstGeom prst="rect">
-            <a:avLst/>
-          </a:prstGeom>
-          <a:noFill/>
-          <a:ln/>
-        </p:spPr>
-        <p:txBody>
-          <a:bodyPr wrap="square" rtlCol="0" anchor="ctr"/>
-          <a:lstStyle/>
-          <a:p>
-            <a:pPr indent="0" marL="0">
-              <a:buNone/>
-            </a:pPr>
-            <a:r>
-              <a:rPr lang="en-US" sz="1600" dirty="0">
-                <a:solidFill>
-                  <a:srgbClr val="363636"/>
-                </a:solidFill>
-                <a:latin typeface="Calibri" pitchFamily="34" charset="0"/>
-                <a:ea typeface="Calibri" pitchFamily="34" charset="-122"/>
-                <a:cs typeface="Calibri" pitchFamily="34" charset="-120"/>
-              </a:rPr>
-              <a:t>Content for: Interpreting data</a:t>
-            </a:r>
-            <a:endParaRPr lang="en-US" sz="1600" dirty="0"/>
-          </a:p>
-          <a:p>
-            <a:pPr indent="0" marL="0">
-              <a:buNone/>
-            </a:pPr>
-            <a:endParaRPr lang="en-US" sz="1600" dirty="0"/>
-          </a:p>
-          <a:p>
-            <a:pPr indent="0" marL="0">
-              <a:buNone/>
-            </a:pPr>
-            <a:r>
-              <a:rPr lang="en-US" sz="1600" dirty="0">
-                <a:solidFill>
-                  <a:srgbClr val="363636"/>
-                </a:solidFill>
-                <a:latin typeface="Calibri" pitchFamily="34" charset="0"/>
-                <a:ea typeface="Calibri" pitchFamily="34" charset="-122"/>
-                <a:cs typeface="Calibri" pitchFamily="34" charset="-120"/>
-              </a:rPr>
-              <a:t>Key points will be covered in class.</a:t>
-            </a:r>
-            <a:endParaRPr lang="en-US" sz="1600" dirty="0"/>
-          </a:p>
-        </p:txBody>
-      </p:sp>
-      <p:sp>
-        <p:nvSpPr>
-          <p:cNvPr id="5" name="Text 3"/>
-          <p:cNvSpPr/>
-          <p:nvPr/>
-        </p:nvSpPr>
-        <p:spPr>
-          <a:xfrm>
-            <a:off x="7772400" y="4663440"/>
-            <a:ext cx="1097280" cy="365760"/>
-          </a:xfrm>
-          <a:prstGeom prst="rect">
-            <a:avLst/>
-          </a:prstGeom>
-          <a:noFill/>
-          <a:ln/>
-        </p:spPr>
-        <p:txBody>
-          <a:bodyPr wrap="square" rtlCol="0" anchor="ctr"/>
-          <a:lstStyle/>
-          <a:p>
-            <a:pPr algn="r" indent="0" marL="0">
-              <a:buNone/>
-            </a:pPr>
-            <a:r>
               <a:rPr lang="en-US" sz="1000" dirty="0">
                 <a:solidFill>
-                  <a:srgbClr val="999999"/>
-                </a:solidFill>
-                <a:latin typeface="Calibri" pitchFamily="34" charset="0"/>
-                <a:ea typeface="Calibri" pitchFamily="34" charset="-122"/>
-                <a:cs typeface="Calibri" pitchFamily="34" charset="-120"/>
-              </a:rPr>
-              <a:t>6 / 6</a:t>
+                  <a:srgbClr val="6B6660"/>
+                </a:solidFill>
+              </a:rPr>
+              <a:t>mrzocchi.com</a:t>
             </a:r>
             <a:endParaRPr lang="en-US" sz="1000" dirty="0"/>
           </a:p>

--- a/static/ppts/G6_Sci_T1_Data_Graphs.pptx
+++ b/static/ppts/G6_Sci_T1_Data_Graphs.pptx
@@ -10,9 +10,10 @@
     <p:sldId id="258" r:id="rId4"/>
     <p:sldId id="259" r:id="rId5"/>
     <p:sldId id="260" r:id="rId6"/>
+    <p:sldId id="261" r:id="rId7"/>
   </p:sldIdLst>
   <p:notesMasterIdLst>
-    <p:notesMasterId r:id="rId7"/>
+    <p:notesMasterId r:id="rId8"/>
   </p:notesMasterIdLst>
   <p:sldSz cx="9144000" cy="5143500"/>
   <p:notesSz cx="5143500" cy="9144000"/>
@@ -900,6 +901,94 @@
 </p:notes>
 </file>
 
+<file path=ppt/notesSlides/notesSlide6.xml><?xml version="1.0" encoding="utf-8"?>
+<p:notes xmlns:a="http://schemas.openxmlformats.org/drawingml/2006/main" xmlns:r="http://schemas.openxmlformats.org/officeDocument/2006/relationships" xmlns:p="http://schemas.openxmlformats.org/presentationml/2006/main">
+  <p:cSld>
+    <p:spTree>
+      <p:nvGrpSpPr>
+        <p:cNvPr id="1" name=""/>
+        <p:cNvGrpSpPr/>
+        <p:nvPr/>
+      </p:nvGrpSpPr>
+      <p:grpSpPr>
+        <a:xfrm>
+          <a:off x="0" y="0"/>
+          <a:ext cx="0" cy="0"/>
+          <a:chOff x="0" y="0"/>
+          <a:chExt cx="0" cy="0"/>
+        </a:xfrm>
+      </p:grpSpPr>
+      <p:sp>
+        <p:nvSpPr>
+          <p:cNvPr id="2" name="Slide Image Placeholder 1"/>
+          <p:cNvSpPr>
+            <a:spLocks noGrp="1" noRot="1" noChangeAspect="1"/>
+          </p:cNvSpPr>
+          <p:nvPr>
+            <p:ph type="sldImg"/>
+          </p:nvPr>
+        </p:nvSpPr>
+        <p:spPr/>
+      </p:sp>
+      <p:sp>
+        <p:nvSpPr>
+          <p:cNvPr id="3" name="Notes Placeholder 2"/>
+          <p:cNvSpPr>
+            <a:spLocks noGrp="1"/>
+          </p:cNvSpPr>
+          <p:nvPr>
+            <p:ph type="body" idx="1"/>
+          </p:nvPr>
+        </p:nvSpPr>
+        <p:spPr/>
+        <p:txBody>
+          <a:bodyPr/>
+          <a:lstStyle/>
+          <a:p>
+            <a:r>
+              <a:rPr lang="en-US" dirty="0"/>
+              <a:t/>
+            </a:r>
+            <a:endParaRPr lang="en-US" dirty="0"/>
+          </a:p>
+        </p:txBody>
+      </p:sp>
+      <p:sp>
+        <p:nvSpPr>
+          <p:cNvPr id="4" name="Slide Number Placeholder 3"/>
+          <p:cNvSpPr>
+            <a:spLocks noGrp="1"/>
+          </p:cNvSpPr>
+          <p:nvPr>
+            <p:ph type="sldNum" sz="quarter" idx="10"/>
+          </p:nvPr>
+        </p:nvSpPr>
+        <p:spPr/>
+        <p:txBody>
+          <a:bodyPr/>
+          <a:lstStyle/>
+          <a:p>
+            <a:fld id="{F7021451-1387-4CA6-816F-3879F97B5CBC}" type="slidenum">
+              <a:rPr lang="en-US"/>
+              <a:t>6</a:t>
+            </a:fld>
+            <a:endParaRPr lang="en-US"/>
+          </a:p>
+        </p:txBody>
+      </p:sp>
+    </p:spTree>
+    <p:extLst>
+      <p:ext uri="{BB962C8B-B14F-4D97-AF65-F5344CB8AC3E}">
+        <p14:creationId xmlns:p14="http://schemas.microsoft.com/office/powerpoint/2010/main" val="1024086991"/>
+      </p:ext>
+    </p:extLst>
+  </p:cSld>
+  <p:clrMapOvr>
+    <a:masterClrMapping/>
+  </p:clrMapOvr>
+</p:notes>
+</file>
+
 <file path=ppt/slideLayouts/slideLayout1.xml><?xml version="1.0" encoding="utf-8"?>
 <p:sldLayout xmlns:a="http://schemas.openxmlformats.org/drawingml/2006/main" xmlns:r="http://schemas.openxmlformats.org/officeDocument/2006/relationships" xmlns:p="http://schemas.openxmlformats.org/presentationml/2006/main" preserve="1">
   <p:cSld name="DEFAULT">
@@ -1259,7 +1348,7 @@
         </p:nvSpPr>
         <p:spPr>
           <a:xfrm>
-            <a:off x="731520" y="1280160"/>
+            <a:off x="731520" y="1097280"/>
             <a:ext cx="7772400" cy="1371600"/>
           </a:xfrm>
           <a:prstGeom prst="rect">
@@ -1276,7 +1365,7 @@
               <a:buNone/>
             </a:pPr>
             <a:r>
-              <a:rPr lang="en-US" sz="3600" b="1" dirty="0">
+              <a:rPr lang="en-US" sz="4000" b="1" dirty="0">
                 <a:solidFill>
                   <a:srgbClr val="FFFFFF"/>
                 </a:solidFill>
@@ -1286,7 +1375,7 @@
               </a:rPr>
               <a:t>Data &amp; Graphs</a:t>
             </a:r>
-            <a:endParaRPr lang="en-US" sz="3600" dirty="0"/>
+            <a:endParaRPr lang="en-US" sz="4000" dirty="0"/>
           </a:p>
         </p:txBody>
       </p:sp>
@@ -1298,7 +1387,7 @@
         </p:nvSpPr>
         <p:spPr>
           <a:xfrm>
-            <a:off x="731520" y="2743200"/>
+            <a:off x="731520" y="2560320"/>
             <a:ext cx="7772400" cy="548640"/>
           </a:xfrm>
           <a:prstGeom prst="rect">
@@ -1317,13 +1406,13 @@
             <a:r>
               <a:rPr lang="en-US" sz="1600" dirty="0">
                 <a:solidFill>
-                  <a:srgbClr val="9B9690"/>
-                </a:solidFill>
-                <a:latin typeface="Calibri" pitchFamily="34" charset="0"/>
-                <a:ea typeface="Calibri" pitchFamily="34" charset="-122"/>
-                <a:cs typeface="Calibri" pitchFamily="34" charset="-120"/>
-              </a:rPr>
-              <a:t>G6 Science · Scientific Skills</a:t>
+                  <a:srgbClr val="E9C46A"/>
+                </a:solidFill>
+                <a:latin typeface="Calibri" pitchFamily="34" charset="0"/>
+                <a:ea typeface="Calibri" pitchFamily="34" charset="-122"/>
+                <a:cs typeface="Calibri" pitchFamily="34" charset="-120"/>
+              </a:rPr>
+              <a:t>Grade 6 Science · Mr Zocchi</a:t>
             </a:r>
             <a:endParaRPr lang="en-US" sz="1600" dirty="0"/>
           </a:p>
@@ -1331,14 +1420,36 @@
       </p:sp>
       <p:sp>
         <p:nvSpPr>
-          <p:cNvPr id="5" name="Text 3"/>
-          <p:cNvSpPr/>
-          <p:nvPr/>
-        </p:nvSpPr>
-        <p:spPr>
-          <a:xfrm>
-            <a:off x="731520" y="4389120"/>
-            <a:ext cx="7772400" cy="457200"/>
+          <p:cNvPr id="5" name="Shape 3"/>
+          <p:cNvSpPr/>
+          <p:nvPr/>
+        </p:nvSpPr>
+        <p:spPr>
+          <a:xfrm>
+            <a:off x="731520" y="3474720"/>
+            <a:ext cx="2011680" cy="411480"/>
+          </a:xfrm>
+          <a:prstGeom prst="roundRect">
+            <a:avLst>
+              <a:gd name="adj" fmla="val 17778"/>
+            </a:avLst>
+          </a:prstGeom>
+          <a:solidFill>
+            <a:srgbClr val="2A9D8F"/>
+          </a:solidFill>
+          <a:ln/>
+        </p:spPr>
+      </p:sp>
+      <p:sp>
+        <p:nvSpPr>
+          <p:cNvPr id="6" name="Text 4"/>
+          <p:cNvSpPr/>
+          <p:nvPr/>
+        </p:nvSpPr>
+        <p:spPr>
+          <a:xfrm>
+            <a:off x="731520" y="3474720"/>
+            <a:ext cx="2011680" cy="411480"/>
           </a:xfrm>
           <a:prstGeom prst="rect">
             <a:avLst/>
@@ -1350,21 +1461,21 @@
           <a:bodyPr wrap="square" rtlCol="0" anchor="ctr"/>
           <a:lstStyle/>
           <a:p>
-            <a:pPr indent="0" marL="0">
+            <a:pPr algn="ctr" indent="0" marL="0">
               <a:buNone/>
             </a:pPr>
             <a:r>
-              <a:rPr lang="en-US" sz="1000" dirty="0">
-                <a:solidFill>
-                  <a:srgbClr val="6B6660"/>
-                </a:solidFill>
-                <a:latin typeface="Calibri" pitchFamily="34" charset="0"/>
-                <a:ea typeface="Calibri" pitchFamily="34" charset="-122"/>
-                <a:cs typeface="Calibri" pitchFamily="34" charset="-120"/>
-              </a:rPr>
-              <a:t>Mr Zocchi · mrzocchi.com</a:t>
-            </a:r>
-            <a:endParaRPr lang="en-US" sz="1000" dirty="0"/>
+              <a:rPr lang="en-US" sz="1200" b="1" dirty="0">
+                <a:solidFill>
+                  <a:srgbClr val="FFFFFF"/>
+                </a:solidFill>
+                <a:latin typeface="Calibri" pitchFamily="34" charset="0"/>
+                <a:ea typeface="Calibri" pitchFamily="34" charset="-122"/>
+                <a:cs typeface="Calibri" pitchFamily="34" charset="-120"/>
+              </a:rPr>
+              <a:t>Term 1 · Scientific Skills</a:t>
+            </a:r>
+            <a:endParaRPr lang="en-US" sz="1200" dirty="0"/>
           </a:p>
         </p:txBody>
       </p:sp>
@@ -1382,7 +1493,7 @@
     <p:bg>
       <p:bgPr>
         <a:solidFill>
-          <a:srgbClr val="FFFFFF"/>
+          <a:srgbClr val="FAF8F5"/>
         </a:solidFill>
       </p:bgPr>
     </p:bg>
@@ -1428,8 +1539,8 @@
         </p:nvSpPr>
         <p:spPr>
           <a:xfrm>
-            <a:off x="548640" y="274320"/>
-            <a:ext cx="8046720" cy="640080"/>
+            <a:off x="7772400" y="4709160"/>
+            <a:ext cx="1097280" cy="320040"/>
           </a:xfrm>
           <a:prstGeom prst="rect">
             <a:avLst/>
@@ -1438,14 +1549,105 @@
           <a:ln/>
         </p:spPr>
         <p:txBody>
-          <a:bodyPr wrap="square" lIns="0" tIns="0" rIns="0" bIns="0" rtlCol="0" anchor="ctr"/>
+          <a:bodyPr wrap="square" rtlCol="0" anchor="ctr"/>
+          <a:lstStyle/>
+          <a:p>
+            <a:pPr algn="r" indent="0" marL="0">
+              <a:buNone/>
+            </a:pPr>
+            <a:r>
+              <a:rPr lang="en-US" sz="900" dirty="0">
+                <a:solidFill>
+                  <a:srgbClr val="6B6660"/>
+                </a:solidFill>
+                <a:latin typeface="Calibri" pitchFamily="34" charset="0"/>
+                <a:ea typeface="Calibri" pitchFamily="34" charset="-122"/>
+                <a:cs typeface="Calibri" pitchFamily="34" charset="-120"/>
+              </a:rPr>
+              <a:t>2 / 6</a:t>
+            </a:r>
+            <a:endParaRPr lang="en-US" sz="900" dirty="0"/>
+          </a:p>
+        </p:txBody>
+      </p:sp>
+      <p:sp>
+        <p:nvSpPr>
+          <p:cNvPr id="4" name="Shape 2"/>
+          <p:cNvSpPr/>
+          <p:nvPr/>
+        </p:nvSpPr>
+        <p:spPr>
+          <a:xfrm>
+            <a:off x="1371600" y="914400"/>
+            <a:ext cx="6400800" cy="3200400"/>
+          </a:xfrm>
+          <a:prstGeom prst="rect">
+            <a:avLst/>
+          </a:prstGeom>
+          <a:solidFill>
+            <a:srgbClr val="FFFFFF"/>
+          </a:solidFill>
+          <a:ln w="12700">
+            <a:solidFill>
+              <a:srgbClr val="E5E2DC"/>
+            </a:solidFill>
+            <a:prstDash val="solid"/>
+          </a:ln>
+          <a:effectLst>
+            <a:outerShdw sx="100000" sy="100000" kx="0" ky="0" algn="bl" rotWithShape="0" blurRad="50800" dist="25400" dir="8100000">
+              <a:srgbClr val="000000">
+                <a:alpha val="10000"/>
+              </a:srgbClr>
+            </a:outerShdw>
+          </a:effectLst>
+        </p:spPr>
+      </p:sp>
+      <p:sp>
+        <p:nvSpPr>
+          <p:cNvPr id="5" name="Shape 3"/>
+          <p:cNvSpPr/>
+          <p:nvPr/>
+        </p:nvSpPr>
+        <p:spPr>
+          <a:xfrm>
+            <a:off x="1371600" y="914400"/>
+            <a:ext cx="91440" cy="3200400"/>
+          </a:xfrm>
+          <a:prstGeom prst="rect">
+            <a:avLst/>
+          </a:prstGeom>
+          <a:solidFill>
+            <a:srgbClr val="2A9D8F"/>
+          </a:solidFill>
+          <a:ln/>
+        </p:spPr>
+      </p:sp>
+      <p:sp>
+        <p:nvSpPr>
+          <p:cNvPr id="6" name="Text 4"/>
+          <p:cNvSpPr/>
+          <p:nvPr/>
+        </p:nvSpPr>
+        <p:spPr>
+          <a:xfrm>
+            <a:off x="1828800" y="1097280"/>
+            <a:ext cx="5669280" cy="640080"/>
+          </a:xfrm>
+          <a:prstGeom prst="rect">
+            <a:avLst/>
+          </a:prstGeom>
+          <a:noFill/>
+          <a:ln/>
+        </p:spPr>
+        <p:txBody>
+          <a:bodyPr wrap="square" rtlCol="0" anchor="ctr"/>
           <a:lstStyle/>
           <a:p>
             <a:pPr indent="0" marL="0">
               <a:buNone/>
             </a:pPr>
             <a:r>
-              <a:rPr lang="en-US" sz="2600" b="1" dirty="0">
+              <a:rPr lang="en-US" sz="2400" b="1" dirty="0">
                 <a:solidFill>
                   <a:srgbClr val="1B2A4A"/>
                 </a:solidFill>
@@ -1453,22 +1655,22 @@
                 <a:ea typeface="Georgia" pitchFamily="34" charset="-122"/>
                 <a:cs typeface="Georgia" pitchFamily="34" charset="-120"/>
               </a:rPr>
-              <a:t>Recording Data</a:t>
-            </a:r>
-            <a:endParaRPr lang="en-US" sz="2600" dirty="0"/>
-          </a:p>
-        </p:txBody>
-      </p:sp>
-      <p:sp>
-        <p:nvSpPr>
-          <p:cNvPr id="4" name="Text 2"/>
-          <p:cNvSpPr/>
-          <p:nvPr/>
-        </p:nvSpPr>
-        <p:spPr>
-          <a:xfrm>
-            <a:off x="548640" y="1097280"/>
-            <a:ext cx="8046720" cy="3474720"/>
+              <a:t>Presenting Data</a:t>
+            </a:r>
+            <a:endParaRPr lang="en-US" sz="2400" dirty="0"/>
+          </a:p>
+        </p:txBody>
+      </p:sp>
+      <p:sp>
+        <p:nvSpPr>
+          <p:cNvPr id="7" name="Text 5"/>
+          <p:cNvSpPr/>
+          <p:nvPr/>
+        </p:nvSpPr>
+        <p:spPr>
+          <a:xfrm>
+            <a:off x="1828800" y="1828800"/>
+            <a:ext cx="5669280" cy="2011680"/>
           </a:xfrm>
           <a:prstGeom prst="rect">
             <a:avLst/>
@@ -1480,12 +1682,11 @@
           <a:bodyPr wrap="square" rtlCol="0" anchor="t"/>
           <a:lstStyle/>
           <a:p>
-            <a:pPr marL="342900" indent="-342900">
-              <a:spcAft>
-                <a:spcPts val="800"/>
-              </a:spcAft>
-              <a:buSzPct val="100000"/>
-              <a:buChar char="•"/>
+            <a:pPr indent="0" marL="0">
+              <a:lnSpc>
+                <a:spcPct val="130000"/>
+              </a:lnSpc>
+              <a:buNone/>
             </a:pPr>
             <a:r>
               <a:rPr lang="en-US" sz="1500" dirty="0">
@@ -1496,149 +1697,9 @@
                 <a:ea typeface="Calibri" pitchFamily="34" charset="-122"/>
                 <a:cs typeface="Calibri" pitchFamily="34" charset="-120"/>
               </a:rPr>
-              <a:t>Use a table with clear headings and units</a:t>
+              <a:t>After collecting data in an experiment, scientists organise it into tables and graphs. Good graphs make patterns visible at a glance. Choosing the right type of graph depends on what kind of data you have collected.</a:t>
             </a:r>
             <a:endParaRPr lang="en-US" sz="1500" dirty="0"/>
-          </a:p>
-          <a:p>
-            <a:pPr marL="342900" indent="-342900">
-              <a:spcAft>
-                <a:spcPts val="800"/>
-              </a:spcAft>
-              <a:buSzPct val="100000"/>
-              <a:buChar char="•"/>
-            </a:pPr>
-            <a:r>
-              <a:rPr lang="en-US" sz="1500" dirty="0">
-                <a:solidFill>
-                  <a:srgbClr val="3D3A36"/>
-                </a:solidFill>
-                <a:latin typeface="Calibri" pitchFamily="34" charset="0"/>
-                <a:ea typeface="Calibri" pitchFamily="34" charset="-122"/>
-                <a:cs typeface="Calibri" pitchFamily="34" charset="-120"/>
-              </a:rPr>
-              <a:t>Independent variable goes in the LEFT column</a:t>
-            </a:r>
-            <a:endParaRPr lang="en-US" sz="1500" dirty="0"/>
-          </a:p>
-          <a:p>
-            <a:pPr marL="342900" indent="-342900">
-              <a:spcAft>
-                <a:spcPts val="800"/>
-              </a:spcAft>
-              <a:buSzPct val="100000"/>
-              <a:buChar char="•"/>
-            </a:pPr>
-            <a:r>
-              <a:rPr lang="en-US" sz="1500" dirty="0">
-                <a:solidFill>
-                  <a:srgbClr val="3D3A36"/>
-                </a:solidFill>
-                <a:latin typeface="Calibri" pitchFamily="34" charset="0"/>
-                <a:ea typeface="Calibri" pitchFamily="34" charset="-122"/>
-                <a:cs typeface="Calibri" pitchFamily="34" charset="-120"/>
-              </a:rPr>
-              <a:t>Dependent variable goes in the RIGHT column</a:t>
-            </a:r>
-            <a:endParaRPr lang="en-US" sz="1500" dirty="0"/>
-          </a:p>
-          <a:p>
-            <a:pPr marL="342900" indent="-342900">
-              <a:spcAft>
-                <a:spcPts val="800"/>
-              </a:spcAft>
-              <a:buSzPct val="100000"/>
-              <a:buChar char="•"/>
-            </a:pPr>
-            <a:r>
-              <a:rPr lang="en-US" sz="1500" dirty="0">
-                <a:solidFill>
-                  <a:srgbClr val="3D3A36"/>
-                </a:solidFill>
-                <a:latin typeface="Calibri" pitchFamily="34" charset="0"/>
-                <a:ea typeface="Calibri" pitchFamily="34" charset="-122"/>
-                <a:cs typeface="Calibri" pitchFamily="34" charset="-120"/>
-              </a:rPr>
-              <a:t>Record data as you go — don't wait until the end</a:t>
-            </a:r>
-            <a:endParaRPr lang="en-US" sz="1500" dirty="0"/>
-          </a:p>
-          <a:p>
-            <a:pPr marL="342900" indent="-342900">
-              <a:spcAft>
-                <a:spcPts val="800"/>
-              </a:spcAft>
-              <a:buSzPct val="100000"/>
-              <a:buChar char="•"/>
-            </a:pPr>
-            <a:r>
-              <a:rPr lang="en-US" sz="1500" dirty="0">
-                <a:solidFill>
-                  <a:srgbClr val="3D3A36"/>
-                </a:solidFill>
-                <a:latin typeface="Calibri" pitchFamily="34" charset="0"/>
-                <a:ea typeface="Calibri" pitchFamily="34" charset="-122"/>
-                <a:cs typeface="Calibri" pitchFamily="34" charset="-120"/>
-              </a:rPr>
-              <a:t>Include units in column headings, not in each cell</a:t>
-            </a:r>
-            <a:endParaRPr lang="en-US" sz="1500" dirty="0"/>
-          </a:p>
-        </p:txBody>
-      </p:sp>
-      <p:sp>
-        <p:nvSpPr>
-          <p:cNvPr id="5" name="Shape 3"/>
-          <p:cNvSpPr/>
-          <p:nvPr/>
-        </p:nvSpPr>
-        <p:spPr>
-          <a:xfrm>
-            <a:off x="548640" y="4754880"/>
-            <a:ext cx="8046720" cy="9144"/>
-          </a:xfrm>
-          <a:prstGeom prst="rect">
-            <a:avLst/>
-          </a:prstGeom>
-          <a:solidFill>
-            <a:srgbClr val="F3F1EE"/>
-          </a:solidFill>
-          <a:ln/>
-        </p:spPr>
-      </p:sp>
-      <p:sp>
-        <p:nvSpPr>
-          <p:cNvPr id="6" name="Text 4"/>
-          <p:cNvSpPr/>
-          <p:nvPr/>
-        </p:nvSpPr>
-        <p:spPr>
-          <a:xfrm>
-            <a:off x="548640" y="4800600"/>
-            <a:ext cx="3657600" cy="274320"/>
-          </a:xfrm>
-          <a:prstGeom prst="rect">
-            <a:avLst/>
-          </a:prstGeom>
-          <a:noFill/>
-          <a:ln/>
-        </p:spPr>
-        <p:txBody>
-          <a:bodyPr wrap="square" rtlCol="0" anchor="ctr"/>
-          <a:lstStyle/>
-          <a:p>
-            <a:pPr indent="0" marL="0">
-              <a:buNone/>
-            </a:pPr>
-            <a:r>
-              <a:rPr lang="en-US" sz="800" dirty="0">
-                <a:solidFill>
-                  <a:srgbClr val="9B9690"/>
-                </a:solidFill>
-              </a:rPr>
-              <a:t>mrzocchi.com</a:t>
-            </a:r>
-            <a:endParaRPr lang="en-US" sz="800" dirty="0"/>
           </a:p>
         </p:txBody>
       </p:sp>
@@ -1656,7 +1717,7 @@
     <p:bg>
       <p:bgPr>
         <a:solidFill>
-          <a:srgbClr val="FFFFFF"/>
+          <a:srgbClr val="FAF8F5"/>
         </a:solidFill>
       </p:bgPr>
     </p:bg>
@@ -1702,8 +1763,8 @@
         </p:nvSpPr>
         <p:spPr>
           <a:xfrm>
-            <a:off x="548640" y="274320"/>
-            <a:ext cx="8046720" cy="640080"/>
+            <a:off x="7772400" y="4709160"/>
+            <a:ext cx="1097280" cy="320040"/>
           </a:xfrm>
           <a:prstGeom prst="rect">
             <a:avLst/>
@@ -1712,7 +1773,46 @@
           <a:ln/>
         </p:spPr>
         <p:txBody>
-          <a:bodyPr wrap="square" lIns="0" tIns="0" rIns="0" bIns="0" rtlCol="0" anchor="ctr"/>
+          <a:bodyPr wrap="square" rtlCol="0" anchor="ctr"/>
+          <a:lstStyle/>
+          <a:p>
+            <a:pPr algn="r" indent="0" marL="0">
+              <a:buNone/>
+            </a:pPr>
+            <a:r>
+              <a:rPr lang="en-US" sz="900" dirty="0">
+                <a:solidFill>
+                  <a:srgbClr val="6B6660"/>
+                </a:solidFill>
+                <a:latin typeface="Calibri" pitchFamily="34" charset="0"/>
+                <a:ea typeface="Calibri" pitchFamily="34" charset="-122"/>
+                <a:cs typeface="Calibri" pitchFamily="34" charset="-120"/>
+              </a:rPr>
+              <a:t>3 / 6</a:t>
+            </a:r>
+            <a:endParaRPr lang="en-US" sz="900" dirty="0"/>
+          </a:p>
+        </p:txBody>
+      </p:sp>
+      <p:sp>
+        <p:nvSpPr>
+          <p:cNvPr id="4" name="Text 2"/>
+          <p:cNvSpPr/>
+          <p:nvPr/>
+        </p:nvSpPr>
+        <p:spPr>
+          <a:xfrm>
+            <a:off x="457200" y="274320"/>
+            <a:ext cx="8229600" cy="640080"/>
+          </a:xfrm>
+          <a:prstGeom prst="rect">
+            <a:avLst/>
+          </a:prstGeom>
+          <a:noFill/>
+          <a:ln/>
+        </p:spPr>
+        <p:txBody>
+          <a:bodyPr wrap="square" rtlCol="0" anchor="ctr"/>
           <a:lstStyle/>
           <a:p>
             <a:pPr indent="0" marL="0">
@@ -1735,22 +1835,27 @@
       </p:sp>
       <p:sp>
         <p:nvSpPr>
-          <p:cNvPr id="4" name="Shape 2"/>
-          <p:cNvSpPr/>
-          <p:nvPr/>
-        </p:nvSpPr>
-        <p:spPr>
-          <a:xfrm>
-            <a:off x="457200" y="1097280"/>
-            <a:ext cx="3840480" cy="3474720"/>
-          </a:xfrm>
-          <a:prstGeom prst="rect">
-            <a:avLst/>
-          </a:prstGeom>
-          <a:solidFill>
-            <a:srgbClr val="F3F1EE"/>
-          </a:solidFill>
-          <a:ln/>
+          <p:cNvPr id="5" name="Shape 3"/>
+          <p:cNvSpPr/>
+          <p:nvPr/>
+        </p:nvSpPr>
+        <p:spPr>
+          <a:xfrm>
+            <a:off x="457200" y="1188720"/>
+            <a:ext cx="2560320" cy="1828800"/>
+          </a:xfrm>
+          <a:prstGeom prst="rect">
+            <a:avLst/>
+          </a:prstGeom>
+          <a:solidFill>
+            <a:srgbClr val="FFFFFF"/>
+          </a:solidFill>
+          <a:ln w="12700">
+            <a:solidFill>
+              <a:srgbClr val="E5E2DC"/>
+            </a:solidFill>
+            <a:prstDash val="solid"/>
+          </a:ln>
           <a:effectLst>
             <a:outerShdw sx="100000" sy="100000" kx="0" ky="0" algn="bl" rotWithShape="0" blurRad="50800" dist="25400" dir="8100000">
               <a:srgbClr val="000000">
@@ -1762,14 +1867,34 @@
       </p:sp>
       <p:sp>
         <p:nvSpPr>
-          <p:cNvPr id="5" name="Text 3"/>
-          <p:cNvSpPr/>
-          <p:nvPr/>
-        </p:nvSpPr>
-        <p:spPr>
-          <a:xfrm>
-            <a:off x="640080" y="1234440"/>
-            <a:ext cx="3474720" cy="411480"/>
+          <p:cNvPr id="6" name="Shape 4"/>
+          <p:cNvSpPr/>
+          <p:nvPr/>
+        </p:nvSpPr>
+        <p:spPr>
+          <a:xfrm>
+            <a:off x="457200" y="1188720"/>
+            <a:ext cx="2560320" cy="54864"/>
+          </a:xfrm>
+          <a:prstGeom prst="rect">
+            <a:avLst/>
+          </a:prstGeom>
+          <a:solidFill>
+            <a:srgbClr val="2A9D8F"/>
+          </a:solidFill>
+          <a:ln/>
+        </p:spPr>
+      </p:sp>
+      <p:sp>
+        <p:nvSpPr>
+          <p:cNvPr id="7" name="Text 5"/>
+          <p:cNvSpPr/>
+          <p:nvPr/>
+        </p:nvSpPr>
+        <p:spPr>
+          <a:xfrm>
+            <a:off x="594360" y="1325880"/>
+            <a:ext cx="2286000" cy="365760"/>
           </a:xfrm>
           <a:prstGeom prst="rect">
             <a:avLst/>
@@ -1785,30 +1910,30 @@
               <a:buNone/>
             </a:pPr>
             <a:r>
-              <a:rPr lang="en-US" sz="1600" b="1" dirty="0">
+              <a:rPr lang="en-US" sz="1400" b="1" dirty="0">
                 <a:solidFill>
                   <a:srgbClr val="1B2A4A"/>
                 </a:solidFill>
-                <a:latin typeface="Georgia" pitchFamily="34" charset="0"/>
-                <a:ea typeface="Georgia" pitchFamily="34" charset="-122"/>
-                <a:cs typeface="Georgia" pitchFamily="34" charset="-120"/>
+                <a:latin typeface="Calibri" pitchFamily="34" charset="0"/>
+                <a:ea typeface="Calibri" pitchFamily="34" charset="-122"/>
+                <a:cs typeface="Calibri" pitchFamily="34" charset="-120"/>
               </a:rPr>
               <a:t>Bar Chart</a:t>
             </a:r>
-            <a:endParaRPr lang="en-US" sz="1600" dirty="0"/>
-          </a:p>
-        </p:txBody>
-      </p:sp>
-      <p:sp>
-        <p:nvSpPr>
-          <p:cNvPr id="6" name="Text 4"/>
-          <p:cNvSpPr/>
-          <p:nvPr/>
-        </p:nvSpPr>
-        <p:spPr>
-          <a:xfrm>
-            <a:off x="640080" y="1737360"/>
-            <a:ext cx="3474720" cy="2651760"/>
+            <a:endParaRPr lang="en-US" sz="1400" dirty="0"/>
+          </a:p>
+        </p:txBody>
+      </p:sp>
+      <p:sp>
+        <p:nvSpPr>
+          <p:cNvPr id="8" name="Text 6"/>
+          <p:cNvSpPr/>
+          <p:nvPr/>
+        </p:nvSpPr>
+        <p:spPr>
+          <a:xfrm>
+            <a:off x="594360" y="1737360"/>
+            <a:ext cx="2286000" cy="1097280"/>
           </a:xfrm>
           <a:prstGeom prst="rect">
             <a:avLst/>
@@ -1820,15 +1945,11 @@
           <a:bodyPr wrap="square" rtlCol="0" anchor="t"/>
           <a:lstStyle/>
           <a:p>
-            <a:pPr marL="342900" indent="-342900">
-              <a:spcAft>
-                <a:spcPts val="600"/>
-              </a:spcAft>
-              <a:buSzPct val="100000"/>
-              <a:buChar char="•"/>
-            </a:pPr>
-            <a:r>
-              <a:rPr lang="en-US" sz="1300" dirty="0">
+            <a:pPr indent="0" marL="0">
+              <a:buNone/>
+            </a:pPr>
+            <a:r>
+              <a:rPr lang="en-US" sz="1100" dirty="0">
                 <a:solidFill>
                   <a:srgbClr val="3D3A36"/>
                 </a:solidFill>
@@ -1836,93 +1957,35 @@
                 <a:ea typeface="Calibri" pitchFamily="34" charset="-122"/>
                 <a:cs typeface="Calibri" pitchFamily="34" charset="-120"/>
               </a:rPr>
-              <a:t>Used for categoric (named) data</a:t>
-            </a:r>
-            <a:endParaRPr lang="en-US" sz="1300" dirty="0"/>
-          </a:p>
-          <a:p>
-            <a:pPr marL="342900" indent="-342900">
-              <a:spcAft>
-                <a:spcPts val="600"/>
-              </a:spcAft>
-              <a:buSzPct val="100000"/>
-              <a:buChar char="•"/>
-            </a:pPr>
-            <a:r>
-              <a:rPr lang="en-US" sz="1300" dirty="0">
-                <a:solidFill>
-                  <a:srgbClr val="3D3A36"/>
-                </a:solidFill>
-                <a:latin typeface="Calibri" pitchFamily="34" charset="0"/>
-                <a:ea typeface="Calibri" pitchFamily="34" charset="-122"/>
-                <a:cs typeface="Calibri" pitchFamily="34" charset="-120"/>
-              </a:rPr>
-              <a:t>Bars don't touch</a:t>
-            </a:r>
-            <a:endParaRPr lang="en-US" sz="1300" dirty="0"/>
-          </a:p>
-          <a:p>
-            <a:pPr marL="342900" indent="-342900">
-              <a:spcAft>
-                <a:spcPts val="600"/>
-              </a:spcAft>
-              <a:buSzPct val="100000"/>
-              <a:buChar char="•"/>
-            </a:pPr>
-            <a:r>
-              <a:rPr lang="en-US" sz="1300" dirty="0">
-                <a:solidFill>
-                  <a:srgbClr val="3D3A36"/>
-                </a:solidFill>
-                <a:latin typeface="Calibri" pitchFamily="34" charset="0"/>
-                <a:ea typeface="Calibri" pitchFamily="34" charset="-122"/>
-                <a:cs typeface="Calibri" pitchFamily="34" charset="-120"/>
-              </a:rPr>
-              <a:t>Example: favourite colours in class</a:t>
-            </a:r>
-            <a:endParaRPr lang="en-US" sz="1300" dirty="0"/>
-          </a:p>
-          <a:p>
-            <a:pPr marL="342900" indent="-342900">
-              <a:spcAft>
-                <a:spcPts val="600"/>
-              </a:spcAft>
-              <a:buSzPct val="100000"/>
-              <a:buChar char="•"/>
-            </a:pPr>
-            <a:r>
-              <a:rPr lang="en-US" sz="1300" dirty="0">
-                <a:solidFill>
-                  <a:srgbClr val="3D3A36"/>
-                </a:solidFill>
-                <a:latin typeface="Calibri" pitchFamily="34" charset="0"/>
-                <a:ea typeface="Calibri" pitchFamily="34" charset="-122"/>
-                <a:cs typeface="Calibri" pitchFamily="34" charset="-120"/>
-              </a:rPr>
-              <a:t>Bars can be horizontal or vertical</a:t>
-            </a:r>
-            <a:endParaRPr lang="en-US" sz="1300" dirty="0"/>
-          </a:p>
-        </p:txBody>
-      </p:sp>
-      <p:sp>
-        <p:nvSpPr>
-          <p:cNvPr id="7" name="Shape 5"/>
-          <p:cNvSpPr/>
-          <p:nvPr/>
-        </p:nvSpPr>
-        <p:spPr>
-          <a:xfrm>
-            <a:off x="4846320" y="1097280"/>
-            <a:ext cx="3840480" cy="3474720"/>
-          </a:xfrm>
-          <a:prstGeom prst="rect">
-            <a:avLst/>
-          </a:prstGeom>
-          <a:solidFill>
-            <a:srgbClr val="F3F1EE"/>
-          </a:solidFill>
-          <a:ln/>
+              <a:t>For categoric data (names/groups). Example: favourite colours in a class. Bars don't touch. Each bar represents a different category.</a:t>
+            </a:r>
+            <a:endParaRPr lang="en-US" sz="1100" dirty="0"/>
+          </a:p>
+        </p:txBody>
+      </p:sp>
+      <p:sp>
+        <p:nvSpPr>
+          <p:cNvPr id="9" name="Shape 7"/>
+          <p:cNvSpPr/>
+          <p:nvPr/>
+        </p:nvSpPr>
+        <p:spPr>
+          <a:xfrm>
+            <a:off x="3291840" y="1188720"/>
+            <a:ext cx="2560320" cy="1828800"/>
+          </a:xfrm>
+          <a:prstGeom prst="rect">
+            <a:avLst/>
+          </a:prstGeom>
+          <a:solidFill>
+            <a:srgbClr val="FFFFFF"/>
+          </a:solidFill>
+          <a:ln w="12700">
+            <a:solidFill>
+              <a:srgbClr val="E5E2DC"/>
+            </a:solidFill>
+            <a:prstDash val="solid"/>
+          </a:ln>
           <a:effectLst>
             <a:outerShdw sx="100000" sy="100000" kx="0" ky="0" algn="bl" rotWithShape="0" blurRad="50800" dist="25400" dir="8100000">
               <a:srgbClr val="000000">
@@ -1934,14 +1997,34 @@
       </p:sp>
       <p:sp>
         <p:nvSpPr>
-          <p:cNvPr id="8" name="Text 6"/>
-          <p:cNvSpPr/>
-          <p:nvPr/>
-        </p:nvSpPr>
-        <p:spPr>
-          <a:xfrm>
-            <a:off x="5029200" y="1234440"/>
-            <a:ext cx="3474720" cy="411480"/>
+          <p:cNvPr id="10" name="Shape 8"/>
+          <p:cNvSpPr/>
+          <p:nvPr/>
+        </p:nvSpPr>
+        <p:spPr>
+          <a:xfrm>
+            <a:off x="3291840" y="1188720"/>
+            <a:ext cx="2560320" cy="54864"/>
+          </a:xfrm>
+          <a:prstGeom prst="rect">
+            <a:avLst/>
+          </a:prstGeom>
+          <a:solidFill>
+            <a:srgbClr val="2A9D8F"/>
+          </a:solidFill>
+          <a:ln/>
+        </p:spPr>
+      </p:sp>
+      <p:sp>
+        <p:nvSpPr>
+          <p:cNvPr id="11" name="Text 9"/>
+          <p:cNvSpPr/>
+          <p:nvPr/>
+        </p:nvSpPr>
+        <p:spPr>
+          <a:xfrm>
+            <a:off x="3429000" y="1325880"/>
+            <a:ext cx="2286000" cy="365760"/>
           </a:xfrm>
           <a:prstGeom prst="rect">
             <a:avLst/>
@@ -1957,30 +2040,30 @@
               <a:buNone/>
             </a:pPr>
             <a:r>
-              <a:rPr lang="en-US" sz="1600" b="1" dirty="0">
+              <a:rPr lang="en-US" sz="1400" b="1" dirty="0">
                 <a:solidFill>
                   <a:srgbClr val="1B2A4A"/>
                 </a:solidFill>
-                <a:latin typeface="Georgia" pitchFamily="34" charset="0"/>
-                <a:ea typeface="Georgia" pitchFamily="34" charset="-122"/>
-                <a:cs typeface="Georgia" pitchFamily="34" charset="-120"/>
+                <a:latin typeface="Calibri" pitchFamily="34" charset="0"/>
+                <a:ea typeface="Calibri" pitchFamily="34" charset="-122"/>
+                <a:cs typeface="Calibri" pitchFamily="34" charset="-120"/>
               </a:rPr>
               <a:t>Line Graph</a:t>
             </a:r>
-            <a:endParaRPr lang="en-US" sz="1600" dirty="0"/>
-          </a:p>
-        </p:txBody>
-      </p:sp>
-      <p:sp>
-        <p:nvSpPr>
-          <p:cNvPr id="9" name="Text 7"/>
-          <p:cNvSpPr/>
-          <p:nvPr/>
-        </p:nvSpPr>
-        <p:spPr>
-          <a:xfrm>
-            <a:off x="5029200" y="1737360"/>
-            <a:ext cx="3474720" cy="2651760"/>
+            <a:endParaRPr lang="en-US" sz="1400" dirty="0"/>
+          </a:p>
+        </p:txBody>
+      </p:sp>
+      <p:sp>
+        <p:nvSpPr>
+          <p:cNvPr id="12" name="Text 10"/>
+          <p:cNvSpPr/>
+          <p:nvPr/>
+        </p:nvSpPr>
+        <p:spPr>
+          <a:xfrm>
+            <a:off x="3429000" y="1737360"/>
+            <a:ext cx="2286000" cy="1097280"/>
           </a:xfrm>
           <a:prstGeom prst="rect">
             <a:avLst/>
@@ -1992,15 +2075,11 @@
           <a:bodyPr wrap="square" rtlCol="0" anchor="t"/>
           <a:lstStyle/>
           <a:p>
-            <a:pPr marL="342900" indent="-342900">
-              <a:spcAft>
-                <a:spcPts val="600"/>
-              </a:spcAft>
-              <a:buSzPct val="100000"/>
-              <a:buChar char="•"/>
-            </a:pPr>
-            <a:r>
-              <a:rPr lang="en-US" sz="1300" dirty="0">
+            <a:pPr indent="0" marL="0">
+              <a:buNone/>
+            </a:pPr>
+            <a:r>
+              <a:rPr lang="en-US" sz="1100" dirty="0">
                 <a:solidFill>
                   <a:srgbClr val="3D3A36"/>
                 </a:solidFill>
@@ -2008,85 +2087,74 @@
                 <a:ea typeface="Calibri" pitchFamily="34" charset="-122"/>
                 <a:cs typeface="Calibri" pitchFamily="34" charset="-120"/>
               </a:rPr>
-              <a:t>Used for continuous (number) data</a:t>
-            </a:r>
-            <a:endParaRPr lang="en-US" sz="1300" dirty="0"/>
-          </a:p>
-          <a:p>
-            <a:pPr marL="342900" indent="-342900">
-              <a:spcAft>
-                <a:spcPts val="600"/>
-              </a:spcAft>
-              <a:buSzPct val="100000"/>
-              <a:buChar char="•"/>
-            </a:pPr>
-            <a:r>
-              <a:rPr lang="en-US" sz="1300" dirty="0">
-                <a:solidFill>
-                  <a:srgbClr val="3D3A36"/>
-                </a:solidFill>
-                <a:latin typeface="Calibri" pitchFamily="34" charset="0"/>
-                <a:ea typeface="Calibri" pitchFamily="34" charset="-122"/>
-                <a:cs typeface="Calibri" pitchFamily="34" charset="-120"/>
-              </a:rPr>
-              <a:t>Plot points, then draw line of best fit</a:t>
-            </a:r>
-            <a:endParaRPr lang="en-US" sz="1300" dirty="0"/>
-          </a:p>
-          <a:p>
-            <a:pPr marL="342900" indent="-342900">
-              <a:spcAft>
-                <a:spcPts val="600"/>
-              </a:spcAft>
-              <a:buSzPct val="100000"/>
-              <a:buChar char="•"/>
-            </a:pPr>
-            <a:r>
-              <a:rPr lang="en-US" sz="1300" dirty="0">
-                <a:solidFill>
-                  <a:srgbClr val="3D3A36"/>
-                </a:solidFill>
-                <a:latin typeface="Calibri" pitchFamily="34" charset="0"/>
-                <a:ea typeface="Calibri" pitchFamily="34" charset="-122"/>
-                <a:cs typeface="Calibri" pitchFamily="34" charset="-120"/>
-              </a:rPr>
-              <a:t>Example: temperature over time</a:t>
-            </a:r>
-            <a:endParaRPr lang="en-US" sz="1300" dirty="0"/>
-          </a:p>
-          <a:p>
-            <a:pPr marL="342900" indent="-342900">
-              <a:spcAft>
-                <a:spcPts val="600"/>
-              </a:spcAft>
-              <a:buSzPct val="100000"/>
-              <a:buChar char="•"/>
-            </a:pPr>
-            <a:r>
-              <a:rPr lang="en-US" sz="1300" dirty="0">
-                <a:solidFill>
-                  <a:srgbClr val="3D3A36"/>
-                </a:solidFill>
-                <a:latin typeface="Calibri" pitchFamily="34" charset="0"/>
-                <a:ea typeface="Calibri" pitchFamily="34" charset="-122"/>
-                <a:cs typeface="Calibri" pitchFamily="34" charset="-120"/>
-              </a:rPr>
-              <a:t>Shows trends and patterns</a:t>
-            </a:r>
-            <a:endParaRPr lang="en-US" sz="1300" dirty="0"/>
-          </a:p>
-        </p:txBody>
-      </p:sp>
-      <p:sp>
-        <p:nvSpPr>
-          <p:cNvPr id="10" name="Text 8"/>
-          <p:cNvSpPr/>
-          <p:nvPr/>
-        </p:nvSpPr>
-        <p:spPr>
-          <a:xfrm>
-            <a:off x="548640" y="4800600"/>
-            <a:ext cx="3657600" cy="274320"/>
+              <a:t>For continuous data (numbers that change over time). Example: temperature over 24 hours. Points are connected with straight lines. Shows trends and patterns.</a:t>
+            </a:r>
+            <a:endParaRPr lang="en-US" sz="1100" dirty="0"/>
+          </a:p>
+        </p:txBody>
+      </p:sp>
+      <p:sp>
+        <p:nvSpPr>
+          <p:cNvPr id="13" name="Shape 11"/>
+          <p:cNvSpPr/>
+          <p:nvPr/>
+        </p:nvSpPr>
+        <p:spPr>
+          <a:xfrm>
+            <a:off x="6126480" y="1188720"/>
+            <a:ext cx="2560320" cy="1828800"/>
+          </a:xfrm>
+          <a:prstGeom prst="rect">
+            <a:avLst/>
+          </a:prstGeom>
+          <a:solidFill>
+            <a:srgbClr val="FFFFFF"/>
+          </a:solidFill>
+          <a:ln w="12700">
+            <a:solidFill>
+              <a:srgbClr val="E5E2DC"/>
+            </a:solidFill>
+            <a:prstDash val="solid"/>
+          </a:ln>
+          <a:effectLst>
+            <a:outerShdw sx="100000" sy="100000" kx="0" ky="0" algn="bl" rotWithShape="0" blurRad="50800" dist="25400" dir="8100000">
+              <a:srgbClr val="000000">
+                <a:alpha val="10000"/>
+              </a:srgbClr>
+            </a:outerShdw>
+          </a:effectLst>
+        </p:spPr>
+      </p:sp>
+      <p:sp>
+        <p:nvSpPr>
+          <p:cNvPr id="14" name="Shape 12"/>
+          <p:cNvSpPr/>
+          <p:nvPr/>
+        </p:nvSpPr>
+        <p:spPr>
+          <a:xfrm>
+            <a:off x="6126480" y="1188720"/>
+            <a:ext cx="2560320" cy="54864"/>
+          </a:xfrm>
+          <a:prstGeom prst="rect">
+            <a:avLst/>
+          </a:prstGeom>
+          <a:solidFill>
+            <a:srgbClr val="2A9D8F"/>
+          </a:solidFill>
+          <a:ln/>
+        </p:spPr>
+      </p:sp>
+      <p:sp>
+        <p:nvSpPr>
+          <p:cNvPr id="15" name="Text 13"/>
+          <p:cNvSpPr/>
+          <p:nvPr/>
+        </p:nvSpPr>
+        <p:spPr>
+          <a:xfrm>
+            <a:off x="6263640" y="1325880"/>
+            <a:ext cx="2286000" cy="365760"/>
           </a:xfrm>
           <a:prstGeom prst="rect">
             <a:avLst/>
@@ -2102,14 +2170,56 @@
               <a:buNone/>
             </a:pPr>
             <a:r>
-              <a:rPr lang="en-US" sz="800" dirty="0">
-                <a:solidFill>
-                  <a:srgbClr val="9B9690"/>
-                </a:solidFill>
-              </a:rPr>
-              <a:t>mrzocchi.com</a:t>
-            </a:r>
-            <a:endParaRPr lang="en-US" sz="800" dirty="0"/>
+              <a:rPr lang="en-US" sz="1400" b="1" dirty="0">
+                <a:solidFill>
+                  <a:srgbClr val="1B2A4A"/>
+                </a:solidFill>
+                <a:latin typeface="Calibri" pitchFamily="34" charset="0"/>
+                <a:ea typeface="Calibri" pitchFamily="34" charset="-122"/>
+                <a:cs typeface="Calibri" pitchFamily="34" charset="-120"/>
+              </a:rPr>
+              <a:t>Pie Chart</a:t>
+            </a:r>
+            <a:endParaRPr lang="en-US" sz="1400" dirty="0"/>
+          </a:p>
+        </p:txBody>
+      </p:sp>
+      <p:sp>
+        <p:nvSpPr>
+          <p:cNvPr id="16" name="Text 14"/>
+          <p:cNvSpPr/>
+          <p:nvPr/>
+        </p:nvSpPr>
+        <p:spPr>
+          <a:xfrm>
+            <a:off x="6263640" y="1737360"/>
+            <a:ext cx="2286000" cy="1097280"/>
+          </a:xfrm>
+          <a:prstGeom prst="rect">
+            <a:avLst/>
+          </a:prstGeom>
+          <a:noFill/>
+          <a:ln/>
+        </p:spPr>
+        <p:txBody>
+          <a:bodyPr wrap="square" rtlCol="0" anchor="t"/>
+          <a:lstStyle/>
+          <a:p>
+            <a:pPr indent="0" marL="0">
+              <a:buNone/>
+            </a:pPr>
+            <a:r>
+              <a:rPr lang="en-US" sz="1100" dirty="0">
+                <a:solidFill>
+                  <a:srgbClr val="3D3A36"/>
+                </a:solidFill>
+                <a:latin typeface="Calibri" pitchFamily="34" charset="0"/>
+                <a:ea typeface="Calibri" pitchFamily="34" charset="-122"/>
+                <a:cs typeface="Calibri" pitchFamily="34" charset="-120"/>
+              </a:rPr>
+              <a:t>Shows proportions of a whole. Example: percentage of each gas in air. All segments add up to 100%. Best for 3–6 categories.</a:t>
+            </a:r>
+            <a:endParaRPr lang="en-US" sz="1100" dirty="0"/>
           </a:p>
         </p:txBody>
       </p:sp>
@@ -2127,7 +2237,7 @@
     <p:bg>
       <p:bgPr>
         <a:solidFill>
-          <a:srgbClr val="FFFFFF"/>
+          <a:srgbClr val="FAF8F5"/>
         </a:solidFill>
       </p:bgPr>
     </p:bg>
@@ -2173,8 +2283,8 @@
         </p:nvSpPr>
         <p:spPr>
           <a:xfrm>
-            <a:off x="548640" y="274320"/>
-            <a:ext cx="8046720" cy="640080"/>
+            <a:off x="7772400" y="4709160"/>
+            <a:ext cx="1097280" cy="320040"/>
           </a:xfrm>
           <a:prstGeom prst="rect">
             <a:avLst/>
@@ -2183,7 +2293,46 @@
           <a:ln/>
         </p:spPr>
         <p:txBody>
-          <a:bodyPr wrap="square" lIns="0" tIns="0" rIns="0" bIns="0" rtlCol="0" anchor="ctr"/>
+          <a:bodyPr wrap="square" rtlCol="0" anchor="ctr"/>
+          <a:lstStyle/>
+          <a:p>
+            <a:pPr algn="r" indent="0" marL="0">
+              <a:buNone/>
+            </a:pPr>
+            <a:r>
+              <a:rPr lang="en-US" sz="900" dirty="0">
+                <a:solidFill>
+                  <a:srgbClr val="6B6660"/>
+                </a:solidFill>
+                <a:latin typeface="Calibri" pitchFamily="34" charset="0"/>
+                <a:ea typeface="Calibri" pitchFamily="34" charset="-122"/>
+                <a:cs typeface="Calibri" pitchFamily="34" charset="-120"/>
+              </a:rPr>
+              <a:t>4 / 6</a:t>
+            </a:r>
+            <a:endParaRPr lang="en-US" sz="900" dirty="0"/>
+          </a:p>
+        </p:txBody>
+      </p:sp>
+      <p:sp>
+        <p:nvSpPr>
+          <p:cNvPr id="4" name="Text 2"/>
+          <p:cNvSpPr/>
+          <p:nvPr/>
+        </p:nvSpPr>
+        <p:spPr>
+          <a:xfrm>
+            <a:off x="457200" y="274320"/>
+            <a:ext cx="8229600" cy="640080"/>
+          </a:xfrm>
+          <a:prstGeom prst="rect">
+            <a:avLst/>
+          </a:prstGeom>
+          <a:noFill/>
+          <a:ln/>
+        </p:spPr>
+        <p:txBody>
+          <a:bodyPr wrap="square" rtlCol="0" anchor="ctr"/>
           <a:lstStyle/>
           <a:p>
             <a:pPr indent="0" marL="0">
@@ -2198,7 +2347,7 @@
                 <a:ea typeface="Georgia" pitchFamily="34" charset="-122"/>
                 <a:cs typeface="Georgia" pitchFamily="34" charset="-120"/>
               </a:rPr>
-              <a:t>Drawing Good Graphs</a:t>
+              <a:t>Drawing a Good Graph</a:t>
             </a:r>
             <a:endParaRPr lang="en-US" sz="2600" dirty="0"/>
           </a:p>
@@ -2206,14 +2355,14 @@
       </p:sp>
       <p:sp>
         <p:nvSpPr>
-          <p:cNvPr id="4" name="Text 2"/>
-          <p:cNvSpPr/>
-          <p:nvPr/>
-        </p:nvSpPr>
-        <p:spPr>
-          <a:xfrm>
-            <a:off x="548640" y="1097280"/>
-            <a:ext cx="8046720" cy="3474720"/>
+          <p:cNvPr id="5" name="Text 3"/>
+          <p:cNvSpPr/>
+          <p:nvPr/>
+        </p:nvSpPr>
+        <p:spPr>
+          <a:xfrm>
+            <a:off x="457200" y="1188720"/>
+            <a:ext cx="3840480" cy="3474720"/>
           </a:xfrm>
           <a:prstGeom prst="rect">
             <a:avLst/>
@@ -2227,13 +2376,13 @@
           <a:p>
             <a:pPr marL="342900" indent="-342900">
               <a:spcAft>
-                <a:spcPts val="800"/>
+                <a:spcPts val="600"/>
               </a:spcAft>
               <a:buSzPct val="100000"/>
               <a:buChar char="•"/>
             </a:pPr>
             <a:r>
-              <a:rPr lang="en-US" sz="1500" dirty="0">
+              <a:rPr lang="en-US" sz="1400" dirty="0">
                 <a:solidFill>
                   <a:srgbClr val="3D3A36"/>
                 </a:solidFill>
@@ -2241,20 +2390,20 @@
                 <a:ea typeface="Calibri" pitchFamily="34" charset="-122"/>
                 <a:cs typeface="Calibri" pitchFamily="34" charset="-120"/>
               </a:rPr>
-              <a:t>Title: what the graph shows (DV vs IV)</a:t>
-            </a:r>
-            <a:endParaRPr lang="en-US" sz="1500" dirty="0"/>
+              <a:t>Title: describes what the graph shows</a:t>
+            </a:r>
+            <a:endParaRPr lang="en-US" sz="1400" dirty="0"/>
           </a:p>
           <a:p>
             <a:pPr marL="342900" indent="-342900">
               <a:spcAft>
-                <a:spcPts val="800"/>
+                <a:spcPts val="600"/>
               </a:spcAft>
               <a:buSzPct val="100000"/>
               <a:buChar char="•"/>
             </a:pPr>
             <a:r>
-              <a:rPr lang="en-US" sz="1500" dirty="0">
+              <a:rPr lang="en-US" sz="1400" dirty="0">
                 <a:solidFill>
                   <a:srgbClr val="3D3A36"/>
                 </a:solidFill>
@@ -2262,20 +2411,20 @@
                 <a:ea typeface="Calibri" pitchFamily="34" charset="-122"/>
                 <a:cs typeface="Calibri" pitchFamily="34" charset="-120"/>
               </a:rPr>
-              <a:t>X-axis: Independent Variable (what you changed)</a:t>
-            </a:r>
-            <a:endParaRPr lang="en-US" sz="1500" dirty="0"/>
+              <a:t>X-axis: independent variable (what you changed)</a:t>
+            </a:r>
+            <a:endParaRPr lang="en-US" sz="1400" dirty="0"/>
           </a:p>
           <a:p>
             <a:pPr marL="342900" indent="-342900">
               <a:spcAft>
-                <a:spcPts val="800"/>
+                <a:spcPts val="600"/>
               </a:spcAft>
               <a:buSzPct val="100000"/>
               <a:buChar char="•"/>
             </a:pPr>
             <a:r>
-              <a:rPr lang="en-US" sz="1500" dirty="0">
+              <a:rPr lang="en-US" sz="1400" dirty="0">
                 <a:solidFill>
                   <a:srgbClr val="3D3A36"/>
                 </a:solidFill>
@@ -2283,20 +2432,20 @@
                 <a:ea typeface="Calibri" pitchFamily="34" charset="-122"/>
                 <a:cs typeface="Calibri" pitchFamily="34" charset="-120"/>
               </a:rPr>
-              <a:t>Y-axis: Dependent Variable (what you measured)</a:t>
-            </a:r>
-            <a:endParaRPr lang="en-US" sz="1500" dirty="0"/>
+              <a:t>Y-axis: dependent variable (what you measured)</a:t>
+            </a:r>
+            <a:endParaRPr lang="en-US" sz="1400" dirty="0"/>
           </a:p>
           <a:p>
             <a:pPr marL="342900" indent="-342900">
               <a:spcAft>
-                <a:spcPts val="800"/>
+                <a:spcPts val="600"/>
               </a:spcAft>
               <a:buSzPct val="100000"/>
               <a:buChar char="•"/>
             </a:pPr>
             <a:r>
-              <a:rPr lang="en-US" sz="1500" dirty="0">
+              <a:rPr lang="en-US" sz="1400" dirty="0">
                 <a:solidFill>
                   <a:srgbClr val="3D3A36"/>
                 </a:solidFill>
@@ -2306,18 +2455,18 @@
               </a:rPr>
               <a:t>Label both axes with name AND unit</a:t>
             </a:r>
-            <a:endParaRPr lang="en-US" sz="1500" dirty="0"/>
+            <a:endParaRPr lang="en-US" sz="1400" dirty="0"/>
           </a:p>
           <a:p>
             <a:pPr marL="342900" indent="-342900">
               <a:spcAft>
-                <a:spcPts val="800"/>
+                <a:spcPts val="600"/>
               </a:spcAft>
               <a:buSzPct val="100000"/>
               <a:buChar char="•"/>
             </a:pPr>
             <a:r>
-              <a:rPr lang="en-US" sz="1500" dirty="0">
+              <a:rPr lang="en-US" sz="1400" dirty="0">
                 <a:solidFill>
                   <a:srgbClr val="3D3A36"/>
                 </a:solidFill>
@@ -2325,20 +2474,20 @@
                 <a:ea typeface="Calibri" pitchFamily="34" charset="-122"/>
                 <a:cs typeface="Calibri" pitchFamily="34" charset="-120"/>
               </a:rPr>
-              <a:t>Use a ruler for straight lines and neat bars</a:t>
-            </a:r>
-            <a:endParaRPr lang="en-US" sz="1500" dirty="0"/>
+              <a:t>Choose a sensible scale — use most of the graph paper</a:t>
+            </a:r>
+            <a:endParaRPr lang="en-US" sz="1400" dirty="0"/>
           </a:p>
           <a:p>
             <a:pPr marL="342900" indent="-342900">
               <a:spcAft>
-                <a:spcPts val="800"/>
+                <a:spcPts val="600"/>
               </a:spcAft>
               <a:buSzPct val="100000"/>
               <a:buChar char="•"/>
             </a:pPr>
             <a:r>
-              <a:rPr lang="en-US" sz="1500" dirty="0">
+              <a:rPr lang="en-US" sz="1400" dirty="0">
                 <a:solidFill>
                   <a:srgbClr val="3D3A36"/>
                 </a:solidFill>
@@ -2346,42 +2495,95 @@
                 <a:ea typeface="Calibri" pitchFamily="34" charset="-122"/>
                 <a:cs typeface="Calibri" pitchFamily="34" charset="-120"/>
               </a:rPr>
-              <a:t>Fill at least half the graph paper with your data</a:t>
-            </a:r>
-            <a:endParaRPr lang="en-US" sz="1500" dirty="0"/>
-          </a:p>
-        </p:txBody>
-      </p:sp>
-      <p:sp>
-        <p:nvSpPr>
-          <p:cNvPr id="5" name="Shape 3"/>
-          <p:cNvSpPr/>
-          <p:nvPr/>
-        </p:nvSpPr>
-        <p:spPr>
-          <a:xfrm>
-            <a:off x="548640" y="4754880"/>
-            <a:ext cx="8046720" cy="9144"/>
-          </a:xfrm>
-          <a:prstGeom prst="rect">
-            <a:avLst/>
-          </a:prstGeom>
-          <a:solidFill>
-            <a:srgbClr val="F3F1EE"/>
+              <a:t>Plot points accurately with a small cross (×)</a:t>
+            </a:r>
+            <a:endParaRPr lang="en-US" sz="1400" dirty="0"/>
+          </a:p>
+          <a:p>
+            <a:pPr marL="342900" indent="-342900">
+              <a:spcAft>
+                <a:spcPts val="600"/>
+              </a:spcAft>
+              <a:buSzPct val="100000"/>
+              <a:buChar char="•"/>
+            </a:pPr>
+            <a:r>
+              <a:rPr lang="en-US" sz="1400" dirty="0">
+                <a:solidFill>
+                  <a:srgbClr val="3D3A36"/>
+                </a:solidFill>
+                <a:latin typeface="Calibri" pitchFamily="34" charset="0"/>
+                <a:ea typeface="Calibri" pitchFamily="34" charset="-122"/>
+                <a:cs typeface="Calibri" pitchFamily="34" charset="-120"/>
+              </a:rPr>
+              <a:t>Draw a line of best fit or connect the points</a:t>
+            </a:r>
+            <a:endParaRPr lang="en-US" sz="1400" dirty="0"/>
+          </a:p>
+        </p:txBody>
+      </p:sp>
+      <p:sp>
+        <p:nvSpPr>
+          <p:cNvPr id="6" name="Shape 4"/>
+          <p:cNvSpPr/>
+          <p:nvPr/>
+        </p:nvSpPr>
+        <p:spPr>
+          <a:xfrm>
+            <a:off x="4846320" y="1188720"/>
+            <a:ext cx="3840480" cy="3474720"/>
+          </a:xfrm>
+          <a:prstGeom prst="rect">
+            <a:avLst/>
+          </a:prstGeom>
+          <a:solidFill>
+            <a:srgbClr val="FFFFFF"/>
+          </a:solidFill>
+          <a:ln w="12700">
+            <a:solidFill>
+              <a:srgbClr val="E5E2DC"/>
+            </a:solidFill>
+            <a:prstDash val="solid"/>
+          </a:ln>
+          <a:effectLst>
+            <a:outerShdw sx="100000" sy="100000" kx="0" ky="0" algn="bl" rotWithShape="0" blurRad="50800" dist="25400" dir="8100000">
+              <a:srgbClr val="000000">
+                <a:alpha val="10000"/>
+              </a:srgbClr>
+            </a:outerShdw>
+          </a:effectLst>
+        </p:spPr>
+      </p:sp>
+      <p:sp>
+        <p:nvSpPr>
+          <p:cNvPr id="7" name="Shape 5"/>
+          <p:cNvSpPr/>
+          <p:nvPr/>
+        </p:nvSpPr>
+        <p:spPr>
+          <a:xfrm>
+            <a:off x="4846320" y="1188720"/>
+            <a:ext cx="3840480" cy="54864"/>
+          </a:xfrm>
+          <a:prstGeom prst="rect">
+            <a:avLst/>
+          </a:prstGeom>
+          <a:solidFill>
+            <a:srgbClr val="2A9D8F"/>
           </a:solidFill>
           <a:ln/>
         </p:spPr>
       </p:sp>
       <p:sp>
         <p:nvSpPr>
-          <p:cNvPr id="6" name="Text 4"/>
-          <p:cNvSpPr/>
-          <p:nvPr/>
-        </p:nvSpPr>
-        <p:spPr>
-          <a:xfrm>
-            <a:off x="548640" y="4800600"/>
-            <a:ext cx="3657600" cy="274320"/>
+          <p:cNvPr id="8" name="Text 6"/>
+          <p:cNvSpPr/>
+          <p:nvPr/>
+        </p:nvSpPr>
+        <p:spPr>
+          <a:xfrm>
+            <a:off x="5120640" y="1371600"/>
+            <a:ext cx="3291840" cy="3108960"/>
           </a:xfrm>
           <a:prstGeom prst="rect">
             <a:avLst/>
@@ -2390,21 +2592,156 @@
           <a:ln/>
         </p:spPr>
         <p:txBody>
-          <a:bodyPr wrap="square" rtlCol="0" anchor="ctr"/>
+          <a:bodyPr wrap="square" rtlCol="0" anchor="t"/>
           <a:lstStyle/>
           <a:p>
             <a:pPr indent="0" marL="0">
+              <a:spcAft>
+                <a:spcPts val="400"/>
+              </a:spcAft>
               <a:buNone/>
             </a:pPr>
             <a:r>
-              <a:rPr lang="en-US" sz="800" dirty="0">
-                <a:solidFill>
-                  <a:srgbClr val="9B9690"/>
-                </a:solidFill>
-              </a:rPr>
-              <a:t>mrzocchi.com</a:t>
-            </a:r>
-            <a:endParaRPr lang="en-US" sz="800" dirty="0"/>
+              <a:rPr lang="en-US" sz="1600" b="1" dirty="0">
+                <a:solidFill>
+                  <a:srgbClr val="1B2A4A"/>
+                </a:solidFill>
+                <a:latin typeface="Calibri" pitchFamily="34" charset="0"/>
+                <a:ea typeface="Calibri" pitchFamily="34" charset="-122"/>
+                <a:cs typeface="Calibri" pitchFamily="34" charset="-120"/>
+              </a:rPr>
+              <a:t>Data Tables</a:t>
+            </a:r>
+            <a:endParaRPr lang="en-US" sz="1600" dirty="0"/>
+          </a:p>
+          <a:p>
+            <a:pPr indent="0" marL="0">
+              <a:spcAft>
+                <a:spcPts val="400"/>
+              </a:spcAft>
+              <a:buNone/>
+            </a:pPr>
+            <a:endParaRPr lang="en-US" sz="1600" dirty="0"/>
+          </a:p>
+          <a:p>
+            <a:pPr indent="0" marL="0">
+              <a:spcAft>
+                <a:spcPts val="400"/>
+              </a:spcAft>
+              <a:buNone/>
+            </a:pPr>
+            <a:r>
+              <a:rPr lang="en-US" sz="1300" dirty="0">
+                <a:solidFill>
+                  <a:srgbClr val="3D3A36"/>
+                </a:solidFill>
+                <a:latin typeface="Calibri" pitchFamily="34" charset="0"/>
+                <a:ea typeface="Calibri" pitchFamily="34" charset="-122"/>
+                <a:cs typeface="Calibri" pitchFamily="34" charset="-120"/>
+              </a:rPr>
+              <a:t>Independent variable in the FIRST column</a:t>
+            </a:r>
+            <a:endParaRPr lang="en-US" sz="1600" dirty="0"/>
+          </a:p>
+          <a:p>
+            <a:pPr indent="0" marL="0">
+              <a:spcAft>
+                <a:spcPts val="400"/>
+              </a:spcAft>
+              <a:buNone/>
+            </a:pPr>
+            <a:r>
+              <a:rPr lang="en-US" sz="1300" dirty="0">
+                <a:solidFill>
+                  <a:srgbClr val="3D3A36"/>
+                </a:solidFill>
+                <a:latin typeface="Calibri" pitchFamily="34" charset="0"/>
+                <a:ea typeface="Calibri" pitchFamily="34" charset="-122"/>
+                <a:cs typeface="Calibri" pitchFamily="34" charset="-120"/>
+              </a:rPr>
+              <a:t>Dependent variable in subsequent columns</a:t>
+            </a:r>
+            <a:endParaRPr lang="en-US" sz="1600" dirty="0"/>
+          </a:p>
+          <a:p>
+            <a:pPr indent="0" marL="0">
+              <a:spcAft>
+                <a:spcPts val="400"/>
+              </a:spcAft>
+              <a:buNone/>
+            </a:pPr>
+            <a:r>
+              <a:rPr lang="en-US" sz="1300" dirty="0">
+                <a:solidFill>
+                  <a:srgbClr val="3D3A36"/>
+                </a:solidFill>
+                <a:latin typeface="Calibri" pitchFamily="34" charset="0"/>
+                <a:ea typeface="Calibri" pitchFamily="34" charset="-122"/>
+                <a:cs typeface="Calibri" pitchFamily="34" charset="-120"/>
+              </a:rPr>
+              <a:t>Include units in the header row, not in every cell</a:t>
+            </a:r>
+            <a:endParaRPr lang="en-US" sz="1600" dirty="0"/>
+          </a:p>
+          <a:p>
+            <a:pPr indent="0" marL="0">
+              <a:spcAft>
+                <a:spcPts val="400"/>
+              </a:spcAft>
+              <a:buNone/>
+            </a:pPr>
+            <a:r>
+              <a:rPr lang="en-US" sz="1300" dirty="0">
+                <a:solidFill>
+                  <a:srgbClr val="3D3A36"/>
+                </a:solidFill>
+                <a:latin typeface="Calibri" pitchFamily="34" charset="0"/>
+                <a:ea typeface="Calibri" pitchFamily="34" charset="-122"/>
+                <a:cs typeface="Calibri" pitchFamily="34" charset="-120"/>
+              </a:rPr>
+              <a:t>Record all measurements — don't leave blanks</a:t>
+            </a:r>
+            <a:endParaRPr lang="en-US" sz="1600" dirty="0"/>
+          </a:p>
+          <a:p>
+            <a:pPr indent="0" marL="0">
+              <a:spcAft>
+                <a:spcPts val="400"/>
+              </a:spcAft>
+              <a:buNone/>
+            </a:pPr>
+            <a:r>
+              <a:rPr lang="en-US" sz="1300" dirty="0">
+                <a:solidFill>
+                  <a:srgbClr val="3D3A36"/>
+                </a:solidFill>
+                <a:latin typeface="Calibri" pitchFamily="34" charset="0"/>
+                <a:ea typeface="Calibri" pitchFamily="34" charset="-122"/>
+                <a:cs typeface="Calibri" pitchFamily="34" charset="-120"/>
+              </a:rPr>
+              <a:t>Calculate averages if you have repeats</a:t>
+            </a:r>
+            <a:endParaRPr lang="en-US" sz="1600" dirty="0"/>
+          </a:p>
+          <a:p>
+            <a:pPr indent="0" marL="0">
+              <a:spcAft>
+                <a:spcPts val="400"/>
+              </a:spcAft>
+              <a:buNone/>
+            </a:pPr>
+            <a:r>
+              <a:rPr lang="en-US" sz="1300" dirty="0">
+                <a:solidFill>
+                  <a:srgbClr val="3D3A36"/>
+                </a:solidFill>
+                <a:latin typeface="Calibri" pitchFamily="34" charset="0"/>
+                <a:ea typeface="Calibri" pitchFamily="34" charset="-122"/>
+                <a:cs typeface="Calibri" pitchFamily="34" charset="-120"/>
+              </a:rPr>
+              <a:t>Anomalies (outliers) should be circled and noted</a:t>
+            </a:r>
+            <a:endParaRPr lang="en-US" sz="1600" dirty="0"/>
           </a:p>
         </p:txBody>
       </p:sp>
@@ -2419,6 +2756,284 @@
 <file path=ppt/slides/slide5.xml><?xml version="1.0" encoding="utf-8"?>
 <p:sld xmlns:a="http://schemas.openxmlformats.org/drawingml/2006/main" xmlns:r="http://schemas.openxmlformats.org/officeDocument/2006/relationships" xmlns:p="http://schemas.openxmlformats.org/presentationml/2006/main">
   <p:cSld name="Slide 5">
+    <p:bg>
+      <p:bgPr>
+        <a:solidFill>
+          <a:srgbClr val="FAF8F5"/>
+        </a:solidFill>
+      </p:bgPr>
+    </p:bg>
+    <p:spTree>
+      <p:nvGrpSpPr>
+        <p:cNvPr id="1" name=""/>
+        <p:cNvGrpSpPr/>
+        <p:nvPr/>
+      </p:nvGrpSpPr>
+      <p:grpSpPr>
+        <a:xfrm>
+          <a:off x="0" y="0"/>
+          <a:ext cx="0" cy="0"/>
+          <a:chOff x="0" y="0"/>
+          <a:chExt cx="0" cy="0"/>
+        </a:xfrm>
+      </p:grpSpPr>
+      <p:sp>
+        <p:nvSpPr>
+          <p:cNvPr id="2" name="Shape 0"/>
+          <p:cNvSpPr/>
+          <p:nvPr/>
+        </p:nvSpPr>
+        <p:spPr>
+          <a:xfrm>
+            <a:off x="0" y="0"/>
+            <a:ext cx="9144000" cy="54864"/>
+          </a:xfrm>
+          <a:prstGeom prst="rect">
+            <a:avLst/>
+          </a:prstGeom>
+          <a:solidFill>
+            <a:srgbClr val="2A9D8F"/>
+          </a:solidFill>
+          <a:ln/>
+        </p:spPr>
+      </p:sp>
+      <p:sp>
+        <p:nvSpPr>
+          <p:cNvPr id="3" name="Text 1"/>
+          <p:cNvSpPr/>
+          <p:nvPr/>
+        </p:nvSpPr>
+        <p:spPr>
+          <a:xfrm>
+            <a:off x="7772400" y="4709160"/>
+            <a:ext cx="1097280" cy="320040"/>
+          </a:xfrm>
+          <a:prstGeom prst="rect">
+            <a:avLst/>
+          </a:prstGeom>
+          <a:noFill/>
+          <a:ln/>
+        </p:spPr>
+        <p:txBody>
+          <a:bodyPr wrap="square" rtlCol="0" anchor="ctr"/>
+          <a:lstStyle/>
+          <a:p>
+            <a:pPr algn="r" indent="0" marL="0">
+              <a:buNone/>
+            </a:pPr>
+            <a:r>
+              <a:rPr lang="en-US" sz="900" dirty="0">
+                <a:solidFill>
+                  <a:srgbClr val="6B6660"/>
+                </a:solidFill>
+                <a:latin typeface="Calibri" pitchFamily="34" charset="0"/>
+                <a:ea typeface="Calibri" pitchFamily="34" charset="-122"/>
+                <a:cs typeface="Calibri" pitchFamily="34" charset="-120"/>
+              </a:rPr>
+              <a:t>5 / 6</a:t>
+            </a:r>
+            <a:endParaRPr lang="en-US" sz="900" dirty="0"/>
+          </a:p>
+        </p:txBody>
+      </p:sp>
+      <p:sp>
+        <p:nvSpPr>
+          <p:cNvPr id="4" name="Text 2"/>
+          <p:cNvSpPr/>
+          <p:nvPr/>
+        </p:nvSpPr>
+        <p:spPr>
+          <a:xfrm>
+            <a:off x="457200" y="274320"/>
+            <a:ext cx="8229600" cy="640080"/>
+          </a:xfrm>
+          <a:prstGeom prst="rect">
+            <a:avLst/>
+          </a:prstGeom>
+          <a:noFill/>
+          <a:ln/>
+        </p:spPr>
+        <p:txBody>
+          <a:bodyPr wrap="square" rtlCol="0" anchor="ctr"/>
+          <a:lstStyle/>
+          <a:p>
+            <a:pPr indent="0" marL="0">
+              <a:buNone/>
+            </a:pPr>
+            <a:r>
+              <a:rPr lang="en-US" sz="2600" b="1" dirty="0">
+                <a:solidFill>
+                  <a:srgbClr val="1B2A4A"/>
+                </a:solidFill>
+                <a:latin typeface="Georgia" pitchFamily="34" charset="0"/>
+                <a:ea typeface="Georgia" pitchFamily="34" charset="-122"/>
+                <a:cs typeface="Georgia" pitchFamily="34" charset="-120"/>
+              </a:rPr>
+              <a:t>Interpreting Graphs</a:t>
+            </a:r>
+            <a:endParaRPr lang="en-US" sz="2600" dirty="0"/>
+          </a:p>
+        </p:txBody>
+      </p:sp>
+      <p:sp>
+        <p:nvSpPr>
+          <p:cNvPr id="5" name="Text 3"/>
+          <p:cNvSpPr/>
+          <p:nvPr/>
+        </p:nvSpPr>
+        <p:spPr>
+          <a:xfrm>
+            <a:off x="457200" y="1097280"/>
+            <a:ext cx="8229600" cy="3657600"/>
+          </a:xfrm>
+          <a:prstGeom prst="rect">
+            <a:avLst/>
+          </a:prstGeom>
+          <a:noFill/>
+          <a:ln/>
+        </p:spPr>
+        <p:txBody>
+          <a:bodyPr wrap="square" rtlCol="0" anchor="t"/>
+          <a:lstStyle/>
+          <a:p>
+            <a:pPr marL="342900" indent="-342900">
+              <a:spcAft>
+                <a:spcPts val="800"/>
+              </a:spcAft>
+              <a:buSzPct val="100000"/>
+              <a:buChar char="•"/>
+            </a:pPr>
+            <a:r>
+              <a:rPr lang="en-US" sz="1400" dirty="0">
+                <a:solidFill>
+                  <a:srgbClr val="3D3A36"/>
+                </a:solidFill>
+                <a:latin typeface="Calibri" pitchFamily="34" charset="0"/>
+                <a:ea typeface="Calibri" pitchFamily="34" charset="-122"/>
+                <a:cs typeface="Calibri" pitchFamily="34" charset="-120"/>
+              </a:rPr>
+              <a:t>Describe the overall pattern or trend first</a:t>
+            </a:r>
+            <a:endParaRPr lang="en-US" sz="1400" dirty="0"/>
+          </a:p>
+          <a:p>
+            <a:pPr marL="342900" indent="-342900">
+              <a:spcAft>
+                <a:spcPts val="800"/>
+              </a:spcAft>
+              <a:buSzPct val="100000"/>
+              <a:buChar char="•"/>
+            </a:pPr>
+            <a:r>
+              <a:rPr lang="en-US" sz="1400" dirty="0">
+                <a:solidFill>
+                  <a:srgbClr val="3D3A36"/>
+                </a:solidFill>
+                <a:latin typeface="Calibri" pitchFamily="34" charset="0"/>
+                <a:ea typeface="Calibri" pitchFamily="34" charset="-122"/>
+                <a:cs typeface="Calibri" pitchFamily="34" charset="-120"/>
+              </a:rPr>
+              <a:t>'As temperature increases, the rate of reaction increases'</a:t>
+            </a:r>
+            <a:endParaRPr lang="en-US" sz="1400" dirty="0"/>
+          </a:p>
+          <a:p>
+            <a:pPr marL="342900" indent="-342900">
+              <a:spcAft>
+                <a:spcPts val="800"/>
+              </a:spcAft>
+              <a:buSzPct val="100000"/>
+              <a:buChar char="•"/>
+            </a:pPr>
+            <a:r>
+              <a:rPr lang="en-US" sz="1400" dirty="0">
+                <a:solidFill>
+                  <a:srgbClr val="3D3A36"/>
+                </a:solidFill>
+                <a:latin typeface="Calibri" pitchFamily="34" charset="0"/>
+                <a:ea typeface="Calibri" pitchFamily="34" charset="-122"/>
+                <a:cs typeface="Calibri" pitchFamily="34" charset="-120"/>
+              </a:rPr>
+              <a:t>Use specific data points to support your description</a:t>
+            </a:r>
+            <a:endParaRPr lang="en-US" sz="1400" dirty="0"/>
+          </a:p>
+          <a:p>
+            <a:pPr marL="342900" indent="-342900">
+              <a:spcAft>
+                <a:spcPts val="800"/>
+              </a:spcAft>
+              <a:buSzPct val="100000"/>
+              <a:buChar char="•"/>
+            </a:pPr>
+            <a:r>
+              <a:rPr lang="en-US" sz="1400" dirty="0">
+                <a:solidFill>
+                  <a:srgbClr val="3D3A36"/>
+                </a:solidFill>
+                <a:latin typeface="Calibri" pitchFamily="34" charset="0"/>
+                <a:ea typeface="Calibri" pitchFamily="34" charset="-122"/>
+                <a:cs typeface="Calibri" pitchFamily="34" charset="-120"/>
+              </a:rPr>
+              <a:t>Identify any anomalies — points that don't fit the pattern</a:t>
+            </a:r>
+            <a:endParaRPr lang="en-US" sz="1400" dirty="0"/>
+          </a:p>
+          <a:p>
+            <a:pPr marL="342900" indent="-342900">
+              <a:spcAft>
+                <a:spcPts val="800"/>
+              </a:spcAft>
+              <a:buSzPct val="100000"/>
+              <a:buChar char="•"/>
+            </a:pPr>
+            <a:r>
+              <a:rPr lang="en-US" sz="1400" dirty="0">
+                <a:solidFill>
+                  <a:srgbClr val="3D3A36"/>
+                </a:solidFill>
+                <a:latin typeface="Calibri" pitchFamily="34" charset="0"/>
+                <a:ea typeface="Calibri" pitchFamily="34" charset="-122"/>
+                <a:cs typeface="Calibri" pitchFamily="34" charset="-120"/>
+              </a:rPr>
+              <a:t>Suggest reasons for anomalies: measurement error, contamination, or a genuine effect</a:t>
+            </a:r>
+            <a:endParaRPr lang="en-US" sz="1400" dirty="0"/>
+          </a:p>
+          <a:p>
+            <a:pPr marL="342900" indent="-342900">
+              <a:spcAft>
+                <a:spcPts val="800"/>
+              </a:spcAft>
+              <a:buSzPct val="100000"/>
+              <a:buChar char="•"/>
+            </a:pPr>
+            <a:r>
+              <a:rPr lang="en-US" sz="1400" dirty="0">
+                <a:solidFill>
+                  <a:srgbClr val="3D3A36"/>
+                </a:solidFill>
+                <a:latin typeface="Calibri" pitchFamily="34" charset="0"/>
+                <a:ea typeface="Calibri" pitchFamily="34" charset="-122"/>
+                <a:cs typeface="Calibri" pitchFamily="34" charset="-120"/>
+              </a:rPr>
+              <a:t>A conclusion links the pattern back to your hypothesis</a:t>
+            </a:r>
+            <a:endParaRPr lang="en-US" sz="1400" dirty="0"/>
+          </a:p>
+        </p:txBody>
+      </p:sp>
+    </p:spTree>
+  </p:cSld>
+  <p:clrMapOvr>
+    <a:masterClrMapping/>
+  </p:clrMapOvr>
+</p:sld>
+</file>
+
+<file path=ppt/slides/slide6.xml><?xml version="1.0" encoding="utf-8"?>
+<p:sld xmlns:a="http://schemas.openxmlformats.org/drawingml/2006/main" xmlns:r="http://schemas.openxmlformats.org/officeDocument/2006/relationships" xmlns:p="http://schemas.openxmlformats.org/presentationml/2006/main">
+  <p:cSld name="Slide 6">
     <p:bg>
       <p:bgPr>
         <a:solidFill>
@@ -2449,13 +3064,13 @@
         <p:spPr>
           <a:xfrm>
             <a:off x="0" y="0"/>
-            <a:ext cx="9144000" cy="54864"/>
-          </a:xfrm>
-          <a:prstGeom prst="rect">
-            <a:avLst/>
-          </a:prstGeom>
-          <a:solidFill>
-            <a:srgbClr val="2A9D8F"/>
+            <a:ext cx="109728" cy="5143500"/>
+          </a:xfrm>
+          <a:prstGeom prst="rect">
+            <a:avLst/>
+          </a:prstGeom>
+          <a:solidFill>
+            <a:srgbClr val="E9C46A"/>
           </a:solidFill>
           <a:ln/>
         </p:spPr>
@@ -2468,8 +3083,8 @@
         </p:nvSpPr>
         <p:spPr>
           <a:xfrm>
-            <a:off x="548640" y="457200"/>
-            <a:ext cx="8046720" cy="640080"/>
+            <a:off x="731520" y="457200"/>
+            <a:ext cx="7772400" cy="731520"/>
           </a:xfrm>
           <a:prstGeom prst="rect">
             <a:avLst/>
@@ -2485,7 +3100,7 @@
               <a:buNone/>
             </a:pPr>
             <a:r>
-              <a:rPr lang="en-US" sz="2800" b="1" dirty="0">
+              <a:rPr lang="en-US" sz="3200" b="1" dirty="0">
                 <a:solidFill>
                   <a:srgbClr val="FFFFFF"/>
                 </a:solidFill>
@@ -2495,7 +3110,7 @@
               </a:rPr>
               <a:t>Key Takeaways</a:t>
             </a:r>
-            <a:endParaRPr lang="en-US" sz="2800" dirty="0"/>
+            <a:endParaRPr lang="en-US" sz="3200" dirty="0"/>
           </a:p>
         </p:txBody>
       </p:sp>
@@ -2507,8 +3122,8 @@
         </p:nvSpPr>
         <p:spPr>
           <a:xfrm>
-            <a:off x="731520" y="1371600"/>
-            <a:ext cx="7680960" cy="3200400"/>
+            <a:off x="731520" y="1463040"/>
+            <a:ext cx="7772400" cy="3200400"/>
           </a:xfrm>
           <a:prstGeom prst="rect">
             <a:avLst/>
@@ -2528,7 +3143,7 @@
               <a:buChar char="•"/>
             </a:pPr>
             <a:r>
-              <a:rPr lang="en-US" sz="1600" dirty="0">
+              <a:rPr lang="en-US" sz="1500" dirty="0">
                 <a:solidFill>
                   <a:srgbClr val="CADCFC"/>
                 </a:solidFill>
@@ -2536,9 +3151,9 @@
                 <a:ea typeface="Calibri" pitchFamily="34" charset="-122"/>
                 <a:cs typeface="Calibri" pitchFamily="34" charset="-120"/>
               </a:rPr>
-              <a:t>Tables: IV on left, DV on right, units in headings</a:t>
-            </a:r>
-            <a:endParaRPr lang="en-US" sz="1600" dirty="0"/>
+              <a:t>Bar charts for categories, line graphs for continuous data, pie charts for proportions</a:t>
+            </a:r>
+            <a:endParaRPr lang="en-US" sz="1500" dirty="0"/>
           </a:p>
           <a:p>
             <a:pPr marL="342900" indent="-342900">
@@ -2549,7 +3164,7 @@
               <a:buChar char="•"/>
             </a:pPr>
             <a:r>
-              <a:rPr lang="en-US" sz="1600" dirty="0">
+              <a:rPr lang="en-US" sz="1500" dirty="0">
                 <a:solidFill>
                   <a:srgbClr val="CADCFC"/>
                 </a:solidFill>
@@ -2557,9 +3172,9 @@
                 <a:ea typeface="Calibri" pitchFamily="34" charset="-122"/>
                 <a:cs typeface="Calibri" pitchFamily="34" charset="-120"/>
               </a:rPr>
-              <a:t>Bar charts for categories, line graphs for continuous data</a:t>
-            </a:r>
-            <a:endParaRPr lang="en-US" sz="1600" dirty="0"/>
+              <a:t>Label axes with variable name AND unit</a:t>
+            </a:r>
+            <a:endParaRPr lang="en-US" sz="1500" dirty="0"/>
           </a:p>
           <a:p>
             <a:pPr marL="342900" indent="-342900">
@@ -2570,7 +3185,7 @@
               <a:buChar char="•"/>
             </a:pPr>
             <a:r>
-              <a:rPr lang="en-US" sz="1600" dirty="0">
+              <a:rPr lang="en-US" sz="1500" dirty="0">
                 <a:solidFill>
                   <a:srgbClr val="CADCFC"/>
                 </a:solidFill>
@@ -2578,9 +3193,9 @@
                 <a:ea typeface="Calibri" pitchFamily="34" charset="-122"/>
                 <a:cs typeface="Calibri" pitchFamily="34" charset="-120"/>
               </a:rPr>
-              <a:t>Always label axes with variable name and unit</a:t>
-            </a:r>
-            <a:endParaRPr lang="en-US" sz="1600" dirty="0"/>
+              <a:t>Independent variable on x-axis, dependent on y-axis</a:t>
+            </a:r>
+            <a:endParaRPr lang="en-US" sz="1500" dirty="0"/>
           </a:p>
           <a:p>
             <a:pPr marL="342900" indent="-342900">
@@ -2591,7 +3206,7 @@
               <a:buChar char="•"/>
             </a:pPr>
             <a:r>
-              <a:rPr lang="en-US" sz="1600" dirty="0">
+              <a:rPr lang="en-US" sz="1500" dirty="0">
                 <a:solidFill>
                   <a:srgbClr val="CADCFC"/>
                 </a:solidFill>
@@ -2599,9 +3214,30 @@
                 <a:ea typeface="Calibri" pitchFamily="34" charset="-122"/>
                 <a:cs typeface="Calibri" pitchFamily="34" charset="-120"/>
               </a:rPr>
-              <a:t>Title should describe what the graph shows</a:t>
-            </a:r>
-            <a:endParaRPr lang="en-US" sz="1600" dirty="0"/>
+              <a:t>Describe trends using data from the graph</a:t>
+            </a:r>
+            <a:endParaRPr lang="en-US" sz="1500" dirty="0"/>
+          </a:p>
+          <a:p>
+            <a:pPr marL="342900" indent="-342900">
+              <a:spcAft>
+                <a:spcPts val="1000"/>
+              </a:spcAft>
+              <a:buSzPct val="100000"/>
+              <a:buChar char="•"/>
+            </a:pPr>
+            <a:r>
+              <a:rPr lang="en-US" sz="1500" dirty="0">
+                <a:solidFill>
+                  <a:srgbClr val="CADCFC"/>
+                </a:solidFill>
+                <a:latin typeface="Calibri" pitchFamily="34" charset="0"/>
+                <a:ea typeface="Calibri" pitchFamily="34" charset="-122"/>
+                <a:cs typeface="Calibri" pitchFamily="34" charset="-120"/>
+              </a:rPr>
+              <a:t>Anomalies are data points that don't fit the pattern</a:t>
+            </a:r>
+            <a:endParaRPr lang="en-US" sz="1500" dirty="0"/>
           </a:p>
         </p:txBody>
       </p:sp>
@@ -2613,8 +3249,8 @@
         </p:nvSpPr>
         <p:spPr>
           <a:xfrm>
-            <a:off x="548640" y="4572000"/>
-            <a:ext cx="3657600" cy="274320"/>
+            <a:off x="731520" y="4572000"/>
+            <a:ext cx="7772400" cy="365760"/>
           </a:xfrm>
           <a:prstGeom prst="rect">
             <a:avLst/>
@@ -2630,14 +3266,17 @@
               <a:buNone/>
             </a:pPr>
             <a:r>
-              <a:rPr lang="en-US" sz="1000" dirty="0">
-                <a:solidFill>
-                  <a:srgbClr val="6B6660"/>
-                </a:solidFill>
+              <a:rPr lang="en-US" sz="1100" dirty="0">
+                <a:solidFill>
+                  <a:srgbClr val="E9C46A"/>
+                </a:solidFill>
+                <a:latin typeface="Calibri" pitchFamily="34" charset="0"/>
+                <a:ea typeface="Calibri" pitchFamily="34" charset="-122"/>
+                <a:cs typeface="Calibri" pitchFamily="34" charset="-120"/>
               </a:rPr>
               <a:t>mrzocchi.com</a:t>
             </a:r>
-            <a:endParaRPr lang="en-US" sz="1000" dirty="0"/>
+            <a:endParaRPr lang="en-US" sz="1100" dirty="0"/>
           </a:p>
         </p:txBody>
       </p:sp>

--- a/static/ppts/G6_Sci_T1_Data_Graphs.pptx
+++ b/static/ppts/G6_Sci_T1_Data_Graphs.pptx
@@ -11,9 +11,11 @@
     <p:sldId id="259" r:id="rId5"/>
     <p:sldId id="260" r:id="rId6"/>
     <p:sldId id="261" r:id="rId7"/>
+    <p:sldId id="262" r:id="rId8"/>
+    <p:sldId id="263" r:id="rId9"/>
   </p:sldIdLst>
   <p:notesMasterIdLst>
-    <p:notesMasterId r:id="rId8"/>
+    <p:notesMasterId r:id="rId10"/>
   </p:notesMasterIdLst>
   <p:sldSz cx="9144000" cy="5143500"/>
   <p:notesSz cx="5143500" cy="9144000"/>
@@ -989,6 +991,182 @@
 </p:notes>
 </file>
 
+<file path=ppt/notesSlides/notesSlide7.xml><?xml version="1.0" encoding="utf-8"?>
+<p:notes xmlns:a="http://schemas.openxmlformats.org/drawingml/2006/main" xmlns:r="http://schemas.openxmlformats.org/officeDocument/2006/relationships" xmlns:p="http://schemas.openxmlformats.org/presentationml/2006/main">
+  <p:cSld>
+    <p:spTree>
+      <p:nvGrpSpPr>
+        <p:cNvPr id="1" name=""/>
+        <p:cNvGrpSpPr/>
+        <p:nvPr/>
+      </p:nvGrpSpPr>
+      <p:grpSpPr>
+        <a:xfrm>
+          <a:off x="0" y="0"/>
+          <a:ext cx="0" cy="0"/>
+          <a:chOff x="0" y="0"/>
+          <a:chExt cx="0" cy="0"/>
+        </a:xfrm>
+      </p:grpSpPr>
+      <p:sp>
+        <p:nvSpPr>
+          <p:cNvPr id="2" name="Slide Image Placeholder 1"/>
+          <p:cNvSpPr>
+            <a:spLocks noGrp="1" noRot="1" noChangeAspect="1"/>
+          </p:cNvSpPr>
+          <p:nvPr>
+            <p:ph type="sldImg"/>
+          </p:nvPr>
+        </p:nvSpPr>
+        <p:spPr/>
+      </p:sp>
+      <p:sp>
+        <p:nvSpPr>
+          <p:cNvPr id="3" name="Notes Placeholder 2"/>
+          <p:cNvSpPr>
+            <a:spLocks noGrp="1"/>
+          </p:cNvSpPr>
+          <p:nvPr>
+            <p:ph type="body" idx="1"/>
+          </p:nvPr>
+        </p:nvSpPr>
+        <p:spPr/>
+        <p:txBody>
+          <a:bodyPr/>
+          <a:lstStyle/>
+          <a:p>
+            <a:r>
+              <a:rPr lang="en-US" dirty="0"/>
+              <a:t/>
+            </a:r>
+            <a:endParaRPr lang="en-US" dirty="0"/>
+          </a:p>
+        </p:txBody>
+      </p:sp>
+      <p:sp>
+        <p:nvSpPr>
+          <p:cNvPr id="4" name="Slide Number Placeholder 3"/>
+          <p:cNvSpPr>
+            <a:spLocks noGrp="1"/>
+          </p:cNvSpPr>
+          <p:nvPr>
+            <p:ph type="sldNum" sz="quarter" idx="10"/>
+          </p:nvPr>
+        </p:nvSpPr>
+        <p:spPr/>
+        <p:txBody>
+          <a:bodyPr/>
+          <a:lstStyle/>
+          <a:p>
+            <a:fld id="{F7021451-1387-4CA6-816F-3879F97B5CBC}" type="slidenum">
+              <a:rPr lang="en-US"/>
+              <a:t>7</a:t>
+            </a:fld>
+            <a:endParaRPr lang="en-US"/>
+          </a:p>
+        </p:txBody>
+      </p:sp>
+    </p:spTree>
+    <p:extLst>
+      <p:ext uri="{BB962C8B-B14F-4D97-AF65-F5344CB8AC3E}">
+        <p14:creationId xmlns:p14="http://schemas.microsoft.com/office/powerpoint/2010/main" val="1024086991"/>
+      </p:ext>
+    </p:extLst>
+  </p:cSld>
+  <p:clrMapOvr>
+    <a:masterClrMapping/>
+  </p:clrMapOvr>
+</p:notes>
+</file>
+
+<file path=ppt/notesSlides/notesSlide8.xml><?xml version="1.0" encoding="utf-8"?>
+<p:notes xmlns:a="http://schemas.openxmlformats.org/drawingml/2006/main" xmlns:r="http://schemas.openxmlformats.org/officeDocument/2006/relationships" xmlns:p="http://schemas.openxmlformats.org/presentationml/2006/main">
+  <p:cSld>
+    <p:spTree>
+      <p:nvGrpSpPr>
+        <p:cNvPr id="1" name=""/>
+        <p:cNvGrpSpPr/>
+        <p:nvPr/>
+      </p:nvGrpSpPr>
+      <p:grpSpPr>
+        <a:xfrm>
+          <a:off x="0" y="0"/>
+          <a:ext cx="0" cy="0"/>
+          <a:chOff x="0" y="0"/>
+          <a:chExt cx="0" cy="0"/>
+        </a:xfrm>
+      </p:grpSpPr>
+      <p:sp>
+        <p:nvSpPr>
+          <p:cNvPr id="2" name="Slide Image Placeholder 1"/>
+          <p:cNvSpPr>
+            <a:spLocks noGrp="1" noRot="1" noChangeAspect="1"/>
+          </p:cNvSpPr>
+          <p:nvPr>
+            <p:ph type="sldImg"/>
+          </p:nvPr>
+        </p:nvSpPr>
+        <p:spPr/>
+      </p:sp>
+      <p:sp>
+        <p:nvSpPr>
+          <p:cNvPr id="3" name="Notes Placeholder 2"/>
+          <p:cNvSpPr>
+            <a:spLocks noGrp="1"/>
+          </p:cNvSpPr>
+          <p:nvPr>
+            <p:ph type="body" idx="1"/>
+          </p:nvPr>
+        </p:nvSpPr>
+        <p:spPr/>
+        <p:txBody>
+          <a:bodyPr/>
+          <a:lstStyle/>
+          <a:p>
+            <a:r>
+              <a:rPr lang="en-US" dirty="0"/>
+              <a:t/>
+            </a:r>
+            <a:endParaRPr lang="en-US" dirty="0"/>
+          </a:p>
+        </p:txBody>
+      </p:sp>
+      <p:sp>
+        <p:nvSpPr>
+          <p:cNvPr id="4" name="Slide Number Placeholder 3"/>
+          <p:cNvSpPr>
+            <a:spLocks noGrp="1"/>
+          </p:cNvSpPr>
+          <p:nvPr>
+            <p:ph type="sldNum" sz="quarter" idx="10"/>
+          </p:nvPr>
+        </p:nvSpPr>
+        <p:spPr/>
+        <p:txBody>
+          <a:bodyPr/>
+          <a:lstStyle/>
+          <a:p>
+            <a:fld id="{F7021451-1387-4CA6-816F-3879F97B5CBC}" type="slidenum">
+              <a:rPr lang="en-US"/>
+              <a:t>8</a:t>
+            </a:fld>
+            <a:endParaRPr lang="en-US"/>
+          </a:p>
+        </p:txBody>
+      </p:sp>
+    </p:spTree>
+    <p:extLst>
+      <p:ext uri="{BB962C8B-B14F-4D97-AF65-F5344CB8AC3E}">
+        <p14:creationId xmlns:p14="http://schemas.microsoft.com/office/powerpoint/2010/main" val="1024086991"/>
+      </p:ext>
+    </p:extLst>
+  </p:cSld>
+  <p:clrMapOvr>
+    <a:masterClrMapping/>
+  </p:clrMapOvr>
+</p:notes>
+</file>
+
 <file path=ppt/slideLayouts/slideLayout1.xml><?xml version="1.0" encoding="utf-8"?>
 <p:sldLayout xmlns:a="http://schemas.openxmlformats.org/drawingml/2006/main" xmlns:r="http://schemas.openxmlformats.org/officeDocument/2006/relationships" xmlns:p="http://schemas.openxmlformats.org/presentationml/2006/main" preserve="1">
   <p:cSld name="DEFAULT">
@@ -1299,13 +1477,6 @@
 <file path=ppt/slides/slide1.xml><?xml version="1.0" encoding="utf-8"?>
 <p:sld xmlns:a="http://schemas.openxmlformats.org/drawingml/2006/main" xmlns:r="http://schemas.openxmlformats.org/officeDocument/2006/relationships" xmlns:p="http://schemas.openxmlformats.org/presentationml/2006/main">
   <p:cSld name="Slide 1">
-    <p:bg>
-      <p:bgPr>
-        <a:solidFill>
-          <a:srgbClr val="1B2A4A"/>
-        </a:solidFill>
-      </p:bgPr>
-    </p:bg>
     <p:spTree>
       <p:nvGrpSpPr>
         <p:cNvPr id="1" name=""/>
@@ -1329,7 +1500,27 @@
         <p:spPr>
           <a:xfrm>
             <a:off x="0" y="0"/>
-            <a:ext cx="109728" cy="5143500"/>
+            <a:ext cx="9144000" cy="5143500"/>
+          </a:xfrm>
+          <a:prstGeom prst="rect">
+            <a:avLst/>
+          </a:prstGeom>
+          <a:solidFill>
+            <a:srgbClr val="1B2A4A"/>
+          </a:solidFill>
+          <a:ln/>
+        </p:spPr>
+      </p:sp>
+      <p:sp>
+        <p:nvSpPr>
+          <p:cNvPr id="3" name="Shape 1"/>
+          <p:cNvSpPr/>
+          <p:nvPr/>
+        </p:nvSpPr>
+        <p:spPr>
+          <a:xfrm>
+            <a:off x="0" y="4777740"/>
+            <a:ext cx="9144000" cy="365760"/>
           </a:xfrm>
           <a:prstGeom prst="rect">
             <a:avLst/>
@@ -1342,14 +1533,36 @@
       </p:sp>
       <p:sp>
         <p:nvSpPr>
-          <p:cNvPr id="3" name="Text 1"/>
-          <p:cNvSpPr/>
-          <p:nvPr/>
-        </p:nvSpPr>
-        <p:spPr>
-          <a:xfrm>
-            <a:off x="731520" y="1097280"/>
-            <a:ext cx="7772400" cy="1371600"/>
+          <p:cNvPr id="4" name="Shape 2"/>
+          <p:cNvSpPr/>
+          <p:nvPr/>
+        </p:nvSpPr>
+        <p:spPr>
+          <a:xfrm>
+            <a:off x="6858000" y="-1371600"/>
+            <a:ext cx="4572000" cy="4572000"/>
+          </a:xfrm>
+          <a:prstGeom prst="ellipse">
+            <a:avLst/>
+          </a:prstGeom>
+          <a:solidFill>
+            <a:srgbClr val="2A9D8F">
+              <a:alpha val="12000"/>
+            </a:srgbClr>
+          </a:solidFill>
+          <a:ln/>
+        </p:spPr>
+      </p:sp>
+      <p:sp>
+        <p:nvSpPr>
+          <p:cNvPr id="5" name="Text 3"/>
+          <p:cNvSpPr/>
+          <p:nvPr/>
+        </p:nvSpPr>
+        <p:spPr>
+          <a:xfrm>
+            <a:off x="731520" y="914400"/>
+            <a:ext cx="7680960" cy="457200"/>
           </a:xfrm>
           <a:prstGeom prst="rect">
             <a:avLst/>
@@ -1365,7 +1578,46 @@
               <a:buNone/>
             </a:pPr>
             <a:r>
-              <a:rPr lang="en-US" sz="4000" b="1" dirty="0">
+              <a:rPr lang="en-US" sz="1300" b="1" spc="500" kern="0" dirty="0">
+                <a:solidFill>
+                  <a:srgbClr val="2A9D8F"/>
+                </a:solidFill>
+                <a:latin typeface="Calibri" pitchFamily="34" charset="0"/>
+                <a:ea typeface="Calibri" pitchFamily="34" charset="-122"/>
+                <a:cs typeface="Calibri" pitchFamily="34" charset="-120"/>
+              </a:rPr>
+              <a:t>GRADE 6 SCIENCE</a:t>
+            </a:r>
+            <a:endParaRPr lang="en-US" sz="1300" dirty="0"/>
+          </a:p>
+        </p:txBody>
+      </p:sp>
+      <p:sp>
+        <p:nvSpPr>
+          <p:cNvPr id="6" name="Text 4"/>
+          <p:cNvSpPr/>
+          <p:nvPr/>
+        </p:nvSpPr>
+        <p:spPr>
+          <a:xfrm>
+            <a:off x="731520" y="1463040"/>
+            <a:ext cx="6858000" cy="1645920"/>
+          </a:xfrm>
+          <a:prstGeom prst="rect">
+            <a:avLst/>
+          </a:prstGeom>
+          <a:noFill/>
+          <a:ln/>
+        </p:spPr>
+        <p:txBody>
+          <a:bodyPr wrap="square" rtlCol="0" anchor="t"/>
+          <a:lstStyle/>
+          <a:p>
+            <a:pPr indent="0" marL="0">
+              <a:buNone/>
+            </a:pPr>
+            <a:r>
+              <a:rPr lang="en-US" sz="3800" b="1" dirty="0">
                 <a:solidFill>
                   <a:srgbClr val="FFFFFF"/>
                 </a:solidFill>
@@ -1375,20 +1627,20 @@
               </a:rPr>
               <a:t>Data &amp; Graphs</a:t>
             </a:r>
-            <a:endParaRPr lang="en-US" sz="4000" dirty="0"/>
-          </a:p>
-        </p:txBody>
-      </p:sp>
-      <p:sp>
-        <p:nvSpPr>
-          <p:cNvPr id="4" name="Text 2"/>
-          <p:cNvSpPr/>
-          <p:nvPr/>
-        </p:nvSpPr>
-        <p:spPr>
-          <a:xfrm>
-            <a:off x="731520" y="2560320"/>
-            <a:ext cx="7772400" cy="548640"/>
+            <a:endParaRPr lang="en-US" sz="3800" dirty="0"/>
+          </a:p>
+        </p:txBody>
+      </p:sp>
+      <p:sp>
+        <p:nvSpPr>
+          <p:cNvPr id="7" name="Text 5"/>
+          <p:cNvSpPr/>
+          <p:nvPr/>
+        </p:nvSpPr>
+        <p:spPr>
+          <a:xfrm>
+            <a:off x="731520" y="3200400"/>
+            <a:ext cx="6400800" cy="548640"/>
           </a:xfrm>
           <a:prstGeom prst="rect">
             <a:avLst/>
@@ -1404,15 +1656,15 @@
               <a:buNone/>
             </a:pPr>
             <a:r>
-              <a:rPr lang="en-US" sz="1600" dirty="0">
+              <a:rPr lang="en-US" sz="1600" i="1" dirty="0">
                 <a:solidFill>
-                  <a:srgbClr val="E9C46A"/>
+                  <a:srgbClr val="9B9690"/>
                 </a:solidFill>
                 <a:latin typeface="Calibri" pitchFamily="34" charset="0"/>
                 <a:ea typeface="Calibri" pitchFamily="34" charset="-122"/>
                 <a:cs typeface="Calibri" pitchFamily="34" charset="-120"/>
               </a:rPr>
-              <a:t>Grade 6 Science · Mr Zocchi</a:t>
+              <a:t>Presenting and interpreting scientific data</a:t>
             </a:r>
             <a:endParaRPr lang="en-US" sz="1600" dirty="0"/>
           </a:p>
@@ -1420,36 +1672,14 @@
       </p:sp>
       <p:sp>
         <p:nvSpPr>
-          <p:cNvPr id="5" name="Shape 3"/>
-          <p:cNvSpPr/>
-          <p:nvPr/>
-        </p:nvSpPr>
-        <p:spPr>
-          <a:xfrm>
-            <a:off x="731520" y="3474720"/>
-            <a:ext cx="2011680" cy="411480"/>
-          </a:xfrm>
-          <a:prstGeom prst="roundRect">
-            <a:avLst>
-              <a:gd name="adj" fmla="val 17778"/>
-            </a:avLst>
-          </a:prstGeom>
-          <a:solidFill>
-            <a:srgbClr val="2A9D8F"/>
-          </a:solidFill>
-          <a:ln/>
-        </p:spPr>
-      </p:sp>
-      <p:sp>
-        <p:nvSpPr>
-          <p:cNvPr id="6" name="Text 4"/>
-          <p:cNvSpPr/>
-          <p:nvPr/>
-        </p:nvSpPr>
-        <p:spPr>
-          <a:xfrm>
-            <a:off x="731520" y="3474720"/>
-            <a:ext cx="2011680" cy="411480"/>
+          <p:cNvPr id="8" name="Text 6"/>
+          <p:cNvSpPr/>
+          <p:nvPr/>
+        </p:nvSpPr>
+        <p:spPr>
+          <a:xfrm>
+            <a:off x="731520" y="4297680"/>
+            <a:ext cx="2743200" cy="365760"/>
           </a:xfrm>
           <a:prstGeom prst="rect">
             <a:avLst/>
@@ -1461,21 +1691,21 @@
           <a:bodyPr wrap="square" rtlCol="0" anchor="ctr"/>
           <a:lstStyle/>
           <a:p>
-            <a:pPr algn="ctr" indent="0" marL="0">
+            <a:pPr indent="0" marL="0">
               <a:buNone/>
             </a:pPr>
             <a:r>
-              <a:rPr lang="en-US" sz="1200" b="1" dirty="0">
+              <a:rPr lang="en-US" sz="1100" dirty="0">
                 <a:solidFill>
-                  <a:srgbClr val="FFFFFF"/>
+                  <a:srgbClr val="9B9690"/>
                 </a:solidFill>
                 <a:latin typeface="Calibri" pitchFamily="34" charset="0"/>
                 <a:ea typeface="Calibri" pitchFamily="34" charset="-122"/>
                 <a:cs typeface="Calibri" pitchFamily="34" charset="-120"/>
               </a:rPr>
-              <a:t>Term 1 · Scientific Skills</a:t>
-            </a:r>
-            <a:endParaRPr lang="en-US" sz="1200" dirty="0"/>
+              <a:t>mrzocchi.com</a:t>
+            </a:r>
+            <a:endParaRPr lang="en-US" sz="1100" dirty="0"/>
           </a:p>
         </p:txBody>
       </p:sp>
@@ -1520,7 +1750,47 @@
         <p:spPr>
           <a:xfrm>
             <a:off x="0" y="0"/>
-            <a:ext cx="9144000" cy="54864"/>
+            <a:ext cx="9144000" cy="822960"/>
+          </a:xfrm>
+          <a:prstGeom prst="rect">
+            <a:avLst/>
+          </a:prstGeom>
+          <a:solidFill>
+            <a:srgbClr val="FFFFFF"/>
+          </a:solidFill>
+          <a:ln/>
+        </p:spPr>
+      </p:sp>
+      <p:sp>
+        <p:nvSpPr>
+          <p:cNvPr id="3" name="Shape 1"/>
+          <p:cNvSpPr/>
+          <p:nvPr/>
+        </p:nvSpPr>
+        <p:spPr>
+          <a:xfrm>
+            <a:off x="0" y="804672"/>
+            <a:ext cx="9144000" cy="27432"/>
+          </a:xfrm>
+          <a:prstGeom prst="rect">
+            <a:avLst/>
+          </a:prstGeom>
+          <a:solidFill>
+            <a:srgbClr val="E5E2DC"/>
+          </a:solidFill>
+          <a:ln/>
+        </p:spPr>
+      </p:sp>
+      <p:sp>
+        <p:nvSpPr>
+          <p:cNvPr id="4" name="Shape 2"/>
+          <p:cNvSpPr/>
+          <p:nvPr/>
+        </p:nvSpPr>
+        <p:spPr>
+          <a:xfrm>
+            <a:off x="548640" y="201168"/>
+            <a:ext cx="54864" cy="420624"/>
           </a:xfrm>
           <a:prstGeom prst="rect">
             <a:avLst/>
@@ -1533,14 +1803,14 @@
       </p:sp>
       <p:sp>
         <p:nvSpPr>
-          <p:cNvPr id="3" name="Text 1"/>
-          <p:cNvSpPr/>
-          <p:nvPr/>
-        </p:nvSpPr>
-        <p:spPr>
-          <a:xfrm>
-            <a:off x="7772400" y="4709160"/>
-            <a:ext cx="1097280" cy="320040"/>
+          <p:cNvPr id="5" name="Text 3"/>
+          <p:cNvSpPr/>
+          <p:nvPr/>
+        </p:nvSpPr>
+        <p:spPr>
+          <a:xfrm>
+            <a:off x="777240" y="137160"/>
+            <a:ext cx="7772400" cy="548640"/>
           </a:xfrm>
           <a:prstGeom prst="rect">
             <a:avLst/>
@@ -1549,14 +1819,139 @@
           <a:ln/>
         </p:spPr>
         <p:txBody>
-          <a:bodyPr wrap="square" rtlCol="0" anchor="ctr"/>
+          <a:bodyPr wrap="square" lIns="0" tIns="0" rIns="0" bIns="0" rtlCol="0" anchor="ctr"/>
           <a:lstStyle/>
           <a:p>
-            <a:pPr algn="r" indent="0" marL="0">
+            <a:pPr indent="0" marL="0">
               <a:buNone/>
             </a:pPr>
             <a:r>
-              <a:rPr lang="en-US" sz="900" dirty="0">
+              <a:rPr lang="en-US" sz="2000" b="1" dirty="0">
+                <a:solidFill>
+                  <a:srgbClr val="1B2A4A"/>
+                </a:solidFill>
+                <a:latin typeface="Georgia" pitchFamily="34" charset="0"/>
+                <a:ea typeface="Georgia" pitchFamily="34" charset="-122"/>
+                <a:cs typeface="Georgia" pitchFamily="34" charset="-120"/>
+              </a:rPr>
+              <a:t>Key Vocabulary</a:t>
+            </a:r>
+            <a:endParaRPr lang="en-US" sz="2000" dirty="0"/>
+          </a:p>
+        </p:txBody>
+      </p:sp>
+      <p:sp>
+        <p:nvSpPr>
+          <p:cNvPr id="6" name="Shape 4"/>
+          <p:cNvSpPr/>
+          <p:nvPr/>
+        </p:nvSpPr>
+        <p:spPr>
+          <a:xfrm>
+            <a:off x="731520" y="1051560"/>
+            <a:ext cx="3657600" cy="658368"/>
+          </a:xfrm>
+          <a:prstGeom prst="rect">
+            <a:avLst/>
+          </a:prstGeom>
+          <a:solidFill>
+            <a:srgbClr val="FFFFFF"/>
+          </a:solidFill>
+          <a:ln/>
+          <a:effectLst>
+            <a:outerShdw sx="100000" sy="100000" kx="0" ky="0" algn="bl" rotWithShape="0" blurRad="50800" dist="25400" dir="8100000">
+              <a:srgbClr val="000000">
+                <a:alpha val="10000"/>
+              </a:srgbClr>
+            </a:outerShdw>
+          </a:effectLst>
+        </p:spPr>
+      </p:sp>
+      <p:sp>
+        <p:nvSpPr>
+          <p:cNvPr id="7" name="Shape 5"/>
+          <p:cNvSpPr/>
+          <p:nvPr/>
+        </p:nvSpPr>
+        <p:spPr>
+          <a:xfrm>
+            <a:off x="731520" y="1051560"/>
+            <a:ext cx="54864" cy="658368"/>
+          </a:xfrm>
+          <a:prstGeom prst="rect">
+            <a:avLst/>
+          </a:prstGeom>
+          <a:solidFill>
+            <a:srgbClr val="2A9D8F"/>
+          </a:solidFill>
+          <a:ln/>
+        </p:spPr>
+      </p:sp>
+      <p:sp>
+        <p:nvSpPr>
+          <p:cNvPr id="8" name="Text 6"/>
+          <p:cNvSpPr/>
+          <p:nvPr/>
+        </p:nvSpPr>
+        <p:spPr>
+          <a:xfrm>
+            <a:off x="914400" y="1051560"/>
+            <a:ext cx="1463040" cy="658368"/>
+          </a:xfrm>
+          <a:prstGeom prst="rect">
+            <a:avLst/>
+          </a:prstGeom>
+          <a:noFill/>
+          <a:ln/>
+        </p:spPr>
+        <p:txBody>
+          <a:bodyPr wrap="square" lIns="0" tIns="0" rIns="0" bIns="0" rtlCol="0" anchor="ctr"/>
+          <a:lstStyle/>
+          <a:p>
+            <a:pPr indent="0" marL="0">
+              <a:buNone/>
+            </a:pPr>
+            <a:r>
+              <a:rPr lang="en-US" sz="1300" b="1" dirty="0">
+                <a:solidFill>
+                  <a:srgbClr val="1B2A4A"/>
+                </a:solidFill>
+                <a:latin typeface="Georgia" pitchFamily="34" charset="0"/>
+                <a:ea typeface="Georgia" pitchFamily="34" charset="-122"/>
+                <a:cs typeface="Georgia" pitchFamily="34" charset="-120"/>
+              </a:rPr>
+              <a:t>Categorical</a:t>
+            </a:r>
+            <a:endParaRPr lang="en-US" sz="1300" dirty="0"/>
+          </a:p>
+        </p:txBody>
+      </p:sp>
+      <p:sp>
+        <p:nvSpPr>
+          <p:cNvPr id="9" name="Text 7"/>
+          <p:cNvSpPr/>
+          <p:nvPr/>
+        </p:nvSpPr>
+        <p:spPr>
+          <a:xfrm>
+            <a:off x="2377440" y="1051560"/>
+            <a:ext cx="1920240" cy="658368"/>
+          </a:xfrm>
+          <a:prstGeom prst="rect">
+            <a:avLst/>
+          </a:prstGeom>
+          <a:noFill/>
+          <a:ln/>
+        </p:spPr>
+        <p:txBody>
+          <a:bodyPr wrap="square" lIns="0" tIns="0" rIns="0" bIns="0" rtlCol="0" anchor="ctr"/>
+          <a:lstStyle/>
+          <a:p>
+            <a:pPr indent="0" marL="0">
+              <a:buNone/>
+            </a:pPr>
+            <a:r>
+              <a:rPr lang="en-US" sz="1100" dirty="0">
                 <a:solidFill>
                   <a:srgbClr val="6B6660"/>
                 </a:solidFill>
@@ -1564,22 +1959,22 @@
                 <a:ea typeface="Calibri" pitchFamily="34" charset="-122"/>
                 <a:cs typeface="Calibri" pitchFamily="34" charset="-120"/>
               </a:rPr>
-              <a:t>2 / 6</a:t>
-            </a:r>
-            <a:endParaRPr lang="en-US" sz="900" dirty="0"/>
-          </a:p>
-        </p:txBody>
-      </p:sp>
-      <p:sp>
-        <p:nvSpPr>
-          <p:cNvPr id="4" name="Shape 2"/>
-          <p:cNvSpPr/>
-          <p:nvPr/>
-        </p:nvSpPr>
-        <p:spPr>
-          <a:xfrm>
-            <a:off x="1371600" y="914400"/>
-            <a:ext cx="6400800" cy="3200400"/>
+              <a:t>Data in groups (e.g. colours)</a:t>
+            </a:r>
+            <a:endParaRPr lang="en-US" sz="1100" dirty="0"/>
+          </a:p>
+        </p:txBody>
+      </p:sp>
+      <p:sp>
+        <p:nvSpPr>
+          <p:cNvPr id="10" name="Shape 8"/>
+          <p:cNvSpPr/>
+          <p:nvPr/>
+        </p:nvSpPr>
+        <p:spPr>
+          <a:xfrm>
+            <a:off x="4754880" y="1051560"/>
+            <a:ext cx="3657600" cy="658368"/>
           </a:xfrm>
           <a:prstGeom prst="rect">
             <a:avLst/>
@@ -1587,12 +1982,7 @@
           <a:solidFill>
             <a:srgbClr val="FFFFFF"/>
           </a:solidFill>
-          <a:ln w="12700">
-            <a:solidFill>
-              <a:srgbClr val="E5E2DC"/>
-            </a:solidFill>
-            <a:prstDash val="solid"/>
-          </a:ln>
+          <a:ln/>
           <a:effectLst>
             <a:outerShdw sx="100000" sy="100000" kx="0" ky="0" algn="bl" rotWithShape="0" blurRad="50800" dist="25400" dir="8100000">
               <a:srgbClr val="000000">
@@ -1604,14 +1994,14 @@
       </p:sp>
       <p:sp>
         <p:nvSpPr>
-          <p:cNvPr id="5" name="Shape 3"/>
-          <p:cNvSpPr/>
-          <p:nvPr/>
-        </p:nvSpPr>
-        <p:spPr>
-          <a:xfrm>
-            <a:off x="1371600" y="914400"/>
-            <a:ext cx="91440" cy="3200400"/>
+          <p:cNvPr id="11" name="Shape 9"/>
+          <p:cNvSpPr/>
+          <p:nvPr/>
+        </p:nvSpPr>
+        <p:spPr>
+          <a:xfrm>
+            <a:off x="4754880" y="1051560"/>
+            <a:ext cx="54864" cy="658368"/>
           </a:xfrm>
           <a:prstGeom prst="rect">
             <a:avLst/>
@@ -1624,14 +2014,14 @@
       </p:sp>
       <p:sp>
         <p:nvSpPr>
-          <p:cNvPr id="6" name="Text 4"/>
-          <p:cNvSpPr/>
-          <p:nvPr/>
-        </p:nvSpPr>
-        <p:spPr>
-          <a:xfrm>
-            <a:off x="1828800" y="1097280"/>
-            <a:ext cx="5669280" cy="640080"/>
+          <p:cNvPr id="12" name="Text 10"/>
+          <p:cNvSpPr/>
+          <p:nvPr/>
+        </p:nvSpPr>
+        <p:spPr>
+          <a:xfrm>
+            <a:off x="4937760" y="1051560"/>
+            <a:ext cx="1463040" cy="658368"/>
           </a:xfrm>
           <a:prstGeom prst="rect">
             <a:avLst/>
@@ -1640,14 +2030,14 @@
           <a:ln/>
         </p:spPr>
         <p:txBody>
-          <a:bodyPr wrap="square" rtlCol="0" anchor="ctr"/>
+          <a:bodyPr wrap="square" lIns="0" tIns="0" rIns="0" bIns="0" rtlCol="0" anchor="ctr"/>
           <a:lstStyle/>
           <a:p>
             <a:pPr indent="0" marL="0">
               <a:buNone/>
             </a:pPr>
             <a:r>
-              <a:rPr lang="en-US" sz="2400" b="1" dirty="0">
+              <a:rPr lang="en-US" sz="1300" b="1" dirty="0">
                 <a:solidFill>
                   <a:srgbClr val="1B2A4A"/>
                 </a:solidFill>
@@ -1655,22 +2045,22 @@
                 <a:ea typeface="Georgia" pitchFamily="34" charset="-122"/>
                 <a:cs typeface="Georgia" pitchFamily="34" charset="-120"/>
               </a:rPr>
-              <a:t>Presenting Data</a:t>
-            </a:r>
-            <a:endParaRPr lang="en-US" sz="2400" dirty="0"/>
-          </a:p>
-        </p:txBody>
-      </p:sp>
-      <p:sp>
-        <p:nvSpPr>
-          <p:cNvPr id="7" name="Text 5"/>
-          <p:cNvSpPr/>
-          <p:nvPr/>
-        </p:nvSpPr>
-        <p:spPr>
-          <a:xfrm>
-            <a:off x="1828800" y="1828800"/>
-            <a:ext cx="5669280" cy="2011680"/>
+              <a:t>Continuous</a:t>
+            </a:r>
+            <a:endParaRPr lang="en-US" sz="1300" dirty="0"/>
+          </a:p>
+        </p:txBody>
+      </p:sp>
+      <p:sp>
+        <p:nvSpPr>
+          <p:cNvPr id="13" name="Text 11"/>
+          <p:cNvSpPr/>
+          <p:nvPr/>
+        </p:nvSpPr>
+        <p:spPr>
+          <a:xfrm>
+            <a:off x="6400800" y="1051560"/>
+            <a:ext cx="1920240" cy="658368"/>
           </a:xfrm>
           <a:prstGeom prst="rect">
             <a:avLst/>
@@ -1679,27 +2069,524 @@
           <a:ln/>
         </p:spPr>
         <p:txBody>
-          <a:bodyPr wrap="square" rtlCol="0" anchor="t"/>
+          <a:bodyPr wrap="square" lIns="0" tIns="0" rIns="0" bIns="0" rtlCol="0" anchor="ctr"/>
           <a:lstStyle/>
           <a:p>
             <a:pPr indent="0" marL="0">
-              <a:lnSpc>
-                <a:spcPct val="130000"/>
-              </a:lnSpc>
               <a:buNone/>
             </a:pPr>
             <a:r>
-              <a:rPr lang="en-US" sz="1500" dirty="0">
+              <a:rPr lang="en-US" sz="1100" dirty="0">
                 <a:solidFill>
-                  <a:srgbClr val="3D3A36"/>
+                  <a:srgbClr val="6B6660"/>
                 </a:solidFill>
                 <a:latin typeface="Calibri" pitchFamily="34" charset="0"/>
                 <a:ea typeface="Calibri" pitchFamily="34" charset="-122"/>
                 <a:cs typeface="Calibri" pitchFamily="34" charset="-120"/>
               </a:rPr>
-              <a:t>After collecting data in an experiment, scientists organise it into tables and graphs. Good graphs make patterns visible at a glance. Choosing the right type of graph depends on what kind of data you have collected.</a:t>
-            </a:r>
-            <a:endParaRPr lang="en-US" sz="1500" dirty="0"/>
+              <a:t>Data on a scale (e.g. temperature)</a:t>
+            </a:r>
+            <a:endParaRPr lang="en-US" sz="1100" dirty="0"/>
+          </a:p>
+        </p:txBody>
+      </p:sp>
+      <p:sp>
+        <p:nvSpPr>
+          <p:cNvPr id="14" name="Shape 12"/>
+          <p:cNvSpPr/>
+          <p:nvPr/>
+        </p:nvSpPr>
+        <p:spPr>
+          <a:xfrm>
+            <a:off x="731520" y="1819656"/>
+            <a:ext cx="3657600" cy="658368"/>
+          </a:xfrm>
+          <a:prstGeom prst="rect">
+            <a:avLst/>
+          </a:prstGeom>
+          <a:solidFill>
+            <a:srgbClr val="FFFFFF"/>
+          </a:solidFill>
+          <a:ln/>
+          <a:effectLst>
+            <a:outerShdw sx="100000" sy="100000" kx="0" ky="0" algn="bl" rotWithShape="0" blurRad="50800" dist="25400" dir="8100000">
+              <a:srgbClr val="000000">
+                <a:alpha val="10000"/>
+              </a:srgbClr>
+            </a:outerShdw>
+          </a:effectLst>
+        </p:spPr>
+      </p:sp>
+      <p:sp>
+        <p:nvSpPr>
+          <p:cNvPr id="15" name="Shape 13"/>
+          <p:cNvSpPr/>
+          <p:nvPr/>
+        </p:nvSpPr>
+        <p:spPr>
+          <a:xfrm>
+            <a:off x="731520" y="1819656"/>
+            <a:ext cx="54864" cy="658368"/>
+          </a:xfrm>
+          <a:prstGeom prst="rect">
+            <a:avLst/>
+          </a:prstGeom>
+          <a:solidFill>
+            <a:srgbClr val="2A9D8F"/>
+          </a:solidFill>
+          <a:ln/>
+        </p:spPr>
+      </p:sp>
+      <p:sp>
+        <p:nvSpPr>
+          <p:cNvPr id="16" name="Text 14"/>
+          <p:cNvSpPr/>
+          <p:nvPr/>
+        </p:nvSpPr>
+        <p:spPr>
+          <a:xfrm>
+            <a:off x="914400" y="1819656"/>
+            <a:ext cx="1463040" cy="658368"/>
+          </a:xfrm>
+          <a:prstGeom prst="rect">
+            <a:avLst/>
+          </a:prstGeom>
+          <a:noFill/>
+          <a:ln/>
+        </p:spPr>
+        <p:txBody>
+          <a:bodyPr wrap="square" lIns="0" tIns="0" rIns="0" bIns="0" rtlCol="0" anchor="ctr"/>
+          <a:lstStyle/>
+          <a:p>
+            <a:pPr indent="0" marL="0">
+              <a:buNone/>
+            </a:pPr>
+            <a:r>
+              <a:rPr lang="en-US" sz="1300" b="1" dirty="0">
+                <a:solidFill>
+                  <a:srgbClr val="1B2A4A"/>
+                </a:solidFill>
+                <a:latin typeface="Georgia" pitchFamily="34" charset="0"/>
+                <a:ea typeface="Georgia" pitchFamily="34" charset="-122"/>
+                <a:cs typeface="Georgia" pitchFamily="34" charset="-120"/>
+              </a:rPr>
+              <a:t>Bar chart</a:t>
+            </a:r>
+            <a:endParaRPr lang="en-US" sz="1300" dirty="0"/>
+          </a:p>
+        </p:txBody>
+      </p:sp>
+      <p:sp>
+        <p:nvSpPr>
+          <p:cNvPr id="17" name="Text 15"/>
+          <p:cNvSpPr/>
+          <p:nvPr/>
+        </p:nvSpPr>
+        <p:spPr>
+          <a:xfrm>
+            <a:off x="2377440" y="1819656"/>
+            <a:ext cx="1920240" cy="658368"/>
+          </a:xfrm>
+          <a:prstGeom prst="rect">
+            <a:avLst/>
+          </a:prstGeom>
+          <a:noFill/>
+          <a:ln/>
+        </p:spPr>
+        <p:txBody>
+          <a:bodyPr wrap="square" lIns="0" tIns="0" rIns="0" bIns="0" rtlCol="0" anchor="ctr"/>
+          <a:lstStyle/>
+          <a:p>
+            <a:pPr indent="0" marL="0">
+              <a:buNone/>
+            </a:pPr>
+            <a:r>
+              <a:rPr lang="en-US" sz="1100" dirty="0">
+                <a:solidFill>
+                  <a:srgbClr val="6B6660"/>
+                </a:solidFill>
+                <a:latin typeface="Calibri" pitchFamily="34" charset="0"/>
+                <a:ea typeface="Calibri" pitchFamily="34" charset="-122"/>
+                <a:cs typeface="Calibri" pitchFamily="34" charset="-120"/>
+              </a:rPr>
+              <a:t>For categorical data — bars don't touch</a:t>
+            </a:r>
+            <a:endParaRPr lang="en-US" sz="1100" dirty="0"/>
+          </a:p>
+        </p:txBody>
+      </p:sp>
+      <p:sp>
+        <p:nvSpPr>
+          <p:cNvPr id="18" name="Shape 16"/>
+          <p:cNvSpPr/>
+          <p:nvPr/>
+        </p:nvSpPr>
+        <p:spPr>
+          <a:xfrm>
+            <a:off x="4754880" y="1819656"/>
+            <a:ext cx="3657600" cy="658368"/>
+          </a:xfrm>
+          <a:prstGeom prst="rect">
+            <a:avLst/>
+          </a:prstGeom>
+          <a:solidFill>
+            <a:srgbClr val="FFFFFF"/>
+          </a:solidFill>
+          <a:ln/>
+          <a:effectLst>
+            <a:outerShdw sx="100000" sy="100000" kx="0" ky="0" algn="bl" rotWithShape="0" blurRad="50800" dist="25400" dir="8100000">
+              <a:srgbClr val="000000">
+                <a:alpha val="10000"/>
+              </a:srgbClr>
+            </a:outerShdw>
+          </a:effectLst>
+        </p:spPr>
+      </p:sp>
+      <p:sp>
+        <p:nvSpPr>
+          <p:cNvPr id="19" name="Shape 17"/>
+          <p:cNvSpPr/>
+          <p:nvPr/>
+        </p:nvSpPr>
+        <p:spPr>
+          <a:xfrm>
+            <a:off x="4754880" y="1819656"/>
+            <a:ext cx="54864" cy="658368"/>
+          </a:xfrm>
+          <a:prstGeom prst="rect">
+            <a:avLst/>
+          </a:prstGeom>
+          <a:solidFill>
+            <a:srgbClr val="2A9D8F"/>
+          </a:solidFill>
+          <a:ln/>
+        </p:spPr>
+      </p:sp>
+      <p:sp>
+        <p:nvSpPr>
+          <p:cNvPr id="20" name="Text 18"/>
+          <p:cNvSpPr/>
+          <p:nvPr/>
+        </p:nvSpPr>
+        <p:spPr>
+          <a:xfrm>
+            <a:off x="4937760" y="1819656"/>
+            <a:ext cx="1463040" cy="658368"/>
+          </a:xfrm>
+          <a:prstGeom prst="rect">
+            <a:avLst/>
+          </a:prstGeom>
+          <a:noFill/>
+          <a:ln/>
+        </p:spPr>
+        <p:txBody>
+          <a:bodyPr wrap="square" lIns="0" tIns="0" rIns="0" bIns="0" rtlCol="0" anchor="ctr"/>
+          <a:lstStyle/>
+          <a:p>
+            <a:pPr indent="0" marL="0">
+              <a:buNone/>
+            </a:pPr>
+            <a:r>
+              <a:rPr lang="en-US" sz="1300" b="1" dirty="0">
+                <a:solidFill>
+                  <a:srgbClr val="1B2A4A"/>
+                </a:solidFill>
+                <a:latin typeface="Georgia" pitchFamily="34" charset="0"/>
+                <a:ea typeface="Georgia" pitchFamily="34" charset="-122"/>
+                <a:cs typeface="Georgia" pitchFamily="34" charset="-120"/>
+              </a:rPr>
+              <a:t>Line graph</a:t>
+            </a:r>
+            <a:endParaRPr lang="en-US" sz="1300" dirty="0"/>
+          </a:p>
+        </p:txBody>
+      </p:sp>
+      <p:sp>
+        <p:nvSpPr>
+          <p:cNvPr id="21" name="Text 19"/>
+          <p:cNvSpPr/>
+          <p:nvPr/>
+        </p:nvSpPr>
+        <p:spPr>
+          <a:xfrm>
+            <a:off x="6400800" y="1819656"/>
+            <a:ext cx="1920240" cy="658368"/>
+          </a:xfrm>
+          <a:prstGeom prst="rect">
+            <a:avLst/>
+          </a:prstGeom>
+          <a:noFill/>
+          <a:ln/>
+        </p:spPr>
+        <p:txBody>
+          <a:bodyPr wrap="square" lIns="0" tIns="0" rIns="0" bIns="0" rtlCol="0" anchor="ctr"/>
+          <a:lstStyle/>
+          <a:p>
+            <a:pPr indent="0" marL="0">
+              <a:buNone/>
+            </a:pPr>
+            <a:r>
+              <a:rPr lang="en-US" sz="1100" dirty="0">
+                <a:solidFill>
+                  <a:srgbClr val="6B6660"/>
+                </a:solidFill>
+                <a:latin typeface="Calibri" pitchFamily="34" charset="0"/>
+                <a:ea typeface="Calibri" pitchFamily="34" charset="-122"/>
+                <a:cs typeface="Calibri" pitchFamily="34" charset="-120"/>
+              </a:rPr>
+              <a:t>For continuous data — points connected</a:t>
+            </a:r>
+            <a:endParaRPr lang="en-US" sz="1100" dirty="0"/>
+          </a:p>
+        </p:txBody>
+      </p:sp>
+      <p:sp>
+        <p:nvSpPr>
+          <p:cNvPr id="22" name="Shape 20"/>
+          <p:cNvSpPr/>
+          <p:nvPr/>
+        </p:nvSpPr>
+        <p:spPr>
+          <a:xfrm>
+            <a:off x="731520" y="2587752"/>
+            <a:ext cx="3657600" cy="658368"/>
+          </a:xfrm>
+          <a:prstGeom prst="rect">
+            <a:avLst/>
+          </a:prstGeom>
+          <a:solidFill>
+            <a:srgbClr val="FFFFFF"/>
+          </a:solidFill>
+          <a:ln/>
+          <a:effectLst>
+            <a:outerShdw sx="100000" sy="100000" kx="0" ky="0" algn="bl" rotWithShape="0" blurRad="50800" dist="25400" dir="8100000">
+              <a:srgbClr val="000000">
+                <a:alpha val="10000"/>
+              </a:srgbClr>
+            </a:outerShdw>
+          </a:effectLst>
+        </p:spPr>
+      </p:sp>
+      <p:sp>
+        <p:nvSpPr>
+          <p:cNvPr id="23" name="Shape 21"/>
+          <p:cNvSpPr/>
+          <p:nvPr/>
+        </p:nvSpPr>
+        <p:spPr>
+          <a:xfrm>
+            <a:off x="731520" y="2587752"/>
+            <a:ext cx="54864" cy="658368"/>
+          </a:xfrm>
+          <a:prstGeom prst="rect">
+            <a:avLst/>
+          </a:prstGeom>
+          <a:solidFill>
+            <a:srgbClr val="2A9D8F"/>
+          </a:solidFill>
+          <a:ln/>
+        </p:spPr>
+      </p:sp>
+      <p:sp>
+        <p:nvSpPr>
+          <p:cNvPr id="24" name="Text 22"/>
+          <p:cNvSpPr/>
+          <p:nvPr/>
+        </p:nvSpPr>
+        <p:spPr>
+          <a:xfrm>
+            <a:off x="914400" y="2587752"/>
+            <a:ext cx="1463040" cy="658368"/>
+          </a:xfrm>
+          <a:prstGeom prst="rect">
+            <a:avLst/>
+          </a:prstGeom>
+          <a:noFill/>
+          <a:ln/>
+        </p:spPr>
+        <p:txBody>
+          <a:bodyPr wrap="square" lIns="0" tIns="0" rIns="0" bIns="0" rtlCol="0" anchor="ctr"/>
+          <a:lstStyle/>
+          <a:p>
+            <a:pPr indent="0" marL="0">
+              <a:buNone/>
+            </a:pPr>
+            <a:r>
+              <a:rPr lang="en-US" sz="1300" b="1" dirty="0">
+                <a:solidFill>
+                  <a:srgbClr val="1B2A4A"/>
+                </a:solidFill>
+                <a:latin typeface="Georgia" pitchFamily="34" charset="0"/>
+                <a:ea typeface="Georgia" pitchFamily="34" charset="-122"/>
+                <a:cs typeface="Georgia" pitchFamily="34" charset="-120"/>
+              </a:rPr>
+              <a:t>Trend</a:t>
+            </a:r>
+            <a:endParaRPr lang="en-US" sz="1300" dirty="0"/>
+          </a:p>
+        </p:txBody>
+      </p:sp>
+      <p:sp>
+        <p:nvSpPr>
+          <p:cNvPr id="25" name="Text 23"/>
+          <p:cNvSpPr/>
+          <p:nvPr/>
+        </p:nvSpPr>
+        <p:spPr>
+          <a:xfrm>
+            <a:off x="2377440" y="2587752"/>
+            <a:ext cx="1920240" cy="658368"/>
+          </a:xfrm>
+          <a:prstGeom prst="rect">
+            <a:avLst/>
+          </a:prstGeom>
+          <a:noFill/>
+          <a:ln/>
+        </p:spPr>
+        <p:txBody>
+          <a:bodyPr wrap="square" lIns="0" tIns="0" rIns="0" bIns="0" rtlCol="0" anchor="ctr"/>
+          <a:lstStyle/>
+          <a:p>
+            <a:pPr indent="0" marL="0">
+              <a:buNone/>
+            </a:pPr>
+            <a:r>
+              <a:rPr lang="en-US" sz="1100" dirty="0">
+                <a:solidFill>
+                  <a:srgbClr val="6B6660"/>
+                </a:solidFill>
+                <a:latin typeface="Calibri" pitchFamily="34" charset="0"/>
+                <a:ea typeface="Calibri" pitchFamily="34" charset="-122"/>
+                <a:cs typeface="Calibri" pitchFamily="34" charset="-120"/>
+              </a:rPr>
+              <a:t>The general pattern in data</a:t>
+            </a:r>
+            <a:endParaRPr lang="en-US" sz="1100" dirty="0"/>
+          </a:p>
+        </p:txBody>
+      </p:sp>
+      <p:sp>
+        <p:nvSpPr>
+          <p:cNvPr id="26" name="Shape 24"/>
+          <p:cNvSpPr/>
+          <p:nvPr/>
+        </p:nvSpPr>
+        <p:spPr>
+          <a:xfrm>
+            <a:off x="4754880" y="2587752"/>
+            <a:ext cx="3657600" cy="658368"/>
+          </a:xfrm>
+          <a:prstGeom prst="rect">
+            <a:avLst/>
+          </a:prstGeom>
+          <a:solidFill>
+            <a:srgbClr val="FFFFFF"/>
+          </a:solidFill>
+          <a:ln/>
+          <a:effectLst>
+            <a:outerShdw sx="100000" sy="100000" kx="0" ky="0" algn="bl" rotWithShape="0" blurRad="50800" dist="25400" dir="8100000">
+              <a:srgbClr val="000000">
+                <a:alpha val="10000"/>
+              </a:srgbClr>
+            </a:outerShdw>
+          </a:effectLst>
+        </p:spPr>
+      </p:sp>
+      <p:sp>
+        <p:nvSpPr>
+          <p:cNvPr id="27" name="Shape 25"/>
+          <p:cNvSpPr/>
+          <p:nvPr/>
+        </p:nvSpPr>
+        <p:spPr>
+          <a:xfrm>
+            <a:off x="4754880" y="2587752"/>
+            <a:ext cx="54864" cy="658368"/>
+          </a:xfrm>
+          <a:prstGeom prst="rect">
+            <a:avLst/>
+          </a:prstGeom>
+          <a:solidFill>
+            <a:srgbClr val="2A9D8F"/>
+          </a:solidFill>
+          <a:ln/>
+        </p:spPr>
+      </p:sp>
+      <p:sp>
+        <p:nvSpPr>
+          <p:cNvPr id="28" name="Text 26"/>
+          <p:cNvSpPr/>
+          <p:nvPr/>
+        </p:nvSpPr>
+        <p:spPr>
+          <a:xfrm>
+            <a:off x="4937760" y="2587752"/>
+            <a:ext cx="1463040" cy="658368"/>
+          </a:xfrm>
+          <a:prstGeom prst="rect">
+            <a:avLst/>
+          </a:prstGeom>
+          <a:noFill/>
+          <a:ln/>
+        </p:spPr>
+        <p:txBody>
+          <a:bodyPr wrap="square" lIns="0" tIns="0" rIns="0" bIns="0" rtlCol="0" anchor="ctr"/>
+          <a:lstStyle/>
+          <a:p>
+            <a:pPr indent="0" marL="0">
+              <a:buNone/>
+            </a:pPr>
+            <a:r>
+              <a:rPr lang="en-US" sz="1300" b="1" dirty="0">
+                <a:solidFill>
+                  <a:srgbClr val="1B2A4A"/>
+                </a:solidFill>
+                <a:latin typeface="Georgia" pitchFamily="34" charset="0"/>
+                <a:ea typeface="Georgia" pitchFamily="34" charset="-122"/>
+                <a:cs typeface="Georgia" pitchFamily="34" charset="-120"/>
+              </a:rPr>
+              <a:t>Anomaly</a:t>
+            </a:r>
+            <a:endParaRPr lang="en-US" sz="1300" dirty="0"/>
+          </a:p>
+        </p:txBody>
+      </p:sp>
+      <p:sp>
+        <p:nvSpPr>
+          <p:cNvPr id="29" name="Text 27"/>
+          <p:cNvSpPr/>
+          <p:nvPr/>
+        </p:nvSpPr>
+        <p:spPr>
+          <a:xfrm>
+            <a:off x="6400800" y="2587752"/>
+            <a:ext cx="1920240" cy="658368"/>
+          </a:xfrm>
+          <a:prstGeom prst="rect">
+            <a:avLst/>
+          </a:prstGeom>
+          <a:noFill/>
+          <a:ln/>
+        </p:spPr>
+        <p:txBody>
+          <a:bodyPr wrap="square" lIns="0" tIns="0" rIns="0" bIns="0" rtlCol="0" anchor="ctr"/>
+          <a:lstStyle/>
+          <a:p>
+            <a:pPr indent="0" marL="0">
+              <a:buNone/>
+            </a:pPr>
+            <a:r>
+              <a:rPr lang="en-US" sz="1100" dirty="0">
+                <a:solidFill>
+                  <a:srgbClr val="6B6660"/>
+                </a:solidFill>
+                <a:latin typeface="Calibri" pitchFamily="34" charset="0"/>
+                <a:ea typeface="Calibri" pitchFamily="34" charset="-122"/>
+                <a:cs typeface="Calibri" pitchFamily="34" charset="-120"/>
+              </a:rPr>
+              <a:t>A result that doesn't fit the pattern</a:t>
+            </a:r>
+            <a:endParaRPr lang="en-US" sz="1100" dirty="0"/>
           </a:p>
         </p:txBody>
       </p:sp>
@@ -1744,7 +2631,47 @@
         <p:spPr>
           <a:xfrm>
             <a:off x="0" y="0"/>
-            <a:ext cx="9144000" cy="54864"/>
+            <a:ext cx="9144000" cy="822960"/>
+          </a:xfrm>
+          <a:prstGeom prst="rect">
+            <a:avLst/>
+          </a:prstGeom>
+          <a:solidFill>
+            <a:srgbClr val="FFFFFF"/>
+          </a:solidFill>
+          <a:ln/>
+        </p:spPr>
+      </p:sp>
+      <p:sp>
+        <p:nvSpPr>
+          <p:cNvPr id="3" name="Shape 1"/>
+          <p:cNvSpPr/>
+          <p:nvPr/>
+        </p:nvSpPr>
+        <p:spPr>
+          <a:xfrm>
+            <a:off x="0" y="804672"/>
+            <a:ext cx="9144000" cy="27432"/>
+          </a:xfrm>
+          <a:prstGeom prst="rect">
+            <a:avLst/>
+          </a:prstGeom>
+          <a:solidFill>
+            <a:srgbClr val="E5E2DC"/>
+          </a:solidFill>
+          <a:ln/>
+        </p:spPr>
+      </p:sp>
+      <p:sp>
+        <p:nvSpPr>
+          <p:cNvPr id="4" name="Shape 2"/>
+          <p:cNvSpPr/>
+          <p:nvPr/>
+        </p:nvSpPr>
+        <p:spPr>
+          <a:xfrm>
+            <a:off x="548640" y="201168"/>
+            <a:ext cx="54864" cy="420624"/>
           </a:xfrm>
           <a:prstGeom prst="rect">
             <a:avLst/>
@@ -1757,14 +2684,14 @@
       </p:sp>
       <p:sp>
         <p:nvSpPr>
-          <p:cNvPr id="3" name="Text 1"/>
-          <p:cNvSpPr/>
-          <p:nvPr/>
-        </p:nvSpPr>
-        <p:spPr>
-          <a:xfrm>
-            <a:off x="7772400" y="4709160"/>
-            <a:ext cx="1097280" cy="320040"/>
+          <p:cNvPr id="5" name="Text 3"/>
+          <p:cNvSpPr/>
+          <p:nvPr/>
+        </p:nvSpPr>
+        <p:spPr>
+          <a:xfrm>
+            <a:off x="777240" y="137160"/>
+            <a:ext cx="7772400" cy="548640"/>
           </a:xfrm>
           <a:prstGeom prst="rect">
             <a:avLst/>
@@ -1773,53 +2700,14 @@
           <a:ln/>
         </p:spPr>
         <p:txBody>
-          <a:bodyPr wrap="square" rtlCol="0" anchor="ctr"/>
-          <a:lstStyle/>
-          <a:p>
-            <a:pPr algn="r" indent="0" marL="0">
-              <a:buNone/>
-            </a:pPr>
-            <a:r>
-              <a:rPr lang="en-US" sz="900" dirty="0">
-                <a:solidFill>
-                  <a:srgbClr val="6B6660"/>
-                </a:solidFill>
-                <a:latin typeface="Calibri" pitchFamily="34" charset="0"/>
-                <a:ea typeface="Calibri" pitchFamily="34" charset="-122"/>
-                <a:cs typeface="Calibri" pitchFamily="34" charset="-120"/>
-              </a:rPr>
-              <a:t>3 / 6</a:t>
-            </a:r>
-            <a:endParaRPr lang="en-US" sz="900" dirty="0"/>
-          </a:p>
-        </p:txBody>
-      </p:sp>
-      <p:sp>
-        <p:nvSpPr>
-          <p:cNvPr id="4" name="Text 2"/>
-          <p:cNvSpPr/>
-          <p:nvPr/>
-        </p:nvSpPr>
-        <p:spPr>
-          <a:xfrm>
-            <a:off x="457200" y="274320"/>
-            <a:ext cx="8229600" cy="640080"/>
-          </a:xfrm>
-          <a:prstGeom prst="rect">
-            <a:avLst/>
-          </a:prstGeom>
-          <a:noFill/>
-          <a:ln/>
-        </p:spPr>
-        <p:txBody>
-          <a:bodyPr wrap="square" rtlCol="0" anchor="ctr"/>
+          <a:bodyPr wrap="square" lIns="0" tIns="0" rIns="0" bIns="0" rtlCol="0" anchor="ctr"/>
           <a:lstStyle/>
           <a:p>
             <a:pPr indent="0" marL="0">
               <a:buNone/>
             </a:pPr>
             <a:r>
-              <a:rPr lang="en-US" sz="2600" b="1" dirty="0">
+              <a:rPr lang="en-US" sz="2000" b="1" dirty="0">
                 <a:solidFill>
                   <a:srgbClr val="1B2A4A"/>
                 </a:solidFill>
@@ -1827,22 +2715,22 @@
                 <a:ea typeface="Georgia" pitchFamily="34" charset="-122"/>
                 <a:cs typeface="Georgia" pitchFamily="34" charset="-120"/>
               </a:rPr>
-              <a:t>Types of Graphs</a:t>
-            </a:r>
-            <a:endParaRPr lang="en-US" sz="2600" dirty="0"/>
-          </a:p>
-        </p:txBody>
-      </p:sp>
-      <p:sp>
-        <p:nvSpPr>
-          <p:cNvPr id="5" name="Shape 3"/>
-          <p:cNvSpPr/>
-          <p:nvPr/>
-        </p:nvSpPr>
-        <p:spPr>
-          <a:xfrm>
-            <a:off x="457200" y="1188720"/>
-            <a:ext cx="2560320" cy="1828800"/>
+              <a:t>Choosing the Right Graph</a:t>
+            </a:r>
+            <a:endParaRPr lang="en-US" sz="2000" dirty="0"/>
+          </a:p>
+        </p:txBody>
+      </p:sp>
+      <p:sp>
+        <p:nvSpPr>
+          <p:cNvPr id="6" name="Shape 4"/>
+          <p:cNvSpPr/>
+          <p:nvPr/>
+        </p:nvSpPr>
+        <p:spPr>
+          <a:xfrm>
+            <a:off x="548640" y="1051560"/>
+            <a:ext cx="3840480" cy="3474720"/>
           </a:xfrm>
           <a:prstGeom prst="rect">
             <a:avLst/>
@@ -1850,12 +2738,7 @@
           <a:solidFill>
             <a:srgbClr val="FFFFFF"/>
           </a:solidFill>
-          <a:ln w="12700">
-            <a:solidFill>
-              <a:srgbClr val="E5E2DC"/>
-            </a:solidFill>
-            <a:prstDash val="solid"/>
-          </a:ln>
+          <a:ln/>
           <a:effectLst>
             <a:outerShdw sx="100000" sy="100000" kx="0" ky="0" algn="bl" rotWithShape="0" blurRad="50800" dist="25400" dir="8100000">
               <a:srgbClr val="000000">
@@ -1867,14 +2750,14 @@
       </p:sp>
       <p:sp>
         <p:nvSpPr>
-          <p:cNvPr id="6" name="Shape 4"/>
-          <p:cNvSpPr/>
-          <p:nvPr/>
-        </p:nvSpPr>
-        <p:spPr>
-          <a:xfrm>
-            <a:off x="457200" y="1188720"/>
-            <a:ext cx="2560320" cy="54864"/>
+          <p:cNvPr id="7" name="Shape 5"/>
+          <p:cNvSpPr/>
+          <p:nvPr/>
+        </p:nvSpPr>
+        <p:spPr>
+          <a:xfrm>
+            <a:off x="548640" y="1051560"/>
+            <a:ext cx="3840480" cy="54864"/>
           </a:xfrm>
           <a:prstGeom prst="rect">
             <a:avLst/>
@@ -1887,14 +2770,14 @@
       </p:sp>
       <p:sp>
         <p:nvSpPr>
-          <p:cNvPr id="7" name="Text 5"/>
-          <p:cNvSpPr/>
-          <p:nvPr/>
-        </p:nvSpPr>
-        <p:spPr>
-          <a:xfrm>
-            <a:off x="594360" y="1325880"/>
-            <a:ext cx="2286000" cy="365760"/>
+          <p:cNvPr id="8" name="Text 6"/>
+          <p:cNvSpPr/>
+          <p:nvPr/>
+        </p:nvSpPr>
+        <p:spPr>
+          <a:xfrm>
+            <a:off x="777240" y="1188720"/>
+            <a:ext cx="3383280" cy="457200"/>
           </a:xfrm>
           <a:prstGeom prst="rect">
             <a:avLst/>
@@ -1903,37 +2786,37 @@
           <a:ln/>
         </p:spPr>
         <p:txBody>
-          <a:bodyPr wrap="square" rtlCol="0" anchor="ctr"/>
+          <a:bodyPr wrap="square" lIns="0" tIns="0" rIns="0" bIns="0" rtlCol="0" anchor="ctr"/>
           <a:lstStyle/>
           <a:p>
             <a:pPr indent="0" marL="0">
               <a:buNone/>
             </a:pPr>
             <a:r>
-              <a:rPr lang="en-US" sz="1400" b="1" dirty="0">
+              <a:rPr lang="en-US" sz="1500" b="1" dirty="0">
                 <a:solidFill>
                   <a:srgbClr val="1B2A4A"/>
                 </a:solidFill>
-                <a:latin typeface="Calibri" pitchFamily="34" charset="0"/>
-                <a:ea typeface="Calibri" pitchFamily="34" charset="-122"/>
-                <a:cs typeface="Calibri" pitchFamily="34" charset="-120"/>
+                <a:latin typeface="Georgia" pitchFamily="34" charset="0"/>
+                <a:ea typeface="Georgia" pitchFamily="34" charset="-122"/>
+                <a:cs typeface="Georgia" pitchFamily="34" charset="-120"/>
               </a:rPr>
               <a:t>Bar Chart</a:t>
             </a:r>
-            <a:endParaRPr lang="en-US" sz="1400" dirty="0"/>
-          </a:p>
-        </p:txBody>
-      </p:sp>
-      <p:sp>
-        <p:nvSpPr>
-          <p:cNvPr id="8" name="Text 6"/>
-          <p:cNvSpPr/>
-          <p:nvPr/>
-        </p:nvSpPr>
-        <p:spPr>
-          <a:xfrm>
-            <a:off x="594360" y="1737360"/>
-            <a:ext cx="2286000" cy="1097280"/>
+            <a:endParaRPr lang="en-US" sz="1500" dirty="0"/>
+          </a:p>
+        </p:txBody>
+      </p:sp>
+      <p:sp>
+        <p:nvSpPr>
+          <p:cNvPr id="9" name="Text 7"/>
+          <p:cNvSpPr/>
+          <p:nvPr/>
+        </p:nvSpPr>
+        <p:spPr>
+          <a:xfrm>
+            <a:off x="777240" y="1691640"/>
+            <a:ext cx="3383280" cy="2651760"/>
           </a:xfrm>
           <a:prstGeom prst="rect">
             <a:avLst/>
@@ -1945,11 +2828,15 @@
           <a:bodyPr wrap="square" rtlCol="0" anchor="t"/>
           <a:lstStyle/>
           <a:p>
-            <a:pPr indent="0" marL="0">
-              <a:buNone/>
+            <a:pPr marL="342900" indent="-342900">
+              <a:spcAft>
+                <a:spcPts val="600"/>
+              </a:spcAft>
+              <a:buSzPct val="100000"/>
+              <a:buChar char="•"/>
             </a:pPr>
             <a:r>
-              <a:rPr lang="en-US" sz="1100" dirty="0">
+              <a:rPr lang="en-US" sz="1300" dirty="0">
                 <a:solidFill>
                   <a:srgbClr val="3D3A36"/>
                 </a:solidFill>
@@ -1957,22 +2844,85 @@
                 <a:ea typeface="Calibri" pitchFamily="34" charset="-122"/>
                 <a:cs typeface="Calibri" pitchFamily="34" charset="-120"/>
               </a:rPr>
-              <a:t>For categoric data (names/groups). Example: favourite colours in a class. Bars don't touch. Each bar represents a different category.</a:t>
-            </a:r>
-            <a:endParaRPr lang="en-US" sz="1100" dirty="0"/>
-          </a:p>
-        </p:txBody>
-      </p:sp>
-      <p:sp>
-        <p:nvSpPr>
-          <p:cNvPr id="9" name="Shape 7"/>
-          <p:cNvSpPr/>
-          <p:nvPr/>
-        </p:nvSpPr>
-        <p:spPr>
-          <a:xfrm>
-            <a:off x="3291840" y="1188720"/>
-            <a:ext cx="2560320" cy="1828800"/>
+              <a:t>Used for CATEGORICAL data</a:t>
+            </a:r>
+            <a:endParaRPr lang="en-US" sz="1300" dirty="0"/>
+          </a:p>
+          <a:p>
+            <a:pPr marL="342900" indent="-342900">
+              <a:spcAft>
+                <a:spcPts val="600"/>
+              </a:spcAft>
+              <a:buSzPct val="100000"/>
+              <a:buChar char="•"/>
+            </a:pPr>
+            <a:r>
+              <a:rPr lang="en-US" sz="1300" dirty="0">
+                <a:solidFill>
+                  <a:srgbClr val="3D3A36"/>
+                </a:solidFill>
+                <a:latin typeface="Calibri" pitchFamily="34" charset="0"/>
+                <a:ea typeface="Calibri" pitchFamily="34" charset="-122"/>
+                <a:cs typeface="Calibri" pitchFamily="34" charset="-120"/>
+              </a:rPr>
+              <a:t>Bars do NOT touch</a:t>
+            </a:r>
+            <a:endParaRPr lang="en-US" sz="1300" dirty="0"/>
+          </a:p>
+          <a:p>
+            <a:pPr marL="342900" indent="-342900">
+              <a:spcAft>
+                <a:spcPts val="600"/>
+              </a:spcAft>
+              <a:buSzPct val="100000"/>
+              <a:buChar char="•"/>
+            </a:pPr>
+            <a:r>
+              <a:rPr lang="en-US" sz="1300" dirty="0">
+                <a:solidFill>
+                  <a:srgbClr val="3D3A36"/>
+                </a:solidFill>
+                <a:latin typeface="Calibri" pitchFamily="34" charset="0"/>
+                <a:ea typeface="Calibri" pitchFamily="34" charset="-122"/>
+                <a:cs typeface="Calibri" pitchFamily="34" charset="-120"/>
+              </a:rPr>
+              <a:t>Example: favourite colour of students</a:t>
+            </a:r>
+            <a:endParaRPr lang="en-US" sz="1300" dirty="0"/>
+          </a:p>
+          <a:p>
+            <a:pPr marL="342900" indent="-342900">
+              <a:spcAft>
+                <a:spcPts val="600"/>
+              </a:spcAft>
+              <a:buSzPct val="100000"/>
+              <a:buChar char="•"/>
+            </a:pPr>
+            <a:r>
+              <a:rPr lang="en-US" sz="1300" dirty="0">
+                <a:solidFill>
+                  <a:srgbClr val="3D3A36"/>
+                </a:solidFill>
+                <a:latin typeface="Calibri" pitchFamily="34" charset="0"/>
+                <a:ea typeface="Calibri" pitchFamily="34" charset="-122"/>
+                <a:cs typeface="Calibri" pitchFamily="34" charset="-120"/>
+              </a:rPr>
+              <a:t>Categories on x-axis, frequency on y-axis</a:t>
+            </a:r>
+            <a:endParaRPr lang="en-US" sz="1300" dirty="0"/>
+          </a:p>
+        </p:txBody>
+      </p:sp>
+      <p:sp>
+        <p:nvSpPr>
+          <p:cNvPr id="10" name="Shape 8"/>
+          <p:cNvSpPr/>
+          <p:nvPr/>
+        </p:nvSpPr>
+        <p:spPr>
+          <a:xfrm>
+            <a:off x="4754880" y="1051560"/>
+            <a:ext cx="3840480" cy="3474720"/>
           </a:xfrm>
           <a:prstGeom prst="rect">
             <a:avLst/>
@@ -1980,12 +2930,7 @@
           <a:solidFill>
             <a:srgbClr val="FFFFFF"/>
           </a:solidFill>
-          <a:ln w="12700">
-            <a:solidFill>
-              <a:srgbClr val="E5E2DC"/>
-            </a:solidFill>
-            <a:prstDash val="solid"/>
-          </a:ln>
+          <a:ln/>
           <a:effectLst>
             <a:outerShdw sx="100000" sy="100000" kx="0" ky="0" algn="bl" rotWithShape="0" blurRad="50800" dist="25400" dir="8100000">
               <a:srgbClr val="000000">
@@ -1997,34 +2942,34 @@
       </p:sp>
       <p:sp>
         <p:nvSpPr>
-          <p:cNvPr id="10" name="Shape 8"/>
-          <p:cNvSpPr/>
-          <p:nvPr/>
-        </p:nvSpPr>
-        <p:spPr>
-          <a:xfrm>
-            <a:off x="3291840" y="1188720"/>
-            <a:ext cx="2560320" cy="54864"/>
-          </a:xfrm>
-          <a:prstGeom prst="rect">
-            <a:avLst/>
-          </a:prstGeom>
-          <a:solidFill>
-            <a:srgbClr val="2A9D8F"/>
-          </a:solidFill>
-          <a:ln/>
-        </p:spPr>
-      </p:sp>
-      <p:sp>
-        <p:nvSpPr>
-          <p:cNvPr id="11" name="Text 9"/>
-          <p:cNvSpPr/>
-          <p:nvPr/>
-        </p:nvSpPr>
-        <p:spPr>
-          <a:xfrm>
-            <a:off x="3429000" y="1325880"/>
-            <a:ext cx="2286000" cy="365760"/>
+          <p:cNvPr id="11" name="Shape 9"/>
+          <p:cNvSpPr/>
+          <p:nvPr/>
+        </p:nvSpPr>
+        <p:spPr>
+          <a:xfrm>
+            <a:off x="4754880" y="1051560"/>
+            <a:ext cx="3840480" cy="54864"/>
+          </a:xfrm>
+          <a:prstGeom prst="rect">
+            <a:avLst/>
+          </a:prstGeom>
+          <a:solidFill>
+            <a:srgbClr val="E9C46A"/>
+          </a:solidFill>
+          <a:ln/>
+        </p:spPr>
+      </p:sp>
+      <p:sp>
+        <p:nvSpPr>
+          <p:cNvPr id="12" name="Text 10"/>
+          <p:cNvSpPr/>
+          <p:nvPr/>
+        </p:nvSpPr>
+        <p:spPr>
+          <a:xfrm>
+            <a:off x="4983480" y="1188720"/>
+            <a:ext cx="3383280" cy="457200"/>
           </a:xfrm>
           <a:prstGeom prst="rect">
             <a:avLst/>
@@ -2033,37 +2978,37 @@
           <a:ln/>
         </p:spPr>
         <p:txBody>
-          <a:bodyPr wrap="square" rtlCol="0" anchor="ctr"/>
+          <a:bodyPr wrap="square" lIns="0" tIns="0" rIns="0" bIns="0" rtlCol="0" anchor="ctr"/>
           <a:lstStyle/>
           <a:p>
             <a:pPr indent="0" marL="0">
               <a:buNone/>
             </a:pPr>
             <a:r>
-              <a:rPr lang="en-US" sz="1400" b="1" dirty="0">
+              <a:rPr lang="en-US" sz="1500" b="1" dirty="0">
                 <a:solidFill>
                   <a:srgbClr val="1B2A4A"/>
                 </a:solidFill>
-                <a:latin typeface="Calibri" pitchFamily="34" charset="0"/>
-                <a:ea typeface="Calibri" pitchFamily="34" charset="-122"/>
-                <a:cs typeface="Calibri" pitchFamily="34" charset="-120"/>
+                <a:latin typeface="Georgia" pitchFamily="34" charset="0"/>
+                <a:ea typeface="Georgia" pitchFamily="34" charset="-122"/>
+                <a:cs typeface="Georgia" pitchFamily="34" charset="-120"/>
               </a:rPr>
               <a:t>Line Graph</a:t>
             </a:r>
-            <a:endParaRPr lang="en-US" sz="1400" dirty="0"/>
-          </a:p>
-        </p:txBody>
-      </p:sp>
-      <p:sp>
-        <p:nvSpPr>
-          <p:cNvPr id="12" name="Text 10"/>
-          <p:cNvSpPr/>
-          <p:nvPr/>
-        </p:nvSpPr>
-        <p:spPr>
-          <a:xfrm>
-            <a:off x="3429000" y="1737360"/>
-            <a:ext cx="2286000" cy="1097280"/>
+            <a:endParaRPr lang="en-US" sz="1500" dirty="0"/>
+          </a:p>
+        </p:txBody>
+      </p:sp>
+      <p:sp>
+        <p:nvSpPr>
+          <p:cNvPr id="13" name="Text 11"/>
+          <p:cNvSpPr/>
+          <p:nvPr/>
+        </p:nvSpPr>
+        <p:spPr>
+          <a:xfrm>
+            <a:off x="4983480" y="1691640"/>
+            <a:ext cx="3383280" cy="2651760"/>
           </a:xfrm>
           <a:prstGeom prst="rect">
             <a:avLst/>
@@ -2075,11 +3020,15 @@
           <a:bodyPr wrap="square" rtlCol="0" anchor="t"/>
           <a:lstStyle/>
           <a:p>
-            <a:pPr indent="0" marL="0">
-              <a:buNone/>
+            <a:pPr marL="342900" indent="-342900">
+              <a:spcAft>
+                <a:spcPts val="600"/>
+              </a:spcAft>
+              <a:buSzPct val="100000"/>
+              <a:buChar char="•"/>
             </a:pPr>
             <a:r>
-              <a:rPr lang="en-US" sz="1100" dirty="0">
+              <a:rPr lang="en-US" sz="1300" dirty="0">
                 <a:solidFill>
                   <a:srgbClr val="3D3A36"/>
                 </a:solidFill>
@@ -2087,129 +3036,20 @@
                 <a:ea typeface="Calibri" pitchFamily="34" charset="-122"/>
                 <a:cs typeface="Calibri" pitchFamily="34" charset="-120"/>
               </a:rPr>
-              <a:t>For continuous data (numbers that change over time). Example: temperature over 24 hours. Points are connected with straight lines. Shows trends and patterns.</a:t>
-            </a:r>
-            <a:endParaRPr lang="en-US" sz="1100" dirty="0"/>
-          </a:p>
-        </p:txBody>
-      </p:sp>
-      <p:sp>
-        <p:nvSpPr>
-          <p:cNvPr id="13" name="Shape 11"/>
-          <p:cNvSpPr/>
-          <p:nvPr/>
-        </p:nvSpPr>
-        <p:spPr>
-          <a:xfrm>
-            <a:off x="6126480" y="1188720"/>
-            <a:ext cx="2560320" cy="1828800"/>
-          </a:xfrm>
-          <a:prstGeom prst="rect">
-            <a:avLst/>
-          </a:prstGeom>
-          <a:solidFill>
-            <a:srgbClr val="FFFFFF"/>
-          </a:solidFill>
-          <a:ln w="12700">
-            <a:solidFill>
-              <a:srgbClr val="E5E2DC"/>
-            </a:solidFill>
-            <a:prstDash val="solid"/>
-          </a:ln>
-          <a:effectLst>
-            <a:outerShdw sx="100000" sy="100000" kx="0" ky="0" algn="bl" rotWithShape="0" blurRad="50800" dist="25400" dir="8100000">
-              <a:srgbClr val="000000">
-                <a:alpha val="10000"/>
-              </a:srgbClr>
-            </a:outerShdw>
-          </a:effectLst>
-        </p:spPr>
-      </p:sp>
-      <p:sp>
-        <p:nvSpPr>
-          <p:cNvPr id="14" name="Shape 12"/>
-          <p:cNvSpPr/>
-          <p:nvPr/>
-        </p:nvSpPr>
-        <p:spPr>
-          <a:xfrm>
-            <a:off x="6126480" y="1188720"/>
-            <a:ext cx="2560320" cy="54864"/>
-          </a:xfrm>
-          <a:prstGeom prst="rect">
-            <a:avLst/>
-          </a:prstGeom>
-          <a:solidFill>
-            <a:srgbClr val="2A9D8F"/>
-          </a:solidFill>
-          <a:ln/>
-        </p:spPr>
-      </p:sp>
-      <p:sp>
-        <p:nvSpPr>
-          <p:cNvPr id="15" name="Text 13"/>
-          <p:cNvSpPr/>
-          <p:nvPr/>
-        </p:nvSpPr>
-        <p:spPr>
-          <a:xfrm>
-            <a:off x="6263640" y="1325880"/>
-            <a:ext cx="2286000" cy="365760"/>
-          </a:xfrm>
-          <a:prstGeom prst="rect">
-            <a:avLst/>
-          </a:prstGeom>
-          <a:noFill/>
-          <a:ln/>
-        </p:spPr>
-        <p:txBody>
-          <a:bodyPr wrap="square" rtlCol="0" anchor="ctr"/>
-          <a:lstStyle/>
-          <a:p>
-            <a:pPr indent="0" marL="0">
-              <a:buNone/>
+              <a:t>Used for CONTINUOUS data</a:t>
+            </a:r>
+            <a:endParaRPr lang="en-US" sz="1300" dirty="0"/>
+          </a:p>
+          <a:p>
+            <a:pPr marL="342900" indent="-342900">
+              <a:spcAft>
+                <a:spcPts val="600"/>
+              </a:spcAft>
+              <a:buSzPct val="100000"/>
+              <a:buChar char="•"/>
             </a:pPr>
             <a:r>
-              <a:rPr lang="en-US" sz="1400" b="1" dirty="0">
-                <a:solidFill>
-                  <a:srgbClr val="1B2A4A"/>
-                </a:solidFill>
-                <a:latin typeface="Calibri" pitchFamily="34" charset="0"/>
-                <a:ea typeface="Calibri" pitchFamily="34" charset="-122"/>
-                <a:cs typeface="Calibri" pitchFamily="34" charset="-120"/>
-              </a:rPr>
-              <a:t>Pie Chart</a:t>
-            </a:r>
-            <a:endParaRPr lang="en-US" sz="1400" dirty="0"/>
-          </a:p>
-        </p:txBody>
-      </p:sp>
-      <p:sp>
-        <p:nvSpPr>
-          <p:cNvPr id="16" name="Text 14"/>
-          <p:cNvSpPr/>
-          <p:nvPr/>
-        </p:nvSpPr>
-        <p:spPr>
-          <a:xfrm>
-            <a:off x="6263640" y="1737360"/>
-            <a:ext cx="2286000" cy="1097280"/>
-          </a:xfrm>
-          <a:prstGeom prst="rect">
-            <a:avLst/>
-          </a:prstGeom>
-          <a:noFill/>
-          <a:ln/>
-        </p:spPr>
-        <p:txBody>
-          <a:bodyPr wrap="square" rtlCol="0" anchor="t"/>
-          <a:lstStyle/>
-          <a:p>
-            <a:pPr indent="0" marL="0">
-              <a:buNone/>
-            </a:pPr>
-            <a:r>
-              <a:rPr lang="en-US" sz="1100" dirty="0">
+              <a:rPr lang="en-US" sz="1300" dirty="0">
                 <a:solidFill>
                   <a:srgbClr val="3D3A36"/>
                 </a:solidFill>
@@ -2217,9 +3057,51 @@
                 <a:ea typeface="Calibri" pitchFamily="34" charset="-122"/>
                 <a:cs typeface="Calibri" pitchFamily="34" charset="-120"/>
               </a:rPr>
-              <a:t>Shows proportions of a whole. Example: percentage of each gas in air. All segments add up to 100%. Best for 3–6 categories.</a:t>
-            </a:r>
-            <a:endParaRPr lang="en-US" sz="1100" dirty="0"/>
+              <a:t>Points connected by lines</a:t>
+            </a:r>
+            <a:endParaRPr lang="en-US" sz="1300" dirty="0"/>
+          </a:p>
+          <a:p>
+            <a:pPr marL="342900" indent="-342900">
+              <a:spcAft>
+                <a:spcPts val="600"/>
+              </a:spcAft>
+              <a:buSzPct val="100000"/>
+              <a:buChar char="•"/>
+            </a:pPr>
+            <a:r>
+              <a:rPr lang="en-US" sz="1300" dirty="0">
+                <a:solidFill>
+                  <a:srgbClr val="3D3A36"/>
+                </a:solidFill>
+                <a:latin typeface="Calibri" pitchFamily="34" charset="0"/>
+                <a:ea typeface="Calibri" pitchFamily="34" charset="-122"/>
+                <a:cs typeface="Calibri" pitchFamily="34" charset="-120"/>
+              </a:rPr>
+              <a:t>Example: temperature over time</a:t>
+            </a:r>
+            <a:endParaRPr lang="en-US" sz="1300" dirty="0"/>
+          </a:p>
+          <a:p>
+            <a:pPr marL="342900" indent="-342900">
+              <a:spcAft>
+                <a:spcPts val="600"/>
+              </a:spcAft>
+              <a:buSzPct val="100000"/>
+              <a:buChar char="•"/>
+            </a:pPr>
+            <a:r>
+              <a:rPr lang="en-US" sz="1300" dirty="0">
+                <a:solidFill>
+                  <a:srgbClr val="3D3A36"/>
+                </a:solidFill>
+                <a:latin typeface="Calibri" pitchFamily="34" charset="0"/>
+                <a:ea typeface="Calibri" pitchFamily="34" charset="-122"/>
+                <a:cs typeface="Calibri" pitchFamily="34" charset="-120"/>
+              </a:rPr>
+              <a:t>Both axes show numbers</a:t>
+            </a:r>
+            <a:endParaRPr lang="en-US" sz="1300" dirty="0"/>
           </a:p>
         </p:txBody>
       </p:sp>
@@ -2264,7 +3146,47 @@
         <p:spPr>
           <a:xfrm>
             <a:off x="0" y="0"/>
-            <a:ext cx="9144000" cy="54864"/>
+            <a:ext cx="9144000" cy="822960"/>
+          </a:xfrm>
+          <a:prstGeom prst="rect">
+            <a:avLst/>
+          </a:prstGeom>
+          <a:solidFill>
+            <a:srgbClr val="FFFFFF"/>
+          </a:solidFill>
+          <a:ln/>
+        </p:spPr>
+      </p:sp>
+      <p:sp>
+        <p:nvSpPr>
+          <p:cNvPr id="3" name="Shape 1"/>
+          <p:cNvSpPr/>
+          <p:nvPr/>
+        </p:nvSpPr>
+        <p:spPr>
+          <a:xfrm>
+            <a:off x="0" y="804672"/>
+            <a:ext cx="9144000" cy="27432"/>
+          </a:xfrm>
+          <a:prstGeom prst="rect">
+            <a:avLst/>
+          </a:prstGeom>
+          <a:solidFill>
+            <a:srgbClr val="E5E2DC"/>
+          </a:solidFill>
+          <a:ln/>
+        </p:spPr>
+      </p:sp>
+      <p:sp>
+        <p:nvSpPr>
+          <p:cNvPr id="4" name="Shape 2"/>
+          <p:cNvSpPr/>
+          <p:nvPr/>
+        </p:nvSpPr>
+        <p:spPr>
+          <a:xfrm>
+            <a:off x="548640" y="201168"/>
+            <a:ext cx="54864" cy="420624"/>
           </a:xfrm>
           <a:prstGeom prst="rect">
             <a:avLst/>
@@ -2277,14 +3199,14 @@
       </p:sp>
       <p:sp>
         <p:nvSpPr>
-          <p:cNvPr id="3" name="Text 1"/>
-          <p:cNvSpPr/>
-          <p:nvPr/>
-        </p:nvSpPr>
-        <p:spPr>
-          <a:xfrm>
-            <a:off x="7772400" y="4709160"/>
-            <a:ext cx="1097280" cy="320040"/>
+          <p:cNvPr id="5" name="Text 3"/>
+          <p:cNvSpPr/>
+          <p:nvPr/>
+        </p:nvSpPr>
+        <p:spPr>
+          <a:xfrm>
+            <a:off x="777240" y="137160"/>
+            <a:ext cx="7772400" cy="548640"/>
           </a:xfrm>
           <a:prstGeom prst="rect">
             <a:avLst/>
@@ -2293,53 +3215,14 @@
           <a:ln/>
         </p:spPr>
         <p:txBody>
-          <a:bodyPr wrap="square" rtlCol="0" anchor="ctr"/>
-          <a:lstStyle/>
-          <a:p>
-            <a:pPr algn="r" indent="0" marL="0">
-              <a:buNone/>
-            </a:pPr>
-            <a:r>
-              <a:rPr lang="en-US" sz="900" dirty="0">
-                <a:solidFill>
-                  <a:srgbClr val="6B6660"/>
-                </a:solidFill>
-                <a:latin typeface="Calibri" pitchFamily="34" charset="0"/>
-                <a:ea typeface="Calibri" pitchFamily="34" charset="-122"/>
-                <a:cs typeface="Calibri" pitchFamily="34" charset="-120"/>
-              </a:rPr>
-              <a:t>4 / 6</a:t>
-            </a:r>
-            <a:endParaRPr lang="en-US" sz="900" dirty="0"/>
-          </a:p>
-        </p:txBody>
-      </p:sp>
-      <p:sp>
-        <p:nvSpPr>
-          <p:cNvPr id="4" name="Text 2"/>
-          <p:cNvSpPr/>
-          <p:nvPr/>
-        </p:nvSpPr>
-        <p:spPr>
-          <a:xfrm>
-            <a:off x="457200" y="274320"/>
-            <a:ext cx="8229600" cy="640080"/>
-          </a:xfrm>
-          <a:prstGeom prst="rect">
-            <a:avLst/>
-          </a:prstGeom>
-          <a:noFill/>
-          <a:ln/>
-        </p:spPr>
-        <p:txBody>
-          <a:bodyPr wrap="square" rtlCol="0" anchor="ctr"/>
+          <a:bodyPr wrap="square" lIns="0" tIns="0" rIns="0" bIns="0" rtlCol="0" anchor="ctr"/>
           <a:lstStyle/>
           <a:p>
             <a:pPr indent="0" marL="0">
               <a:buNone/>
             </a:pPr>
             <a:r>
-              <a:rPr lang="en-US" sz="2600" b="1" dirty="0">
+              <a:rPr lang="en-US" sz="2000" b="1" dirty="0">
                 <a:solidFill>
                   <a:srgbClr val="1B2A4A"/>
                 </a:solidFill>
@@ -2347,22 +3230,22 @@
                 <a:ea typeface="Georgia" pitchFamily="34" charset="-122"/>
                 <a:cs typeface="Georgia" pitchFamily="34" charset="-120"/>
               </a:rPr>
-              <a:t>Drawing a Good Graph</a:t>
-            </a:r>
-            <a:endParaRPr lang="en-US" sz="2600" dirty="0"/>
-          </a:p>
-        </p:txBody>
-      </p:sp>
-      <p:sp>
-        <p:nvSpPr>
-          <p:cNvPr id="5" name="Text 3"/>
-          <p:cNvSpPr/>
-          <p:nvPr/>
-        </p:nvSpPr>
-        <p:spPr>
-          <a:xfrm>
-            <a:off x="457200" y="1188720"/>
-            <a:ext cx="3840480" cy="3474720"/>
+              <a:t>Drawing a Graph — Step by Step</a:t>
+            </a:r>
+            <a:endParaRPr lang="en-US" sz="2000" dirty="0"/>
+          </a:p>
+        </p:txBody>
+      </p:sp>
+      <p:sp>
+        <p:nvSpPr>
+          <p:cNvPr id="6" name="Text 4"/>
+          <p:cNvSpPr/>
+          <p:nvPr/>
+        </p:nvSpPr>
+        <p:spPr>
+          <a:xfrm>
+            <a:off x="731520" y="1051560"/>
+            <a:ext cx="7680960" cy="3108960"/>
           </a:xfrm>
           <a:prstGeom prst="rect">
             <a:avLst/>
@@ -2376,13 +3259,13 @@
           <a:p>
             <a:pPr marL="342900" indent="-342900">
               <a:spcAft>
-                <a:spcPts val="600"/>
+                <a:spcPts val="800"/>
               </a:spcAft>
               <a:buSzPct val="100000"/>
               <a:buChar char="•"/>
             </a:pPr>
             <a:r>
-              <a:rPr lang="en-US" sz="1400" dirty="0">
+              <a:rPr lang="en-US" sz="1500" dirty="0">
                 <a:solidFill>
                   <a:srgbClr val="3D3A36"/>
                 </a:solidFill>
@@ -2390,20 +3273,20 @@
                 <a:ea typeface="Calibri" pitchFamily="34" charset="-122"/>
                 <a:cs typeface="Calibri" pitchFamily="34" charset="-120"/>
               </a:rPr>
-              <a:t>Title: describes what the graph shows</a:t>
-            </a:r>
-            <a:endParaRPr lang="en-US" sz="1400" dirty="0"/>
+              <a:t>1. Draw axes with a ruler — x-axis (horizontal), y-axis (vertical).</a:t>
+            </a:r>
+            <a:endParaRPr lang="en-US" sz="1500" dirty="0"/>
           </a:p>
           <a:p>
             <a:pPr marL="342900" indent="-342900">
               <a:spcAft>
-                <a:spcPts val="600"/>
+                <a:spcPts val="800"/>
               </a:spcAft>
               <a:buSzPct val="100000"/>
               <a:buChar char="•"/>
             </a:pPr>
             <a:r>
-              <a:rPr lang="en-US" sz="1400" dirty="0">
+              <a:rPr lang="en-US" sz="1500" dirty="0">
                 <a:solidFill>
                   <a:srgbClr val="3D3A36"/>
                 </a:solidFill>
@@ -2411,20 +3294,20 @@
                 <a:ea typeface="Calibri" pitchFamily="34" charset="-122"/>
                 <a:cs typeface="Calibri" pitchFamily="34" charset="-120"/>
               </a:rPr>
-              <a:t>X-axis: independent variable (what you changed)</a:t>
-            </a:r>
-            <a:endParaRPr lang="en-US" sz="1400" dirty="0"/>
+              <a:t>2. Label both axes with the variable name AND unit.</a:t>
+            </a:r>
+            <a:endParaRPr lang="en-US" sz="1500" dirty="0"/>
           </a:p>
           <a:p>
             <a:pPr marL="342900" indent="-342900">
               <a:spcAft>
-                <a:spcPts val="600"/>
+                <a:spcPts val="800"/>
               </a:spcAft>
               <a:buSzPct val="100000"/>
               <a:buChar char="•"/>
             </a:pPr>
             <a:r>
-              <a:rPr lang="en-US" sz="1400" dirty="0">
+              <a:rPr lang="en-US" sz="1500" dirty="0">
                 <a:solidFill>
                   <a:srgbClr val="3D3A36"/>
                 </a:solidFill>
@@ -2432,20 +3315,20 @@
                 <a:ea typeface="Calibri" pitchFamily="34" charset="-122"/>
                 <a:cs typeface="Calibri" pitchFamily="34" charset="-120"/>
               </a:rPr>
-              <a:t>Y-axis: dependent variable (what you measured)</a:t>
-            </a:r>
-            <a:endParaRPr lang="en-US" sz="1400" dirty="0"/>
+              <a:t>3. Choose a sensible scale — use even numbers, fill the space.</a:t>
+            </a:r>
+            <a:endParaRPr lang="en-US" sz="1500" dirty="0"/>
           </a:p>
           <a:p>
             <a:pPr marL="342900" indent="-342900">
               <a:spcAft>
-                <a:spcPts val="600"/>
+                <a:spcPts val="800"/>
               </a:spcAft>
               <a:buSzPct val="100000"/>
               <a:buChar char="•"/>
             </a:pPr>
             <a:r>
-              <a:rPr lang="en-US" sz="1400" dirty="0">
+              <a:rPr lang="en-US" sz="1500" dirty="0">
                 <a:solidFill>
                   <a:srgbClr val="3D3A36"/>
                 </a:solidFill>
@@ -2453,20 +3336,20 @@
                 <a:ea typeface="Calibri" pitchFamily="34" charset="-122"/>
                 <a:cs typeface="Calibri" pitchFamily="34" charset="-120"/>
               </a:rPr>
-              <a:t>Label both axes with name AND unit</a:t>
-            </a:r>
-            <a:endParaRPr lang="en-US" sz="1400" dirty="0"/>
+              <a:t>4. Plot each point carefully with a small cross (×).</a:t>
+            </a:r>
+            <a:endParaRPr lang="en-US" sz="1500" dirty="0"/>
           </a:p>
           <a:p>
             <a:pPr marL="342900" indent="-342900">
               <a:spcAft>
-                <a:spcPts val="600"/>
+                <a:spcPts val="800"/>
               </a:spcAft>
               <a:buSzPct val="100000"/>
               <a:buChar char="•"/>
             </a:pPr>
             <a:r>
-              <a:rPr lang="en-US" sz="1400" dirty="0">
+              <a:rPr lang="en-US" sz="1500" dirty="0">
                 <a:solidFill>
                   <a:srgbClr val="3D3A36"/>
                 </a:solidFill>
@@ -2474,20 +3357,20 @@
                 <a:ea typeface="Calibri" pitchFamily="34" charset="-122"/>
                 <a:cs typeface="Calibri" pitchFamily="34" charset="-120"/>
               </a:rPr>
-              <a:t>Choose a sensible scale — use most of the graph paper</a:t>
-            </a:r>
-            <a:endParaRPr lang="en-US" sz="1400" dirty="0"/>
+              <a:t>5. Draw a line of best fit or connect the points.</a:t>
+            </a:r>
+            <a:endParaRPr lang="en-US" sz="1500" dirty="0"/>
           </a:p>
           <a:p>
             <a:pPr marL="342900" indent="-342900">
               <a:spcAft>
-                <a:spcPts val="600"/>
+                <a:spcPts val="800"/>
               </a:spcAft>
               <a:buSzPct val="100000"/>
               <a:buChar char="•"/>
             </a:pPr>
             <a:r>
-              <a:rPr lang="en-US" sz="1400" dirty="0">
+              <a:rPr lang="en-US" sz="1500" dirty="0">
                 <a:solidFill>
                   <a:srgbClr val="3D3A36"/>
                 </a:solidFill>
@@ -2495,20 +3378,79 @@
                 <a:ea typeface="Calibri" pitchFamily="34" charset="-122"/>
                 <a:cs typeface="Calibri" pitchFamily="34" charset="-120"/>
               </a:rPr>
-              <a:t>Plot points accurately with a small cross (×)</a:t>
-            </a:r>
-            <a:endParaRPr lang="en-US" sz="1400" dirty="0"/>
-          </a:p>
-          <a:p>
-            <a:pPr marL="342900" indent="-342900">
-              <a:spcAft>
-                <a:spcPts val="600"/>
-              </a:spcAft>
-              <a:buSzPct val="100000"/>
-              <a:buChar char="•"/>
+              <a:t>6. Give your graph a clear title.</a:t>
+            </a:r>
+            <a:endParaRPr lang="en-US" sz="1500" dirty="0"/>
+          </a:p>
+        </p:txBody>
+      </p:sp>
+      <p:sp>
+        <p:nvSpPr>
+          <p:cNvPr id="7" name="Shape 5"/>
+          <p:cNvSpPr/>
+          <p:nvPr/>
+        </p:nvSpPr>
+        <p:spPr>
+          <a:xfrm>
+            <a:off x="731520" y="4206240"/>
+            <a:ext cx="7680960" cy="640080"/>
+          </a:xfrm>
+          <a:prstGeom prst="rect">
+            <a:avLst/>
+          </a:prstGeom>
+          <a:solidFill>
+            <a:srgbClr val="E8F5F3"/>
+          </a:solidFill>
+          <a:ln/>
+          <a:effectLst>
+            <a:outerShdw sx="100000" sy="100000" kx="0" ky="0" algn="bl" rotWithShape="0" blurRad="50800" dist="25400" dir="8100000">
+              <a:srgbClr val="000000">
+                <a:alpha val="10000"/>
+              </a:srgbClr>
+            </a:outerShdw>
+          </a:effectLst>
+        </p:spPr>
+      </p:sp>
+      <p:sp>
+        <p:nvSpPr>
+          <p:cNvPr id="8" name="Text 6"/>
+          <p:cNvSpPr/>
+          <p:nvPr/>
+        </p:nvSpPr>
+        <p:spPr>
+          <a:xfrm>
+            <a:off x="914400" y="4251960"/>
+            <a:ext cx="7315200" cy="548640"/>
+          </a:xfrm>
+          <a:prstGeom prst="rect">
+            <a:avLst/>
+          </a:prstGeom>
+          <a:noFill/>
+          <a:ln/>
+        </p:spPr>
+        <p:txBody>
+          <a:bodyPr wrap="square" rtlCol="0" anchor="ctr"/>
+          <a:lstStyle/>
+          <a:p>
+            <a:pPr indent="0" marL="0">
+              <a:buNone/>
             </a:pPr>
             <a:r>
-              <a:rPr lang="en-US" sz="1400" dirty="0">
+              <a:rPr lang="en-US" sz="1200" b="1" dirty="0">
+                <a:solidFill>
+                  <a:srgbClr val="2A9D8F"/>
+                </a:solidFill>
+                <a:latin typeface="Calibri" pitchFamily="34" charset="0"/>
+                <a:ea typeface="Calibri" pitchFamily="34" charset="-122"/>
+                <a:cs typeface="Calibri" pitchFamily="34" charset="-120"/>
+              </a:rPr>
+              <a:t>Key Idea: </a:t>
+            </a:r>
+            <a:pPr indent="0" marL="0">
+              <a:buNone/>
+            </a:pPr>
+            <a:r>
+              <a:rPr lang="en-US" sz="1200" i="1" dirty="0">
                 <a:solidFill>
                   <a:srgbClr val="3D3A36"/>
                 </a:solidFill>
@@ -2516,232 +3458,9 @@
                 <a:ea typeface="Calibri" pitchFamily="34" charset="-122"/>
                 <a:cs typeface="Calibri" pitchFamily="34" charset="-120"/>
               </a:rPr>
-              <a:t>Draw a line of best fit or connect the points</a:t>
-            </a:r>
-            <a:endParaRPr lang="en-US" sz="1400" dirty="0"/>
-          </a:p>
-        </p:txBody>
-      </p:sp>
-      <p:sp>
-        <p:nvSpPr>
-          <p:cNvPr id="6" name="Shape 4"/>
-          <p:cNvSpPr/>
-          <p:nvPr/>
-        </p:nvSpPr>
-        <p:spPr>
-          <a:xfrm>
-            <a:off x="4846320" y="1188720"/>
-            <a:ext cx="3840480" cy="3474720"/>
-          </a:xfrm>
-          <a:prstGeom prst="rect">
-            <a:avLst/>
-          </a:prstGeom>
-          <a:solidFill>
-            <a:srgbClr val="FFFFFF"/>
-          </a:solidFill>
-          <a:ln w="12700">
-            <a:solidFill>
-              <a:srgbClr val="E5E2DC"/>
-            </a:solidFill>
-            <a:prstDash val="solid"/>
-          </a:ln>
-          <a:effectLst>
-            <a:outerShdw sx="100000" sy="100000" kx="0" ky="0" algn="bl" rotWithShape="0" blurRad="50800" dist="25400" dir="8100000">
-              <a:srgbClr val="000000">
-                <a:alpha val="10000"/>
-              </a:srgbClr>
-            </a:outerShdw>
-          </a:effectLst>
-        </p:spPr>
-      </p:sp>
-      <p:sp>
-        <p:nvSpPr>
-          <p:cNvPr id="7" name="Shape 5"/>
-          <p:cNvSpPr/>
-          <p:nvPr/>
-        </p:nvSpPr>
-        <p:spPr>
-          <a:xfrm>
-            <a:off x="4846320" y="1188720"/>
-            <a:ext cx="3840480" cy="54864"/>
-          </a:xfrm>
-          <a:prstGeom prst="rect">
-            <a:avLst/>
-          </a:prstGeom>
-          <a:solidFill>
-            <a:srgbClr val="2A9D8F"/>
-          </a:solidFill>
-          <a:ln/>
-        </p:spPr>
-      </p:sp>
-      <p:sp>
-        <p:nvSpPr>
-          <p:cNvPr id="8" name="Text 6"/>
-          <p:cNvSpPr/>
-          <p:nvPr/>
-        </p:nvSpPr>
-        <p:spPr>
-          <a:xfrm>
-            <a:off x="5120640" y="1371600"/>
-            <a:ext cx="3291840" cy="3108960"/>
-          </a:xfrm>
-          <a:prstGeom prst="rect">
-            <a:avLst/>
-          </a:prstGeom>
-          <a:noFill/>
-          <a:ln/>
-        </p:spPr>
-        <p:txBody>
-          <a:bodyPr wrap="square" rtlCol="0" anchor="t"/>
-          <a:lstStyle/>
-          <a:p>
-            <a:pPr indent="0" marL="0">
-              <a:spcAft>
-                <a:spcPts val="400"/>
-              </a:spcAft>
-              <a:buNone/>
-            </a:pPr>
-            <a:r>
-              <a:rPr lang="en-US" sz="1600" b="1" dirty="0">
-                <a:solidFill>
-                  <a:srgbClr val="1B2A4A"/>
-                </a:solidFill>
-                <a:latin typeface="Calibri" pitchFamily="34" charset="0"/>
-                <a:ea typeface="Calibri" pitchFamily="34" charset="-122"/>
-                <a:cs typeface="Calibri" pitchFamily="34" charset="-120"/>
-              </a:rPr>
-              <a:t>Data Tables</a:t>
-            </a:r>
-            <a:endParaRPr lang="en-US" sz="1600" dirty="0"/>
-          </a:p>
-          <a:p>
-            <a:pPr indent="0" marL="0">
-              <a:spcAft>
-                <a:spcPts val="400"/>
-              </a:spcAft>
-              <a:buNone/>
-            </a:pPr>
-            <a:endParaRPr lang="en-US" sz="1600" dirty="0"/>
-          </a:p>
-          <a:p>
-            <a:pPr indent="0" marL="0">
-              <a:spcAft>
-                <a:spcPts val="400"/>
-              </a:spcAft>
-              <a:buNone/>
-            </a:pPr>
-            <a:r>
-              <a:rPr lang="en-US" sz="1300" dirty="0">
-                <a:solidFill>
-                  <a:srgbClr val="3D3A36"/>
-                </a:solidFill>
-                <a:latin typeface="Calibri" pitchFamily="34" charset="0"/>
-                <a:ea typeface="Calibri" pitchFamily="34" charset="-122"/>
-                <a:cs typeface="Calibri" pitchFamily="34" charset="-120"/>
-              </a:rPr>
-              <a:t>Independent variable in the FIRST column</a:t>
-            </a:r>
-            <a:endParaRPr lang="en-US" sz="1600" dirty="0"/>
-          </a:p>
-          <a:p>
-            <a:pPr indent="0" marL="0">
-              <a:spcAft>
-                <a:spcPts val="400"/>
-              </a:spcAft>
-              <a:buNone/>
-            </a:pPr>
-            <a:r>
-              <a:rPr lang="en-US" sz="1300" dirty="0">
-                <a:solidFill>
-                  <a:srgbClr val="3D3A36"/>
-                </a:solidFill>
-                <a:latin typeface="Calibri" pitchFamily="34" charset="0"/>
-                <a:ea typeface="Calibri" pitchFamily="34" charset="-122"/>
-                <a:cs typeface="Calibri" pitchFamily="34" charset="-120"/>
-              </a:rPr>
-              <a:t>Dependent variable in subsequent columns</a:t>
-            </a:r>
-            <a:endParaRPr lang="en-US" sz="1600" dirty="0"/>
-          </a:p>
-          <a:p>
-            <a:pPr indent="0" marL="0">
-              <a:spcAft>
-                <a:spcPts val="400"/>
-              </a:spcAft>
-              <a:buNone/>
-            </a:pPr>
-            <a:r>
-              <a:rPr lang="en-US" sz="1300" dirty="0">
-                <a:solidFill>
-                  <a:srgbClr val="3D3A36"/>
-                </a:solidFill>
-                <a:latin typeface="Calibri" pitchFamily="34" charset="0"/>
-                <a:ea typeface="Calibri" pitchFamily="34" charset="-122"/>
-                <a:cs typeface="Calibri" pitchFamily="34" charset="-120"/>
-              </a:rPr>
-              <a:t>Include units in the header row, not in every cell</a:t>
-            </a:r>
-            <a:endParaRPr lang="en-US" sz="1600" dirty="0"/>
-          </a:p>
-          <a:p>
-            <a:pPr indent="0" marL="0">
-              <a:spcAft>
-                <a:spcPts val="400"/>
-              </a:spcAft>
-              <a:buNone/>
-            </a:pPr>
-            <a:r>
-              <a:rPr lang="en-US" sz="1300" dirty="0">
-                <a:solidFill>
-                  <a:srgbClr val="3D3A36"/>
-                </a:solidFill>
-                <a:latin typeface="Calibri" pitchFamily="34" charset="0"/>
-                <a:ea typeface="Calibri" pitchFamily="34" charset="-122"/>
-                <a:cs typeface="Calibri" pitchFamily="34" charset="-120"/>
-              </a:rPr>
-              <a:t>Record all measurements — don't leave blanks</a:t>
-            </a:r>
-            <a:endParaRPr lang="en-US" sz="1600" dirty="0"/>
-          </a:p>
-          <a:p>
-            <a:pPr indent="0" marL="0">
-              <a:spcAft>
-                <a:spcPts val="400"/>
-              </a:spcAft>
-              <a:buNone/>
-            </a:pPr>
-            <a:r>
-              <a:rPr lang="en-US" sz="1300" dirty="0">
-                <a:solidFill>
-                  <a:srgbClr val="3D3A36"/>
-                </a:solidFill>
-                <a:latin typeface="Calibri" pitchFamily="34" charset="0"/>
-                <a:ea typeface="Calibri" pitchFamily="34" charset="-122"/>
-                <a:cs typeface="Calibri" pitchFamily="34" charset="-120"/>
-              </a:rPr>
-              <a:t>Calculate averages if you have repeats</a:t>
-            </a:r>
-            <a:endParaRPr lang="en-US" sz="1600" dirty="0"/>
-          </a:p>
-          <a:p>
-            <a:pPr indent="0" marL="0">
-              <a:spcAft>
-                <a:spcPts val="400"/>
-              </a:spcAft>
-              <a:buNone/>
-            </a:pPr>
-            <a:r>
-              <a:rPr lang="en-US" sz="1300" dirty="0">
-                <a:solidFill>
-                  <a:srgbClr val="3D3A36"/>
-                </a:solidFill>
-                <a:latin typeface="Calibri" pitchFamily="34" charset="0"/>
-                <a:ea typeface="Calibri" pitchFamily="34" charset="-122"/>
-                <a:cs typeface="Calibri" pitchFamily="34" charset="-120"/>
-              </a:rPr>
-              <a:t>Anomalies (outliers) should be circled and noted</a:t>
-            </a:r>
-            <a:endParaRPr lang="en-US" sz="1600" dirty="0"/>
+              <a:t>A graph without labels is like a map without names — useless!</a:t>
+            </a:r>
+            <a:endParaRPr lang="en-US" sz="1200" dirty="0"/>
           </a:p>
         </p:txBody>
       </p:sp>
@@ -2786,7 +3505,47 @@
         <p:spPr>
           <a:xfrm>
             <a:off x="0" y="0"/>
-            <a:ext cx="9144000" cy="54864"/>
+            <a:ext cx="9144000" cy="822960"/>
+          </a:xfrm>
+          <a:prstGeom prst="rect">
+            <a:avLst/>
+          </a:prstGeom>
+          <a:solidFill>
+            <a:srgbClr val="FFFFFF"/>
+          </a:solidFill>
+          <a:ln/>
+        </p:spPr>
+      </p:sp>
+      <p:sp>
+        <p:nvSpPr>
+          <p:cNvPr id="3" name="Shape 1"/>
+          <p:cNvSpPr/>
+          <p:nvPr/>
+        </p:nvSpPr>
+        <p:spPr>
+          <a:xfrm>
+            <a:off x="0" y="804672"/>
+            <a:ext cx="9144000" cy="27432"/>
+          </a:xfrm>
+          <a:prstGeom prst="rect">
+            <a:avLst/>
+          </a:prstGeom>
+          <a:solidFill>
+            <a:srgbClr val="E5E2DC"/>
+          </a:solidFill>
+          <a:ln/>
+        </p:spPr>
+      </p:sp>
+      <p:sp>
+        <p:nvSpPr>
+          <p:cNvPr id="4" name="Shape 2"/>
+          <p:cNvSpPr/>
+          <p:nvPr/>
+        </p:nvSpPr>
+        <p:spPr>
+          <a:xfrm>
+            <a:off x="548640" y="201168"/>
+            <a:ext cx="54864" cy="420624"/>
           </a:xfrm>
           <a:prstGeom prst="rect">
             <a:avLst/>
@@ -2799,14 +3558,14 @@
       </p:sp>
       <p:sp>
         <p:nvSpPr>
-          <p:cNvPr id="3" name="Text 1"/>
-          <p:cNvSpPr/>
-          <p:nvPr/>
-        </p:nvSpPr>
-        <p:spPr>
-          <a:xfrm>
-            <a:off x="7772400" y="4709160"/>
-            <a:ext cx="1097280" cy="320040"/>
+          <p:cNvPr id="5" name="Text 3"/>
+          <p:cNvSpPr/>
+          <p:nvPr/>
+        </p:nvSpPr>
+        <p:spPr>
+          <a:xfrm>
+            <a:off x="777240" y="137160"/>
+            <a:ext cx="7772400" cy="548640"/>
           </a:xfrm>
           <a:prstGeom prst="rect">
             <a:avLst/>
@@ -2815,53 +3574,14 @@
           <a:ln/>
         </p:spPr>
         <p:txBody>
-          <a:bodyPr wrap="square" rtlCol="0" anchor="ctr"/>
-          <a:lstStyle/>
-          <a:p>
-            <a:pPr algn="r" indent="0" marL="0">
-              <a:buNone/>
-            </a:pPr>
-            <a:r>
-              <a:rPr lang="en-US" sz="900" dirty="0">
-                <a:solidFill>
-                  <a:srgbClr val="6B6660"/>
-                </a:solidFill>
-                <a:latin typeface="Calibri" pitchFamily="34" charset="0"/>
-                <a:ea typeface="Calibri" pitchFamily="34" charset="-122"/>
-                <a:cs typeface="Calibri" pitchFamily="34" charset="-120"/>
-              </a:rPr>
-              <a:t>5 / 6</a:t>
-            </a:r>
-            <a:endParaRPr lang="en-US" sz="900" dirty="0"/>
-          </a:p>
-        </p:txBody>
-      </p:sp>
-      <p:sp>
-        <p:nvSpPr>
-          <p:cNvPr id="4" name="Text 2"/>
-          <p:cNvSpPr/>
-          <p:nvPr/>
-        </p:nvSpPr>
-        <p:spPr>
-          <a:xfrm>
-            <a:off x="457200" y="274320"/>
-            <a:ext cx="8229600" cy="640080"/>
-          </a:xfrm>
-          <a:prstGeom prst="rect">
-            <a:avLst/>
-          </a:prstGeom>
-          <a:noFill/>
-          <a:ln/>
-        </p:spPr>
-        <p:txBody>
-          <a:bodyPr wrap="square" rtlCol="0" anchor="ctr"/>
+          <a:bodyPr wrap="square" lIns="0" tIns="0" rIns="0" bIns="0" rtlCol="0" anchor="ctr"/>
           <a:lstStyle/>
           <a:p>
             <a:pPr indent="0" marL="0">
               <a:buNone/>
             </a:pPr>
             <a:r>
-              <a:rPr lang="en-US" sz="2600" b="1" dirty="0">
+              <a:rPr lang="en-US" sz="2000" b="1" dirty="0">
                 <a:solidFill>
                   <a:srgbClr val="1B2A4A"/>
                 </a:solidFill>
@@ -2869,22 +3589,22 @@
                 <a:ea typeface="Georgia" pitchFamily="34" charset="-122"/>
                 <a:cs typeface="Georgia" pitchFamily="34" charset="-120"/>
               </a:rPr>
-              <a:t>Interpreting Graphs</a:t>
-            </a:r>
-            <a:endParaRPr lang="en-US" sz="2600" dirty="0"/>
-          </a:p>
-        </p:txBody>
-      </p:sp>
-      <p:sp>
-        <p:nvSpPr>
-          <p:cNvPr id="5" name="Text 3"/>
-          <p:cNvSpPr/>
-          <p:nvPr/>
-        </p:nvSpPr>
-        <p:spPr>
-          <a:xfrm>
-            <a:off x="457200" y="1097280"/>
-            <a:ext cx="8229600" cy="3657600"/>
+              <a:t>Reading &amp; Describing Graphs</a:t>
+            </a:r>
+            <a:endParaRPr lang="en-US" sz="2000" dirty="0"/>
+          </a:p>
+        </p:txBody>
+      </p:sp>
+      <p:sp>
+        <p:nvSpPr>
+          <p:cNvPr id="6" name="Text 4"/>
+          <p:cNvSpPr/>
+          <p:nvPr/>
+        </p:nvSpPr>
+        <p:spPr>
+          <a:xfrm>
+            <a:off x="731520" y="1051560"/>
+            <a:ext cx="7680960" cy="3108960"/>
           </a:xfrm>
           <a:prstGeom prst="rect">
             <a:avLst/>
@@ -2904,7 +3624,7 @@
               <a:buChar char="•"/>
             </a:pPr>
             <a:r>
-              <a:rPr lang="en-US" sz="1400" dirty="0">
+              <a:rPr lang="en-US" sz="1500" dirty="0">
                 <a:solidFill>
                   <a:srgbClr val="3D3A36"/>
                 </a:solidFill>
@@ -2912,9 +3632,9 @@
                 <a:ea typeface="Calibri" pitchFamily="34" charset="-122"/>
                 <a:cs typeface="Calibri" pitchFamily="34" charset="-120"/>
               </a:rPr>
-              <a:t>Describe the overall pattern or trend first</a:t>
-            </a:r>
-            <a:endParaRPr lang="en-US" sz="1400" dirty="0"/>
+              <a:t>Describe the TREND: 'As X increases, Y increases/decreases.'</a:t>
+            </a:r>
+            <a:endParaRPr lang="en-US" sz="1500" dirty="0"/>
           </a:p>
           <a:p>
             <a:pPr marL="342900" indent="-342900">
@@ -2925,7 +3645,7 @@
               <a:buChar char="•"/>
             </a:pPr>
             <a:r>
-              <a:rPr lang="en-US" sz="1400" dirty="0">
+              <a:rPr lang="en-US" sz="1500" dirty="0">
                 <a:solidFill>
                   <a:srgbClr val="3D3A36"/>
                 </a:solidFill>
@@ -2933,9 +3653,9 @@
                 <a:ea typeface="Calibri" pitchFamily="34" charset="-122"/>
                 <a:cs typeface="Calibri" pitchFamily="34" charset="-120"/>
               </a:rPr>
-              <a:t>'As temperature increases, the rate of reaction increases'</a:t>
-            </a:r>
-            <a:endParaRPr lang="en-US" sz="1400" dirty="0"/>
+              <a:t>Use DATA from the graph to support your description.</a:t>
+            </a:r>
+            <a:endParaRPr lang="en-US" sz="1500" dirty="0"/>
           </a:p>
           <a:p>
             <a:pPr marL="342900" indent="-342900">
@@ -2946,7 +3666,7 @@
               <a:buChar char="•"/>
             </a:pPr>
             <a:r>
-              <a:rPr lang="en-US" sz="1400" dirty="0">
+              <a:rPr lang="en-US" sz="1500" dirty="0">
                 <a:solidFill>
                   <a:srgbClr val="3D3A36"/>
                 </a:solidFill>
@@ -2954,9 +3674,9 @@
                 <a:ea typeface="Calibri" pitchFamily="34" charset="-122"/>
                 <a:cs typeface="Calibri" pitchFamily="34" charset="-120"/>
               </a:rPr>
-              <a:t>Use specific data points to support your description</a:t>
-            </a:r>
-            <a:endParaRPr lang="en-US" sz="1400" dirty="0"/>
+              <a:t>Identify any ANOMALIES — results that don't fit the pattern.</a:t>
+            </a:r>
+            <a:endParaRPr lang="en-US" sz="1500" dirty="0"/>
           </a:p>
           <a:p>
             <a:pPr marL="342900" indent="-342900">
@@ -2967,7 +3687,7 @@
               <a:buChar char="•"/>
             </a:pPr>
             <a:r>
-              <a:rPr lang="en-US" sz="1400" dirty="0">
+              <a:rPr lang="en-US" sz="1500" dirty="0">
                 <a:solidFill>
                   <a:srgbClr val="3D3A36"/>
                 </a:solidFill>
@@ -2975,9 +3695,9 @@
                 <a:ea typeface="Calibri" pitchFamily="34" charset="-122"/>
                 <a:cs typeface="Calibri" pitchFamily="34" charset="-120"/>
               </a:rPr>
-              <a:t>Identify any anomalies — points that don't fit the pattern</a:t>
-            </a:r>
-            <a:endParaRPr lang="en-US" sz="1400" dirty="0"/>
+              <a:t>Read values by tracing from the x-axis up and across to the y-axis.</a:t>
+            </a:r>
+            <a:endParaRPr lang="en-US" sz="1500" dirty="0"/>
           </a:p>
           <a:p>
             <a:pPr marL="342900" indent="-342900">
@@ -2988,7 +3708,7 @@
               <a:buChar char="•"/>
             </a:pPr>
             <a:r>
-              <a:rPr lang="en-US" sz="1400" dirty="0">
+              <a:rPr lang="en-US" sz="1500" dirty="0">
                 <a:solidFill>
                   <a:srgbClr val="3D3A36"/>
                 </a:solidFill>
@@ -2996,20 +3716,79 @@
                 <a:ea typeface="Calibri" pitchFamily="34" charset="-122"/>
                 <a:cs typeface="Calibri" pitchFamily="34" charset="-120"/>
               </a:rPr>
-              <a:t>Suggest reasons for anomalies: measurement error, contamination, or a genuine effect</a:t>
-            </a:r>
-            <a:endParaRPr lang="en-US" sz="1400" dirty="0"/>
-          </a:p>
-          <a:p>
-            <a:pPr marL="342900" indent="-342900">
-              <a:spcAft>
-                <a:spcPts val="800"/>
-              </a:spcAft>
-              <a:buSzPct val="100000"/>
-              <a:buChar char="•"/>
+              <a:t>Always refer to the UNITS when quoting values from a graph.</a:t>
+            </a:r>
+            <a:endParaRPr lang="en-US" sz="1500" dirty="0"/>
+          </a:p>
+        </p:txBody>
+      </p:sp>
+      <p:sp>
+        <p:nvSpPr>
+          <p:cNvPr id="7" name="Shape 5"/>
+          <p:cNvSpPr/>
+          <p:nvPr/>
+        </p:nvSpPr>
+        <p:spPr>
+          <a:xfrm>
+            <a:off x="731520" y="4206240"/>
+            <a:ext cx="7680960" cy="640080"/>
+          </a:xfrm>
+          <a:prstGeom prst="rect">
+            <a:avLst/>
+          </a:prstGeom>
+          <a:solidFill>
+            <a:srgbClr val="E8F5F3"/>
+          </a:solidFill>
+          <a:ln/>
+          <a:effectLst>
+            <a:outerShdw sx="100000" sy="100000" kx="0" ky="0" algn="bl" rotWithShape="0" blurRad="50800" dist="25400" dir="8100000">
+              <a:srgbClr val="000000">
+                <a:alpha val="10000"/>
+              </a:srgbClr>
+            </a:outerShdw>
+          </a:effectLst>
+        </p:spPr>
+      </p:sp>
+      <p:sp>
+        <p:nvSpPr>
+          <p:cNvPr id="8" name="Text 6"/>
+          <p:cNvSpPr/>
+          <p:nvPr/>
+        </p:nvSpPr>
+        <p:spPr>
+          <a:xfrm>
+            <a:off x="914400" y="4251960"/>
+            <a:ext cx="7315200" cy="548640"/>
+          </a:xfrm>
+          <a:prstGeom prst="rect">
+            <a:avLst/>
+          </a:prstGeom>
+          <a:noFill/>
+          <a:ln/>
+        </p:spPr>
+        <p:txBody>
+          <a:bodyPr wrap="square" rtlCol="0" anchor="ctr"/>
+          <a:lstStyle/>
+          <a:p>
+            <a:pPr indent="0" marL="0">
+              <a:buNone/>
             </a:pPr>
             <a:r>
-              <a:rPr lang="en-US" sz="1400" dirty="0">
+              <a:rPr lang="en-US" sz="1200" b="1" dirty="0">
+                <a:solidFill>
+                  <a:srgbClr val="2A9D8F"/>
+                </a:solidFill>
+                <a:latin typeface="Calibri" pitchFamily="34" charset="0"/>
+                <a:ea typeface="Calibri" pitchFamily="34" charset="-122"/>
+                <a:cs typeface="Calibri" pitchFamily="34" charset="-120"/>
+              </a:rPr>
+              <a:t>Key Idea: </a:t>
+            </a:r>
+            <a:pPr indent="0" marL="0">
+              <a:buNone/>
+            </a:pPr>
+            <a:r>
+              <a:rPr lang="en-US" sz="1200" i="1" dirty="0">
                 <a:solidFill>
                   <a:srgbClr val="3D3A36"/>
                 </a:solidFill>
@@ -3017,9 +3796,9 @@
                 <a:ea typeface="Calibri" pitchFamily="34" charset="-122"/>
                 <a:cs typeface="Calibri" pitchFamily="34" charset="-120"/>
               </a:rPr>
-              <a:t>A conclusion links the pattern back to your hypothesis</a:t>
-            </a:r>
-            <a:endParaRPr lang="en-US" sz="1400" dirty="0"/>
+              <a:t>In MYP Criterion B, you need to describe AND explain the pattern.</a:t>
+            </a:r>
+            <a:endParaRPr lang="en-US" sz="1200" dirty="0"/>
           </a:p>
         </p:txBody>
       </p:sp>
@@ -3037,7 +3816,7 @@
     <p:bg>
       <p:bgPr>
         <a:solidFill>
-          <a:srgbClr val="1B2A4A"/>
+          <a:srgbClr val="FAF8F5"/>
         </a:solidFill>
       </p:bgPr>
     </p:bg>
@@ -3064,27 +3843,67 @@
         <p:spPr>
           <a:xfrm>
             <a:off x="0" y="0"/>
-            <a:ext cx="109728" cy="5143500"/>
-          </a:xfrm>
-          <a:prstGeom prst="rect">
-            <a:avLst/>
-          </a:prstGeom>
-          <a:solidFill>
-            <a:srgbClr val="E9C46A"/>
-          </a:solidFill>
-          <a:ln/>
-        </p:spPr>
-      </p:sp>
-      <p:sp>
-        <p:nvSpPr>
-          <p:cNvPr id="3" name="Text 1"/>
-          <p:cNvSpPr/>
-          <p:nvPr/>
-        </p:nvSpPr>
-        <p:spPr>
-          <a:xfrm>
-            <a:off x="731520" y="457200"/>
-            <a:ext cx="7772400" cy="731520"/>
+            <a:ext cx="9144000" cy="822960"/>
+          </a:xfrm>
+          <a:prstGeom prst="rect">
+            <a:avLst/>
+          </a:prstGeom>
+          <a:solidFill>
+            <a:srgbClr val="FFFFFF"/>
+          </a:solidFill>
+          <a:ln/>
+        </p:spPr>
+      </p:sp>
+      <p:sp>
+        <p:nvSpPr>
+          <p:cNvPr id="3" name="Shape 1"/>
+          <p:cNvSpPr/>
+          <p:nvPr/>
+        </p:nvSpPr>
+        <p:spPr>
+          <a:xfrm>
+            <a:off x="0" y="804672"/>
+            <a:ext cx="9144000" cy="27432"/>
+          </a:xfrm>
+          <a:prstGeom prst="rect">
+            <a:avLst/>
+          </a:prstGeom>
+          <a:solidFill>
+            <a:srgbClr val="E5E2DC"/>
+          </a:solidFill>
+          <a:ln/>
+        </p:spPr>
+      </p:sp>
+      <p:sp>
+        <p:nvSpPr>
+          <p:cNvPr id="4" name="Shape 2"/>
+          <p:cNvSpPr/>
+          <p:nvPr/>
+        </p:nvSpPr>
+        <p:spPr>
+          <a:xfrm>
+            <a:off x="548640" y="201168"/>
+            <a:ext cx="54864" cy="420624"/>
+          </a:xfrm>
+          <a:prstGeom prst="rect">
+            <a:avLst/>
+          </a:prstGeom>
+          <a:solidFill>
+            <a:srgbClr val="2A9D8F"/>
+          </a:solidFill>
+          <a:ln/>
+        </p:spPr>
+      </p:sp>
+      <p:sp>
+        <p:nvSpPr>
+          <p:cNvPr id="5" name="Text 3"/>
+          <p:cNvSpPr/>
+          <p:nvPr/>
+        </p:nvSpPr>
+        <p:spPr>
+          <a:xfrm>
+            <a:off x="777240" y="137160"/>
+            <a:ext cx="7772400" cy="548640"/>
           </a:xfrm>
           <a:prstGeom prst="rect">
             <a:avLst/>
@@ -3093,14 +3912,1887 @@
           <a:ln/>
         </p:spPr>
         <p:txBody>
-          <a:bodyPr wrap="square" rtlCol="0" anchor="ctr"/>
+          <a:bodyPr wrap="square" lIns="0" tIns="0" rIns="0" bIns="0" rtlCol="0" anchor="ctr"/>
           <a:lstStyle/>
           <a:p>
             <a:pPr indent="0" marL="0">
               <a:buNone/>
             </a:pPr>
             <a:r>
-              <a:rPr lang="en-US" sz="3200" b="1" dirty="0">
+              <a:rPr lang="en-US" sz="2000" b="1" dirty="0">
+                <a:solidFill>
+                  <a:srgbClr val="1B2A4A"/>
+                </a:solidFill>
+                <a:latin typeface="Georgia" pitchFamily="34" charset="0"/>
+                <a:ea typeface="Georgia" pitchFamily="34" charset="-122"/>
+                <a:cs typeface="Georgia" pitchFamily="34" charset="-120"/>
+              </a:rPr>
+              <a:t>Types of Data Tables</a:t>
+            </a:r>
+            <a:endParaRPr lang="en-US" sz="2000" dirty="0"/>
+          </a:p>
+        </p:txBody>
+      </p:sp>
+      <p:graphicFrame>
+        <p:nvGraphicFramePr>
+          <p:cNvPr id="7" name="Table 0"/>
+          <p:cNvGraphicFramePr>
+            <a:graphicFrameLocks noGrp="1"/>
+          </p:cNvGraphicFramePr>
+          <p:nvPr>
+            <p:extLst>
+              <p:ext uri="{D42A27DB-BD31-4B8C-83A1-F6EECF244321}">
+                <p14:modId xmlns:p14="http://schemas.microsoft.com/office/powerpoint/2010/main" val="1579011935"/>
+              </p:ext>
+            </p:extLst>
+          </p:nvPr>
+        </p:nvGraphicFramePr>
+        <p:xfrm>
+          <a:off x="640080" y="1051560"/>
+          <a:ext cx="7863840" cy="914400"/>
+        </p:xfrm>
+        <a:graphic>
+          <a:graphicData uri="http://schemas.openxmlformats.org/drawingml/2006/table">
+            <a:tbl>
+              <a:tblPr/>
+              <a:tblGrid>
+                <a:gridCol w="2621280"/>
+                <a:gridCol w="2621280"/>
+                <a:gridCol w="2621280"/>
+              </a:tblGrid>
+              <a:tr h="502920">
+                <a:tc>
+                  <a:txBody>
+                    <a:bodyPr/>
+                    <a:lstStyle/>
+                    <a:p>
+                      <a:pPr indent="0" marL="0">
+                        <a:buNone/>
+                      </a:pPr>
+                      <a:r>
+                        <a:rPr lang="en-US" sz="1200" b="1" dirty="0">
+                          <a:solidFill>
+                            <a:srgbClr val="FFFFFF"/>
+                          </a:solidFill>
+                          <a:latin typeface="Calibri" pitchFamily="34" charset="0"/>
+                          <a:ea typeface="Calibri" pitchFamily="34" charset="-122"/>
+                          <a:cs typeface="Calibri" pitchFamily="34" charset="-120"/>
+                        </a:rPr>
+                        <a:t>Feature</a:t>
+                      </a:r>
+                      <a:endParaRPr lang="en-US" sz="1200" dirty="0">
+                        <a:latin typeface="Calibri" charset="0"/>
+                        <a:ea typeface="Calibri" charset="0"/>
+                        <a:cs typeface="Calibri" charset="0"/>
+                      </a:endParaRPr>
+                    </a:p>
+                  </a:txBody>
+                  <a:tcPr marL="91440" marR="91440" marT="45720" marB="45720">
+                    <a:lnL w="6350" cap="flat" cmpd="sng" algn="ctr">
+                      <a:solidFill>
+                        <a:srgbClr val="E5E2DC"/>
+                      </a:solidFill>
+                      <a:prstDash val="solid"/>
+                      <a:round/>
+                      <a:headEnd type="none" w="med" len="med"/>
+                      <a:tailEnd type="none" w="med" len="med"/>
+                    </a:lnL>
+                    <a:lnR w="6350" cap="flat" cmpd="sng" algn="ctr">
+                      <a:solidFill>
+                        <a:srgbClr val="E5E2DC"/>
+                      </a:solidFill>
+                      <a:prstDash val="solid"/>
+                      <a:round/>
+                      <a:headEnd type="none" w="med" len="med"/>
+                      <a:tailEnd type="none" w="med" len="med"/>
+                    </a:lnR>
+                    <a:lnT w="6350" cap="flat" cmpd="sng" algn="ctr">
+                      <a:solidFill>
+                        <a:srgbClr val="E5E2DC"/>
+                      </a:solidFill>
+                      <a:prstDash val="solid"/>
+                      <a:round/>
+                      <a:headEnd type="none" w="med" len="med"/>
+                      <a:tailEnd type="none" w="med" len="med"/>
+                    </a:lnT>
+                    <a:lnB w="6350" cap="flat" cmpd="sng" algn="ctr">
+                      <a:solidFill>
+                        <a:srgbClr val="E5E2DC"/>
+                      </a:solidFill>
+                      <a:prstDash val="solid"/>
+                      <a:round/>
+                      <a:headEnd type="none" w="med" len="med"/>
+                      <a:tailEnd type="none" w="med" len="med"/>
+                    </a:lnB>
+                    <a:solidFill>
+                      <a:srgbClr val="2A9D8F"/>
+                    </a:solidFill>
+                  </a:tcPr>
+                </a:tc>
+                <a:tc>
+                  <a:txBody>
+                    <a:bodyPr/>
+                    <a:lstStyle/>
+                    <a:p>
+                      <a:pPr indent="0" marL="0">
+                        <a:buNone/>
+                      </a:pPr>
+                      <a:r>
+                        <a:rPr lang="en-US" sz="1200" b="1" dirty="0">
+                          <a:solidFill>
+                            <a:srgbClr val="FFFFFF"/>
+                          </a:solidFill>
+                          <a:latin typeface="Calibri" pitchFamily="34" charset="0"/>
+                          <a:ea typeface="Calibri" pitchFamily="34" charset="-122"/>
+                          <a:cs typeface="Calibri" pitchFamily="34" charset="-120"/>
+                        </a:rPr>
+                        <a:t>Good Table</a:t>
+                      </a:r>
+                      <a:endParaRPr lang="en-US" sz="1200" dirty="0">
+                        <a:latin typeface="Calibri" charset="0"/>
+                        <a:ea typeface="Calibri" charset="0"/>
+                        <a:cs typeface="Calibri" charset="0"/>
+                      </a:endParaRPr>
+                    </a:p>
+                  </a:txBody>
+                  <a:tcPr marL="91440" marR="91440" marT="45720" marB="45720">
+                    <a:lnL w="6350" cap="flat" cmpd="sng" algn="ctr">
+                      <a:solidFill>
+                        <a:srgbClr val="E5E2DC"/>
+                      </a:solidFill>
+                      <a:prstDash val="solid"/>
+                      <a:round/>
+                      <a:headEnd type="none" w="med" len="med"/>
+                      <a:tailEnd type="none" w="med" len="med"/>
+                    </a:lnL>
+                    <a:lnR w="6350" cap="flat" cmpd="sng" algn="ctr">
+                      <a:solidFill>
+                        <a:srgbClr val="E5E2DC"/>
+                      </a:solidFill>
+                      <a:prstDash val="solid"/>
+                      <a:round/>
+                      <a:headEnd type="none" w="med" len="med"/>
+                      <a:tailEnd type="none" w="med" len="med"/>
+                    </a:lnR>
+                    <a:lnT w="6350" cap="flat" cmpd="sng" algn="ctr">
+                      <a:solidFill>
+                        <a:srgbClr val="E5E2DC"/>
+                      </a:solidFill>
+                      <a:prstDash val="solid"/>
+                      <a:round/>
+                      <a:headEnd type="none" w="med" len="med"/>
+                      <a:tailEnd type="none" w="med" len="med"/>
+                    </a:lnT>
+                    <a:lnB w="6350" cap="flat" cmpd="sng" algn="ctr">
+                      <a:solidFill>
+                        <a:srgbClr val="E5E2DC"/>
+                      </a:solidFill>
+                      <a:prstDash val="solid"/>
+                      <a:round/>
+                      <a:headEnd type="none" w="med" len="med"/>
+                      <a:tailEnd type="none" w="med" len="med"/>
+                    </a:lnB>
+                    <a:solidFill>
+                      <a:srgbClr val="2A9D8F"/>
+                    </a:solidFill>
+                  </a:tcPr>
+                </a:tc>
+                <a:tc>
+                  <a:txBody>
+                    <a:bodyPr/>
+                    <a:lstStyle/>
+                    <a:p>
+                      <a:pPr indent="0" marL="0">
+                        <a:buNone/>
+                      </a:pPr>
+                      <a:r>
+                        <a:rPr lang="en-US" sz="1200" b="1" dirty="0">
+                          <a:solidFill>
+                            <a:srgbClr val="FFFFFF"/>
+                          </a:solidFill>
+                          <a:latin typeface="Calibri" pitchFamily="34" charset="0"/>
+                          <a:ea typeface="Calibri" pitchFamily="34" charset="-122"/>
+                          <a:cs typeface="Calibri" pitchFamily="34" charset="-120"/>
+                        </a:rPr>
+                        <a:t>Poor Table</a:t>
+                      </a:r>
+                      <a:endParaRPr lang="en-US" sz="1200" dirty="0">
+                        <a:latin typeface="Calibri" charset="0"/>
+                        <a:ea typeface="Calibri" charset="0"/>
+                        <a:cs typeface="Calibri" charset="0"/>
+                      </a:endParaRPr>
+                    </a:p>
+                  </a:txBody>
+                  <a:tcPr marL="91440" marR="91440" marT="45720" marB="45720">
+                    <a:lnL w="6350" cap="flat" cmpd="sng" algn="ctr">
+                      <a:solidFill>
+                        <a:srgbClr val="E5E2DC"/>
+                      </a:solidFill>
+                      <a:prstDash val="solid"/>
+                      <a:round/>
+                      <a:headEnd type="none" w="med" len="med"/>
+                      <a:tailEnd type="none" w="med" len="med"/>
+                    </a:lnL>
+                    <a:lnR w="6350" cap="flat" cmpd="sng" algn="ctr">
+                      <a:solidFill>
+                        <a:srgbClr val="E5E2DC"/>
+                      </a:solidFill>
+                      <a:prstDash val="solid"/>
+                      <a:round/>
+                      <a:headEnd type="none" w="med" len="med"/>
+                      <a:tailEnd type="none" w="med" len="med"/>
+                    </a:lnR>
+                    <a:lnT w="6350" cap="flat" cmpd="sng" algn="ctr">
+                      <a:solidFill>
+                        <a:srgbClr val="E5E2DC"/>
+                      </a:solidFill>
+                      <a:prstDash val="solid"/>
+                      <a:round/>
+                      <a:headEnd type="none" w="med" len="med"/>
+                      <a:tailEnd type="none" w="med" len="med"/>
+                    </a:lnT>
+                    <a:lnB w="6350" cap="flat" cmpd="sng" algn="ctr">
+                      <a:solidFill>
+                        <a:srgbClr val="E5E2DC"/>
+                      </a:solidFill>
+                      <a:prstDash val="solid"/>
+                      <a:round/>
+                      <a:headEnd type="none" w="med" len="med"/>
+                      <a:tailEnd type="none" w="med" len="med"/>
+                    </a:lnB>
+                    <a:solidFill>
+                      <a:srgbClr val="2A9D8F"/>
+                    </a:solidFill>
+                  </a:tcPr>
+                </a:tc>
+              </a:tr>
+              <a:tr h="502920">
+                <a:tc>
+                  <a:txBody>
+                    <a:bodyPr/>
+                    <a:lstStyle/>
+                    <a:p>
+                      <a:pPr indent="0" marL="0">
+                        <a:buNone/>
+                      </a:pPr>
+                      <a:r>
+                        <a:rPr lang="en-US" sz="1200" dirty="0">
+                          <a:solidFill>
+                            <a:srgbClr val="3D3A36"/>
+                          </a:solidFill>
+                          <a:latin typeface="Calibri" pitchFamily="34" charset="0"/>
+                          <a:ea typeface="Calibri" pitchFamily="34" charset="-122"/>
+                          <a:cs typeface="Calibri" pitchFamily="34" charset="-120"/>
+                        </a:rPr>
+                        <a:t>Headings</a:t>
+                      </a:r>
+                      <a:endParaRPr lang="en-US" sz="1200" dirty="0">
+                        <a:latin typeface="Calibri" charset="0"/>
+                        <a:ea typeface="Calibri" charset="0"/>
+                        <a:cs typeface="Calibri" charset="0"/>
+                      </a:endParaRPr>
+                    </a:p>
+                  </a:txBody>
+                  <a:tcPr marL="91440" marR="91440" marT="45720" marB="45720">
+                    <a:lnL w="6350" cap="flat" cmpd="sng" algn="ctr">
+                      <a:solidFill>
+                        <a:srgbClr val="E5E2DC"/>
+                      </a:solidFill>
+                      <a:prstDash val="solid"/>
+                      <a:round/>
+                      <a:headEnd type="none" w="med" len="med"/>
+                      <a:tailEnd type="none" w="med" len="med"/>
+                    </a:lnL>
+                    <a:lnR w="6350" cap="flat" cmpd="sng" algn="ctr">
+                      <a:solidFill>
+                        <a:srgbClr val="E5E2DC"/>
+                      </a:solidFill>
+                      <a:prstDash val="solid"/>
+                      <a:round/>
+                      <a:headEnd type="none" w="med" len="med"/>
+                      <a:tailEnd type="none" w="med" len="med"/>
+                    </a:lnR>
+                    <a:lnT w="6350" cap="flat" cmpd="sng" algn="ctr">
+                      <a:solidFill>
+                        <a:srgbClr val="E5E2DC"/>
+                      </a:solidFill>
+                      <a:prstDash val="solid"/>
+                      <a:round/>
+                      <a:headEnd type="none" w="med" len="med"/>
+                      <a:tailEnd type="none" w="med" len="med"/>
+                    </a:lnT>
+                    <a:lnB w="6350" cap="flat" cmpd="sng" algn="ctr">
+                      <a:solidFill>
+                        <a:srgbClr val="E5E2DC"/>
+                      </a:solidFill>
+                      <a:prstDash val="solid"/>
+                      <a:round/>
+                      <a:headEnd type="none" w="med" len="med"/>
+                      <a:tailEnd type="none" w="med" len="med"/>
+                    </a:lnB>
+                    <a:solidFill>
+                      <a:srgbClr val="FFFFFF"/>
+                    </a:solidFill>
+                  </a:tcPr>
+                </a:tc>
+                <a:tc>
+                  <a:txBody>
+                    <a:bodyPr/>
+                    <a:lstStyle/>
+                    <a:p>
+                      <a:pPr indent="0" marL="0">
+                        <a:buNone/>
+                      </a:pPr>
+                      <a:r>
+                        <a:rPr lang="en-US" sz="1200" dirty="0">
+                          <a:solidFill>
+                            <a:srgbClr val="3D3A36"/>
+                          </a:solidFill>
+                          <a:latin typeface="Calibri" pitchFamily="34" charset="0"/>
+                          <a:ea typeface="Calibri" pitchFamily="34" charset="-122"/>
+                          <a:cs typeface="Calibri" pitchFamily="34" charset="-120"/>
+                        </a:rPr>
+                        <a:t>Clear with units (e.g. Mass / g)</a:t>
+                      </a:r>
+                      <a:endParaRPr lang="en-US" sz="1200" dirty="0">
+                        <a:latin typeface="Calibri" charset="0"/>
+                        <a:ea typeface="Calibri" charset="0"/>
+                        <a:cs typeface="Calibri" charset="0"/>
+                      </a:endParaRPr>
+                    </a:p>
+                  </a:txBody>
+                  <a:tcPr marL="91440" marR="91440" marT="45720" marB="45720">
+                    <a:lnL w="6350" cap="flat" cmpd="sng" algn="ctr">
+                      <a:solidFill>
+                        <a:srgbClr val="E5E2DC"/>
+                      </a:solidFill>
+                      <a:prstDash val="solid"/>
+                      <a:round/>
+                      <a:headEnd type="none" w="med" len="med"/>
+                      <a:tailEnd type="none" w="med" len="med"/>
+                    </a:lnL>
+                    <a:lnR w="6350" cap="flat" cmpd="sng" algn="ctr">
+                      <a:solidFill>
+                        <a:srgbClr val="E5E2DC"/>
+                      </a:solidFill>
+                      <a:prstDash val="solid"/>
+                      <a:round/>
+                      <a:headEnd type="none" w="med" len="med"/>
+                      <a:tailEnd type="none" w="med" len="med"/>
+                    </a:lnR>
+                    <a:lnT w="6350" cap="flat" cmpd="sng" algn="ctr">
+                      <a:solidFill>
+                        <a:srgbClr val="E5E2DC"/>
+                      </a:solidFill>
+                      <a:prstDash val="solid"/>
+                      <a:round/>
+                      <a:headEnd type="none" w="med" len="med"/>
+                      <a:tailEnd type="none" w="med" len="med"/>
+                    </a:lnT>
+                    <a:lnB w="6350" cap="flat" cmpd="sng" algn="ctr">
+                      <a:solidFill>
+                        <a:srgbClr val="E5E2DC"/>
+                      </a:solidFill>
+                      <a:prstDash val="solid"/>
+                      <a:round/>
+                      <a:headEnd type="none" w="med" len="med"/>
+                      <a:tailEnd type="none" w="med" len="med"/>
+                    </a:lnB>
+                    <a:solidFill>
+                      <a:srgbClr val="FFFFFF"/>
+                    </a:solidFill>
+                  </a:tcPr>
+                </a:tc>
+                <a:tc>
+                  <a:txBody>
+                    <a:bodyPr/>
+                    <a:lstStyle/>
+                    <a:p>
+                      <a:pPr indent="0" marL="0">
+                        <a:buNone/>
+                      </a:pPr>
+                      <a:r>
+                        <a:rPr lang="en-US" sz="1200" dirty="0">
+                          <a:solidFill>
+                            <a:srgbClr val="3D3A36"/>
+                          </a:solidFill>
+                          <a:latin typeface="Calibri" pitchFamily="34" charset="0"/>
+                          <a:ea typeface="Calibri" pitchFamily="34" charset="-122"/>
+                          <a:cs typeface="Calibri" pitchFamily="34" charset="-120"/>
+                        </a:rPr>
+                        <a:t>Missing units</a:t>
+                      </a:r>
+                      <a:endParaRPr lang="en-US" sz="1200" dirty="0">
+                        <a:latin typeface="Calibri" charset="0"/>
+                        <a:ea typeface="Calibri" charset="0"/>
+                        <a:cs typeface="Calibri" charset="0"/>
+                      </a:endParaRPr>
+                    </a:p>
+                  </a:txBody>
+                  <a:tcPr marL="91440" marR="91440" marT="45720" marB="45720">
+                    <a:lnL w="6350" cap="flat" cmpd="sng" algn="ctr">
+                      <a:solidFill>
+                        <a:srgbClr val="E5E2DC"/>
+                      </a:solidFill>
+                      <a:prstDash val="solid"/>
+                      <a:round/>
+                      <a:headEnd type="none" w="med" len="med"/>
+                      <a:tailEnd type="none" w="med" len="med"/>
+                    </a:lnL>
+                    <a:lnR w="6350" cap="flat" cmpd="sng" algn="ctr">
+                      <a:solidFill>
+                        <a:srgbClr val="E5E2DC"/>
+                      </a:solidFill>
+                      <a:prstDash val="solid"/>
+                      <a:round/>
+                      <a:headEnd type="none" w="med" len="med"/>
+                      <a:tailEnd type="none" w="med" len="med"/>
+                    </a:lnR>
+                    <a:lnT w="6350" cap="flat" cmpd="sng" algn="ctr">
+                      <a:solidFill>
+                        <a:srgbClr val="E5E2DC"/>
+                      </a:solidFill>
+                      <a:prstDash val="solid"/>
+                      <a:round/>
+                      <a:headEnd type="none" w="med" len="med"/>
+                      <a:tailEnd type="none" w="med" len="med"/>
+                    </a:lnT>
+                    <a:lnB w="6350" cap="flat" cmpd="sng" algn="ctr">
+                      <a:solidFill>
+                        <a:srgbClr val="E5E2DC"/>
+                      </a:solidFill>
+                      <a:prstDash val="solid"/>
+                      <a:round/>
+                      <a:headEnd type="none" w="med" len="med"/>
+                      <a:tailEnd type="none" w="med" len="med"/>
+                    </a:lnB>
+                    <a:solidFill>
+                      <a:srgbClr val="FFFFFF"/>
+                    </a:solidFill>
+                  </a:tcPr>
+                </a:tc>
+              </a:tr>
+              <a:tr h="502920">
+                <a:tc>
+                  <a:txBody>
+                    <a:bodyPr/>
+                    <a:lstStyle/>
+                    <a:p>
+                      <a:pPr indent="0" marL="0">
+                        <a:buNone/>
+                      </a:pPr>
+                      <a:r>
+                        <a:rPr lang="en-US" sz="1200" dirty="0">
+                          <a:solidFill>
+                            <a:srgbClr val="3D3A36"/>
+                          </a:solidFill>
+                          <a:latin typeface="Calibri" pitchFamily="34" charset="0"/>
+                          <a:ea typeface="Calibri" pitchFamily="34" charset="-122"/>
+                          <a:cs typeface="Calibri" pitchFamily="34" charset="-120"/>
+                        </a:rPr>
+                        <a:t>Values</a:t>
+                      </a:r>
+                      <a:endParaRPr lang="en-US" sz="1200" dirty="0">
+                        <a:latin typeface="Calibri" charset="0"/>
+                        <a:ea typeface="Calibri" charset="0"/>
+                        <a:cs typeface="Calibri" charset="0"/>
+                      </a:endParaRPr>
+                    </a:p>
+                  </a:txBody>
+                  <a:tcPr marL="91440" marR="91440" marT="45720" marB="45720">
+                    <a:lnL w="6350" cap="flat" cmpd="sng" algn="ctr">
+                      <a:solidFill>
+                        <a:srgbClr val="E5E2DC"/>
+                      </a:solidFill>
+                      <a:prstDash val="solid"/>
+                      <a:round/>
+                      <a:headEnd type="none" w="med" len="med"/>
+                      <a:tailEnd type="none" w="med" len="med"/>
+                    </a:lnL>
+                    <a:lnR w="6350" cap="flat" cmpd="sng" algn="ctr">
+                      <a:solidFill>
+                        <a:srgbClr val="E5E2DC"/>
+                      </a:solidFill>
+                      <a:prstDash val="solid"/>
+                      <a:round/>
+                      <a:headEnd type="none" w="med" len="med"/>
+                      <a:tailEnd type="none" w="med" len="med"/>
+                    </a:lnR>
+                    <a:lnT w="6350" cap="flat" cmpd="sng" algn="ctr">
+                      <a:solidFill>
+                        <a:srgbClr val="E5E2DC"/>
+                      </a:solidFill>
+                      <a:prstDash val="solid"/>
+                      <a:round/>
+                      <a:headEnd type="none" w="med" len="med"/>
+                      <a:tailEnd type="none" w="med" len="med"/>
+                    </a:lnT>
+                    <a:lnB w="6350" cap="flat" cmpd="sng" algn="ctr">
+                      <a:solidFill>
+                        <a:srgbClr val="E5E2DC"/>
+                      </a:solidFill>
+                      <a:prstDash val="solid"/>
+                      <a:round/>
+                      <a:headEnd type="none" w="med" len="med"/>
+                      <a:tailEnd type="none" w="med" len="med"/>
+                    </a:lnB>
+                    <a:solidFill>
+                      <a:srgbClr val="F8F6F3"/>
+                    </a:solidFill>
+                  </a:tcPr>
+                </a:tc>
+                <a:tc>
+                  <a:txBody>
+                    <a:bodyPr/>
+                    <a:lstStyle/>
+                    <a:p>
+                      <a:pPr indent="0" marL="0">
+                        <a:buNone/>
+                      </a:pPr>
+                      <a:r>
+                        <a:rPr lang="en-US" sz="1200" dirty="0">
+                          <a:solidFill>
+                            <a:srgbClr val="3D3A36"/>
+                          </a:solidFill>
+                          <a:latin typeface="Calibri" pitchFamily="34" charset="0"/>
+                          <a:ea typeface="Calibri" pitchFamily="34" charset="-122"/>
+                          <a:cs typeface="Calibri" pitchFamily="34" charset="-120"/>
+                        </a:rPr>
+                        <a:t>Neat, aligned numbers</a:t>
+                      </a:r>
+                      <a:endParaRPr lang="en-US" sz="1200" dirty="0">
+                        <a:latin typeface="Calibri" charset="0"/>
+                        <a:ea typeface="Calibri" charset="0"/>
+                        <a:cs typeface="Calibri" charset="0"/>
+                      </a:endParaRPr>
+                    </a:p>
+                  </a:txBody>
+                  <a:tcPr marL="91440" marR="91440" marT="45720" marB="45720">
+                    <a:lnL w="6350" cap="flat" cmpd="sng" algn="ctr">
+                      <a:solidFill>
+                        <a:srgbClr val="E5E2DC"/>
+                      </a:solidFill>
+                      <a:prstDash val="solid"/>
+                      <a:round/>
+                      <a:headEnd type="none" w="med" len="med"/>
+                      <a:tailEnd type="none" w="med" len="med"/>
+                    </a:lnL>
+                    <a:lnR w="6350" cap="flat" cmpd="sng" algn="ctr">
+                      <a:solidFill>
+                        <a:srgbClr val="E5E2DC"/>
+                      </a:solidFill>
+                      <a:prstDash val="solid"/>
+                      <a:round/>
+                      <a:headEnd type="none" w="med" len="med"/>
+                      <a:tailEnd type="none" w="med" len="med"/>
+                    </a:lnR>
+                    <a:lnT w="6350" cap="flat" cmpd="sng" algn="ctr">
+                      <a:solidFill>
+                        <a:srgbClr val="E5E2DC"/>
+                      </a:solidFill>
+                      <a:prstDash val="solid"/>
+                      <a:round/>
+                      <a:headEnd type="none" w="med" len="med"/>
+                      <a:tailEnd type="none" w="med" len="med"/>
+                    </a:lnT>
+                    <a:lnB w="6350" cap="flat" cmpd="sng" algn="ctr">
+                      <a:solidFill>
+                        <a:srgbClr val="E5E2DC"/>
+                      </a:solidFill>
+                      <a:prstDash val="solid"/>
+                      <a:round/>
+                      <a:headEnd type="none" w="med" len="med"/>
+                      <a:tailEnd type="none" w="med" len="med"/>
+                    </a:lnB>
+                    <a:solidFill>
+                      <a:srgbClr val="F8F6F3"/>
+                    </a:solidFill>
+                  </a:tcPr>
+                </a:tc>
+                <a:tc>
+                  <a:txBody>
+                    <a:bodyPr/>
+                    <a:lstStyle/>
+                    <a:p>
+                      <a:pPr indent="0" marL="0">
+                        <a:buNone/>
+                      </a:pPr>
+                      <a:r>
+                        <a:rPr lang="en-US" sz="1200" dirty="0">
+                          <a:solidFill>
+                            <a:srgbClr val="3D3A36"/>
+                          </a:solidFill>
+                          <a:latin typeface="Calibri" pitchFamily="34" charset="0"/>
+                          <a:ea typeface="Calibri" pitchFamily="34" charset="-122"/>
+                          <a:cs typeface="Calibri" pitchFamily="34" charset="-120"/>
+                        </a:rPr>
+                        <a:t>Messy, scattered</a:t>
+                      </a:r>
+                      <a:endParaRPr lang="en-US" sz="1200" dirty="0">
+                        <a:latin typeface="Calibri" charset="0"/>
+                        <a:ea typeface="Calibri" charset="0"/>
+                        <a:cs typeface="Calibri" charset="0"/>
+                      </a:endParaRPr>
+                    </a:p>
+                  </a:txBody>
+                  <a:tcPr marL="91440" marR="91440" marT="45720" marB="45720">
+                    <a:lnL w="6350" cap="flat" cmpd="sng" algn="ctr">
+                      <a:solidFill>
+                        <a:srgbClr val="E5E2DC"/>
+                      </a:solidFill>
+                      <a:prstDash val="solid"/>
+                      <a:round/>
+                      <a:headEnd type="none" w="med" len="med"/>
+                      <a:tailEnd type="none" w="med" len="med"/>
+                    </a:lnL>
+                    <a:lnR w="6350" cap="flat" cmpd="sng" algn="ctr">
+                      <a:solidFill>
+                        <a:srgbClr val="E5E2DC"/>
+                      </a:solidFill>
+                      <a:prstDash val="solid"/>
+                      <a:round/>
+                      <a:headEnd type="none" w="med" len="med"/>
+                      <a:tailEnd type="none" w="med" len="med"/>
+                    </a:lnR>
+                    <a:lnT w="6350" cap="flat" cmpd="sng" algn="ctr">
+                      <a:solidFill>
+                        <a:srgbClr val="E5E2DC"/>
+                      </a:solidFill>
+                      <a:prstDash val="solid"/>
+                      <a:round/>
+                      <a:headEnd type="none" w="med" len="med"/>
+                      <a:tailEnd type="none" w="med" len="med"/>
+                    </a:lnT>
+                    <a:lnB w="6350" cap="flat" cmpd="sng" algn="ctr">
+                      <a:solidFill>
+                        <a:srgbClr val="E5E2DC"/>
+                      </a:solidFill>
+                      <a:prstDash val="solid"/>
+                      <a:round/>
+                      <a:headEnd type="none" w="med" len="med"/>
+                      <a:tailEnd type="none" w="med" len="med"/>
+                    </a:lnB>
+                    <a:solidFill>
+                      <a:srgbClr val="F8F6F3"/>
+                    </a:solidFill>
+                  </a:tcPr>
+                </a:tc>
+              </a:tr>
+              <a:tr h="502920">
+                <a:tc>
+                  <a:txBody>
+                    <a:bodyPr/>
+                    <a:lstStyle/>
+                    <a:p>
+                      <a:pPr indent="0" marL="0">
+                        <a:buNone/>
+                      </a:pPr>
+                      <a:r>
+                        <a:rPr lang="en-US" sz="1200" dirty="0">
+                          <a:solidFill>
+                            <a:srgbClr val="3D3A36"/>
+                          </a:solidFill>
+                          <a:latin typeface="Calibri" pitchFamily="34" charset="0"/>
+                          <a:ea typeface="Calibri" pitchFamily="34" charset="-122"/>
+                          <a:cs typeface="Calibri" pitchFamily="34" charset="-120"/>
+                        </a:rPr>
+                        <a:t>Repeats</a:t>
+                      </a:r>
+                      <a:endParaRPr lang="en-US" sz="1200" dirty="0">
+                        <a:latin typeface="Calibri" charset="0"/>
+                        <a:ea typeface="Calibri" charset="0"/>
+                        <a:cs typeface="Calibri" charset="0"/>
+                      </a:endParaRPr>
+                    </a:p>
+                  </a:txBody>
+                  <a:tcPr marL="91440" marR="91440" marT="45720" marB="45720">
+                    <a:lnL w="6350" cap="flat" cmpd="sng" algn="ctr">
+                      <a:solidFill>
+                        <a:srgbClr val="E5E2DC"/>
+                      </a:solidFill>
+                      <a:prstDash val="solid"/>
+                      <a:round/>
+                      <a:headEnd type="none" w="med" len="med"/>
+                      <a:tailEnd type="none" w="med" len="med"/>
+                    </a:lnL>
+                    <a:lnR w="6350" cap="flat" cmpd="sng" algn="ctr">
+                      <a:solidFill>
+                        <a:srgbClr val="E5E2DC"/>
+                      </a:solidFill>
+                      <a:prstDash val="solid"/>
+                      <a:round/>
+                      <a:headEnd type="none" w="med" len="med"/>
+                      <a:tailEnd type="none" w="med" len="med"/>
+                    </a:lnR>
+                    <a:lnT w="6350" cap="flat" cmpd="sng" algn="ctr">
+                      <a:solidFill>
+                        <a:srgbClr val="E5E2DC"/>
+                      </a:solidFill>
+                      <a:prstDash val="solid"/>
+                      <a:round/>
+                      <a:headEnd type="none" w="med" len="med"/>
+                      <a:tailEnd type="none" w="med" len="med"/>
+                    </a:lnT>
+                    <a:lnB w="6350" cap="flat" cmpd="sng" algn="ctr">
+                      <a:solidFill>
+                        <a:srgbClr val="E5E2DC"/>
+                      </a:solidFill>
+                      <a:prstDash val="solid"/>
+                      <a:round/>
+                      <a:headEnd type="none" w="med" len="med"/>
+                      <a:tailEnd type="none" w="med" len="med"/>
+                    </a:lnB>
+                    <a:solidFill>
+                      <a:srgbClr val="FFFFFF"/>
+                    </a:solidFill>
+                  </a:tcPr>
+                </a:tc>
+                <a:tc>
+                  <a:txBody>
+                    <a:bodyPr/>
+                    <a:lstStyle/>
+                    <a:p>
+                      <a:pPr indent="0" marL="0">
+                        <a:buNone/>
+                      </a:pPr>
+                      <a:r>
+                        <a:rPr lang="en-US" sz="1200" dirty="0">
+                          <a:solidFill>
+                            <a:srgbClr val="3D3A36"/>
+                          </a:solidFill>
+                          <a:latin typeface="Calibri" pitchFamily="34" charset="0"/>
+                          <a:ea typeface="Calibri" pitchFamily="34" charset="-122"/>
+                          <a:cs typeface="Calibri" pitchFamily="34" charset="-120"/>
+                        </a:rPr>
+                        <a:t>Space for 3 trials + mean</a:t>
+                      </a:r>
+                      <a:endParaRPr lang="en-US" sz="1200" dirty="0">
+                        <a:latin typeface="Calibri" charset="0"/>
+                        <a:ea typeface="Calibri" charset="0"/>
+                        <a:cs typeface="Calibri" charset="0"/>
+                      </a:endParaRPr>
+                    </a:p>
+                  </a:txBody>
+                  <a:tcPr marL="91440" marR="91440" marT="45720" marB="45720">
+                    <a:lnL w="6350" cap="flat" cmpd="sng" algn="ctr">
+                      <a:solidFill>
+                        <a:srgbClr val="E5E2DC"/>
+                      </a:solidFill>
+                      <a:prstDash val="solid"/>
+                      <a:round/>
+                      <a:headEnd type="none" w="med" len="med"/>
+                      <a:tailEnd type="none" w="med" len="med"/>
+                    </a:lnL>
+                    <a:lnR w="6350" cap="flat" cmpd="sng" algn="ctr">
+                      <a:solidFill>
+                        <a:srgbClr val="E5E2DC"/>
+                      </a:solidFill>
+                      <a:prstDash val="solid"/>
+                      <a:round/>
+                      <a:headEnd type="none" w="med" len="med"/>
+                      <a:tailEnd type="none" w="med" len="med"/>
+                    </a:lnR>
+                    <a:lnT w="6350" cap="flat" cmpd="sng" algn="ctr">
+                      <a:solidFill>
+                        <a:srgbClr val="E5E2DC"/>
+                      </a:solidFill>
+                      <a:prstDash val="solid"/>
+                      <a:round/>
+                      <a:headEnd type="none" w="med" len="med"/>
+                      <a:tailEnd type="none" w="med" len="med"/>
+                    </a:lnT>
+                    <a:lnB w="6350" cap="flat" cmpd="sng" algn="ctr">
+                      <a:solidFill>
+                        <a:srgbClr val="E5E2DC"/>
+                      </a:solidFill>
+                      <a:prstDash val="solid"/>
+                      <a:round/>
+                      <a:headEnd type="none" w="med" len="med"/>
+                      <a:tailEnd type="none" w="med" len="med"/>
+                    </a:lnB>
+                    <a:solidFill>
+                      <a:srgbClr val="FFFFFF"/>
+                    </a:solidFill>
+                  </a:tcPr>
+                </a:tc>
+                <a:tc>
+                  <a:txBody>
+                    <a:bodyPr/>
+                    <a:lstStyle/>
+                    <a:p>
+                      <a:pPr indent="0" marL="0">
+                        <a:buNone/>
+                      </a:pPr>
+                      <a:r>
+                        <a:rPr lang="en-US" sz="1200" dirty="0">
+                          <a:solidFill>
+                            <a:srgbClr val="3D3A36"/>
+                          </a:solidFill>
+                          <a:latin typeface="Calibri" pitchFamily="34" charset="0"/>
+                          <a:ea typeface="Calibri" pitchFamily="34" charset="-122"/>
+                          <a:cs typeface="Calibri" pitchFamily="34" charset="-120"/>
+                        </a:rPr>
+                        <a:t>Only 1 trial</a:t>
+                      </a:r>
+                      <a:endParaRPr lang="en-US" sz="1200" dirty="0">
+                        <a:latin typeface="Calibri" charset="0"/>
+                        <a:ea typeface="Calibri" charset="0"/>
+                        <a:cs typeface="Calibri" charset="0"/>
+                      </a:endParaRPr>
+                    </a:p>
+                  </a:txBody>
+                  <a:tcPr marL="91440" marR="91440" marT="45720" marB="45720">
+                    <a:lnL w="6350" cap="flat" cmpd="sng" algn="ctr">
+                      <a:solidFill>
+                        <a:srgbClr val="E5E2DC"/>
+                      </a:solidFill>
+                      <a:prstDash val="solid"/>
+                      <a:round/>
+                      <a:headEnd type="none" w="med" len="med"/>
+                      <a:tailEnd type="none" w="med" len="med"/>
+                    </a:lnL>
+                    <a:lnR w="6350" cap="flat" cmpd="sng" algn="ctr">
+                      <a:solidFill>
+                        <a:srgbClr val="E5E2DC"/>
+                      </a:solidFill>
+                      <a:prstDash val="solid"/>
+                      <a:round/>
+                      <a:headEnd type="none" w="med" len="med"/>
+                      <a:tailEnd type="none" w="med" len="med"/>
+                    </a:lnR>
+                    <a:lnT w="6350" cap="flat" cmpd="sng" algn="ctr">
+                      <a:solidFill>
+                        <a:srgbClr val="E5E2DC"/>
+                      </a:solidFill>
+                      <a:prstDash val="solid"/>
+                      <a:round/>
+                      <a:headEnd type="none" w="med" len="med"/>
+                      <a:tailEnd type="none" w="med" len="med"/>
+                    </a:lnT>
+                    <a:lnB w="6350" cap="flat" cmpd="sng" algn="ctr">
+                      <a:solidFill>
+                        <a:srgbClr val="E5E2DC"/>
+                      </a:solidFill>
+                      <a:prstDash val="solid"/>
+                      <a:round/>
+                      <a:headEnd type="none" w="med" len="med"/>
+                      <a:tailEnd type="none" w="med" len="med"/>
+                    </a:lnB>
+                    <a:solidFill>
+                      <a:srgbClr val="FFFFFF"/>
+                    </a:solidFill>
+                  </a:tcPr>
+                </a:tc>
+              </a:tr>
+              <a:tr h="502920">
+                <a:tc>
+                  <a:txBody>
+                    <a:bodyPr/>
+                    <a:lstStyle/>
+                    <a:p>
+                      <a:pPr indent="0" marL="0">
+                        <a:buNone/>
+                      </a:pPr>
+                      <a:r>
+                        <a:rPr lang="en-US" sz="1200" dirty="0">
+                          <a:solidFill>
+                            <a:srgbClr val="3D3A36"/>
+                          </a:solidFill>
+                          <a:latin typeface="Calibri" pitchFamily="34" charset="0"/>
+                          <a:ea typeface="Calibri" pitchFamily="34" charset="-122"/>
+                          <a:cs typeface="Calibri" pitchFamily="34" charset="-120"/>
+                        </a:rPr>
+                        <a:t>Organisation</a:t>
+                      </a:r>
+                      <a:endParaRPr lang="en-US" sz="1200" dirty="0">
+                        <a:latin typeface="Calibri" charset="0"/>
+                        <a:ea typeface="Calibri" charset="0"/>
+                        <a:cs typeface="Calibri" charset="0"/>
+                      </a:endParaRPr>
+                    </a:p>
+                  </a:txBody>
+                  <a:tcPr marL="91440" marR="91440" marT="45720" marB="45720">
+                    <a:lnL w="6350" cap="flat" cmpd="sng" algn="ctr">
+                      <a:solidFill>
+                        <a:srgbClr val="E5E2DC"/>
+                      </a:solidFill>
+                      <a:prstDash val="solid"/>
+                      <a:round/>
+                      <a:headEnd type="none" w="med" len="med"/>
+                      <a:tailEnd type="none" w="med" len="med"/>
+                    </a:lnL>
+                    <a:lnR w="6350" cap="flat" cmpd="sng" algn="ctr">
+                      <a:solidFill>
+                        <a:srgbClr val="E5E2DC"/>
+                      </a:solidFill>
+                      <a:prstDash val="solid"/>
+                      <a:round/>
+                      <a:headEnd type="none" w="med" len="med"/>
+                      <a:tailEnd type="none" w="med" len="med"/>
+                    </a:lnR>
+                    <a:lnT w="6350" cap="flat" cmpd="sng" algn="ctr">
+                      <a:solidFill>
+                        <a:srgbClr val="E5E2DC"/>
+                      </a:solidFill>
+                      <a:prstDash val="solid"/>
+                      <a:round/>
+                      <a:headEnd type="none" w="med" len="med"/>
+                      <a:tailEnd type="none" w="med" len="med"/>
+                    </a:lnT>
+                    <a:lnB w="6350" cap="flat" cmpd="sng" algn="ctr">
+                      <a:solidFill>
+                        <a:srgbClr val="E5E2DC"/>
+                      </a:solidFill>
+                      <a:prstDash val="solid"/>
+                      <a:round/>
+                      <a:headEnd type="none" w="med" len="med"/>
+                      <a:tailEnd type="none" w="med" len="med"/>
+                    </a:lnB>
+                    <a:solidFill>
+                      <a:srgbClr val="F8F6F3"/>
+                    </a:solidFill>
+                  </a:tcPr>
+                </a:tc>
+                <a:tc>
+                  <a:txBody>
+                    <a:bodyPr/>
+                    <a:lstStyle/>
+                    <a:p>
+                      <a:pPr indent="0" marL="0">
+                        <a:buNone/>
+                      </a:pPr>
+                      <a:r>
+                        <a:rPr lang="en-US" sz="1200" dirty="0">
+                          <a:solidFill>
+                            <a:srgbClr val="3D3A36"/>
+                          </a:solidFill>
+                          <a:latin typeface="Calibri" pitchFamily="34" charset="0"/>
+                          <a:ea typeface="Calibri" pitchFamily="34" charset="-122"/>
+                          <a:cs typeface="Calibri" pitchFamily="34" charset="-120"/>
+                        </a:rPr>
+                        <a:t>IV in left column, DV in right</a:t>
+                      </a:r>
+                      <a:endParaRPr lang="en-US" sz="1200" dirty="0">
+                        <a:latin typeface="Calibri" charset="0"/>
+                        <a:ea typeface="Calibri" charset="0"/>
+                        <a:cs typeface="Calibri" charset="0"/>
+                      </a:endParaRPr>
+                    </a:p>
+                  </a:txBody>
+                  <a:tcPr marL="91440" marR="91440" marT="45720" marB="45720">
+                    <a:lnL w="6350" cap="flat" cmpd="sng" algn="ctr">
+                      <a:solidFill>
+                        <a:srgbClr val="E5E2DC"/>
+                      </a:solidFill>
+                      <a:prstDash val="solid"/>
+                      <a:round/>
+                      <a:headEnd type="none" w="med" len="med"/>
+                      <a:tailEnd type="none" w="med" len="med"/>
+                    </a:lnL>
+                    <a:lnR w="6350" cap="flat" cmpd="sng" algn="ctr">
+                      <a:solidFill>
+                        <a:srgbClr val="E5E2DC"/>
+                      </a:solidFill>
+                      <a:prstDash val="solid"/>
+                      <a:round/>
+                      <a:headEnd type="none" w="med" len="med"/>
+                      <a:tailEnd type="none" w="med" len="med"/>
+                    </a:lnR>
+                    <a:lnT w="6350" cap="flat" cmpd="sng" algn="ctr">
+                      <a:solidFill>
+                        <a:srgbClr val="E5E2DC"/>
+                      </a:solidFill>
+                      <a:prstDash val="solid"/>
+                      <a:round/>
+                      <a:headEnd type="none" w="med" len="med"/>
+                      <a:tailEnd type="none" w="med" len="med"/>
+                    </a:lnT>
+                    <a:lnB w="6350" cap="flat" cmpd="sng" algn="ctr">
+                      <a:solidFill>
+                        <a:srgbClr val="E5E2DC"/>
+                      </a:solidFill>
+                      <a:prstDash val="solid"/>
+                      <a:round/>
+                      <a:headEnd type="none" w="med" len="med"/>
+                      <a:tailEnd type="none" w="med" len="med"/>
+                    </a:lnB>
+                    <a:solidFill>
+                      <a:srgbClr val="F8F6F3"/>
+                    </a:solidFill>
+                  </a:tcPr>
+                </a:tc>
+                <a:tc>
+                  <a:txBody>
+                    <a:bodyPr/>
+                    <a:lstStyle/>
+                    <a:p>
+                      <a:pPr indent="0" marL="0">
+                        <a:buNone/>
+                      </a:pPr>
+                      <a:r>
+                        <a:rPr lang="en-US" sz="1200" dirty="0">
+                          <a:solidFill>
+                            <a:srgbClr val="3D3A36"/>
+                          </a:solidFill>
+                          <a:latin typeface="Calibri" pitchFamily="34" charset="0"/>
+                          <a:ea typeface="Calibri" pitchFamily="34" charset="-122"/>
+                          <a:cs typeface="Calibri" pitchFamily="34" charset="-120"/>
+                        </a:rPr>
+                        <a:t>Random order</a:t>
+                      </a:r>
+                      <a:endParaRPr lang="en-US" sz="1200" dirty="0">
+                        <a:latin typeface="Calibri" charset="0"/>
+                        <a:ea typeface="Calibri" charset="0"/>
+                        <a:cs typeface="Calibri" charset="0"/>
+                      </a:endParaRPr>
+                    </a:p>
+                  </a:txBody>
+                  <a:tcPr marL="91440" marR="91440" marT="45720" marB="45720">
+                    <a:lnL w="6350" cap="flat" cmpd="sng" algn="ctr">
+                      <a:solidFill>
+                        <a:srgbClr val="E5E2DC"/>
+                      </a:solidFill>
+                      <a:prstDash val="solid"/>
+                      <a:round/>
+                      <a:headEnd type="none" w="med" len="med"/>
+                      <a:tailEnd type="none" w="med" len="med"/>
+                    </a:lnL>
+                    <a:lnR w="6350" cap="flat" cmpd="sng" algn="ctr">
+                      <a:solidFill>
+                        <a:srgbClr val="E5E2DC"/>
+                      </a:solidFill>
+                      <a:prstDash val="solid"/>
+                      <a:round/>
+                      <a:headEnd type="none" w="med" len="med"/>
+                      <a:tailEnd type="none" w="med" len="med"/>
+                    </a:lnR>
+                    <a:lnT w="6350" cap="flat" cmpd="sng" algn="ctr">
+                      <a:solidFill>
+                        <a:srgbClr val="E5E2DC"/>
+                      </a:solidFill>
+                      <a:prstDash val="solid"/>
+                      <a:round/>
+                      <a:headEnd type="none" w="med" len="med"/>
+                      <a:tailEnd type="none" w="med" len="med"/>
+                    </a:lnT>
+                    <a:lnB w="6350" cap="flat" cmpd="sng" algn="ctr">
+                      <a:solidFill>
+                        <a:srgbClr val="E5E2DC"/>
+                      </a:solidFill>
+                      <a:prstDash val="solid"/>
+                      <a:round/>
+                      <a:headEnd type="none" w="med" len="med"/>
+                      <a:tailEnd type="none" w="med" len="med"/>
+                    </a:lnB>
+                    <a:solidFill>
+                      <a:srgbClr val="F8F6F3"/>
+                    </a:solidFill>
+                  </a:tcPr>
+                </a:tc>
+              </a:tr>
+            </a:tbl>
+          </a:graphicData>
+        </a:graphic>
+      </p:graphicFrame>
+    </p:spTree>
+  </p:cSld>
+  <p:clrMapOvr>
+    <a:masterClrMapping/>
+  </p:clrMapOvr>
+</p:sld>
+</file>
+
+<file path=ppt/slides/slide7.xml><?xml version="1.0" encoding="utf-8"?>
+<p:sld xmlns:a="http://schemas.openxmlformats.org/drawingml/2006/main" xmlns:r="http://schemas.openxmlformats.org/officeDocument/2006/relationships" xmlns:p="http://schemas.openxmlformats.org/presentationml/2006/main">
+  <p:cSld name="Slide 7">
+    <p:bg>
+      <p:bgPr>
+        <a:solidFill>
+          <a:srgbClr val="FAF8F5"/>
+        </a:solidFill>
+      </p:bgPr>
+    </p:bg>
+    <p:spTree>
+      <p:nvGrpSpPr>
+        <p:cNvPr id="1" name=""/>
+        <p:cNvGrpSpPr/>
+        <p:nvPr/>
+      </p:nvGrpSpPr>
+      <p:grpSpPr>
+        <a:xfrm>
+          <a:off x="0" y="0"/>
+          <a:ext cx="0" cy="0"/>
+          <a:chOff x="0" y="0"/>
+          <a:chExt cx="0" cy="0"/>
+        </a:xfrm>
+      </p:grpSpPr>
+      <p:sp>
+        <p:nvSpPr>
+          <p:cNvPr id="2" name="Shape 0"/>
+          <p:cNvSpPr/>
+          <p:nvPr/>
+        </p:nvSpPr>
+        <p:spPr>
+          <a:xfrm>
+            <a:off x="0" y="0"/>
+            <a:ext cx="9144000" cy="822960"/>
+          </a:xfrm>
+          <a:prstGeom prst="rect">
+            <a:avLst/>
+          </a:prstGeom>
+          <a:solidFill>
+            <a:srgbClr val="FFFFFF"/>
+          </a:solidFill>
+          <a:ln/>
+        </p:spPr>
+      </p:sp>
+      <p:sp>
+        <p:nvSpPr>
+          <p:cNvPr id="3" name="Shape 1"/>
+          <p:cNvSpPr/>
+          <p:nvPr/>
+        </p:nvSpPr>
+        <p:spPr>
+          <a:xfrm>
+            <a:off x="0" y="804672"/>
+            <a:ext cx="9144000" cy="27432"/>
+          </a:xfrm>
+          <a:prstGeom prst="rect">
+            <a:avLst/>
+          </a:prstGeom>
+          <a:solidFill>
+            <a:srgbClr val="E5E2DC"/>
+          </a:solidFill>
+          <a:ln/>
+        </p:spPr>
+      </p:sp>
+      <p:sp>
+        <p:nvSpPr>
+          <p:cNvPr id="4" name="Shape 2"/>
+          <p:cNvSpPr/>
+          <p:nvPr/>
+        </p:nvSpPr>
+        <p:spPr>
+          <a:xfrm>
+            <a:off x="548640" y="201168"/>
+            <a:ext cx="54864" cy="420624"/>
+          </a:xfrm>
+          <a:prstGeom prst="rect">
+            <a:avLst/>
+          </a:prstGeom>
+          <a:solidFill>
+            <a:srgbClr val="2A9D8F"/>
+          </a:solidFill>
+          <a:ln/>
+        </p:spPr>
+      </p:sp>
+      <p:sp>
+        <p:nvSpPr>
+          <p:cNvPr id="5" name="Text 3"/>
+          <p:cNvSpPr/>
+          <p:nvPr/>
+        </p:nvSpPr>
+        <p:spPr>
+          <a:xfrm>
+            <a:off x="777240" y="137160"/>
+            <a:ext cx="7772400" cy="548640"/>
+          </a:xfrm>
+          <a:prstGeom prst="rect">
+            <a:avLst/>
+          </a:prstGeom>
+          <a:noFill/>
+          <a:ln/>
+        </p:spPr>
+        <p:txBody>
+          <a:bodyPr wrap="square" lIns="0" tIns="0" rIns="0" bIns="0" rtlCol="0" anchor="ctr"/>
+          <a:lstStyle/>
+          <a:p>
+            <a:pPr indent="0" marL="0">
+              <a:buNone/>
+            </a:pPr>
+            <a:r>
+              <a:rPr lang="en-US" sz="2000" b="1" dirty="0">
+                <a:solidFill>
+                  <a:srgbClr val="1B2A4A"/>
+                </a:solidFill>
+                <a:latin typeface="Georgia" pitchFamily="34" charset="0"/>
+                <a:ea typeface="Georgia" pitchFamily="34" charset="-122"/>
+                <a:cs typeface="Georgia" pitchFamily="34" charset="-120"/>
+              </a:rPr>
+              <a:t>Check Your Understanding</a:t>
+            </a:r>
+            <a:endParaRPr lang="en-US" sz="2000" dirty="0"/>
+          </a:p>
+        </p:txBody>
+      </p:sp>
+      <p:sp>
+        <p:nvSpPr>
+          <p:cNvPr id="6" name="Shape 4"/>
+          <p:cNvSpPr/>
+          <p:nvPr/>
+        </p:nvSpPr>
+        <p:spPr>
+          <a:xfrm>
+            <a:off x="731520" y="1051560"/>
+            <a:ext cx="7680960" cy="438912"/>
+          </a:xfrm>
+          <a:prstGeom prst="rect">
+            <a:avLst/>
+          </a:prstGeom>
+          <a:solidFill>
+            <a:srgbClr val="FFFFFF"/>
+          </a:solidFill>
+          <a:ln/>
+        </p:spPr>
+      </p:sp>
+      <p:sp>
+        <p:nvSpPr>
+          <p:cNvPr id="7" name="Text 5"/>
+          <p:cNvSpPr/>
+          <p:nvPr/>
+        </p:nvSpPr>
+        <p:spPr>
+          <a:xfrm>
+            <a:off x="868680" y="1051560"/>
+            <a:ext cx="320040" cy="438912"/>
+          </a:xfrm>
+          <a:prstGeom prst="rect">
+            <a:avLst/>
+          </a:prstGeom>
+          <a:noFill/>
+          <a:ln/>
+        </p:spPr>
+        <p:txBody>
+          <a:bodyPr wrap="square" rtlCol="0" anchor="ctr"/>
+          <a:lstStyle/>
+          <a:p>
+            <a:pPr indent="0" marL="0">
+              <a:buNone/>
+            </a:pPr>
+            <a:r>
+              <a:rPr lang="en-US" sz="1400" dirty="0">
+                <a:solidFill>
+                  <a:srgbClr val="2A9D8F"/>
+                </a:solidFill>
+              </a:rPr>
+              <a:t>☐</a:t>
+            </a:r>
+            <a:endParaRPr lang="en-US" sz="1400" dirty="0"/>
+          </a:p>
+        </p:txBody>
+      </p:sp>
+      <p:sp>
+        <p:nvSpPr>
+          <p:cNvPr id="8" name="Text 6"/>
+          <p:cNvSpPr/>
+          <p:nvPr/>
+        </p:nvSpPr>
+        <p:spPr>
+          <a:xfrm>
+            <a:off x="1234440" y="1051560"/>
+            <a:ext cx="6949440" cy="438912"/>
+          </a:xfrm>
+          <a:prstGeom prst="rect">
+            <a:avLst/>
+          </a:prstGeom>
+          <a:noFill/>
+          <a:ln/>
+        </p:spPr>
+        <p:txBody>
+          <a:bodyPr wrap="square" rtlCol="0" anchor="ctr"/>
+          <a:lstStyle/>
+          <a:p>
+            <a:pPr indent="0" marL="0">
+              <a:buNone/>
+            </a:pPr>
+            <a:r>
+              <a:rPr lang="en-US" sz="1300" dirty="0">
+                <a:solidFill>
+                  <a:srgbClr val="3D3A36"/>
+                </a:solidFill>
+                <a:latin typeface="Calibri" pitchFamily="34" charset="0"/>
+                <a:ea typeface="Calibri" pitchFamily="34" charset="-122"/>
+                <a:cs typeface="Calibri" pitchFamily="34" charset="-120"/>
+              </a:rPr>
+              <a:t>I can choose the right graph type for my data</a:t>
+            </a:r>
+            <a:endParaRPr lang="en-US" sz="1300" dirty="0"/>
+          </a:p>
+        </p:txBody>
+      </p:sp>
+      <p:sp>
+        <p:nvSpPr>
+          <p:cNvPr id="9" name="Shape 7"/>
+          <p:cNvSpPr/>
+          <p:nvPr/>
+        </p:nvSpPr>
+        <p:spPr>
+          <a:xfrm>
+            <a:off x="731520" y="1554480"/>
+            <a:ext cx="7680960" cy="438912"/>
+          </a:xfrm>
+          <a:prstGeom prst="rect">
+            <a:avLst/>
+          </a:prstGeom>
+          <a:solidFill>
+            <a:srgbClr val="F8F6F3"/>
+          </a:solidFill>
+          <a:ln/>
+        </p:spPr>
+      </p:sp>
+      <p:sp>
+        <p:nvSpPr>
+          <p:cNvPr id="10" name="Text 8"/>
+          <p:cNvSpPr/>
+          <p:nvPr/>
+        </p:nvSpPr>
+        <p:spPr>
+          <a:xfrm>
+            <a:off x="868680" y="1554480"/>
+            <a:ext cx="320040" cy="438912"/>
+          </a:xfrm>
+          <a:prstGeom prst="rect">
+            <a:avLst/>
+          </a:prstGeom>
+          <a:noFill/>
+          <a:ln/>
+        </p:spPr>
+        <p:txBody>
+          <a:bodyPr wrap="square" rtlCol="0" anchor="ctr"/>
+          <a:lstStyle/>
+          <a:p>
+            <a:pPr indent="0" marL="0">
+              <a:buNone/>
+            </a:pPr>
+            <a:r>
+              <a:rPr lang="en-US" sz="1400" dirty="0">
+                <a:solidFill>
+                  <a:srgbClr val="2A9D8F"/>
+                </a:solidFill>
+              </a:rPr>
+              <a:t>☐</a:t>
+            </a:r>
+            <a:endParaRPr lang="en-US" sz="1400" dirty="0"/>
+          </a:p>
+        </p:txBody>
+      </p:sp>
+      <p:sp>
+        <p:nvSpPr>
+          <p:cNvPr id="11" name="Text 9"/>
+          <p:cNvSpPr/>
+          <p:nvPr/>
+        </p:nvSpPr>
+        <p:spPr>
+          <a:xfrm>
+            <a:off x="1234440" y="1554480"/>
+            <a:ext cx="6949440" cy="438912"/>
+          </a:xfrm>
+          <a:prstGeom prst="rect">
+            <a:avLst/>
+          </a:prstGeom>
+          <a:noFill/>
+          <a:ln/>
+        </p:spPr>
+        <p:txBody>
+          <a:bodyPr wrap="square" rtlCol="0" anchor="ctr"/>
+          <a:lstStyle/>
+          <a:p>
+            <a:pPr indent="0" marL="0">
+              <a:buNone/>
+            </a:pPr>
+            <a:r>
+              <a:rPr lang="en-US" sz="1300" dirty="0">
+                <a:solidFill>
+                  <a:srgbClr val="3D3A36"/>
+                </a:solidFill>
+                <a:latin typeface="Calibri" pitchFamily="34" charset="0"/>
+                <a:ea typeface="Calibri" pitchFamily="34" charset="-122"/>
+                <a:cs typeface="Calibri" pitchFamily="34" charset="-120"/>
+              </a:rPr>
+              <a:t>I can draw a graph with labelled axes and a title</a:t>
+            </a:r>
+            <a:endParaRPr lang="en-US" sz="1300" dirty="0"/>
+          </a:p>
+        </p:txBody>
+      </p:sp>
+      <p:sp>
+        <p:nvSpPr>
+          <p:cNvPr id="12" name="Shape 10"/>
+          <p:cNvSpPr/>
+          <p:nvPr/>
+        </p:nvSpPr>
+        <p:spPr>
+          <a:xfrm>
+            <a:off x="731520" y="2057400"/>
+            <a:ext cx="7680960" cy="438912"/>
+          </a:xfrm>
+          <a:prstGeom prst="rect">
+            <a:avLst/>
+          </a:prstGeom>
+          <a:solidFill>
+            <a:srgbClr val="FFFFFF"/>
+          </a:solidFill>
+          <a:ln/>
+        </p:spPr>
+      </p:sp>
+      <p:sp>
+        <p:nvSpPr>
+          <p:cNvPr id="13" name="Text 11"/>
+          <p:cNvSpPr/>
+          <p:nvPr/>
+        </p:nvSpPr>
+        <p:spPr>
+          <a:xfrm>
+            <a:off x="868680" y="2057400"/>
+            <a:ext cx="320040" cy="438912"/>
+          </a:xfrm>
+          <a:prstGeom prst="rect">
+            <a:avLst/>
+          </a:prstGeom>
+          <a:noFill/>
+          <a:ln/>
+        </p:spPr>
+        <p:txBody>
+          <a:bodyPr wrap="square" rtlCol="0" anchor="ctr"/>
+          <a:lstStyle/>
+          <a:p>
+            <a:pPr indent="0" marL="0">
+              <a:buNone/>
+            </a:pPr>
+            <a:r>
+              <a:rPr lang="en-US" sz="1400" dirty="0">
+                <a:solidFill>
+                  <a:srgbClr val="2A9D8F"/>
+                </a:solidFill>
+              </a:rPr>
+              <a:t>☐</a:t>
+            </a:r>
+            <a:endParaRPr lang="en-US" sz="1400" dirty="0"/>
+          </a:p>
+        </p:txBody>
+      </p:sp>
+      <p:sp>
+        <p:nvSpPr>
+          <p:cNvPr id="14" name="Text 12"/>
+          <p:cNvSpPr/>
+          <p:nvPr/>
+        </p:nvSpPr>
+        <p:spPr>
+          <a:xfrm>
+            <a:off x="1234440" y="2057400"/>
+            <a:ext cx="6949440" cy="438912"/>
+          </a:xfrm>
+          <a:prstGeom prst="rect">
+            <a:avLst/>
+          </a:prstGeom>
+          <a:noFill/>
+          <a:ln/>
+        </p:spPr>
+        <p:txBody>
+          <a:bodyPr wrap="square" rtlCol="0" anchor="ctr"/>
+          <a:lstStyle/>
+          <a:p>
+            <a:pPr indent="0" marL="0">
+              <a:buNone/>
+            </a:pPr>
+            <a:r>
+              <a:rPr lang="en-US" sz="1300" dirty="0">
+                <a:solidFill>
+                  <a:srgbClr val="3D3A36"/>
+                </a:solidFill>
+                <a:latin typeface="Calibri" pitchFamily="34" charset="0"/>
+                <a:ea typeface="Calibri" pitchFamily="34" charset="-122"/>
+                <a:cs typeface="Calibri" pitchFamily="34" charset="-120"/>
+              </a:rPr>
+              <a:t>I can describe the trend shown in a graph</a:t>
+            </a:r>
+            <a:endParaRPr lang="en-US" sz="1300" dirty="0"/>
+          </a:p>
+        </p:txBody>
+      </p:sp>
+      <p:sp>
+        <p:nvSpPr>
+          <p:cNvPr id="15" name="Shape 13"/>
+          <p:cNvSpPr/>
+          <p:nvPr/>
+        </p:nvSpPr>
+        <p:spPr>
+          <a:xfrm>
+            <a:off x="731520" y="2560320"/>
+            <a:ext cx="7680960" cy="438912"/>
+          </a:xfrm>
+          <a:prstGeom prst="rect">
+            <a:avLst/>
+          </a:prstGeom>
+          <a:solidFill>
+            <a:srgbClr val="F8F6F3"/>
+          </a:solidFill>
+          <a:ln/>
+        </p:spPr>
+      </p:sp>
+      <p:sp>
+        <p:nvSpPr>
+          <p:cNvPr id="16" name="Text 14"/>
+          <p:cNvSpPr/>
+          <p:nvPr/>
+        </p:nvSpPr>
+        <p:spPr>
+          <a:xfrm>
+            <a:off x="868680" y="2560320"/>
+            <a:ext cx="320040" cy="438912"/>
+          </a:xfrm>
+          <a:prstGeom prst="rect">
+            <a:avLst/>
+          </a:prstGeom>
+          <a:noFill/>
+          <a:ln/>
+        </p:spPr>
+        <p:txBody>
+          <a:bodyPr wrap="square" rtlCol="0" anchor="ctr"/>
+          <a:lstStyle/>
+          <a:p>
+            <a:pPr indent="0" marL="0">
+              <a:buNone/>
+            </a:pPr>
+            <a:r>
+              <a:rPr lang="en-US" sz="1400" dirty="0">
+                <a:solidFill>
+                  <a:srgbClr val="2A9D8F"/>
+                </a:solidFill>
+              </a:rPr>
+              <a:t>☐</a:t>
+            </a:r>
+            <a:endParaRPr lang="en-US" sz="1400" dirty="0"/>
+          </a:p>
+        </p:txBody>
+      </p:sp>
+      <p:sp>
+        <p:nvSpPr>
+          <p:cNvPr id="17" name="Text 15"/>
+          <p:cNvSpPr/>
+          <p:nvPr/>
+        </p:nvSpPr>
+        <p:spPr>
+          <a:xfrm>
+            <a:off x="1234440" y="2560320"/>
+            <a:ext cx="6949440" cy="438912"/>
+          </a:xfrm>
+          <a:prstGeom prst="rect">
+            <a:avLst/>
+          </a:prstGeom>
+          <a:noFill/>
+          <a:ln/>
+        </p:spPr>
+        <p:txBody>
+          <a:bodyPr wrap="square" rtlCol="0" anchor="ctr"/>
+          <a:lstStyle/>
+          <a:p>
+            <a:pPr indent="0" marL="0">
+              <a:buNone/>
+            </a:pPr>
+            <a:r>
+              <a:rPr lang="en-US" sz="1300" dirty="0">
+                <a:solidFill>
+                  <a:srgbClr val="3D3A36"/>
+                </a:solidFill>
+                <a:latin typeface="Calibri" pitchFamily="34" charset="0"/>
+                <a:ea typeface="Calibri" pitchFamily="34" charset="-122"/>
+                <a:cs typeface="Calibri" pitchFamily="34" charset="-120"/>
+              </a:rPr>
+              <a:t>I can identify anomalies in data</a:t>
+            </a:r>
+            <a:endParaRPr lang="en-US" sz="1300" dirty="0"/>
+          </a:p>
+        </p:txBody>
+      </p:sp>
+      <p:sp>
+        <p:nvSpPr>
+          <p:cNvPr id="18" name="Shape 16"/>
+          <p:cNvSpPr/>
+          <p:nvPr/>
+        </p:nvSpPr>
+        <p:spPr>
+          <a:xfrm>
+            <a:off x="731520" y="3063240"/>
+            <a:ext cx="7680960" cy="438912"/>
+          </a:xfrm>
+          <a:prstGeom prst="rect">
+            <a:avLst/>
+          </a:prstGeom>
+          <a:solidFill>
+            <a:srgbClr val="FFFFFF"/>
+          </a:solidFill>
+          <a:ln/>
+        </p:spPr>
+      </p:sp>
+      <p:sp>
+        <p:nvSpPr>
+          <p:cNvPr id="19" name="Text 17"/>
+          <p:cNvSpPr/>
+          <p:nvPr/>
+        </p:nvSpPr>
+        <p:spPr>
+          <a:xfrm>
+            <a:off x="868680" y="3063240"/>
+            <a:ext cx="320040" cy="438912"/>
+          </a:xfrm>
+          <a:prstGeom prst="rect">
+            <a:avLst/>
+          </a:prstGeom>
+          <a:noFill/>
+          <a:ln/>
+        </p:spPr>
+        <p:txBody>
+          <a:bodyPr wrap="square" rtlCol="0" anchor="ctr"/>
+          <a:lstStyle/>
+          <a:p>
+            <a:pPr indent="0" marL="0">
+              <a:buNone/>
+            </a:pPr>
+            <a:r>
+              <a:rPr lang="en-US" sz="1400" dirty="0">
+                <a:solidFill>
+                  <a:srgbClr val="2A9D8F"/>
+                </a:solidFill>
+              </a:rPr>
+              <a:t>☐</a:t>
+            </a:r>
+            <a:endParaRPr lang="en-US" sz="1400" dirty="0"/>
+          </a:p>
+        </p:txBody>
+      </p:sp>
+      <p:sp>
+        <p:nvSpPr>
+          <p:cNvPr id="20" name="Text 18"/>
+          <p:cNvSpPr/>
+          <p:nvPr/>
+        </p:nvSpPr>
+        <p:spPr>
+          <a:xfrm>
+            <a:off x="1234440" y="3063240"/>
+            <a:ext cx="6949440" cy="438912"/>
+          </a:xfrm>
+          <a:prstGeom prst="rect">
+            <a:avLst/>
+          </a:prstGeom>
+          <a:noFill/>
+          <a:ln/>
+        </p:spPr>
+        <p:txBody>
+          <a:bodyPr wrap="square" rtlCol="0" anchor="ctr"/>
+          <a:lstStyle/>
+          <a:p>
+            <a:pPr indent="0" marL="0">
+              <a:buNone/>
+            </a:pPr>
+            <a:r>
+              <a:rPr lang="en-US" sz="1300" dirty="0">
+                <a:solidFill>
+                  <a:srgbClr val="3D3A36"/>
+                </a:solidFill>
+                <a:latin typeface="Calibri" pitchFamily="34" charset="0"/>
+                <a:ea typeface="Calibri" pitchFamily="34" charset="-122"/>
+                <a:cs typeface="Calibri" pitchFamily="34" charset="-120"/>
+              </a:rPr>
+              <a:t>I can organise data in a proper results table</a:t>
+            </a:r>
+            <a:endParaRPr lang="en-US" sz="1300" dirty="0"/>
+          </a:p>
+        </p:txBody>
+      </p:sp>
+      <p:sp>
+        <p:nvSpPr>
+          <p:cNvPr id="21" name="Shape 19"/>
+          <p:cNvSpPr/>
+          <p:nvPr/>
+        </p:nvSpPr>
+        <p:spPr>
+          <a:xfrm>
+            <a:off x="731520" y="3749040"/>
+            <a:ext cx="7680960" cy="594360"/>
+          </a:xfrm>
+          <a:prstGeom prst="rect">
+            <a:avLst/>
+          </a:prstGeom>
+          <a:solidFill>
+            <a:srgbClr val="E8F5F3"/>
+          </a:solidFill>
+          <a:ln/>
+          <a:effectLst>
+            <a:outerShdw sx="100000" sy="100000" kx="0" ky="0" algn="bl" rotWithShape="0" blurRad="50800" dist="25400" dir="8100000">
+              <a:srgbClr val="000000">
+                <a:alpha val="10000"/>
+              </a:srgbClr>
+            </a:outerShdw>
+          </a:effectLst>
+        </p:spPr>
+      </p:sp>
+      <p:sp>
+        <p:nvSpPr>
+          <p:cNvPr id="22" name="Text 20"/>
+          <p:cNvSpPr/>
+          <p:nvPr/>
+        </p:nvSpPr>
+        <p:spPr>
+          <a:xfrm>
+            <a:off x="914400" y="3749040"/>
+            <a:ext cx="7315200" cy="594360"/>
+          </a:xfrm>
+          <a:prstGeom prst="rect">
+            <a:avLst/>
+          </a:prstGeom>
+          <a:noFill/>
+          <a:ln/>
+        </p:spPr>
+        <p:txBody>
+          <a:bodyPr wrap="square" rtlCol="0" anchor="ctr"/>
+          <a:lstStyle/>
+          <a:p>
+            <a:pPr indent="0" marL="0">
+              <a:buNone/>
+            </a:pPr>
+            <a:r>
+              <a:rPr lang="en-US" sz="1200" b="1" dirty="0">
+                <a:solidFill>
+                  <a:srgbClr val="2A9D8F"/>
+                </a:solidFill>
+                <a:latin typeface="Calibri" pitchFamily="34" charset="0"/>
+                <a:ea typeface="Calibri" pitchFamily="34" charset="-122"/>
+                <a:cs typeface="Calibri" pitchFamily="34" charset="-120"/>
+              </a:rPr>
+              <a:t>Key Idea: </a:t>
+            </a:r>
+            <a:pPr indent="0" marL="0">
+              <a:buNone/>
+            </a:pPr>
+            <a:r>
+              <a:rPr lang="en-US" sz="1200" i="1" dirty="0">
+                <a:solidFill>
+                  <a:srgbClr val="3D3A36"/>
+                </a:solidFill>
+                <a:latin typeface="Calibri" pitchFamily="34" charset="0"/>
+                <a:ea typeface="Calibri" pitchFamily="34" charset="-122"/>
+                <a:cs typeface="Calibri" pitchFamily="34" charset="-120"/>
+              </a:rPr>
+              <a:t>Data without a graph is hard to understand — a graph tells the story.</a:t>
+            </a:r>
+            <a:endParaRPr lang="en-US" sz="1200" dirty="0"/>
+          </a:p>
+        </p:txBody>
+      </p:sp>
+    </p:spTree>
+  </p:cSld>
+  <p:clrMapOvr>
+    <a:masterClrMapping/>
+  </p:clrMapOvr>
+</p:sld>
+</file>
+
+<file path=ppt/slides/slide8.xml><?xml version="1.0" encoding="utf-8"?>
+<p:sld xmlns:a="http://schemas.openxmlformats.org/drawingml/2006/main" xmlns:r="http://schemas.openxmlformats.org/officeDocument/2006/relationships" xmlns:p="http://schemas.openxmlformats.org/presentationml/2006/main">
+  <p:cSld name="Slide 8">
+    <p:spTree>
+      <p:nvGrpSpPr>
+        <p:cNvPr id="1" name=""/>
+        <p:cNvGrpSpPr/>
+        <p:nvPr/>
+      </p:nvGrpSpPr>
+      <p:grpSpPr>
+        <a:xfrm>
+          <a:off x="0" y="0"/>
+          <a:ext cx="0" cy="0"/>
+          <a:chOff x="0" y="0"/>
+          <a:chExt cx="0" cy="0"/>
+        </a:xfrm>
+      </p:grpSpPr>
+      <p:sp>
+        <p:nvSpPr>
+          <p:cNvPr id="2" name="Shape 0"/>
+          <p:cNvSpPr/>
+          <p:nvPr/>
+        </p:nvSpPr>
+        <p:spPr>
+          <a:xfrm>
+            <a:off x="0" y="0"/>
+            <a:ext cx="9144000" cy="5143500"/>
+          </a:xfrm>
+          <a:prstGeom prst="rect">
+            <a:avLst/>
+          </a:prstGeom>
+          <a:solidFill>
+            <a:srgbClr val="1B2A4A"/>
+          </a:solidFill>
+          <a:ln/>
+        </p:spPr>
+      </p:sp>
+      <p:sp>
+        <p:nvSpPr>
+          <p:cNvPr id="3" name="Shape 1"/>
+          <p:cNvSpPr/>
+          <p:nvPr/>
+        </p:nvSpPr>
+        <p:spPr>
+          <a:xfrm>
+            <a:off x="0" y="4777740"/>
+            <a:ext cx="9144000" cy="365760"/>
+          </a:xfrm>
+          <a:prstGeom prst="rect">
+            <a:avLst/>
+          </a:prstGeom>
+          <a:solidFill>
+            <a:srgbClr val="2A9D8F"/>
+          </a:solidFill>
+          <a:ln/>
+        </p:spPr>
+      </p:sp>
+      <p:sp>
+        <p:nvSpPr>
+          <p:cNvPr id="4" name="Shape 2"/>
+          <p:cNvSpPr/>
+          <p:nvPr/>
+        </p:nvSpPr>
+        <p:spPr>
+          <a:xfrm>
+            <a:off x="-914400" y="-914400"/>
+            <a:ext cx="3657600" cy="3657600"/>
+          </a:xfrm>
+          <a:prstGeom prst="ellipse">
+            <a:avLst/>
+          </a:prstGeom>
+          <a:solidFill>
+            <a:srgbClr val="2A9D8F">
+              <a:alpha val="10000"/>
+            </a:srgbClr>
+          </a:solidFill>
+          <a:ln/>
+        </p:spPr>
+      </p:sp>
+      <p:sp>
+        <p:nvSpPr>
+          <p:cNvPr id="5" name="Text 3"/>
+          <p:cNvSpPr/>
+          <p:nvPr/>
+        </p:nvSpPr>
+        <p:spPr>
+          <a:xfrm>
+            <a:off x="731520" y="1463040"/>
+            <a:ext cx="7680960" cy="822960"/>
+          </a:xfrm>
+          <a:prstGeom prst="rect">
+            <a:avLst/>
+          </a:prstGeom>
+          <a:noFill/>
+          <a:ln/>
+        </p:spPr>
+        <p:txBody>
+          <a:bodyPr wrap="square" rtlCol="0" anchor="ctr"/>
+          <a:lstStyle/>
+          <a:p>
+            <a:pPr algn="ctr" indent="0" marL="0">
+              <a:buNone/>
+            </a:pPr>
+            <a:r>
+              <a:rPr lang="en-US" sz="3400" b="1" dirty="0">
                 <a:solidFill>
                   <a:srgbClr val="FFFFFF"/>
                 </a:solidFill>
@@ -3108,149 +5800,22 @@
                 <a:ea typeface="Georgia" pitchFamily="34" charset="-122"/>
                 <a:cs typeface="Georgia" pitchFamily="34" charset="-120"/>
               </a:rPr>
-              <a:t>Key Takeaways</a:t>
-            </a:r>
-            <a:endParaRPr lang="en-US" sz="3200" dirty="0"/>
-          </a:p>
-        </p:txBody>
-      </p:sp>
-      <p:sp>
-        <p:nvSpPr>
-          <p:cNvPr id="4" name="Text 2"/>
-          <p:cNvSpPr/>
-          <p:nvPr/>
-        </p:nvSpPr>
-        <p:spPr>
-          <a:xfrm>
-            <a:off x="731520" y="1463040"/>
-            <a:ext cx="7772400" cy="3200400"/>
-          </a:xfrm>
-          <a:prstGeom prst="rect">
-            <a:avLst/>
-          </a:prstGeom>
-          <a:noFill/>
-          <a:ln/>
-        </p:spPr>
-        <p:txBody>
-          <a:bodyPr wrap="square" rtlCol="0" anchor="t"/>
-          <a:lstStyle/>
-          <a:p>
-            <a:pPr marL="342900" indent="-342900">
-              <a:spcAft>
-                <a:spcPts val="1000"/>
-              </a:spcAft>
-              <a:buSzPct val="100000"/>
-              <a:buChar char="•"/>
-            </a:pPr>
-            <a:r>
-              <a:rPr lang="en-US" sz="1500" dirty="0">
-                <a:solidFill>
-                  <a:srgbClr val="CADCFC"/>
-                </a:solidFill>
-                <a:latin typeface="Calibri" pitchFamily="34" charset="0"/>
-                <a:ea typeface="Calibri" pitchFamily="34" charset="-122"/>
-                <a:cs typeface="Calibri" pitchFamily="34" charset="-120"/>
-              </a:rPr>
-              <a:t>Bar charts for categories, line graphs for continuous data, pie charts for proportions</a:t>
-            </a:r>
-            <a:endParaRPr lang="en-US" sz="1500" dirty="0"/>
-          </a:p>
-          <a:p>
-            <a:pPr marL="342900" indent="-342900">
-              <a:spcAft>
-                <a:spcPts val="1000"/>
-              </a:spcAft>
-              <a:buSzPct val="100000"/>
-              <a:buChar char="•"/>
-            </a:pPr>
-            <a:r>
-              <a:rPr lang="en-US" sz="1500" dirty="0">
-                <a:solidFill>
-                  <a:srgbClr val="CADCFC"/>
-                </a:solidFill>
-                <a:latin typeface="Calibri" pitchFamily="34" charset="0"/>
-                <a:ea typeface="Calibri" pitchFamily="34" charset="-122"/>
-                <a:cs typeface="Calibri" pitchFamily="34" charset="-120"/>
-              </a:rPr>
-              <a:t>Label axes with variable name AND unit</a:t>
-            </a:r>
-            <a:endParaRPr lang="en-US" sz="1500" dirty="0"/>
-          </a:p>
-          <a:p>
-            <a:pPr marL="342900" indent="-342900">
-              <a:spcAft>
-                <a:spcPts val="1000"/>
-              </a:spcAft>
-              <a:buSzPct val="100000"/>
-              <a:buChar char="•"/>
-            </a:pPr>
-            <a:r>
-              <a:rPr lang="en-US" sz="1500" dirty="0">
-                <a:solidFill>
-                  <a:srgbClr val="CADCFC"/>
-                </a:solidFill>
-                <a:latin typeface="Calibri" pitchFamily="34" charset="0"/>
-                <a:ea typeface="Calibri" pitchFamily="34" charset="-122"/>
-                <a:cs typeface="Calibri" pitchFamily="34" charset="-120"/>
-              </a:rPr>
-              <a:t>Independent variable on x-axis, dependent on y-axis</a:t>
-            </a:r>
-            <a:endParaRPr lang="en-US" sz="1500" dirty="0"/>
-          </a:p>
-          <a:p>
-            <a:pPr marL="342900" indent="-342900">
-              <a:spcAft>
-                <a:spcPts val="1000"/>
-              </a:spcAft>
-              <a:buSzPct val="100000"/>
-              <a:buChar char="•"/>
-            </a:pPr>
-            <a:r>
-              <a:rPr lang="en-US" sz="1500" dirty="0">
-                <a:solidFill>
-                  <a:srgbClr val="CADCFC"/>
-                </a:solidFill>
-                <a:latin typeface="Calibri" pitchFamily="34" charset="0"/>
-                <a:ea typeface="Calibri" pitchFamily="34" charset="-122"/>
-                <a:cs typeface="Calibri" pitchFamily="34" charset="-120"/>
-              </a:rPr>
-              <a:t>Describe trends using data from the graph</a:t>
-            </a:r>
-            <a:endParaRPr lang="en-US" sz="1500" dirty="0"/>
-          </a:p>
-          <a:p>
-            <a:pPr marL="342900" indent="-342900">
-              <a:spcAft>
-                <a:spcPts val="1000"/>
-              </a:spcAft>
-              <a:buSzPct val="100000"/>
-              <a:buChar char="•"/>
-            </a:pPr>
-            <a:r>
-              <a:rPr lang="en-US" sz="1500" dirty="0">
-                <a:solidFill>
-                  <a:srgbClr val="CADCFC"/>
-                </a:solidFill>
-                <a:latin typeface="Calibri" pitchFamily="34" charset="0"/>
-                <a:ea typeface="Calibri" pitchFamily="34" charset="-122"/>
-                <a:cs typeface="Calibri" pitchFamily="34" charset="-120"/>
-              </a:rPr>
-              <a:t>Anomalies are data points that don't fit the pattern</a:t>
-            </a:r>
-            <a:endParaRPr lang="en-US" sz="1500" dirty="0"/>
-          </a:p>
-        </p:txBody>
-      </p:sp>
-      <p:sp>
-        <p:nvSpPr>
-          <p:cNvPr id="5" name="Text 3"/>
-          <p:cNvSpPr/>
-          <p:nvPr/>
-        </p:nvSpPr>
-        <p:spPr>
-          <a:xfrm>
-            <a:off x="731520" y="4572000"/>
-            <a:ext cx="7772400" cy="365760"/>
+              <a:t>Review &amp; Practise</a:t>
+            </a:r>
+            <a:endParaRPr lang="en-US" sz="3400" dirty="0"/>
+          </a:p>
+        </p:txBody>
+      </p:sp>
+      <p:sp>
+        <p:nvSpPr>
+          <p:cNvPr id="6" name="Text 4"/>
+          <p:cNvSpPr/>
+          <p:nvPr/>
+        </p:nvSpPr>
+        <p:spPr>
+          <a:xfrm>
+            <a:off x="731520" y="2468880"/>
+            <a:ext cx="7680960" cy="457200"/>
           </a:xfrm>
           <a:prstGeom prst="rect">
             <a:avLst/>
@@ -3262,13 +5827,13 @@
           <a:bodyPr wrap="square" rtlCol="0" anchor="ctr"/>
           <a:lstStyle/>
           <a:p>
-            <a:pPr indent="0" marL="0">
+            <a:pPr algn="ctr" indent="0" marL="0">
               <a:buNone/>
             </a:pPr>
             <a:r>
-              <a:rPr lang="en-US" sz="1100" dirty="0">
+              <a:rPr lang="en-US" sz="1800" dirty="0">
                 <a:solidFill>
-                  <a:srgbClr val="E9C46A"/>
+                  <a:srgbClr val="2A9D8F"/>
                 </a:solidFill>
                 <a:latin typeface="Calibri" pitchFamily="34" charset="0"/>
                 <a:ea typeface="Calibri" pitchFamily="34" charset="-122"/>
@@ -3276,7 +5841,46 @@
               </a:rPr>
               <a:t>mrzocchi.com</a:t>
             </a:r>
-            <a:endParaRPr lang="en-US" sz="1100" dirty="0"/>
+            <a:endParaRPr lang="en-US" sz="1800" dirty="0"/>
+          </a:p>
+        </p:txBody>
+      </p:sp>
+      <p:sp>
+        <p:nvSpPr>
+          <p:cNvPr id="7" name="Text 5"/>
+          <p:cNvSpPr/>
+          <p:nvPr/>
+        </p:nvSpPr>
+        <p:spPr>
+          <a:xfrm>
+            <a:off x="731520" y="3108960"/>
+            <a:ext cx="7680960" cy="457200"/>
+          </a:xfrm>
+          <a:prstGeom prst="rect">
+            <a:avLst/>
+          </a:prstGeom>
+          <a:noFill/>
+          <a:ln/>
+        </p:spPr>
+        <p:txBody>
+          <a:bodyPr wrap="square" rtlCol="0" anchor="ctr"/>
+          <a:lstStyle/>
+          <a:p>
+            <a:pPr algn="ctr" indent="0" marL="0">
+              <a:buNone/>
+            </a:pPr>
+            <a:r>
+              <a:rPr lang="en-US" sz="1300" dirty="0">
+                <a:solidFill>
+                  <a:srgbClr val="9B9690"/>
+                </a:solidFill>
+                <a:latin typeface="Calibri" pitchFamily="34" charset="0"/>
+                <a:ea typeface="Calibri" pitchFamily="34" charset="-122"/>
+                <a:cs typeface="Calibri" pitchFamily="34" charset="-120"/>
+              </a:rPr>
+              <a:t>Use the Self-Quiz, Review Games, and Practice Builder to test yourself.</a:t>
+            </a:r>
+            <a:endParaRPr lang="en-US" sz="1300" dirty="0"/>
           </a:p>
         </p:txBody>
       </p:sp>

--- a/static/ppts/G6_Sci_T1_Data_Graphs.pptx
+++ b/static/ppts/G6_Sci_T1_Data_Graphs.pptx
@@ -17,8 +17,8 @@
   <p:notesMasterIdLst>
     <p:notesMasterId r:id="rId10"/>
   </p:notesMasterIdLst>
-  <p:sldSz cx="9144000" cy="5143500"/>
-  <p:notesSz cx="5143500" cy="9144000"/>
+  <p:sldSz cx="12192000" cy="6858000"/>
+  <p:notesSz cx="6858000" cy="12192000"/>
   <p:defaultTextStyle>
     <a:lvl1pPr marL="0" algn="l" defTabSz="914400" rtl="0" eaLnBrk="1" latinLnBrk="0" hangingPunct="1">
       <a:defRPr sz="1800" kern="1200">
@@ -1477,6 +1477,13 @@
 <file path=ppt/slides/slide1.xml><?xml version="1.0" encoding="utf-8"?>
 <p:sld xmlns:a="http://schemas.openxmlformats.org/drawingml/2006/main" xmlns:r="http://schemas.openxmlformats.org/officeDocument/2006/relationships" xmlns:p="http://schemas.openxmlformats.org/presentationml/2006/main">
   <p:cSld name="Slide 1">
+    <p:bg>
+      <p:bgPr>
+        <a:solidFill>
+          <a:srgbClr val="2A9D8F"/>
+        </a:solidFill>
+      </p:bgPr>
+    </p:bg>
     <p:spTree>
       <p:nvGrpSpPr>
         <p:cNvPr id="1" name=""/>
@@ -1499,55 +1506,15 @@
         </p:nvSpPr>
         <p:spPr>
           <a:xfrm>
-            <a:off x="0" y="0"/>
-            <a:ext cx="9144000" cy="5143500"/>
-          </a:xfrm>
-          <a:prstGeom prst="rect">
-            <a:avLst/>
-          </a:prstGeom>
-          <a:solidFill>
-            <a:srgbClr val="1B2A4A"/>
-          </a:solidFill>
-          <a:ln/>
-        </p:spPr>
-      </p:sp>
-      <p:sp>
-        <p:nvSpPr>
-          <p:cNvPr id="3" name="Shape 1"/>
-          <p:cNvSpPr/>
-          <p:nvPr/>
-        </p:nvSpPr>
-        <p:spPr>
-          <a:xfrm>
-            <a:off x="0" y="4777740"/>
-            <a:ext cx="9144000" cy="365760"/>
-          </a:xfrm>
-          <a:prstGeom prst="rect">
-            <a:avLst/>
-          </a:prstGeom>
-          <a:solidFill>
-            <a:srgbClr val="2A9D8F"/>
-          </a:solidFill>
-          <a:ln/>
-        </p:spPr>
-      </p:sp>
-      <p:sp>
-        <p:nvSpPr>
-          <p:cNvPr id="4" name="Shape 2"/>
-          <p:cNvSpPr/>
-          <p:nvPr/>
-        </p:nvSpPr>
-        <p:spPr>
-          <a:xfrm>
-            <a:off x="6858000" y="-1371600"/>
-            <a:ext cx="4572000" cy="4572000"/>
+            <a:off x="7772400" y="-914400"/>
+            <a:ext cx="3657600" cy="3657600"/>
           </a:xfrm>
           <a:prstGeom prst="ellipse">
             <a:avLst/>
           </a:prstGeom>
           <a:solidFill>
-            <a:srgbClr val="2A9D8F">
-              <a:alpha val="12000"/>
+            <a:srgbClr val="FFFFFF">
+              <a:alpha val="8000"/>
             </a:srgbClr>
           </a:solidFill>
           <a:ln/>
@@ -1555,14 +1522,14 @@
       </p:sp>
       <p:sp>
         <p:nvSpPr>
-          <p:cNvPr id="5" name="Text 3"/>
+          <p:cNvPr id="3" name="Text 1"/>
           <p:cNvSpPr/>
           <p:nvPr/>
         </p:nvSpPr>
         <p:spPr>
           <a:xfrm>
-            <a:off x="731520" y="914400"/>
-            <a:ext cx="7680960" cy="457200"/>
+            <a:off x="731520" y="548640"/>
+            <a:ext cx="7315200" cy="365760"/>
           </a:xfrm>
           <a:prstGeom prst="rect">
             <a:avLst/>
@@ -1578,30 +1545,30 @@
               <a:buNone/>
             </a:pPr>
             <a:r>
-              <a:rPr lang="en-US" sz="1300" b="1" spc="500" kern="0" dirty="0">
+              <a:rPr lang="en-US" sz="1100" b="1" dirty="0">
                 <a:solidFill>
-                  <a:srgbClr val="2A9D8F"/>
+                  <a:srgbClr val="F2D68A"/>
                 </a:solidFill>
-                <a:latin typeface="Calibri" pitchFamily="34" charset="0"/>
-                <a:ea typeface="Calibri" pitchFamily="34" charset="-122"/>
-                <a:cs typeface="Calibri" pitchFamily="34" charset="-120"/>
+                <a:latin typeface="Arial" pitchFamily="34" charset="0"/>
+                <a:ea typeface="Arial" pitchFamily="34" charset="-122"/>
+                <a:cs typeface="Arial" pitchFamily="34" charset="-120"/>
               </a:rPr>
               <a:t>GRADE 6 SCIENCE</a:t>
             </a:r>
-            <a:endParaRPr lang="en-US" sz="1300" dirty="0"/>
+            <a:endParaRPr lang="en-US" sz="1100" dirty="0"/>
           </a:p>
         </p:txBody>
       </p:sp>
       <p:sp>
         <p:nvSpPr>
-          <p:cNvPr id="6" name="Text 4"/>
+          <p:cNvPr id="4" name="Text 2"/>
           <p:cNvSpPr/>
           <p:nvPr/>
         </p:nvSpPr>
         <p:spPr>
           <a:xfrm>
-            <a:off x="731520" y="1463040"/>
-            <a:ext cx="6858000" cy="1645920"/>
+            <a:off x="731520" y="1371600"/>
+            <a:ext cx="9144000" cy="1645920"/>
           </a:xfrm>
           <a:prstGeom prst="rect">
             <a:avLst/>
@@ -1610,14 +1577,17 @@
           <a:ln/>
         </p:spPr>
         <p:txBody>
-          <a:bodyPr wrap="square" rtlCol="0" anchor="t"/>
+          <a:bodyPr wrap="square" rtlCol="0" anchor="ctr"/>
           <a:lstStyle/>
           <a:p>
             <a:pPr indent="0" marL="0">
+              <a:lnSpc>
+                <a:spcPct val="110000"/>
+              </a:lnSpc>
               <a:buNone/>
             </a:pPr>
             <a:r>
-              <a:rPr lang="en-US" sz="3800" b="1" dirty="0">
+              <a:rPr lang="en-US" sz="3600" b="1" dirty="0">
                 <a:solidFill>
                   <a:srgbClr val="FFFFFF"/>
                 </a:solidFill>
@@ -1627,20 +1597,20 @@
               </a:rPr>
               <a:t>Data &amp; Graphs</a:t>
             </a:r>
-            <a:endParaRPr lang="en-US" sz="3800" dirty="0"/>
+            <a:endParaRPr lang="en-US" sz="3600" dirty="0"/>
           </a:p>
         </p:txBody>
       </p:sp>
       <p:sp>
         <p:nvSpPr>
-          <p:cNvPr id="7" name="Text 5"/>
+          <p:cNvPr id="5" name="Text 3"/>
           <p:cNvSpPr/>
           <p:nvPr/>
         </p:nvSpPr>
         <p:spPr>
           <a:xfrm>
             <a:off x="731520" y="3200400"/>
-            <a:ext cx="6400800" cy="548640"/>
+            <a:ext cx="7315200" cy="548640"/>
           </a:xfrm>
           <a:prstGeom prst="rect">
             <a:avLst/>
@@ -1656,15 +1626,17 @@
               <a:buNone/>
             </a:pPr>
             <a:r>
-              <a:rPr lang="en-US" sz="1600" i="1" dirty="0">
+              <a:rPr lang="en-US" sz="1600" dirty="0">
                 <a:solidFill>
-                  <a:srgbClr val="9B9690"/>
+                  <a:srgbClr val="FFFFFF">
+                    <a:alpha val="65000"/>
+                  </a:srgbClr>
                 </a:solidFill>
-                <a:latin typeface="Calibri" pitchFamily="34" charset="0"/>
-                <a:ea typeface="Calibri" pitchFamily="34" charset="-122"/>
-                <a:cs typeface="Calibri" pitchFamily="34" charset="-120"/>
+                <a:latin typeface="Arial" pitchFamily="34" charset="0"/>
+                <a:ea typeface="Arial" pitchFamily="34" charset="-122"/>
+                <a:cs typeface="Arial" pitchFamily="34" charset="-120"/>
               </a:rPr>
-              <a:t>Presenting and interpreting scientific data</a:t>
+              <a:t>Organising and presenting scientific results</a:t>
             </a:r>
             <a:endParaRPr lang="en-US" sz="1600" dirty="0"/>
           </a:p>
@@ -1672,14 +1644,14 @@
       </p:sp>
       <p:sp>
         <p:nvSpPr>
-          <p:cNvPr id="8" name="Text 6"/>
+          <p:cNvPr id="6" name="Text 4"/>
           <p:cNvSpPr/>
           <p:nvPr/>
         </p:nvSpPr>
         <p:spPr>
           <a:xfrm>
-            <a:off x="731520" y="4297680"/>
-            <a:ext cx="2743200" cy="365760"/>
+            <a:off x="731520" y="4389120"/>
+            <a:ext cx="2743200" cy="320040"/>
           </a:xfrm>
           <a:prstGeom prst="rect">
             <a:avLst/>
@@ -1695,17 +1667,19 @@
               <a:buNone/>
             </a:pPr>
             <a:r>
-              <a:rPr lang="en-US" sz="1100" dirty="0">
+              <a:rPr lang="en-US" sz="1000" dirty="0">
                 <a:solidFill>
-                  <a:srgbClr val="9B9690"/>
+                  <a:srgbClr val="FFFFFF">
+                    <a:alpha val="40000"/>
+                  </a:srgbClr>
                 </a:solidFill>
-                <a:latin typeface="Calibri" pitchFamily="34" charset="0"/>
-                <a:ea typeface="Calibri" pitchFamily="34" charset="-122"/>
-                <a:cs typeface="Calibri" pitchFamily="34" charset="-120"/>
+                <a:latin typeface="Arial" pitchFamily="34" charset="0"/>
+                <a:ea typeface="Arial" pitchFamily="34" charset="-122"/>
+                <a:cs typeface="Arial" pitchFamily="34" charset="-120"/>
               </a:rPr>
               <a:t>mrzocchi.com</a:t>
             </a:r>
-            <a:endParaRPr lang="en-US" sz="1100" dirty="0"/>
+            <a:endParaRPr lang="en-US" sz="1000" dirty="0"/>
           </a:p>
         </p:txBody>
       </p:sp>
@@ -1750,47 +1724,7 @@
         <p:spPr>
           <a:xfrm>
             <a:off x="0" y="0"/>
-            <a:ext cx="9144000" cy="822960"/>
-          </a:xfrm>
-          <a:prstGeom prst="rect">
-            <a:avLst/>
-          </a:prstGeom>
-          <a:solidFill>
-            <a:srgbClr val="FFFFFF"/>
-          </a:solidFill>
-          <a:ln/>
-        </p:spPr>
-      </p:sp>
-      <p:sp>
-        <p:nvSpPr>
-          <p:cNvPr id="3" name="Shape 1"/>
-          <p:cNvSpPr/>
-          <p:nvPr/>
-        </p:nvSpPr>
-        <p:spPr>
-          <a:xfrm>
-            <a:off x="0" y="804672"/>
-            <a:ext cx="9144000" cy="27432"/>
-          </a:xfrm>
-          <a:prstGeom prst="rect">
-            <a:avLst/>
-          </a:prstGeom>
-          <a:solidFill>
-            <a:srgbClr val="E5E2DC"/>
-          </a:solidFill>
-          <a:ln/>
-        </p:spPr>
-      </p:sp>
-      <p:sp>
-        <p:nvSpPr>
-          <p:cNvPr id="4" name="Shape 2"/>
-          <p:cNvSpPr/>
-          <p:nvPr/>
-        </p:nvSpPr>
-        <p:spPr>
-          <a:xfrm>
-            <a:off x="548640" y="201168"/>
-            <a:ext cx="54864" cy="420624"/>
+            <a:ext cx="73152" cy="5148072"/>
           </a:xfrm>
           <a:prstGeom prst="rect">
             <a:avLst/>
@@ -1803,14 +1737,14 @@
       </p:sp>
       <p:sp>
         <p:nvSpPr>
-          <p:cNvPr id="5" name="Text 3"/>
+          <p:cNvPr id="3" name="Text 1"/>
           <p:cNvSpPr/>
           <p:nvPr/>
         </p:nvSpPr>
         <p:spPr>
           <a:xfrm>
-            <a:off x="777240" y="137160"/>
-            <a:ext cx="7772400" cy="548640"/>
+            <a:off x="548640" y="274320"/>
+            <a:ext cx="9144000" cy="640080"/>
           </a:xfrm>
           <a:prstGeom prst="rect">
             <a:avLst/>
@@ -1819,14 +1753,14 @@
           <a:ln/>
         </p:spPr>
         <p:txBody>
-          <a:bodyPr wrap="square" lIns="0" tIns="0" rIns="0" bIns="0" rtlCol="0" anchor="ctr"/>
+          <a:bodyPr wrap="square" rtlCol="0" anchor="ctr"/>
           <a:lstStyle/>
           <a:p>
             <a:pPr indent="0" marL="0">
               <a:buNone/>
             </a:pPr>
             <a:r>
-              <a:rPr lang="en-US" sz="2000" b="1" dirty="0">
+              <a:rPr lang="en-US" sz="2400" b="1" dirty="0">
                 <a:solidFill>
                   <a:srgbClr val="1B2A4A"/>
                 </a:solidFill>
@@ -1836,47 +1770,20 @@
               </a:rPr>
               <a:t>Key Vocabulary</a:t>
             </a:r>
-            <a:endParaRPr lang="en-US" sz="2000" dirty="0"/>
+            <a:endParaRPr lang="en-US" sz="2400" dirty="0"/>
           </a:p>
         </p:txBody>
       </p:sp>
       <p:sp>
         <p:nvSpPr>
-          <p:cNvPr id="6" name="Shape 4"/>
+          <p:cNvPr id="4" name="Shape 2"/>
           <p:cNvSpPr/>
           <p:nvPr/>
         </p:nvSpPr>
         <p:spPr>
           <a:xfrm>
-            <a:off x="731520" y="1051560"/>
-            <a:ext cx="3657600" cy="658368"/>
-          </a:xfrm>
-          <a:prstGeom prst="rect">
-            <a:avLst/>
-          </a:prstGeom>
-          <a:solidFill>
-            <a:srgbClr val="FFFFFF"/>
-          </a:solidFill>
-          <a:ln/>
-          <a:effectLst>
-            <a:outerShdw sx="100000" sy="100000" kx="0" ky="0" algn="bl" rotWithShape="0" blurRad="50800" dist="25400" dir="8100000">
-              <a:srgbClr val="000000">
-                <a:alpha val="10000"/>
-              </a:srgbClr>
-            </a:outerShdw>
-          </a:effectLst>
-        </p:spPr>
-      </p:sp>
-      <p:sp>
-        <p:nvSpPr>
-          <p:cNvPr id="7" name="Shape 5"/>
-          <p:cNvSpPr/>
-          <p:nvPr/>
-        </p:nvSpPr>
-        <p:spPr>
-          <a:xfrm>
-            <a:off x="731520" y="1051560"/>
-            <a:ext cx="54864" cy="658368"/>
+            <a:off x="548640" y="960120"/>
+            <a:ext cx="2286000" cy="36576"/>
           </a:xfrm>
           <a:prstGeom prst="rect">
             <a:avLst/>
@@ -1889,14 +1796,41 @@
       </p:sp>
       <p:sp>
         <p:nvSpPr>
-          <p:cNvPr id="8" name="Text 6"/>
+          <p:cNvPr id="5" name="Shape 3"/>
           <p:cNvSpPr/>
           <p:nvPr/>
         </p:nvSpPr>
         <p:spPr>
           <a:xfrm>
-            <a:off x="914400" y="1051560"/>
-            <a:ext cx="1463040" cy="658368"/>
+            <a:off x="548640" y="1234440"/>
+            <a:ext cx="3200400" cy="914400"/>
+          </a:xfrm>
+          <a:prstGeom prst="roundRect">
+            <a:avLst>
+              <a:gd name="adj" fmla="val 10000"/>
+            </a:avLst>
+          </a:prstGeom>
+          <a:solidFill>
+            <a:srgbClr val="FFFFFF"/>
+          </a:solidFill>
+          <a:ln w="9525">
+            <a:solidFill>
+              <a:srgbClr val="E5E2DC"/>
+            </a:solidFill>
+            <a:prstDash val="solid"/>
+          </a:ln>
+        </p:spPr>
+      </p:sp>
+      <p:sp>
+        <p:nvSpPr>
+          <p:cNvPr id="6" name="Text 4"/>
+          <p:cNvSpPr/>
+          <p:nvPr/>
+        </p:nvSpPr>
+        <p:spPr>
+          <a:xfrm>
+            <a:off x="685800" y="1307592"/>
+            <a:ext cx="2926080" cy="320040"/>
           </a:xfrm>
           <a:prstGeom prst="rect">
             <a:avLst/>
@@ -1905,37 +1839,37 @@
           <a:ln/>
         </p:spPr>
         <p:txBody>
-          <a:bodyPr wrap="square" lIns="0" tIns="0" rIns="0" bIns="0" rtlCol="0" anchor="ctr"/>
+          <a:bodyPr wrap="square" rtlCol="0" anchor="ctr"/>
           <a:lstStyle/>
           <a:p>
             <a:pPr indent="0" marL="0">
               <a:buNone/>
             </a:pPr>
             <a:r>
-              <a:rPr lang="en-US" sz="1300" b="1" dirty="0">
+              <a:rPr lang="en-US" sz="1400" b="1" dirty="0">
                 <a:solidFill>
-                  <a:srgbClr val="1B2A4A"/>
+                  <a:srgbClr val="2A9D8F"/>
                 </a:solidFill>
                 <a:latin typeface="Georgia" pitchFamily="34" charset="0"/>
                 <a:ea typeface="Georgia" pitchFamily="34" charset="-122"/>
                 <a:cs typeface="Georgia" pitchFamily="34" charset="-120"/>
               </a:rPr>
-              <a:t>Categorical</a:t>
-            </a:r>
-            <a:endParaRPr lang="en-US" sz="1300" dirty="0"/>
+              <a:t>Bar Chart</a:t>
+            </a:r>
+            <a:endParaRPr lang="en-US" sz="1400" dirty="0"/>
           </a:p>
         </p:txBody>
       </p:sp>
       <p:sp>
         <p:nvSpPr>
-          <p:cNvPr id="9" name="Text 7"/>
+          <p:cNvPr id="7" name="Text 5"/>
           <p:cNvSpPr/>
           <p:nvPr/>
         </p:nvSpPr>
         <p:spPr>
           <a:xfrm>
-            <a:off x="2377440" y="1051560"/>
-            <a:ext cx="1920240" cy="658368"/>
+            <a:off x="685800" y="1645920"/>
+            <a:ext cx="2926080" cy="457200"/>
           </a:xfrm>
           <a:prstGeom prst="rect">
             <a:avLst/>
@@ -1944,10 +1878,13 @@
           <a:ln/>
         </p:spPr>
         <p:txBody>
-          <a:bodyPr wrap="square" lIns="0" tIns="0" rIns="0" bIns="0" rtlCol="0" anchor="ctr"/>
+          <a:bodyPr wrap="square" rtlCol="0" anchor="ctr"/>
           <a:lstStyle/>
           <a:p>
             <a:pPr indent="0" marL="0">
+              <a:lnSpc>
+                <a:spcPct val="130000"/>
+              </a:lnSpc>
               <a:buNone/>
             </a:pPr>
             <a:r>
@@ -1955,11 +1892,11 @@
                 <a:solidFill>
                   <a:srgbClr val="6B6660"/>
                 </a:solidFill>
-                <a:latin typeface="Calibri" pitchFamily="34" charset="0"/>
-                <a:ea typeface="Calibri" pitchFamily="34" charset="-122"/>
-                <a:cs typeface="Calibri" pitchFamily="34" charset="-120"/>
+                <a:latin typeface="Arial" pitchFamily="34" charset="0"/>
+                <a:ea typeface="Arial" pitchFamily="34" charset="-122"/>
+                <a:cs typeface="Arial" pitchFamily="34" charset="-120"/>
               </a:rPr>
-              <a:t>Data in groups (e.g. colours)</a:t>
+              <a:t>Used for categorial data — bars don't touch.</a:t>
             </a:r>
             <a:endParaRPr lang="en-US" sz="1100" dirty="0"/>
           </a:p>
@@ -1967,100 +1904,80 @@
       </p:sp>
       <p:sp>
         <p:nvSpPr>
-          <p:cNvPr id="10" name="Shape 8"/>
+          <p:cNvPr id="8" name="Shape 6"/>
           <p:cNvSpPr/>
           <p:nvPr/>
         </p:nvSpPr>
         <p:spPr>
           <a:xfrm>
-            <a:off x="4754880" y="1051560"/>
-            <a:ext cx="3657600" cy="658368"/>
-          </a:xfrm>
-          <a:prstGeom prst="rect">
-            <a:avLst/>
+            <a:off x="4023360" y="1234440"/>
+            <a:ext cx="3200400" cy="914400"/>
+          </a:xfrm>
+          <a:prstGeom prst="roundRect">
+            <a:avLst>
+              <a:gd name="adj" fmla="val 10000"/>
+            </a:avLst>
           </a:prstGeom>
           <a:solidFill>
             <a:srgbClr val="FFFFFF"/>
           </a:solidFill>
-          <a:ln/>
-          <a:effectLst>
-            <a:outerShdw sx="100000" sy="100000" kx="0" ky="0" algn="bl" rotWithShape="0" blurRad="50800" dist="25400" dir="8100000">
-              <a:srgbClr val="000000">
-                <a:alpha val="10000"/>
-              </a:srgbClr>
-            </a:outerShdw>
-          </a:effectLst>
-        </p:spPr>
-      </p:sp>
-      <p:sp>
-        <p:nvSpPr>
-          <p:cNvPr id="11" name="Shape 9"/>
+          <a:ln w="9525">
+            <a:solidFill>
+              <a:srgbClr val="E5E2DC"/>
+            </a:solidFill>
+            <a:prstDash val="solid"/>
+          </a:ln>
+        </p:spPr>
+      </p:sp>
+      <p:sp>
+        <p:nvSpPr>
+          <p:cNvPr id="9" name="Text 7"/>
           <p:cNvSpPr/>
           <p:nvPr/>
         </p:nvSpPr>
         <p:spPr>
           <a:xfrm>
-            <a:off x="4754880" y="1051560"/>
-            <a:ext cx="54864" cy="658368"/>
+            <a:off x="4160520" y="1307592"/>
+            <a:ext cx="2926080" cy="320040"/>
           </a:xfrm>
           <a:prstGeom prst="rect">
             <a:avLst/>
           </a:prstGeom>
-          <a:solidFill>
-            <a:srgbClr val="2A9D8F"/>
-          </a:solidFill>
-          <a:ln/>
-        </p:spPr>
-      </p:sp>
-      <p:sp>
-        <p:nvSpPr>
-          <p:cNvPr id="12" name="Text 10"/>
-          <p:cNvSpPr/>
-          <p:nvPr/>
-        </p:nvSpPr>
-        <p:spPr>
-          <a:xfrm>
-            <a:off x="4937760" y="1051560"/>
-            <a:ext cx="1463040" cy="658368"/>
-          </a:xfrm>
-          <a:prstGeom prst="rect">
-            <a:avLst/>
-          </a:prstGeom>
           <a:noFill/>
           <a:ln/>
         </p:spPr>
         <p:txBody>
-          <a:bodyPr wrap="square" lIns="0" tIns="0" rIns="0" bIns="0" rtlCol="0" anchor="ctr"/>
+          <a:bodyPr wrap="square" rtlCol="0" anchor="ctr"/>
           <a:lstStyle/>
           <a:p>
             <a:pPr indent="0" marL="0">
               <a:buNone/>
             </a:pPr>
             <a:r>
-              <a:rPr lang="en-US" sz="1300" b="1" dirty="0">
+              <a:rPr lang="en-US" sz="1400" b="1" dirty="0">
                 <a:solidFill>
-                  <a:srgbClr val="1B2A4A"/>
+                  <a:srgbClr val="2A9D8F"/>
                 </a:solidFill>
                 <a:latin typeface="Georgia" pitchFamily="34" charset="0"/>
                 <a:ea typeface="Georgia" pitchFamily="34" charset="-122"/>
                 <a:cs typeface="Georgia" pitchFamily="34" charset="-120"/>
               </a:rPr>
-              <a:t>Continuous</a:t>
-            </a:r>
-            <a:endParaRPr lang="en-US" sz="1300" dirty="0"/>
+              <a:t>Line Graph</a:t>
+            </a:r>
+            <a:endParaRPr lang="en-US" sz="1400" dirty="0"/>
           </a:p>
         </p:txBody>
       </p:sp>
       <p:sp>
         <p:nvSpPr>
-          <p:cNvPr id="13" name="Text 11"/>
+          <p:cNvPr id="10" name="Text 8"/>
           <p:cNvSpPr/>
           <p:nvPr/>
         </p:nvSpPr>
         <p:spPr>
           <a:xfrm>
-            <a:off x="6400800" y="1051560"/>
-            <a:ext cx="1920240" cy="658368"/>
+            <a:off x="4160520" y="1645920"/>
+            <a:ext cx="2926080" cy="457200"/>
           </a:xfrm>
           <a:prstGeom prst="rect">
             <a:avLst/>
@@ -2069,10 +1986,13 @@
           <a:ln/>
         </p:spPr>
         <p:txBody>
-          <a:bodyPr wrap="square" lIns="0" tIns="0" rIns="0" bIns="0" rtlCol="0" anchor="ctr"/>
+          <a:bodyPr wrap="square" rtlCol="0" anchor="ctr"/>
           <a:lstStyle/>
           <a:p>
             <a:pPr indent="0" marL="0">
+              <a:lnSpc>
+                <a:spcPct val="130000"/>
+              </a:lnSpc>
               <a:buNone/>
             </a:pPr>
             <a:r>
@@ -2080,11 +2000,11 @@
                 <a:solidFill>
                   <a:srgbClr val="6B6660"/>
                 </a:solidFill>
-                <a:latin typeface="Calibri" pitchFamily="34" charset="0"/>
-                <a:ea typeface="Calibri" pitchFamily="34" charset="-122"/>
-                <a:cs typeface="Calibri" pitchFamily="34" charset="-120"/>
+                <a:latin typeface="Arial" pitchFamily="34" charset="0"/>
+                <a:ea typeface="Arial" pitchFamily="34" charset="-122"/>
+                <a:cs typeface="Arial" pitchFamily="34" charset="-120"/>
               </a:rPr>
-              <a:t>Data on a scale (e.g. temperature)</a:t>
+              <a:t>Used for continuous data — shows trends over time.</a:t>
             </a:r>
             <a:endParaRPr lang="en-US" sz="1100" dirty="0"/>
           </a:p>
@@ -2092,100 +2012,80 @@
       </p:sp>
       <p:sp>
         <p:nvSpPr>
-          <p:cNvPr id="14" name="Shape 12"/>
+          <p:cNvPr id="11" name="Shape 9"/>
           <p:cNvSpPr/>
           <p:nvPr/>
         </p:nvSpPr>
         <p:spPr>
           <a:xfrm>
-            <a:off x="731520" y="1819656"/>
-            <a:ext cx="3657600" cy="658368"/>
-          </a:xfrm>
-          <a:prstGeom prst="rect">
-            <a:avLst/>
+            <a:off x="7498080" y="1234440"/>
+            <a:ext cx="3200400" cy="914400"/>
+          </a:xfrm>
+          <a:prstGeom prst="roundRect">
+            <a:avLst>
+              <a:gd name="adj" fmla="val 10000"/>
+            </a:avLst>
           </a:prstGeom>
           <a:solidFill>
             <a:srgbClr val="FFFFFF"/>
           </a:solidFill>
-          <a:ln/>
-          <a:effectLst>
-            <a:outerShdw sx="100000" sy="100000" kx="0" ky="0" algn="bl" rotWithShape="0" blurRad="50800" dist="25400" dir="8100000">
-              <a:srgbClr val="000000">
-                <a:alpha val="10000"/>
-              </a:srgbClr>
-            </a:outerShdw>
-          </a:effectLst>
-        </p:spPr>
-      </p:sp>
-      <p:sp>
-        <p:nvSpPr>
-          <p:cNvPr id="15" name="Shape 13"/>
+          <a:ln w="9525">
+            <a:solidFill>
+              <a:srgbClr val="E5E2DC"/>
+            </a:solidFill>
+            <a:prstDash val="solid"/>
+          </a:ln>
+        </p:spPr>
+      </p:sp>
+      <p:sp>
+        <p:nvSpPr>
+          <p:cNvPr id="12" name="Text 10"/>
           <p:cNvSpPr/>
           <p:nvPr/>
         </p:nvSpPr>
         <p:spPr>
           <a:xfrm>
-            <a:off x="731520" y="1819656"/>
-            <a:ext cx="54864" cy="658368"/>
+            <a:off x="7635240" y="1307592"/>
+            <a:ext cx="2926080" cy="320040"/>
           </a:xfrm>
           <a:prstGeom prst="rect">
             <a:avLst/>
           </a:prstGeom>
-          <a:solidFill>
-            <a:srgbClr val="2A9D8F"/>
-          </a:solidFill>
-          <a:ln/>
-        </p:spPr>
-      </p:sp>
-      <p:sp>
-        <p:nvSpPr>
-          <p:cNvPr id="16" name="Text 14"/>
-          <p:cNvSpPr/>
-          <p:nvPr/>
-        </p:nvSpPr>
-        <p:spPr>
-          <a:xfrm>
-            <a:off x="914400" y="1819656"/>
-            <a:ext cx="1463040" cy="658368"/>
-          </a:xfrm>
-          <a:prstGeom prst="rect">
-            <a:avLst/>
-          </a:prstGeom>
           <a:noFill/>
           <a:ln/>
         </p:spPr>
         <p:txBody>
-          <a:bodyPr wrap="square" lIns="0" tIns="0" rIns="0" bIns="0" rtlCol="0" anchor="ctr"/>
+          <a:bodyPr wrap="square" rtlCol="0" anchor="ctr"/>
           <a:lstStyle/>
           <a:p>
             <a:pPr indent="0" marL="0">
               <a:buNone/>
             </a:pPr>
             <a:r>
-              <a:rPr lang="en-US" sz="1300" b="1" dirty="0">
+              <a:rPr lang="en-US" sz="1400" b="1" dirty="0">
                 <a:solidFill>
-                  <a:srgbClr val="1B2A4A"/>
+                  <a:srgbClr val="2A9D8F"/>
                 </a:solidFill>
                 <a:latin typeface="Georgia" pitchFamily="34" charset="0"/>
                 <a:ea typeface="Georgia" pitchFamily="34" charset="-122"/>
                 <a:cs typeface="Georgia" pitchFamily="34" charset="-120"/>
               </a:rPr>
-              <a:t>Bar chart</a:t>
-            </a:r>
-            <a:endParaRPr lang="en-US" sz="1300" dirty="0"/>
+              <a:t>Pie Chart</a:t>
+            </a:r>
+            <a:endParaRPr lang="en-US" sz="1400" dirty="0"/>
           </a:p>
         </p:txBody>
       </p:sp>
       <p:sp>
         <p:nvSpPr>
-          <p:cNvPr id="17" name="Text 15"/>
+          <p:cNvPr id="13" name="Text 11"/>
           <p:cNvSpPr/>
           <p:nvPr/>
         </p:nvSpPr>
         <p:spPr>
           <a:xfrm>
-            <a:off x="2377440" y="1819656"/>
-            <a:ext cx="1920240" cy="658368"/>
+            <a:off x="7635240" y="1645920"/>
+            <a:ext cx="2926080" cy="457200"/>
           </a:xfrm>
           <a:prstGeom prst="rect">
             <a:avLst/>
@@ -2194,10 +2094,13 @@
           <a:ln/>
         </p:spPr>
         <p:txBody>
-          <a:bodyPr wrap="square" lIns="0" tIns="0" rIns="0" bIns="0" rtlCol="0" anchor="ctr"/>
+          <a:bodyPr wrap="square" rtlCol="0" anchor="ctr"/>
           <a:lstStyle/>
           <a:p>
             <a:pPr indent="0" marL="0">
+              <a:lnSpc>
+                <a:spcPct val="130000"/>
+              </a:lnSpc>
               <a:buNone/>
             </a:pPr>
             <a:r>
@@ -2205,11 +2108,11 @@
                 <a:solidFill>
                   <a:srgbClr val="6B6660"/>
                 </a:solidFill>
-                <a:latin typeface="Calibri" pitchFamily="34" charset="0"/>
-                <a:ea typeface="Calibri" pitchFamily="34" charset="-122"/>
-                <a:cs typeface="Calibri" pitchFamily="34" charset="-120"/>
+                <a:latin typeface="Arial" pitchFamily="34" charset="0"/>
+                <a:ea typeface="Arial" pitchFamily="34" charset="-122"/>
+                <a:cs typeface="Arial" pitchFamily="34" charset="-120"/>
               </a:rPr>
-              <a:t>For categorical data — bars don't touch</a:t>
+              <a:t>Shows proportions — parts of a whole (100%).</a:t>
             </a:r>
             <a:endParaRPr lang="en-US" sz="1100" dirty="0"/>
           </a:p>
@@ -2217,100 +2120,80 @@
       </p:sp>
       <p:sp>
         <p:nvSpPr>
-          <p:cNvPr id="18" name="Shape 16"/>
+          <p:cNvPr id="14" name="Shape 12"/>
           <p:cNvSpPr/>
           <p:nvPr/>
         </p:nvSpPr>
         <p:spPr>
           <a:xfrm>
-            <a:off x="4754880" y="1819656"/>
-            <a:ext cx="3657600" cy="658368"/>
-          </a:xfrm>
-          <a:prstGeom prst="rect">
-            <a:avLst/>
+            <a:off x="548640" y="2286000"/>
+            <a:ext cx="3200400" cy="914400"/>
+          </a:xfrm>
+          <a:prstGeom prst="roundRect">
+            <a:avLst>
+              <a:gd name="adj" fmla="val 10000"/>
+            </a:avLst>
           </a:prstGeom>
           <a:solidFill>
             <a:srgbClr val="FFFFFF"/>
           </a:solidFill>
-          <a:ln/>
-          <a:effectLst>
-            <a:outerShdw sx="100000" sy="100000" kx="0" ky="0" algn="bl" rotWithShape="0" blurRad="50800" dist="25400" dir="8100000">
-              <a:srgbClr val="000000">
-                <a:alpha val="10000"/>
-              </a:srgbClr>
-            </a:outerShdw>
-          </a:effectLst>
-        </p:spPr>
-      </p:sp>
-      <p:sp>
-        <p:nvSpPr>
-          <p:cNvPr id="19" name="Shape 17"/>
+          <a:ln w="9525">
+            <a:solidFill>
+              <a:srgbClr val="E5E2DC"/>
+            </a:solidFill>
+            <a:prstDash val="solid"/>
+          </a:ln>
+        </p:spPr>
+      </p:sp>
+      <p:sp>
+        <p:nvSpPr>
+          <p:cNvPr id="15" name="Text 13"/>
           <p:cNvSpPr/>
           <p:nvPr/>
         </p:nvSpPr>
         <p:spPr>
           <a:xfrm>
-            <a:off x="4754880" y="1819656"/>
-            <a:ext cx="54864" cy="658368"/>
+            <a:off x="685800" y="2359152"/>
+            <a:ext cx="2926080" cy="320040"/>
           </a:xfrm>
           <a:prstGeom prst="rect">
             <a:avLst/>
           </a:prstGeom>
-          <a:solidFill>
-            <a:srgbClr val="2A9D8F"/>
-          </a:solidFill>
-          <a:ln/>
-        </p:spPr>
-      </p:sp>
-      <p:sp>
-        <p:nvSpPr>
-          <p:cNvPr id="20" name="Text 18"/>
-          <p:cNvSpPr/>
-          <p:nvPr/>
-        </p:nvSpPr>
-        <p:spPr>
-          <a:xfrm>
-            <a:off x="4937760" y="1819656"/>
-            <a:ext cx="1463040" cy="658368"/>
-          </a:xfrm>
-          <a:prstGeom prst="rect">
-            <a:avLst/>
-          </a:prstGeom>
           <a:noFill/>
           <a:ln/>
         </p:spPr>
         <p:txBody>
-          <a:bodyPr wrap="square" lIns="0" tIns="0" rIns="0" bIns="0" rtlCol="0" anchor="ctr"/>
+          <a:bodyPr wrap="square" rtlCol="0" anchor="ctr"/>
           <a:lstStyle/>
           <a:p>
             <a:pPr indent="0" marL="0">
               <a:buNone/>
             </a:pPr>
             <a:r>
-              <a:rPr lang="en-US" sz="1300" b="1" dirty="0">
+              <a:rPr lang="en-US" sz="1400" b="1" dirty="0">
                 <a:solidFill>
-                  <a:srgbClr val="1B2A4A"/>
+                  <a:srgbClr val="2A9D8F"/>
                 </a:solidFill>
                 <a:latin typeface="Georgia" pitchFamily="34" charset="0"/>
                 <a:ea typeface="Georgia" pitchFamily="34" charset="-122"/>
                 <a:cs typeface="Georgia" pitchFamily="34" charset="-120"/>
               </a:rPr>
-              <a:t>Line graph</a:t>
-            </a:r>
-            <a:endParaRPr lang="en-US" sz="1300" dirty="0"/>
+              <a:t>Axis</a:t>
+            </a:r>
+            <a:endParaRPr lang="en-US" sz="1400" dirty="0"/>
           </a:p>
         </p:txBody>
       </p:sp>
       <p:sp>
         <p:nvSpPr>
-          <p:cNvPr id="21" name="Text 19"/>
+          <p:cNvPr id="16" name="Text 14"/>
           <p:cNvSpPr/>
           <p:nvPr/>
         </p:nvSpPr>
         <p:spPr>
           <a:xfrm>
-            <a:off x="6400800" y="1819656"/>
-            <a:ext cx="1920240" cy="658368"/>
+            <a:off x="685800" y="2697480"/>
+            <a:ext cx="2926080" cy="457200"/>
           </a:xfrm>
           <a:prstGeom prst="rect">
             <a:avLst/>
@@ -2319,10 +2202,13 @@
           <a:ln/>
         </p:spPr>
         <p:txBody>
-          <a:bodyPr wrap="square" lIns="0" tIns="0" rIns="0" bIns="0" rtlCol="0" anchor="ctr"/>
+          <a:bodyPr wrap="square" rtlCol="0" anchor="ctr"/>
           <a:lstStyle/>
           <a:p>
             <a:pPr indent="0" marL="0">
+              <a:lnSpc>
+                <a:spcPct val="130000"/>
+              </a:lnSpc>
               <a:buNone/>
             </a:pPr>
             <a:r>
@@ -2330,11 +2216,11 @@
                 <a:solidFill>
                   <a:srgbClr val="6B6660"/>
                 </a:solidFill>
-                <a:latin typeface="Calibri" pitchFamily="34" charset="0"/>
-                <a:ea typeface="Calibri" pitchFamily="34" charset="-122"/>
-                <a:cs typeface="Calibri" pitchFamily="34" charset="-120"/>
+                <a:latin typeface="Arial" pitchFamily="34" charset="0"/>
+                <a:ea typeface="Arial" pitchFamily="34" charset="-122"/>
+                <a:cs typeface="Arial" pitchFamily="34" charset="-120"/>
               </a:rPr>
-              <a:t>For continuous data — points connected</a:t>
+              <a:t>The x-axis (horizontal) and y-axis (vertical) on a graph.</a:t>
             </a:r>
             <a:endParaRPr lang="en-US" sz="1100" dirty="0"/>
           </a:p>
@@ -2342,79 +2228,59 @@
       </p:sp>
       <p:sp>
         <p:nvSpPr>
-          <p:cNvPr id="22" name="Shape 20"/>
+          <p:cNvPr id="17" name="Shape 15"/>
           <p:cNvSpPr/>
           <p:nvPr/>
         </p:nvSpPr>
         <p:spPr>
           <a:xfrm>
-            <a:off x="731520" y="2587752"/>
-            <a:ext cx="3657600" cy="658368"/>
-          </a:xfrm>
-          <a:prstGeom prst="rect">
-            <a:avLst/>
+            <a:off x="4023360" y="2286000"/>
+            <a:ext cx="3200400" cy="914400"/>
+          </a:xfrm>
+          <a:prstGeom prst="roundRect">
+            <a:avLst>
+              <a:gd name="adj" fmla="val 10000"/>
+            </a:avLst>
           </a:prstGeom>
           <a:solidFill>
             <a:srgbClr val="FFFFFF"/>
           </a:solidFill>
-          <a:ln/>
-          <a:effectLst>
-            <a:outerShdw sx="100000" sy="100000" kx="0" ky="0" algn="bl" rotWithShape="0" blurRad="50800" dist="25400" dir="8100000">
-              <a:srgbClr val="000000">
-                <a:alpha val="10000"/>
-              </a:srgbClr>
-            </a:outerShdw>
-          </a:effectLst>
-        </p:spPr>
-      </p:sp>
-      <p:sp>
-        <p:nvSpPr>
-          <p:cNvPr id="23" name="Shape 21"/>
+          <a:ln w="9525">
+            <a:solidFill>
+              <a:srgbClr val="E5E2DC"/>
+            </a:solidFill>
+            <a:prstDash val="solid"/>
+          </a:ln>
+        </p:spPr>
+      </p:sp>
+      <p:sp>
+        <p:nvSpPr>
+          <p:cNvPr id="18" name="Text 16"/>
           <p:cNvSpPr/>
           <p:nvPr/>
         </p:nvSpPr>
         <p:spPr>
           <a:xfrm>
-            <a:off x="731520" y="2587752"/>
-            <a:ext cx="54864" cy="658368"/>
+            <a:off x="4160520" y="2359152"/>
+            <a:ext cx="2926080" cy="320040"/>
           </a:xfrm>
           <a:prstGeom prst="rect">
             <a:avLst/>
           </a:prstGeom>
-          <a:solidFill>
-            <a:srgbClr val="2A9D8F"/>
-          </a:solidFill>
-          <a:ln/>
-        </p:spPr>
-      </p:sp>
-      <p:sp>
-        <p:nvSpPr>
-          <p:cNvPr id="24" name="Text 22"/>
-          <p:cNvSpPr/>
-          <p:nvPr/>
-        </p:nvSpPr>
-        <p:spPr>
-          <a:xfrm>
-            <a:off x="914400" y="2587752"/>
-            <a:ext cx="1463040" cy="658368"/>
-          </a:xfrm>
-          <a:prstGeom prst="rect">
-            <a:avLst/>
-          </a:prstGeom>
           <a:noFill/>
           <a:ln/>
         </p:spPr>
         <p:txBody>
-          <a:bodyPr wrap="square" lIns="0" tIns="0" rIns="0" bIns="0" rtlCol="0" anchor="ctr"/>
+          <a:bodyPr wrap="square" rtlCol="0" anchor="ctr"/>
           <a:lstStyle/>
           <a:p>
             <a:pPr indent="0" marL="0">
               <a:buNone/>
             </a:pPr>
             <a:r>
-              <a:rPr lang="en-US" sz="1300" b="1" dirty="0">
+              <a:rPr lang="en-US" sz="1400" b="1" dirty="0">
                 <a:solidFill>
-                  <a:srgbClr val="1B2A4A"/>
+                  <a:srgbClr val="2A9D8F"/>
                 </a:solidFill>
                 <a:latin typeface="Georgia" pitchFamily="34" charset="0"/>
                 <a:ea typeface="Georgia" pitchFamily="34" charset="-122"/>
@@ -2422,20 +2288,20 @@
               </a:rPr>
               <a:t>Trend</a:t>
             </a:r>
-            <a:endParaRPr lang="en-US" sz="1300" dirty="0"/>
+            <a:endParaRPr lang="en-US" sz="1400" dirty="0"/>
           </a:p>
         </p:txBody>
       </p:sp>
       <p:sp>
         <p:nvSpPr>
-          <p:cNvPr id="25" name="Text 23"/>
+          <p:cNvPr id="19" name="Text 17"/>
           <p:cNvSpPr/>
           <p:nvPr/>
         </p:nvSpPr>
         <p:spPr>
           <a:xfrm>
-            <a:off x="2377440" y="2587752"/>
-            <a:ext cx="1920240" cy="658368"/>
+            <a:off x="4160520" y="2697480"/>
+            <a:ext cx="2926080" cy="457200"/>
           </a:xfrm>
           <a:prstGeom prst="rect">
             <a:avLst/>
@@ -2444,10 +2310,13 @@
           <a:ln/>
         </p:spPr>
         <p:txBody>
-          <a:bodyPr wrap="square" lIns="0" tIns="0" rIns="0" bIns="0" rtlCol="0" anchor="ctr"/>
+          <a:bodyPr wrap="square" rtlCol="0" anchor="ctr"/>
           <a:lstStyle/>
           <a:p>
             <a:pPr indent="0" marL="0">
+              <a:lnSpc>
+                <a:spcPct val="130000"/>
+              </a:lnSpc>
               <a:buNone/>
             </a:pPr>
             <a:r>
@@ -2455,11 +2324,11 @@
                 <a:solidFill>
                   <a:srgbClr val="6B6660"/>
                 </a:solidFill>
-                <a:latin typeface="Calibri" pitchFamily="34" charset="0"/>
-                <a:ea typeface="Calibri" pitchFamily="34" charset="-122"/>
-                <a:cs typeface="Calibri" pitchFamily="34" charset="-120"/>
+                <a:latin typeface="Arial" pitchFamily="34" charset="0"/>
+                <a:ea typeface="Arial" pitchFamily="34" charset="-122"/>
+                <a:cs typeface="Arial" pitchFamily="34" charset="-120"/>
               </a:rPr>
-              <a:t>The general pattern in data</a:t>
+              <a:t>The overall pattern shown by the data.</a:t>
             </a:r>
             <a:endParaRPr lang="en-US" sz="1100" dirty="0"/>
           </a:p>
@@ -2467,100 +2336,80 @@
       </p:sp>
       <p:sp>
         <p:nvSpPr>
-          <p:cNvPr id="26" name="Shape 24"/>
+          <p:cNvPr id="20" name="Shape 18"/>
           <p:cNvSpPr/>
           <p:nvPr/>
         </p:nvSpPr>
         <p:spPr>
           <a:xfrm>
-            <a:off x="4754880" y="2587752"/>
-            <a:ext cx="3657600" cy="658368"/>
-          </a:xfrm>
-          <a:prstGeom prst="rect">
-            <a:avLst/>
+            <a:off x="7498080" y="2286000"/>
+            <a:ext cx="3200400" cy="914400"/>
+          </a:xfrm>
+          <a:prstGeom prst="roundRect">
+            <a:avLst>
+              <a:gd name="adj" fmla="val 10000"/>
+            </a:avLst>
           </a:prstGeom>
           <a:solidFill>
             <a:srgbClr val="FFFFFF"/>
           </a:solidFill>
-          <a:ln/>
-          <a:effectLst>
-            <a:outerShdw sx="100000" sy="100000" kx="0" ky="0" algn="bl" rotWithShape="0" blurRad="50800" dist="25400" dir="8100000">
-              <a:srgbClr val="000000">
-                <a:alpha val="10000"/>
-              </a:srgbClr>
-            </a:outerShdw>
-          </a:effectLst>
-        </p:spPr>
-      </p:sp>
-      <p:sp>
-        <p:nvSpPr>
-          <p:cNvPr id="27" name="Shape 25"/>
+          <a:ln w="9525">
+            <a:solidFill>
+              <a:srgbClr val="E5E2DC"/>
+            </a:solidFill>
+            <a:prstDash val="solid"/>
+          </a:ln>
+        </p:spPr>
+      </p:sp>
+      <p:sp>
+        <p:nvSpPr>
+          <p:cNvPr id="21" name="Text 19"/>
           <p:cNvSpPr/>
           <p:nvPr/>
         </p:nvSpPr>
         <p:spPr>
           <a:xfrm>
-            <a:off x="4754880" y="2587752"/>
-            <a:ext cx="54864" cy="658368"/>
+            <a:off x="7635240" y="2359152"/>
+            <a:ext cx="2926080" cy="320040"/>
           </a:xfrm>
           <a:prstGeom prst="rect">
             <a:avLst/>
           </a:prstGeom>
-          <a:solidFill>
-            <a:srgbClr val="2A9D8F"/>
-          </a:solidFill>
-          <a:ln/>
-        </p:spPr>
-      </p:sp>
-      <p:sp>
-        <p:nvSpPr>
-          <p:cNvPr id="28" name="Text 26"/>
-          <p:cNvSpPr/>
-          <p:nvPr/>
-        </p:nvSpPr>
-        <p:spPr>
-          <a:xfrm>
-            <a:off x="4937760" y="2587752"/>
-            <a:ext cx="1463040" cy="658368"/>
-          </a:xfrm>
-          <a:prstGeom prst="rect">
-            <a:avLst/>
-          </a:prstGeom>
           <a:noFill/>
           <a:ln/>
         </p:spPr>
         <p:txBody>
-          <a:bodyPr wrap="square" lIns="0" tIns="0" rIns="0" bIns="0" rtlCol="0" anchor="ctr"/>
+          <a:bodyPr wrap="square" rtlCol="0" anchor="ctr"/>
           <a:lstStyle/>
           <a:p>
             <a:pPr indent="0" marL="0">
               <a:buNone/>
             </a:pPr>
             <a:r>
-              <a:rPr lang="en-US" sz="1300" b="1" dirty="0">
+              <a:rPr lang="en-US" sz="1400" b="1" dirty="0">
                 <a:solidFill>
-                  <a:srgbClr val="1B2A4A"/>
+                  <a:srgbClr val="2A9D8F"/>
                 </a:solidFill>
                 <a:latin typeface="Georgia" pitchFamily="34" charset="0"/>
                 <a:ea typeface="Georgia" pitchFamily="34" charset="-122"/>
                 <a:cs typeface="Georgia" pitchFamily="34" charset="-120"/>
               </a:rPr>
-              <a:t>Anomaly</a:t>
-            </a:r>
-            <a:endParaRPr lang="en-US" sz="1300" dirty="0"/>
+              <a:t>Outlier</a:t>
+            </a:r>
+            <a:endParaRPr lang="en-US" sz="1400" dirty="0"/>
           </a:p>
         </p:txBody>
       </p:sp>
       <p:sp>
         <p:nvSpPr>
-          <p:cNvPr id="29" name="Text 27"/>
+          <p:cNvPr id="22" name="Text 20"/>
           <p:cNvSpPr/>
           <p:nvPr/>
         </p:nvSpPr>
         <p:spPr>
           <a:xfrm>
-            <a:off x="6400800" y="2587752"/>
-            <a:ext cx="1920240" cy="658368"/>
+            <a:off x="7635240" y="2697480"/>
+            <a:ext cx="2926080" cy="457200"/>
           </a:xfrm>
           <a:prstGeom prst="rect">
             <a:avLst/>
@@ -2569,10 +2418,13 @@
           <a:ln/>
         </p:spPr>
         <p:txBody>
-          <a:bodyPr wrap="square" lIns="0" tIns="0" rIns="0" bIns="0" rtlCol="0" anchor="ctr"/>
+          <a:bodyPr wrap="square" rtlCol="0" anchor="ctr"/>
           <a:lstStyle/>
           <a:p>
             <a:pPr indent="0" marL="0">
+              <a:lnSpc>
+                <a:spcPct val="130000"/>
+              </a:lnSpc>
               <a:buNone/>
             </a:pPr>
             <a:r>
@@ -2580,11 +2432,11 @@
                 <a:solidFill>
                   <a:srgbClr val="6B6660"/>
                 </a:solidFill>
-                <a:latin typeface="Calibri" pitchFamily="34" charset="0"/>
-                <a:ea typeface="Calibri" pitchFamily="34" charset="-122"/>
-                <a:cs typeface="Calibri" pitchFamily="34" charset="-120"/>
+                <a:latin typeface="Arial" pitchFamily="34" charset="0"/>
+                <a:ea typeface="Arial" pitchFamily="34" charset="-122"/>
+                <a:cs typeface="Arial" pitchFamily="34" charset="-120"/>
               </a:rPr>
-              <a:t>A result that doesn't fit the pattern</a:t>
+              <a:t>A data point that doesn't fit the pattern.</a:t>
             </a:r>
             <a:endParaRPr lang="en-US" sz="1100" dirty="0"/>
           </a:p>
@@ -2631,47 +2483,7 @@
         <p:spPr>
           <a:xfrm>
             <a:off x="0" y="0"/>
-            <a:ext cx="9144000" cy="822960"/>
-          </a:xfrm>
-          <a:prstGeom prst="rect">
-            <a:avLst/>
-          </a:prstGeom>
-          <a:solidFill>
-            <a:srgbClr val="FFFFFF"/>
-          </a:solidFill>
-          <a:ln/>
-        </p:spPr>
-      </p:sp>
-      <p:sp>
-        <p:nvSpPr>
-          <p:cNvPr id="3" name="Shape 1"/>
-          <p:cNvSpPr/>
-          <p:nvPr/>
-        </p:nvSpPr>
-        <p:spPr>
-          <a:xfrm>
-            <a:off x="0" y="804672"/>
-            <a:ext cx="9144000" cy="27432"/>
-          </a:xfrm>
-          <a:prstGeom prst="rect">
-            <a:avLst/>
-          </a:prstGeom>
-          <a:solidFill>
-            <a:srgbClr val="E5E2DC"/>
-          </a:solidFill>
-          <a:ln/>
-        </p:spPr>
-      </p:sp>
-      <p:sp>
-        <p:nvSpPr>
-          <p:cNvPr id="4" name="Shape 2"/>
-          <p:cNvSpPr/>
-          <p:nvPr/>
-        </p:nvSpPr>
-        <p:spPr>
-          <a:xfrm>
-            <a:off x="548640" y="201168"/>
-            <a:ext cx="54864" cy="420624"/>
+            <a:ext cx="73152" cy="5148072"/>
           </a:xfrm>
           <a:prstGeom prst="rect">
             <a:avLst/>
@@ -2684,14 +2496,14 @@
       </p:sp>
       <p:sp>
         <p:nvSpPr>
-          <p:cNvPr id="5" name="Text 3"/>
+          <p:cNvPr id="3" name="Text 1"/>
           <p:cNvSpPr/>
           <p:nvPr/>
         </p:nvSpPr>
         <p:spPr>
           <a:xfrm>
-            <a:off x="777240" y="137160"/>
-            <a:ext cx="7772400" cy="548640"/>
+            <a:off x="548640" y="274320"/>
+            <a:ext cx="9144000" cy="640080"/>
           </a:xfrm>
           <a:prstGeom prst="rect">
             <a:avLst/>
@@ -2700,14 +2512,14 @@
           <a:ln/>
         </p:spPr>
         <p:txBody>
-          <a:bodyPr wrap="square" lIns="0" tIns="0" rIns="0" bIns="0" rtlCol="0" anchor="ctr"/>
+          <a:bodyPr wrap="square" rtlCol="0" anchor="ctr"/>
           <a:lstStyle/>
           <a:p>
             <a:pPr indent="0" marL="0">
               <a:buNone/>
             </a:pPr>
             <a:r>
-              <a:rPr lang="en-US" sz="2000" b="1" dirty="0">
+              <a:rPr lang="en-US" sz="2400" b="1" dirty="0">
                 <a:solidFill>
                   <a:srgbClr val="1B2A4A"/>
                 </a:solidFill>
@@ -2715,49 +2527,22 @@
                 <a:ea typeface="Georgia" pitchFamily="34" charset="-122"/>
                 <a:cs typeface="Georgia" pitchFamily="34" charset="-120"/>
               </a:rPr>
-              <a:t>Choosing the Right Graph</a:t>
-            </a:r>
-            <a:endParaRPr lang="en-US" sz="2000" dirty="0"/>
+              <a:t>Drawing a Good Graph: SALT Rules</a:t>
+            </a:r>
+            <a:endParaRPr lang="en-US" sz="2400" dirty="0"/>
           </a:p>
         </p:txBody>
       </p:sp>
       <p:sp>
         <p:nvSpPr>
-          <p:cNvPr id="6" name="Shape 4"/>
+          <p:cNvPr id="4" name="Shape 2"/>
           <p:cNvSpPr/>
           <p:nvPr/>
         </p:nvSpPr>
         <p:spPr>
           <a:xfrm>
-            <a:off x="548640" y="1051560"/>
-            <a:ext cx="3840480" cy="3474720"/>
-          </a:xfrm>
-          <a:prstGeom prst="rect">
-            <a:avLst/>
-          </a:prstGeom>
-          <a:solidFill>
-            <a:srgbClr val="FFFFFF"/>
-          </a:solidFill>
-          <a:ln/>
-          <a:effectLst>
-            <a:outerShdw sx="100000" sy="100000" kx="0" ky="0" algn="bl" rotWithShape="0" blurRad="50800" dist="25400" dir="8100000">
-              <a:srgbClr val="000000">
-                <a:alpha val="10000"/>
-              </a:srgbClr>
-            </a:outerShdw>
-          </a:effectLst>
-        </p:spPr>
-      </p:sp>
-      <p:sp>
-        <p:nvSpPr>
-          <p:cNvPr id="7" name="Shape 5"/>
-          <p:cNvSpPr/>
-          <p:nvPr/>
-        </p:nvSpPr>
-        <p:spPr>
-          <a:xfrm>
-            <a:off x="548640" y="1051560"/>
-            <a:ext cx="3840480" cy="54864"/>
+            <a:off x="548640" y="960120"/>
+            <a:ext cx="2286000" cy="36576"/>
           </a:xfrm>
           <a:prstGeom prst="rect">
             <a:avLst/>
@@ -2770,53 +2555,14 @@
       </p:sp>
       <p:sp>
         <p:nvSpPr>
-          <p:cNvPr id="8" name="Text 6"/>
+          <p:cNvPr id="5" name="Text 3"/>
           <p:cNvSpPr/>
           <p:nvPr/>
         </p:nvSpPr>
         <p:spPr>
           <a:xfrm>
-            <a:off x="777240" y="1188720"/>
-            <a:ext cx="3383280" cy="457200"/>
-          </a:xfrm>
-          <a:prstGeom prst="rect">
-            <a:avLst/>
-          </a:prstGeom>
-          <a:noFill/>
-          <a:ln/>
-        </p:spPr>
-        <p:txBody>
-          <a:bodyPr wrap="square" lIns="0" tIns="0" rIns="0" bIns="0" rtlCol="0" anchor="ctr"/>
-          <a:lstStyle/>
-          <a:p>
-            <a:pPr indent="0" marL="0">
-              <a:buNone/>
-            </a:pPr>
-            <a:r>
-              <a:rPr lang="en-US" sz="1500" b="1" dirty="0">
-                <a:solidFill>
-                  <a:srgbClr val="1B2A4A"/>
-                </a:solidFill>
-                <a:latin typeface="Georgia" pitchFamily="34" charset="0"/>
-                <a:ea typeface="Georgia" pitchFamily="34" charset="-122"/>
-                <a:cs typeface="Georgia" pitchFamily="34" charset="-120"/>
-              </a:rPr>
-              <a:t>Bar Chart</a:t>
-            </a:r>
-            <a:endParaRPr lang="en-US" sz="1500" dirty="0"/>
-          </a:p>
-        </p:txBody>
-      </p:sp>
-      <p:sp>
-        <p:nvSpPr>
-          <p:cNvPr id="9" name="Text 7"/>
-          <p:cNvSpPr/>
-          <p:nvPr/>
-        </p:nvSpPr>
-        <p:spPr>
-          <a:xfrm>
-            <a:off x="777240" y="1691640"/>
-            <a:ext cx="3383280" cy="2651760"/>
+            <a:off x="548640" y="1188720"/>
+            <a:ext cx="10058400" cy="3474720"/>
           </a:xfrm>
           <a:prstGeom prst="rect">
             <a:avLst/>
@@ -2828,280 +2574,136 @@
           <a:bodyPr wrap="square" rtlCol="0" anchor="t"/>
           <a:lstStyle/>
           <a:p>
-            <a:pPr marL="342900" indent="-342900">
+            <a:pPr>
+              <a:lnSpc>
+                <a:spcPct val="150000"/>
+              </a:lnSpc>
               <a:spcAft>
                 <a:spcPts val="600"/>
               </a:spcAft>
-              <a:buSzPct val="100000"/>
-              <a:buChar char="•"/>
             </a:pPr>
             <a:r>
-              <a:rPr lang="en-US" sz="1300" dirty="0">
+              <a:rPr lang="en-US" sz="1500" dirty="0">
                 <a:solidFill>
                   <a:srgbClr val="3D3A36"/>
                 </a:solidFill>
-                <a:latin typeface="Calibri" pitchFamily="34" charset="0"/>
-                <a:ea typeface="Calibri" pitchFamily="34" charset="-122"/>
-                <a:cs typeface="Calibri" pitchFamily="34" charset="-120"/>
+                <a:latin typeface="Arial" pitchFamily="34" charset="0"/>
+                <a:ea typeface="Arial" pitchFamily="34" charset="-122"/>
+                <a:cs typeface="Arial" pitchFamily="34" charset="-120"/>
               </a:rPr>
-              <a:t>Used for CATEGORICAL data</a:t>
-            </a:r>
-            <a:endParaRPr lang="en-US" sz="1300" dirty="0"/>
-          </a:p>
-          <a:p>
-            <a:pPr marL="342900" indent="-342900">
+              <a:t>S — Scale: Choose a scale that uses most of the graph paper.</a:t>
+            </a:r>
+            <a:endParaRPr lang="en-US" sz="1500" dirty="0"/>
+          </a:p>
+          <a:p>
+            <a:pPr>
+              <a:lnSpc>
+                <a:spcPct val="150000"/>
+              </a:lnSpc>
               <a:spcAft>
                 <a:spcPts val="600"/>
               </a:spcAft>
-              <a:buSzPct val="100000"/>
-              <a:buChar char="•"/>
             </a:pPr>
             <a:r>
-              <a:rPr lang="en-US" sz="1300" dirty="0">
+              <a:rPr lang="en-US" sz="1500" dirty="0">
                 <a:solidFill>
                   <a:srgbClr val="3D3A36"/>
                 </a:solidFill>
-                <a:latin typeface="Calibri" pitchFamily="34" charset="0"/>
-                <a:ea typeface="Calibri" pitchFamily="34" charset="-122"/>
-                <a:cs typeface="Calibri" pitchFamily="34" charset="-120"/>
+                <a:latin typeface="Arial" pitchFamily="34" charset="0"/>
+                <a:ea typeface="Arial" pitchFamily="34" charset="-122"/>
+                <a:cs typeface="Arial" pitchFamily="34" charset="-120"/>
               </a:rPr>
-              <a:t>Bars do NOT touch</a:t>
-            </a:r>
-            <a:endParaRPr lang="en-US" sz="1300" dirty="0"/>
-          </a:p>
-          <a:p>
-            <a:pPr marL="342900" indent="-342900">
+              <a:t>A — Axes: Independent variable on x-axis, dependent on y-axis.</a:t>
+            </a:r>
+            <a:endParaRPr lang="en-US" sz="1500" dirty="0"/>
+          </a:p>
+          <a:p>
+            <a:pPr>
+              <a:lnSpc>
+                <a:spcPct val="150000"/>
+              </a:lnSpc>
               <a:spcAft>
                 <a:spcPts val="600"/>
               </a:spcAft>
-              <a:buSzPct val="100000"/>
-              <a:buChar char="•"/>
             </a:pPr>
             <a:r>
-              <a:rPr lang="en-US" sz="1300" dirty="0">
+              <a:rPr lang="en-US" sz="1500" dirty="0">
                 <a:solidFill>
                   <a:srgbClr val="3D3A36"/>
                 </a:solidFill>
-                <a:latin typeface="Calibri" pitchFamily="34" charset="0"/>
-                <a:ea typeface="Calibri" pitchFamily="34" charset="-122"/>
-                <a:cs typeface="Calibri" pitchFamily="34" charset="-120"/>
+                <a:latin typeface="Arial" pitchFamily="34" charset="0"/>
+                <a:ea typeface="Arial" pitchFamily="34" charset="-122"/>
+                <a:cs typeface="Arial" pitchFamily="34" charset="-120"/>
               </a:rPr>
-              <a:t>Example: favourite colour of students</a:t>
-            </a:r>
-            <a:endParaRPr lang="en-US" sz="1300" dirty="0"/>
-          </a:p>
-          <a:p>
-            <a:pPr marL="342900" indent="-342900">
+              <a:t>L — Labels: Label both axes with the variable name AND unit.</a:t>
+            </a:r>
+            <a:endParaRPr lang="en-US" sz="1500" dirty="0"/>
+          </a:p>
+          <a:p>
+            <a:pPr>
+              <a:lnSpc>
+                <a:spcPct val="150000"/>
+              </a:lnSpc>
               <a:spcAft>
                 <a:spcPts val="600"/>
               </a:spcAft>
-              <a:buSzPct val="100000"/>
-              <a:buChar char="•"/>
             </a:pPr>
             <a:r>
-              <a:rPr lang="en-US" sz="1300" dirty="0">
+              <a:rPr lang="en-US" sz="1500" dirty="0">
                 <a:solidFill>
                   <a:srgbClr val="3D3A36"/>
                 </a:solidFill>
-                <a:latin typeface="Calibri" pitchFamily="34" charset="0"/>
-                <a:ea typeface="Calibri" pitchFamily="34" charset="-122"/>
-                <a:cs typeface="Calibri" pitchFamily="34" charset="-120"/>
+                <a:latin typeface="Arial" pitchFamily="34" charset="0"/>
+                <a:ea typeface="Arial" pitchFamily="34" charset="-122"/>
+                <a:cs typeface="Arial" pitchFamily="34" charset="-120"/>
               </a:rPr>
-              <a:t>Categories on x-axis, frequency on y-axis</a:t>
-            </a:r>
-            <a:endParaRPr lang="en-US" sz="1300" dirty="0"/>
-          </a:p>
-        </p:txBody>
-      </p:sp>
-      <p:sp>
-        <p:nvSpPr>
-          <p:cNvPr id="10" name="Shape 8"/>
-          <p:cNvSpPr/>
-          <p:nvPr/>
-        </p:nvSpPr>
-        <p:spPr>
-          <a:xfrm>
-            <a:off x="4754880" y="1051560"/>
-            <a:ext cx="3840480" cy="3474720"/>
-          </a:xfrm>
-          <a:prstGeom prst="rect">
-            <a:avLst/>
-          </a:prstGeom>
-          <a:solidFill>
-            <a:srgbClr val="FFFFFF"/>
-          </a:solidFill>
-          <a:ln/>
-          <a:effectLst>
-            <a:outerShdw sx="100000" sy="100000" kx="0" ky="0" algn="bl" rotWithShape="0" blurRad="50800" dist="25400" dir="8100000">
-              <a:srgbClr val="000000">
-                <a:alpha val="10000"/>
-              </a:srgbClr>
-            </a:outerShdw>
-          </a:effectLst>
-        </p:spPr>
-      </p:sp>
-      <p:sp>
-        <p:nvSpPr>
-          <p:cNvPr id="11" name="Shape 9"/>
-          <p:cNvSpPr/>
-          <p:nvPr/>
-        </p:nvSpPr>
-        <p:spPr>
-          <a:xfrm>
-            <a:off x="4754880" y="1051560"/>
-            <a:ext cx="3840480" cy="54864"/>
-          </a:xfrm>
-          <a:prstGeom prst="rect">
-            <a:avLst/>
-          </a:prstGeom>
-          <a:solidFill>
-            <a:srgbClr val="E9C46A"/>
-          </a:solidFill>
-          <a:ln/>
-        </p:spPr>
-      </p:sp>
-      <p:sp>
-        <p:nvSpPr>
-          <p:cNvPr id="12" name="Text 10"/>
-          <p:cNvSpPr/>
-          <p:nvPr/>
-        </p:nvSpPr>
-        <p:spPr>
-          <a:xfrm>
-            <a:off x="4983480" y="1188720"/>
-            <a:ext cx="3383280" cy="457200"/>
-          </a:xfrm>
-          <a:prstGeom prst="rect">
-            <a:avLst/>
-          </a:prstGeom>
-          <a:noFill/>
-          <a:ln/>
-        </p:spPr>
-        <p:txBody>
-          <a:bodyPr wrap="square" lIns="0" tIns="0" rIns="0" bIns="0" rtlCol="0" anchor="ctr"/>
-          <a:lstStyle/>
-          <a:p>
-            <a:pPr indent="0" marL="0">
-              <a:buNone/>
-            </a:pPr>
-            <a:r>
-              <a:rPr lang="en-US" sz="1500" b="1" dirty="0">
-                <a:solidFill>
-                  <a:srgbClr val="1B2A4A"/>
-                </a:solidFill>
-                <a:latin typeface="Georgia" pitchFamily="34" charset="0"/>
-                <a:ea typeface="Georgia" pitchFamily="34" charset="-122"/>
-                <a:cs typeface="Georgia" pitchFamily="34" charset="-120"/>
-              </a:rPr>
-              <a:t>Line Graph</a:t>
+              <a:t>T — Title: Write a descriptive title (what was investigated).</a:t>
             </a:r>
             <a:endParaRPr lang="en-US" sz="1500" dirty="0"/>
           </a:p>
-        </p:txBody>
-      </p:sp>
-      <p:sp>
-        <p:nvSpPr>
-          <p:cNvPr id="13" name="Text 11"/>
-          <p:cNvSpPr/>
-          <p:nvPr/>
-        </p:nvSpPr>
-        <p:spPr>
-          <a:xfrm>
-            <a:off x="4983480" y="1691640"/>
-            <a:ext cx="3383280" cy="2651760"/>
-          </a:xfrm>
-          <a:prstGeom prst="rect">
-            <a:avLst/>
-          </a:prstGeom>
-          <a:noFill/>
-          <a:ln/>
-        </p:spPr>
-        <p:txBody>
-          <a:bodyPr wrap="square" rtlCol="0" anchor="t"/>
-          <a:lstStyle/>
-          <a:p>
-            <a:pPr marL="342900" indent="-342900">
+          <a:p>
+            <a:pPr>
+              <a:lnSpc>
+                <a:spcPct val="150000"/>
+              </a:lnSpc>
               <a:spcAft>
                 <a:spcPts val="600"/>
               </a:spcAft>
-              <a:buSzPct val="100000"/>
-              <a:buChar char="•"/>
             </a:pPr>
             <a:r>
-              <a:rPr lang="en-US" sz="1300" dirty="0">
+              <a:rPr lang="en-US" sz="1500" dirty="0">
                 <a:solidFill>
                   <a:srgbClr val="3D3A36"/>
                 </a:solidFill>
-                <a:latin typeface="Calibri" pitchFamily="34" charset="0"/>
-                <a:ea typeface="Calibri" pitchFamily="34" charset="-122"/>
-                <a:cs typeface="Calibri" pitchFamily="34" charset="-120"/>
+                <a:latin typeface="Arial" pitchFamily="34" charset="0"/>
+                <a:ea typeface="Arial" pitchFamily="34" charset="-122"/>
+                <a:cs typeface="Arial" pitchFamily="34" charset="-120"/>
               </a:rPr>
-              <a:t>Used for CONTINUOUS data</a:t>
-            </a:r>
-            <a:endParaRPr lang="en-US" sz="1300" dirty="0"/>
-          </a:p>
-          <a:p>
-            <a:pPr marL="342900" indent="-342900">
+              <a:t>Plot points carefully. Use a sharp pencil.</a:t>
+            </a:r>
+            <a:endParaRPr lang="en-US" sz="1500" dirty="0"/>
+          </a:p>
+          <a:p>
+            <a:pPr>
+              <a:lnSpc>
+                <a:spcPct val="150000"/>
+              </a:lnSpc>
               <a:spcAft>
                 <a:spcPts val="600"/>
               </a:spcAft>
-              <a:buSzPct val="100000"/>
-              <a:buChar char="•"/>
             </a:pPr>
             <a:r>
-              <a:rPr lang="en-US" sz="1300" dirty="0">
+              <a:rPr lang="en-US" sz="1500" dirty="0">
                 <a:solidFill>
                   <a:srgbClr val="3D3A36"/>
                 </a:solidFill>
-                <a:latin typeface="Calibri" pitchFamily="34" charset="0"/>
-                <a:ea typeface="Calibri" pitchFamily="34" charset="-122"/>
-                <a:cs typeface="Calibri" pitchFamily="34" charset="-120"/>
+                <a:latin typeface="Arial" pitchFamily="34" charset="0"/>
+                <a:ea typeface="Arial" pitchFamily="34" charset="-122"/>
+                <a:cs typeface="Arial" pitchFamily="34" charset="-120"/>
               </a:rPr>
-              <a:t>Points connected by lines</a:t>
-            </a:r>
-            <a:endParaRPr lang="en-US" sz="1300" dirty="0"/>
-          </a:p>
-          <a:p>
-            <a:pPr marL="342900" indent="-342900">
-              <a:spcAft>
-                <a:spcPts val="600"/>
-              </a:spcAft>
-              <a:buSzPct val="100000"/>
-              <a:buChar char="•"/>
-            </a:pPr>
-            <a:r>
-              <a:rPr lang="en-US" sz="1300" dirty="0">
-                <a:solidFill>
-                  <a:srgbClr val="3D3A36"/>
-                </a:solidFill>
-                <a:latin typeface="Calibri" pitchFamily="34" charset="0"/>
-                <a:ea typeface="Calibri" pitchFamily="34" charset="-122"/>
-                <a:cs typeface="Calibri" pitchFamily="34" charset="-120"/>
-              </a:rPr>
-              <a:t>Example: temperature over time</a:t>
-            </a:r>
-            <a:endParaRPr lang="en-US" sz="1300" dirty="0"/>
-          </a:p>
-          <a:p>
-            <a:pPr marL="342900" indent="-342900">
-              <a:spcAft>
-                <a:spcPts val="600"/>
-              </a:spcAft>
-              <a:buSzPct val="100000"/>
-              <a:buChar char="•"/>
-            </a:pPr>
-            <a:r>
-              <a:rPr lang="en-US" sz="1300" dirty="0">
-                <a:solidFill>
-                  <a:srgbClr val="3D3A36"/>
-                </a:solidFill>
-                <a:latin typeface="Calibri" pitchFamily="34" charset="0"/>
-                <a:ea typeface="Calibri" pitchFamily="34" charset="-122"/>
-                <a:cs typeface="Calibri" pitchFamily="34" charset="-120"/>
-              </a:rPr>
-              <a:t>Both axes show numbers</a:t>
-            </a:r>
-            <a:endParaRPr lang="en-US" sz="1300" dirty="0"/>
+              <a:t>Draw a line of best fit (for line graphs) — smooth, not dot-to-dot.</a:t>
+            </a:r>
+            <a:endParaRPr lang="en-US" sz="1500" dirty="0"/>
           </a:p>
         </p:txBody>
       </p:sp>
@@ -3146,47 +2748,7 @@
         <p:spPr>
           <a:xfrm>
             <a:off x="0" y="0"/>
-            <a:ext cx="9144000" cy="822960"/>
-          </a:xfrm>
-          <a:prstGeom prst="rect">
-            <a:avLst/>
-          </a:prstGeom>
-          <a:solidFill>
-            <a:srgbClr val="FFFFFF"/>
-          </a:solidFill>
-          <a:ln/>
-        </p:spPr>
-      </p:sp>
-      <p:sp>
-        <p:nvSpPr>
-          <p:cNvPr id="3" name="Shape 1"/>
-          <p:cNvSpPr/>
-          <p:nvPr/>
-        </p:nvSpPr>
-        <p:spPr>
-          <a:xfrm>
-            <a:off x="0" y="804672"/>
-            <a:ext cx="9144000" cy="27432"/>
-          </a:xfrm>
-          <a:prstGeom prst="rect">
-            <a:avLst/>
-          </a:prstGeom>
-          <a:solidFill>
-            <a:srgbClr val="E5E2DC"/>
-          </a:solidFill>
-          <a:ln/>
-        </p:spPr>
-      </p:sp>
-      <p:sp>
-        <p:nvSpPr>
-          <p:cNvPr id="4" name="Shape 2"/>
-          <p:cNvSpPr/>
-          <p:nvPr/>
-        </p:nvSpPr>
-        <p:spPr>
-          <a:xfrm>
-            <a:off x="548640" y="201168"/>
-            <a:ext cx="54864" cy="420624"/>
+            <a:ext cx="73152" cy="5148072"/>
           </a:xfrm>
           <a:prstGeom prst="rect">
             <a:avLst/>
@@ -3199,14 +2761,14 @@
       </p:sp>
       <p:sp>
         <p:nvSpPr>
-          <p:cNvPr id="5" name="Text 3"/>
+          <p:cNvPr id="3" name="Text 1"/>
           <p:cNvSpPr/>
           <p:nvPr/>
         </p:nvSpPr>
         <p:spPr>
           <a:xfrm>
-            <a:off x="777240" y="137160"/>
-            <a:ext cx="7772400" cy="548640"/>
+            <a:off x="548640" y="274320"/>
+            <a:ext cx="9144000" cy="640080"/>
           </a:xfrm>
           <a:prstGeom prst="rect">
             <a:avLst/>
@@ -3215,14 +2777,14 @@
           <a:ln/>
         </p:spPr>
         <p:txBody>
-          <a:bodyPr wrap="square" lIns="0" tIns="0" rIns="0" bIns="0" rtlCol="0" anchor="ctr"/>
+          <a:bodyPr wrap="square" rtlCol="0" anchor="ctr"/>
           <a:lstStyle/>
           <a:p>
             <a:pPr indent="0" marL="0">
               <a:buNone/>
             </a:pPr>
             <a:r>
-              <a:rPr lang="en-US" sz="2000" b="1" dirty="0">
+              <a:rPr lang="en-US" sz="2400" b="1" dirty="0">
                 <a:solidFill>
                   <a:srgbClr val="1B2A4A"/>
                 </a:solidFill>
@@ -3230,11 +2792,58 @@
                 <a:ea typeface="Georgia" pitchFamily="34" charset="-122"/>
                 <a:cs typeface="Georgia" pitchFamily="34" charset="-120"/>
               </a:rPr>
-              <a:t>Drawing a Graph — Step by Step</a:t>
-            </a:r>
-            <a:endParaRPr lang="en-US" sz="2000" dirty="0"/>
+              <a:t>Which Graph Should I Use?</a:t>
+            </a:r>
+            <a:endParaRPr lang="en-US" sz="2400" dirty="0"/>
           </a:p>
         </p:txBody>
+      </p:sp>
+      <p:sp>
+        <p:nvSpPr>
+          <p:cNvPr id="4" name="Shape 2"/>
+          <p:cNvSpPr/>
+          <p:nvPr/>
+        </p:nvSpPr>
+        <p:spPr>
+          <a:xfrm>
+            <a:off x="548640" y="960120"/>
+            <a:ext cx="2286000" cy="36576"/>
+          </a:xfrm>
+          <a:prstGeom prst="rect">
+            <a:avLst/>
+          </a:prstGeom>
+          <a:solidFill>
+            <a:srgbClr val="2A9D8F"/>
+          </a:solidFill>
+          <a:ln/>
+        </p:spPr>
+      </p:sp>
+      <p:sp>
+        <p:nvSpPr>
+          <p:cNvPr id="5" name="Shape 3"/>
+          <p:cNvSpPr/>
+          <p:nvPr/>
+        </p:nvSpPr>
+        <p:spPr>
+          <a:xfrm>
+            <a:off x="548640" y="1188720"/>
+            <a:ext cx="5029200" cy="3474720"/>
+          </a:xfrm>
+          <a:prstGeom prst="roundRect">
+            <a:avLst>
+              <a:gd name="adj" fmla="val 3158"/>
+            </a:avLst>
+          </a:prstGeom>
+          <a:solidFill>
+            <a:srgbClr val="FFFFFF"/>
+          </a:solidFill>
+          <a:ln w="9525">
+            <a:solidFill>
+              <a:srgbClr val="E5E2DC"/>
+            </a:solidFill>
+            <a:prstDash val="solid"/>
+          </a:ln>
+        </p:spPr>
       </p:sp>
       <p:sp>
         <p:nvSpPr>
@@ -3244,8 +2853,47 @@
         </p:nvSpPr>
         <p:spPr>
           <a:xfrm>
-            <a:off x="731520" y="1051560"/>
-            <a:ext cx="7680960" cy="3108960"/>
+            <a:off x="777240" y="1325880"/>
+            <a:ext cx="4572000" cy="365760"/>
+          </a:xfrm>
+          <a:prstGeom prst="rect">
+            <a:avLst/>
+          </a:prstGeom>
+          <a:noFill/>
+          <a:ln/>
+        </p:spPr>
+        <p:txBody>
+          <a:bodyPr wrap="square" rtlCol="0" anchor="ctr"/>
+          <a:lstStyle/>
+          <a:p>
+            <a:pPr indent="0" marL="0">
+              <a:buNone/>
+            </a:pPr>
+            <a:r>
+              <a:rPr lang="en-US" sz="1500" b="1" dirty="0">
+                <a:solidFill>
+                  <a:srgbClr val="2A9D8F"/>
+                </a:solidFill>
+                <a:latin typeface="Georgia" pitchFamily="34" charset="0"/>
+                <a:ea typeface="Georgia" pitchFamily="34" charset="-122"/>
+                <a:cs typeface="Georgia" pitchFamily="34" charset="-120"/>
+              </a:rPr>
+              <a:t>Bar Chart</a:t>
+            </a:r>
+            <a:endParaRPr lang="en-US" sz="1500" dirty="0"/>
+          </a:p>
+        </p:txBody>
+      </p:sp>
+      <p:sp>
+        <p:nvSpPr>
+          <p:cNvPr id="7" name="Text 5"/>
+          <p:cNvSpPr/>
+          <p:nvPr/>
+        </p:nvSpPr>
+        <p:spPr>
+          <a:xfrm>
+            <a:off x="777240" y="1783080"/>
+            <a:ext cx="4572000" cy="2651760"/>
           </a:xfrm>
           <a:prstGeom prst="rect">
             <a:avLst/>
@@ -3257,210 +2905,268 @@
           <a:bodyPr wrap="square" rtlCol="0" anchor="t"/>
           <a:lstStyle/>
           <a:p>
-            <a:pPr marL="342900" indent="-342900">
+            <a:pPr>
+              <a:lnSpc>
+                <a:spcPct val="140000"/>
+              </a:lnSpc>
               <a:spcAft>
-                <a:spcPts val="800"/>
+                <a:spcPts val="400"/>
               </a:spcAft>
-              <a:buSzPct val="100000"/>
-              <a:buChar char="•"/>
             </a:pPr>
             <a:r>
-              <a:rPr lang="en-US" sz="1500" dirty="0">
+              <a:rPr lang="en-US" sz="1300" dirty="0">
                 <a:solidFill>
                   <a:srgbClr val="3D3A36"/>
                 </a:solidFill>
-                <a:latin typeface="Calibri" pitchFamily="34" charset="0"/>
-                <a:ea typeface="Calibri" pitchFamily="34" charset="-122"/>
-                <a:cs typeface="Calibri" pitchFamily="34" charset="-120"/>
+                <a:latin typeface="Arial" pitchFamily="34" charset="0"/>
+                <a:ea typeface="Arial" pitchFamily="34" charset="-122"/>
+                <a:cs typeface="Arial" pitchFamily="34" charset="-120"/>
               </a:rPr>
-              <a:t>1. Draw axes with a ruler — x-axis (horizontal), y-axis (vertical).</a:t>
-            </a:r>
-            <a:endParaRPr lang="en-US" sz="1500" dirty="0"/>
-          </a:p>
-          <a:p>
-            <a:pPr marL="342900" indent="-342900">
+              <a:t>Data is in categories (colours, types).</a:t>
+            </a:r>
+            <a:endParaRPr lang="en-US" sz="1300" dirty="0"/>
+          </a:p>
+          <a:p>
+            <a:pPr>
+              <a:lnSpc>
+                <a:spcPct val="140000"/>
+              </a:lnSpc>
               <a:spcAft>
-                <a:spcPts val="800"/>
+                <a:spcPts val="400"/>
               </a:spcAft>
-              <a:buSzPct val="100000"/>
-              <a:buChar char="•"/>
             </a:pPr>
             <a:r>
-              <a:rPr lang="en-US" sz="1500" dirty="0">
+              <a:rPr lang="en-US" sz="1300" dirty="0">
                 <a:solidFill>
                   <a:srgbClr val="3D3A36"/>
                 </a:solidFill>
-                <a:latin typeface="Calibri" pitchFamily="34" charset="0"/>
-                <a:ea typeface="Calibri" pitchFamily="34" charset="-122"/>
-                <a:cs typeface="Calibri" pitchFamily="34" charset="-120"/>
+                <a:latin typeface="Arial" pitchFamily="34" charset="0"/>
+                <a:ea typeface="Arial" pitchFamily="34" charset="-122"/>
+                <a:cs typeface="Arial" pitchFamily="34" charset="-120"/>
               </a:rPr>
-              <a:t>2. Label both axes with the variable name AND unit.</a:t>
-            </a:r>
-            <a:endParaRPr lang="en-US" sz="1500" dirty="0"/>
-          </a:p>
-          <a:p>
-            <a:pPr marL="342900" indent="-342900">
+              <a:t>Bars don't touch each other.</a:t>
+            </a:r>
+            <a:endParaRPr lang="en-US" sz="1300" dirty="0"/>
+          </a:p>
+          <a:p>
+            <a:pPr>
+              <a:lnSpc>
+                <a:spcPct val="140000"/>
+              </a:lnSpc>
               <a:spcAft>
-                <a:spcPts val="800"/>
+                <a:spcPts val="400"/>
               </a:spcAft>
-              <a:buSzPct val="100000"/>
-              <a:buChar char="•"/>
             </a:pPr>
             <a:r>
-              <a:rPr lang="en-US" sz="1500" dirty="0">
+              <a:rPr lang="en-US" sz="1300" dirty="0">
                 <a:solidFill>
                   <a:srgbClr val="3D3A36"/>
                 </a:solidFill>
-                <a:latin typeface="Calibri" pitchFamily="34" charset="0"/>
-                <a:ea typeface="Calibri" pitchFamily="34" charset="-122"/>
-                <a:cs typeface="Calibri" pitchFamily="34" charset="-120"/>
+                <a:latin typeface="Arial" pitchFamily="34" charset="0"/>
+                <a:ea typeface="Arial" pitchFamily="34" charset="-122"/>
+                <a:cs typeface="Arial" pitchFamily="34" charset="-120"/>
               </a:rPr>
-              <a:t>3. Choose a sensible scale — use even numbers, fill the space.</a:t>
-            </a:r>
-            <a:endParaRPr lang="en-US" sz="1500" dirty="0"/>
-          </a:p>
-          <a:p>
-            <a:pPr marL="342900" indent="-342900">
+              <a:t>Example: favourite ice cream flavour.</a:t>
+            </a:r>
+            <a:endParaRPr lang="en-US" sz="1300" dirty="0"/>
+          </a:p>
+          <a:p>
+            <a:pPr>
+              <a:lnSpc>
+                <a:spcPct val="140000"/>
+              </a:lnSpc>
               <a:spcAft>
-                <a:spcPts val="800"/>
+                <a:spcPts val="400"/>
               </a:spcAft>
-              <a:buSzPct val="100000"/>
-              <a:buChar char="•"/>
             </a:pPr>
             <a:r>
-              <a:rPr lang="en-US" sz="1500" dirty="0">
+              <a:rPr lang="en-US" sz="1300" dirty="0">
                 <a:solidFill>
                   <a:srgbClr val="3D3A36"/>
                 </a:solidFill>
-                <a:latin typeface="Calibri" pitchFamily="34" charset="0"/>
-                <a:ea typeface="Calibri" pitchFamily="34" charset="-122"/>
-                <a:cs typeface="Calibri" pitchFamily="34" charset="-120"/>
+                <a:latin typeface="Arial" pitchFamily="34" charset="0"/>
+                <a:ea typeface="Arial" pitchFamily="34" charset="-122"/>
+                <a:cs typeface="Arial" pitchFamily="34" charset="-120"/>
               </a:rPr>
-              <a:t>4. Plot each point carefully with a small cross (×).</a:t>
+              <a:t>Example: number of species in each habitat.</a:t>
+            </a:r>
+            <a:endParaRPr lang="en-US" sz="1300" dirty="0"/>
+          </a:p>
+        </p:txBody>
+      </p:sp>
+      <p:sp>
+        <p:nvSpPr>
+          <p:cNvPr id="8" name="Shape 6"/>
+          <p:cNvSpPr/>
+          <p:nvPr/>
+        </p:nvSpPr>
+        <p:spPr>
+          <a:xfrm>
+            <a:off x="5852160" y="1188720"/>
+            <a:ext cx="5029200" cy="3474720"/>
+          </a:xfrm>
+          <a:prstGeom prst="roundRect">
+            <a:avLst>
+              <a:gd name="adj" fmla="val 3158"/>
+            </a:avLst>
+          </a:prstGeom>
+          <a:solidFill>
+            <a:srgbClr val="FFFFFF"/>
+          </a:solidFill>
+          <a:ln w="9525">
+            <a:solidFill>
+              <a:srgbClr val="E5E2DC"/>
+            </a:solidFill>
+            <a:prstDash val="solid"/>
+          </a:ln>
+        </p:spPr>
+      </p:sp>
+      <p:sp>
+        <p:nvSpPr>
+          <p:cNvPr id="9" name="Text 7"/>
+          <p:cNvSpPr/>
+          <p:nvPr/>
+        </p:nvSpPr>
+        <p:spPr>
+          <a:xfrm>
+            <a:off x="6080760" y="1325880"/>
+            <a:ext cx="4572000" cy="365760"/>
+          </a:xfrm>
+          <a:prstGeom prst="rect">
+            <a:avLst/>
+          </a:prstGeom>
+          <a:noFill/>
+          <a:ln/>
+        </p:spPr>
+        <p:txBody>
+          <a:bodyPr wrap="square" rtlCol="0" anchor="ctr"/>
+          <a:lstStyle/>
+          <a:p>
+            <a:pPr indent="0" marL="0">
+              <a:buNone/>
+            </a:pPr>
+            <a:r>
+              <a:rPr lang="en-US" sz="1500" b="1" dirty="0">
+                <a:solidFill>
+                  <a:srgbClr val="E9C46A"/>
+                </a:solidFill>
+                <a:latin typeface="Georgia" pitchFamily="34" charset="0"/>
+                <a:ea typeface="Georgia" pitchFamily="34" charset="-122"/>
+                <a:cs typeface="Georgia" pitchFamily="34" charset="-120"/>
+              </a:rPr>
+              <a:t>Line Graph</a:t>
             </a:r>
             <a:endParaRPr lang="en-US" sz="1500" dirty="0"/>
           </a:p>
-          <a:p>
-            <a:pPr marL="342900" indent="-342900">
+        </p:txBody>
+      </p:sp>
+      <p:sp>
+        <p:nvSpPr>
+          <p:cNvPr id="10" name="Text 8"/>
+          <p:cNvSpPr/>
+          <p:nvPr/>
+        </p:nvSpPr>
+        <p:spPr>
+          <a:xfrm>
+            <a:off x="6080760" y="1783080"/>
+            <a:ext cx="4572000" cy="2651760"/>
+          </a:xfrm>
+          <a:prstGeom prst="rect">
+            <a:avLst/>
+          </a:prstGeom>
+          <a:noFill/>
+          <a:ln/>
+        </p:spPr>
+        <p:txBody>
+          <a:bodyPr wrap="square" rtlCol="0" anchor="t"/>
+          <a:lstStyle/>
+          <a:p>
+            <a:pPr>
+              <a:lnSpc>
+                <a:spcPct val="140000"/>
+              </a:lnSpc>
               <a:spcAft>
-                <a:spcPts val="800"/>
+                <a:spcPts val="400"/>
               </a:spcAft>
-              <a:buSzPct val="100000"/>
-              <a:buChar char="•"/>
             </a:pPr>
             <a:r>
-              <a:rPr lang="en-US" sz="1500" dirty="0">
+              <a:rPr lang="en-US" sz="1300" dirty="0">
                 <a:solidFill>
                   <a:srgbClr val="3D3A36"/>
                 </a:solidFill>
-                <a:latin typeface="Calibri" pitchFamily="34" charset="0"/>
-                <a:ea typeface="Calibri" pitchFamily="34" charset="-122"/>
-                <a:cs typeface="Calibri" pitchFamily="34" charset="-120"/>
+                <a:latin typeface="Arial" pitchFamily="34" charset="0"/>
+                <a:ea typeface="Arial" pitchFamily="34" charset="-122"/>
+                <a:cs typeface="Arial" pitchFamily="34" charset="-120"/>
               </a:rPr>
-              <a:t>5. Draw a line of best fit or connect the points.</a:t>
-            </a:r>
-            <a:endParaRPr lang="en-US" sz="1500" dirty="0"/>
-          </a:p>
-          <a:p>
-            <a:pPr marL="342900" indent="-342900">
+              <a:t>Data is continuous (numbers that change).</a:t>
+            </a:r>
+            <a:endParaRPr lang="en-US" sz="1300" dirty="0"/>
+          </a:p>
+          <a:p>
+            <a:pPr>
+              <a:lnSpc>
+                <a:spcPct val="140000"/>
+              </a:lnSpc>
               <a:spcAft>
-                <a:spcPts val="800"/>
+                <a:spcPts val="400"/>
               </a:spcAft>
-              <a:buSzPct val="100000"/>
-              <a:buChar char="•"/>
             </a:pPr>
             <a:r>
-              <a:rPr lang="en-US" sz="1500" dirty="0">
+              <a:rPr lang="en-US" sz="1300" dirty="0">
                 <a:solidFill>
                   <a:srgbClr val="3D3A36"/>
                 </a:solidFill>
-                <a:latin typeface="Calibri" pitchFamily="34" charset="0"/>
-                <a:ea typeface="Calibri" pitchFamily="34" charset="-122"/>
-                <a:cs typeface="Calibri" pitchFamily="34" charset="-120"/>
+                <a:latin typeface="Arial" pitchFamily="34" charset="0"/>
+                <a:ea typeface="Arial" pitchFamily="34" charset="-122"/>
+                <a:cs typeface="Arial" pitchFamily="34" charset="-120"/>
               </a:rPr>
-              <a:t>6. Give your graph a clear title.</a:t>
-            </a:r>
-            <a:endParaRPr lang="en-US" sz="1500" dirty="0"/>
-          </a:p>
-        </p:txBody>
-      </p:sp>
-      <p:sp>
-        <p:nvSpPr>
-          <p:cNvPr id="7" name="Shape 5"/>
-          <p:cNvSpPr/>
-          <p:nvPr/>
-        </p:nvSpPr>
-        <p:spPr>
-          <a:xfrm>
-            <a:off x="731520" y="4206240"/>
-            <a:ext cx="7680960" cy="640080"/>
-          </a:xfrm>
-          <a:prstGeom prst="rect">
-            <a:avLst/>
-          </a:prstGeom>
-          <a:solidFill>
-            <a:srgbClr val="E8F5F3"/>
-          </a:solidFill>
-          <a:ln/>
-          <a:effectLst>
-            <a:outerShdw sx="100000" sy="100000" kx="0" ky="0" algn="bl" rotWithShape="0" blurRad="50800" dist="25400" dir="8100000">
-              <a:srgbClr val="000000">
-                <a:alpha val="10000"/>
-              </a:srgbClr>
-            </a:outerShdw>
-          </a:effectLst>
-        </p:spPr>
-      </p:sp>
-      <p:sp>
-        <p:nvSpPr>
-          <p:cNvPr id="8" name="Text 6"/>
-          <p:cNvSpPr/>
-          <p:nvPr/>
-        </p:nvSpPr>
-        <p:spPr>
-          <a:xfrm>
-            <a:off x="914400" y="4251960"/>
-            <a:ext cx="7315200" cy="548640"/>
-          </a:xfrm>
-          <a:prstGeom prst="rect">
-            <a:avLst/>
-          </a:prstGeom>
-          <a:noFill/>
-          <a:ln/>
-        </p:spPr>
-        <p:txBody>
-          <a:bodyPr wrap="square" rtlCol="0" anchor="ctr"/>
-          <a:lstStyle/>
-          <a:p>
-            <a:pPr indent="0" marL="0">
-              <a:buNone/>
+              <a:t>Points connected by a line of best fit.</a:t>
+            </a:r>
+            <a:endParaRPr lang="en-US" sz="1300" dirty="0"/>
+          </a:p>
+          <a:p>
+            <a:pPr>
+              <a:lnSpc>
+                <a:spcPct val="140000"/>
+              </a:lnSpc>
+              <a:spcAft>
+                <a:spcPts val="400"/>
+              </a:spcAft>
             </a:pPr>
             <a:r>
-              <a:rPr lang="en-US" sz="1200" b="1" dirty="0">
-                <a:solidFill>
-                  <a:srgbClr val="2A9D8F"/>
-                </a:solidFill>
-                <a:latin typeface="Calibri" pitchFamily="34" charset="0"/>
-                <a:ea typeface="Calibri" pitchFamily="34" charset="-122"/>
-                <a:cs typeface="Calibri" pitchFamily="34" charset="-120"/>
-              </a:rPr>
-              <a:t>Key Idea: </a:t>
-            </a:r>
-            <a:pPr indent="0" marL="0">
-              <a:buNone/>
-            </a:pPr>
-            <a:r>
-              <a:rPr lang="en-US" sz="1200" i="1" dirty="0">
+              <a:rPr lang="en-US" sz="1300" dirty="0">
                 <a:solidFill>
                   <a:srgbClr val="3D3A36"/>
                 </a:solidFill>
-                <a:latin typeface="Calibri" pitchFamily="34" charset="0"/>
-                <a:ea typeface="Calibri" pitchFamily="34" charset="-122"/>
-                <a:cs typeface="Calibri" pitchFamily="34" charset="-120"/>
+                <a:latin typeface="Arial" pitchFamily="34" charset="0"/>
+                <a:ea typeface="Arial" pitchFamily="34" charset="-122"/>
+                <a:cs typeface="Arial" pitchFamily="34" charset="-120"/>
               </a:rPr>
-              <a:t>A graph without labels is like a map without names — useless!</a:t>
-            </a:r>
-            <a:endParaRPr lang="en-US" sz="1200" dirty="0"/>
+              <a:t>Example: temperature over time.</a:t>
+            </a:r>
+            <a:endParaRPr lang="en-US" sz="1300" dirty="0"/>
+          </a:p>
+          <a:p>
+            <a:pPr>
+              <a:lnSpc>
+                <a:spcPct val="140000"/>
+              </a:lnSpc>
+              <a:spcAft>
+                <a:spcPts val="400"/>
+              </a:spcAft>
+            </a:pPr>
+            <a:r>
+              <a:rPr lang="en-US" sz="1300" dirty="0">
+                <a:solidFill>
+                  <a:srgbClr val="3D3A36"/>
+                </a:solidFill>
+                <a:latin typeface="Arial" pitchFamily="34" charset="0"/>
+                <a:ea typeface="Arial" pitchFamily="34" charset="-122"/>
+                <a:cs typeface="Arial" pitchFamily="34" charset="-120"/>
+              </a:rPr>
+              <a:t>Example: plant height each week.</a:t>
+            </a:r>
+            <a:endParaRPr lang="en-US" sz="1300" dirty="0"/>
           </a:p>
         </p:txBody>
       </p:sp>
@@ -3505,47 +3211,7 @@
         <p:spPr>
           <a:xfrm>
             <a:off x="0" y="0"/>
-            <a:ext cx="9144000" cy="822960"/>
-          </a:xfrm>
-          <a:prstGeom prst="rect">
-            <a:avLst/>
-          </a:prstGeom>
-          <a:solidFill>
-            <a:srgbClr val="FFFFFF"/>
-          </a:solidFill>
-          <a:ln/>
-        </p:spPr>
-      </p:sp>
-      <p:sp>
-        <p:nvSpPr>
-          <p:cNvPr id="3" name="Shape 1"/>
-          <p:cNvSpPr/>
-          <p:nvPr/>
-        </p:nvSpPr>
-        <p:spPr>
-          <a:xfrm>
-            <a:off x="0" y="804672"/>
-            <a:ext cx="9144000" cy="27432"/>
-          </a:xfrm>
-          <a:prstGeom prst="rect">
-            <a:avLst/>
-          </a:prstGeom>
-          <a:solidFill>
-            <a:srgbClr val="E5E2DC"/>
-          </a:solidFill>
-          <a:ln/>
-        </p:spPr>
-      </p:sp>
-      <p:sp>
-        <p:nvSpPr>
-          <p:cNvPr id="4" name="Shape 2"/>
-          <p:cNvSpPr/>
-          <p:nvPr/>
-        </p:nvSpPr>
-        <p:spPr>
-          <a:xfrm>
-            <a:off x="548640" y="201168"/>
-            <a:ext cx="54864" cy="420624"/>
+            <a:ext cx="73152" cy="5148072"/>
           </a:xfrm>
           <a:prstGeom prst="rect">
             <a:avLst/>
@@ -3558,14 +3224,14 @@
       </p:sp>
       <p:sp>
         <p:nvSpPr>
-          <p:cNvPr id="5" name="Text 3"/>
+          <p:cNvPr id="3" name="Text 1"/>
           <p:cNvSpPr/>
           <p:nvPr/>
         </p:nvSpPr>
         <p:spPr>
           <a:xfrm>
-            <a:off x="777240" y="137160"/>
-            <a:ext cx="7772400" cy="548640"/>
+            <a:off x="548640" y="274320"/>
+            <a:ext cx="9144000" cy="640080"/>
           </a:xfrm>
           <a:prstGeom prst="rect">
             <a:avLst/>
@@ -3574,14 +3240,14 @@
           <a:ln/>
         </p:spPr>
         <p:txBody>
-          <a:bodyPr wrap="square" lIns="0" tIns="0" rIns="0" bIns="0" rtlCol="0" anchor="ctr"/>
+          <a:bodyPr wrap="square" rtlCol="0" anchor="ctr"/>
           <a:lstStyle/>
           <a:p>
             <a:pPr indent="0" marL="0">
               <a:buNone/>
             </a:pPr>
             <a:r>
-              <a:rPr lang="en-US" sz="2000" b="1" dirty="0">
+              <a:rPr lang="en-US" sz="2400" b="1" dirty="0">
                 <a:solidFill>
                   <a:srgbClr val="1B2A4A"/>
                 </a:solidFill>
@@ -3589,22 +3255,42 @@
                 <a:ea typeface="Georgia" pitchFamily="34" charset="-122"/>
                 <a:cs typeface="Georgia" pitchFamily="34" charset="-120"/>
               </a:rPr>
-              <a:t>Reading &amp; Describing Graphs</a:t>
-            </a:r>
-            <a:endParaRPr lang="en-US" sz="2000" dirty="0"/>
+              <a:t>Reading and Describing Graphs</a:t>
+            </a:r>
+            <a:endParaRPr lang="en-US" sz="2400" dirty="0"/>
           </a:p>
         </p:txBody>
       </p:sp>
       <p:sp>
         <p:nvSpPr>
-          <p:cNvPr id="6" name="Text 4"/>
+          <p:cNvPr id="4" name="Shape 2"/>
           <p:cNvSpPr/>
           <p:nvPr/>
         </p:nvSpPr>
         <p:spPr>
           <a:xfrm>
-            <a:off x="731520" y="1051560"/>
-            <a:ext cx="7680960" cy="3108960"/>
+            <a:off x="548640" y="960120"/>
+            <a:ext cx="2286000" cy="36576"/>
+          </a:xfrm>
+          <a:prstGeom prst="rect">
+            <a:avLst/>
+          </a:prstGeom>
+          <a:solidFill>
+            <a:srgbClr val="2A9D8F"/>
+          </a:solidFill>
+          <a:ln/>
+        </p:spPr>
+      </p:sp>
+      <p:sp>
+        <p:nvSpPr>
+          <p:cNvPr id="5" name="Text 3"/>
+          <p:cNvSpPr/>
+          <p:nvPr/>
+        </p:nvSpPr>
+        <p:spPr>
+          <a:xfrm>
+            <a:off x="548640" y="1188720"/>
+            <a:ext cx="10058400" cy="3474720"/>
           </a:xfrm>
           <a:prstGeom prst="rect">
             <a:avLst/>
@@ -3616,189 +3302,114 @@
           <a:bodyPr wrap="square" rtlCol="0" anchor="t"/>
           <a:lstStyle/>
           <a:p>
-            <a:pPr marL="342900" indent="-342900">
+            <a:pPr>
+              <a:lnSpc>
+                <a:spcPct val="150000"/>
+              </a:lnSpc>
               <a:spcAft>
-                <a:spcPts val="800"/>
+                <a:spcPts val="600"/>
               </a:spcAft>
-              <a:buSzPct val="100000"/>
-              <a:buChar char="•"/>
             </a:pPr>
             <a:r>
               <a:rPr lang="en-US" sz="1500" dirty="0">
                 <a:solidFill>
                   <a:srgbClr val="3D3A36"/>
                 </a:solidFill>
-                <a:latin typeface="Calibri" pitchFamily="34" charset="0"/>
-                <a:ea typeface="Calibri" pitchFamily="34" charset="-122"/>
-                <a:cs typeface="Calibri" pitchFamily="34" charset="-120"/>
+                <a:latin typeface="Arial" pitchFamily="34" charset="0"/>
+                <a:ea typeface="Arial" pitchFamily="34" charset="-122"/>
+                <a:cs typeface="Arial" pitchFamily="34" charset="-120"/>
               </a:rPr>
-              <a:t>Describe the TREND: 'As X increases, Y increases/decreases.'</a:t>
+              <a:t>Describe the TREND: is it increasing, decreasing, or staying constant?</a:t>
             </a:r>
             <a:endParaRPr lang="en-US" sz="1500" dirty="0"/>
           </a:p>
           <a:p>
-            <a:pPr marL="342900" indent="-342900">
+            <a:pPr>
+              <a:lnSpc>
+                <a:spcPct val="150000"/>
+              </a:lnSpc>
               <a:spcAft>
-                <a:spcPts val="800"/>
+                <a:spcPts val="600"/>
               </a:spcAft>
-              <a:buSzPct val="100000"/>
-              <a:buChar char="•"/>
             </a:pPr>
             <a:r>
               <a:rPr lang="en-US" sz="1500" dirty="0">
                 <a:solidFill>
                   <a:srgbClr val="3D3A36"/>
                 </a:solidFill>
-                <a:latin typeface="Calibri" pitchFamily="34" charset="0"/>
-                <a:ea typeface="Calibri" pitchFamily="34" charset="-122"/>
-                <a:cs typeface="Calibri" pitchFamily="34" charset="-120"/>
+                <a:latin typeface="Arial" pitchFamily="34" charset="0"/>
+                <a:ea typeface="Arial" pitchFamily="34" charset="-122"/>
+                <a:cs typeface="Arial" pitchFamily="34" charset="-120"/>
               </a:rPr>
-              <a:t>Use DATA from the graph to support your description.</a:t>
+              <a:t>Use numbers from the graph: 'at 20°C, the rate was 5 cm/min'.</a:t>
             </a:r>
             <a:endParaRPr lang="en-US" sz="1500" dirty="0"/>
           </a:p>
           <a:p>
-            <a:pPr marL="342900" indent="-342900">
+            <a:pPr>
+              <a:lnSpc>
+                <a:spcPct val="150000"/>
+              </a:lnSpc>
               <a:spcAft>
-                <a:spcPts val="800"/>
+                <a:spcPts val="600"/>
               </a:spcAft>
-              <a:buSzPct val="100000"/>
-              <a:buChar char="•"/>
             </a:pPr>
             <a:r>
               <a:rPr lang="en-US" sz="1500" dirty="0">
                 <a:solidFill>
                   <a:srgbClr val="3D3A36"/>
                 </a:solidFill>
-                <a:latin typeface="Calibri" pitchFamily="34" charset="0"/>
-                <a:ea typeface="Calibri" pitchFamily="34" charset="-122"/>
-                <a:cs typeface="Calibri" pitchFamily="34" charset="-120"/>
+                <a:latin typeface="Arial" pitchFamily="34" charset="0"/>
+                <a:ea typeface="Arial" pitchFamily="34" charset="-122"/>
+                <a:cs typeface="Arial" pitchFamily="34" charset="-120"/>
               </a:rPr>
-              <a:t>Identify any ANOMALIES — results that don't fit the pattern.</a:t>
+              <a:t>Identify any anomalies: 'the point at 40°C does not fit the pattern'.</a:t>
             </a:r>
             <a:endParaRPr lang="en-US" sz="1500" dirty="0"/>
           </a:p>
           <a:p>
-            <a:pPr marL="342900" indent="-342900">
+            <a:pPr>
+              <a:lnSpc>
+                <a:spcPct val="150000"/>
+              </a:lnSpc>
               <a:spcAft>
-                <a:spcPts val="800"/>
+                <a:spcPts val="600"/>
               </a:spcAft>
-              <a:buSzPct val="100000"/>
-              <a:buChar char="•"/>
             </a:pPr>
             <a:r>
               <a:rPr lang="en-US" sz="1500" dirty="0">
                 <a:solidFill>
                   <a:srgbClr val="3D3A36"/>
                 </a:solidFill>
-                <a:latin typeface="Calibri" pitchFamily="34" charset="0"/>
-                <a:ea typeface="Calibri" pitchFamily="34" charset="-122"/>
-                <a:cs typeface="Calibri" pitchFamily="34" charset="-120"/>
+                <a:latin typeface="Arial" pitchFamily="34" charset="0"/>
+                <a:ea typeface="Arial" pitchFamily="34" charset="-122"/>
+                <a:cs typeface="Arial" pitchFamily="34" charset="-120"/>
               </a:rPr>
-              <a:t>Read values by tracing from the x-axis up and across to the y-axis.</a:t>
+              <a:t>For line graphs: is the increase steady or does it speed up/slow down?</a:t>
             </a:r>
             <a:endParaRPr lang="en-US" sz="1500" dirty="0"/>
           </a:p>
           <a:p>
-            <a:pPr marL="342900" indent="-342900">
+            <a:pPr>
+              <a:lnSpc>
+                <a:spcPct val="150000"/>
+              </a:lnSpc>
               <a:spcAft>
-                <a:spcPts val="800"/>
+                <a:spcPts val="600"/>
               </a:spcAft>
-              <a:buSzPct val="100000"/>
-              <a:buChar char="•"/>
             </a:pPr>
             <a:r>
               <a:rPr lang="en-US" sz="1500" dirty="0">
                 <a:solidFill>
                   <a:srgbClr val="3D3A36"/>
                 </a:solidFill>
-                <a:latin typeface="Calibri" pitchFamily="34" charset="0"/>
-                <a:ea typeface="Calibri" pitchFamily="34" charset="-122"/>
-                <a:cs typeface="Calibri" pitchFamily="34" charset="-120"/>
+                <a:latin typeface="Arial" pitchFamily="34" charset="0"/>
+                <a:ea typeface="Arial" pitchFamily="34" charset="-122"/>
+                <a:cs typeface="Arial" pitchFamily="34" charset="-120"/>
               </a:rPr>
-              <a:t>Always refer to the UNITS when quoting values from a graph.</a:t>
+              <a:t>Always refer to BOTH axes when describing what you see.</a:t>
             </a:r>
             <a:endParaRPr lang="en-US" sz="1500" dirty="0"/>
-          </a:p>
-        </p:txBody>
-      </p:sp>
-      <p:sp>
-        <p:nvSpPr>
-          <p:cNvPr id="7" name="Shape 5"/>
-          <p:cNvSpPr/>
-          <p:nvPr/>
-        </p:nvSpPr>
-        <p:spPr>
-          <a:xfrm>
-            <a:off x="731520" y="4206240"/>
-            <a:ext cx="7680960" cy="640080"/>
-          </a:xfrm>
-          <a:prstGeom prst="rect">
-            <a:avLst/>
-          </a:prstGeom>
-          <a:solidFill>
-            <a:srgbClr val="E8F5F3"/>
-          </a:solidFill>
-          <a:ln/>
-          <a:effectLst>
-            <a:outerShdw sx="100000" sy="100000" kx="0" ky="0" algn="bl" rotWithShape="0" blurRad="50800" dist="25400" dir="8100000">
-              <a:srgbClr val="000000">
-                <a:alpha val="10000"/>
-              </a:srgbClr>
-            </a:outerShdw>
-          </a:effectLst>
-        </p:spPr>
-      </p:sp>
-      <p:sp>
-        <p:nvSpPr>
-          <p:cNvPr id="8" name="Text 6"/>
-          <p:cNvSpPr/>
-          <p:nvPr/>
-        </p:nvSpPr>
-        <p:spPr>
-          <a:xfrm>
-            <a:off x="914400" y="4251960"/>
-            <a:ext cx="7315200" cy="548640"/>
-          </a:xfrm>
-          <a:prstGeom prst="rect">
-            <a:avLst/>
-          </a:prstGeom>
-          <a:noFill/>
-          <a:ln/>
-        </p:spPr>
-        <p:txBody>
-          <a:bodyPr wrap="square" rtlCol="0" anchor="ctr"/>
-          <a:lstStyle/>
-          <a:p>
-            <a:pPr indent="0" marL="0">
-              <a:buNone/>
-            </a:pPr>
-            <a:r>
-              <a:rPr lang="en-US" sz="1200" b="1" dirty="0">
-                <a:solidFill>
-                  <a:srgbClr val="2A9D8F"/>
-                </a:solidFill>
-                <a:latin typeface="Calibri" pitchFamily="34" charset="0"/>
-                <a:ea typeface="Calibri" pitchFamily="34" charset="-122"/>
-                <a:cs typeface="Calibri" pitchFamily="34" charset="-120"/>
-              </a:rPr>
-              <a:t>Key Idea: </a:t>
-            </a:r>
-            <a:pPr indent="0" marL="0">
-              <a:buNone/>
-            </a:pPr>
-            <a:r>
-              <a:rPr lang="en-US" sz="1200" i="1" dirty="0">
-                <a:solidFill>
-                  <a:srgbClr val="3D3A36"/>
-                </a:solidFill>
-                <a:latin typeface="Calibri" pitchFamily="34" charset="0"/>
-                <a:ea typeface="Calibri" pitchFamily="34" charset="-122"/>
-                <a:cs typeface="Calibri" pitchFamily="34" charset="-120"/>
-              </a:rPr>
-              <a:t>In MYP Criterion B, you need to describe AND explain the pattern.</a:t>
-            </a:r>
-            <a:endParaRPr lang="en-US" sz="1200" dirty="0"/>
           </a:p>
         </p:txBody>
       </p:sp>
@@ -3843,47 +3454,7 @@
         <p:spPr>
           <a:xfrm>
             <a:off x="0" y="0"/>
-            <a:ext cx="9144000" cy="822960"/>
-          </a:xfrm>
-          <a:prstGeom prst="rect">
-            <a:avLst/>
-          </a:prstGeom>
-          <a:solidFill>
-            <a:srgbClr val="FFFFFF"/>
-          </a:solidFill>
-          <a:ln/>
-        </p:spPr>
-      </p:sp>
-      <p:sp>
-        <p:nvSpPr>
-          <p:cNvPr id="3" name="Shape 1"/>
-          <p:cNvSpPr/>
-          <p:nvPr/>
-        </p:nvSpPr>
-        <p:spPr>
-          <a:xfrm>
-            <a:off x="0" y="804672"/>
-            <a:ext cx="9144000" cy="27432"/>
-          </a:xfrm>
-          <a:prstGeom prst="rect">
-            <a:avLst/>
-          </a:prstGeom>
-          <a:solidFill>
-            <a:srgbClr val="E5E2DC"/>
-          </a:solidFill>
-          <a:ln/>
-        </p:spPr>
-      </p:sp>
-      <p:sp>
-        <p:nvSpPr>
-          <p:cNvPr id="4" name="Shape 2"/>
-          <p:cNvSpPr/>
-          <p:nvPr/>
-        </p:nvSpPr>
-        <p:spPr>
-          <a:xfrm>
-            <a:off x="548640" y="201168"/>
-            <a:ext cx="54864" cy="420624"/>
+            <a:ext cx="73152" cy="5148072"/>
           </a:xfrm>
           <a:prstGeom prst="rect">
             <a:avLst/>
@@ -3896,14 +3467,14 @@
       </p:sp>
       <p:sp>
         <p:nvSpPr>
-          <p:cNvPr id="5" name="Text 3"/>
+          <p:cNvPr id="3" name="Text 1"/>
           <p:cNvSpPr/>
           <p:nvPr/>
         </p:nvSpPr>
         <p:spPr>
           <a:xfrm>
-            <a:off x="777240" y="137160"/>
-            <a:ext cx="7772400" cy="548640"/>
+            <a:off x="548640" y="274320"/>
+            <a:ext cx="9144000" cy="640080"/>
           </a:xfrm>
           <a:prstGeom prst="rect">
             <a:avLst/>
@@ -3912,14 +3483,14 @@
           <a:ln/>
         </p:spPr>
         <p:txBody>
-          <a:bodyPr wrap="square" lIns="0" tIns="0" rIns="0" bIns="0" rtlCol="0" anchor="ctr"/>
+          <a:bodyPr wrap="square" rtlCol="0" anchor="ctr"/>
           <a:lstStyle/>
           <a:p>
             <a:pPr indent="0" marL="0">
               <a:buNone/>
             </a:pPr>
             <a:r>
-              <a:rPr lang="en-US" sz="2000" b="1" dirty="0">
+              <a:rPr lang="en-US" sz="2400" b="1" dirty="0">
                 <a:solidFill>
                   <a:srgbClr val="1B2A4A"/>
                 </a:solidFill>
@@ -3927,9 +3498,9 @@
                 <a:ea typeface="Georgia" pitchFamily="34" charset="-122"/>
                 <a:cs typeface="Georgia" pitchFamily="34" charset="-120"/>
               </a:rPr>
-              <a:t>Types of Data Tables</a:t>
-            </a:r>
-            <a:endParaRPr lang="en-US" sz="2000" dirty="0"/>
+              <a:t>Data Table Example: Plant Growth</a:t>
+            </a:r>
+            <a:endParaRPr lang="en-US" sz="2400" dirty="0"/>
           </a:p>
         </p:txBody>
       </p:sp>
@@ -3948,25 +3519,27 @@
           </p:nvPr>
         </p:nvGraphicFramePr>
         <p:xfrm>
-          <a:off x="640080" y="1051560"/>
-          <a:ext cx="7863840" cy="914400"/>
+          <a:off x="548640" y="1097280"/>
+          <a:ext cx="10241280" cy="914400"/>
         </p:xfrm>
         <a:graphic>
           <a:graphicData uri="http://schemas.openxmlformats.org/drawingml/2006/table">
             <a:tbl>
               <a:tblPr/>
               <a:tblGrid>
-                <a:gridCol w="2621280"/>
-                <a:gridCol w="2621280"/>
-                <a:gridCol w="2621280"/>
+                <a:gridCol w="2048256"/>
+                <a:gridCol w="2048256"/>
+                <a:gridCol w="2048256"/>
+                <a:gridCol w="2048256"/>
+                <a:gridCol w="2048256"/>
               </a:tblGrid>
-              <a:tr h="502920">
+              <a:tr h="411480">
                 <a:tc>
                   <a:txBody>
                     <a:bodyPr/>
                     <a:lstStyle/>
                     <a:p>
-                      <a:pPr indent="0" marL="0">
+                      <a:pPr algn="ctr" indent="0" marL="0">
                         <a:buNone/>
                       </a:pPr>
                       <a:r>
@@ -3974,20 +3547,20 @@
                           <a:solidFill>
                             <a:srgbClr val="FFFFFF"/>
                           </a:solidFill>
-                          <a:latin typeface="Calibri" pitchFamily="34" charset="0"/>
-                          <a:ea typeface="Calibri" pitchFamily="34" charset="-122"/>
-                          <a:cs typeface="Calibri" pitchFamily="34" charset="-120"/>
+                          <a:latin typeface="Arial" pitchFamily="34" charset="0"/>
+                          <a:ea typeface="Arial" pitchFamily="34" charset="-122"/>
+                          <a:cs typeface="Arial" pitchFamily="34" charset="-120"/>
                         </a:rPr>
-                        <a:t>Feature</a:t>
+                        <a:t>Week</a:t>
                       </a:r>
                       <a:endParaRPr lang="en-US" sz="1200" dirty="0">
-                        <a:latin typeface="Calibri" charset="0"/>
-                        <a:ea typeface="Calibri" charset="0"/>
-                        <a:cs typeface="Calibri" charset="0"/>
+                        <a:latin typeface="Arial" charset="0"/>
+                        <a:ea typeface="Arial" charset="0"/>
+                        <a:cs typeface="Arial" charset="0"/>
                       </a:endParaRPr>
                     </a:p>
                   </a:txBody>
-                  <a:tcPr marL="91440" marR="91440" marT="45720" marB="45720">
+                  <a:tcPr marL="101600" marR="101600" marT="50800" marB="50800" anchor="ctr">
                     <a:lnL w="6350" cap="flat" cmpd="sng" algn="ctr">
                       <a:solidFill>
                         <a:srgbClr val="E5E2DC"/>
@@ -4034,7 +3607,7 @@
                     <a:bodyPr/>
                     <a:lstStyle/>
                     <a:p>
-                      <a:pPr indent="0" marL="0">
+                      <a:pPr algn="ctr" indent="0" marL="0">
                         <a:buNone/>
                       </a:pPr>
                       <a:r>
@@ -4042,20 +3615,20 @@
                           <a:solidFill>
                             <a:srgbClr val="FFFFFF"/>
                           </a:solidFill>
-                          <a:latin typeface="Calibri" pitchFamily="34" charset="0"/>
-                          <a:ea typeface="Calibri" pitchFamily="34" charset="-122"/>
-                          <a:cs typeface="Calibri" pitchFamily="34" charset="-120"/>
+                          <a:latin typeface="Arial" pitchFamily="34" charset="0"/>
+                          <a:ea typeface="Arial" pitchFamily="34" charset="-122"/>
+                          <a:cs typeface="Arial" pitchFamily="34" charset="-120"/>
                         </a:rPr>
-                        <a:t>Good Table</a:t>
+                        <a:t>Plant A (cm)</a:t>
                       </a:r>
                       <a:endParaRPr lang="en-US" sz="1200" dirty="0">
-                        <a:latin typeface="Calibri" charset="0"/>
-                        <a:ea typeface="Calibri" charset="0"/>
-                        <a:cs typeface="Calibri" charset="0"/>
+                        <a:latin typeface="Arial" charset="0"/>
+                        <a:ea typeface="Arial" charset="0"/>
+                        <a:cs typeface="Arial" charset="0"/>
                       </a:endParaRPr>
                     </a:p>
                   </a:txBody>
-                  <a:tcPr marL="91440" marR="91440" marT="45720" marB="45720">
+                  <a:tcPr marL="101600" marR="101600" marT="50800" marB="50800" anchor="ctr">
                     <a:lnL w="6350" cap="flat" cmpd="sng" algn="ctr">
                       <a:solidFill>
                         <a:srgbClr val="E5E2DC"/>
@@ -4102,7 +3675,7 @@
                     <a:bodyPr/>
                     <a:lstStyle/>
                     <a:p>
-                      <a:pPr indent="0" marL="0">
+                      <a:pPr algn="ctr" indent="0" marL="0">
                         <a:buNone/>
                       </a:pPr>
                       <a:r>
@@ -4110,20 +3683,156 @@
                           <a:solidFill>
                             <a:srgbClr val="FFFFFF"/>
                           </a:solidFill>
-                          <a:latin typeface="Calibri" pitchFamily="34" charset="0"/>
-                          <a:ea typeface="Calibri" pitchFamily="34" charset="-122"/>
-                          <a:cs typeface="Calibri" pitchFamily="34" charset="-120"/>
+                          <a:latin typeface="Arial" pitchFamily="34" charset="0"/>
+                          <a:ea typeface="Arial" pitchFamily="34" charset="-122"/>
+                          <a:cs typeface="Arial" pitchFamily="34" charset="-120"/>
                         </a:rPr>
-                        <a:t>Poor Table</a:t>
+                        <a:t>Plant B (cm)</a:t>
                       </a:r>
                       <a:endParaRPr lang="en-US" sz="1200" dirty="0">
-                        <a:latin typeface="Calibri" charset="0"/>
-                        <a:ea typeface="Calibri" charset="0"/>
-                        <a:cs typeface="Calibri" charset="0"/>
+                        <a:latin typeface="Arial" charset="0"/>
+                        <a:ea typeface="Arial" charset="0"/>
+                        <a:cs typeface="Arial" charset="0"/>
                       </a:endParaRPr>
                     </a:p>
                   </a:txBody>
-                  <a:tcPr marL="91440" marR="91440" marT="45720" marB="45720">
+                  <a:tcPr marL="101600" marR="101600" marT="50800" marB="50800" anchor="ctr">
+                    <a:lnL w="6350" cap="flat" cmpd="sng" algn="ctr">
+                      <a:solidFill>
+                        <a:srgbClr val="E5E2DC"/>
+                      </a:solidFill>
+                      <a:prstDash val="solid"/>
+                      <a:round/>
+                      <a:headEnd type="none" w="med" len="med"/>
+                      <a:tailEnd type="none" w="med" len="med"/>
+                    </a:lnL>
+                    <a:lnR w="6350" cap="flat" cmpd="sng" algn="ctr">
+                      <a:solidFill>
+                        <a:srgbClr val="E5E2DC"/>
+                      </a:solidFill>
+                      <a:prstDash val="solid"/>
+                      <a:round/>
+                      <a:headEnd type="none" w="med" len="med"/>
+                      <a:tailEnd type="none" w="med" len="med"/>
+                    </a:lnR>
+                    <a:lnT w="6350" cap="flat" cmpd="sng" algn="ctr">
+                      <a:solidFill>
+                        <a:srgbClr val="E5E2DC"/>
+                      </a:solidFill>
+                      <a:prstDash val="solid"/>
+                      <a:round/>
+                      <a:headEnd type="none" w="med" len="med"/>
+                      <a:tailEnd type="none" w="med" len="med"/>
+                    </a:lnT>
+                    <a:lnB w="6350" cap="flat" cmpd="sng" algn="ctr">
+                      <a:solidFill>
+                        <a:srgbClr val="E5E2DC"/>
+                      </a:solidFill>
+                      <a:prstDash val="solid"/>
+                      <a:round/>
+                      <a:headEnd type="none" w="med" len="med"/>
+                      <a:tailEnd type="none" w="med" len="med"/>
+                    </a:lnB>
+                    <a:solidFill>
+                      <a:srgbClr val="2A9D8F"/>
+                    </a:solidFill>
+                  </a:tcPr>
+                </a:tc>
+                <a:tc>
+                  <a:txBody>
+                    <a:bodyPr/>
+                    <a:lstStyle/>
+                    <a:p>
+                      <a:pPr algn="ctr" indent="0" marL="0">
+                        <a:buNone/>
+                      </a:pPr>
+                      <a:r>
+                        <a:rPr lang="en-US" sz="1200" b="1" dirty="0">
+                          <a:solidFill>
+                            <a:srgbClr val="FFFFFF"/>
+                          </a:solidFill>
+                          <a:latin typeface="Arial" pitchFamily="34" charset="0"/>
+                          <a:ea typeface="Arial" pitchFamily="34" charset="-122"/>
+                          <a:cs typeface="Arial" pitchFamily="34" charset="-120"/>
+                        </a:rPr>
+                        <a:t>Plant C (cm)</a:t>
+                      </a:r>
+                      <a:endParaRPr lang="en-US" sz="1200" dirty="0">
+                        <a:latin typeface="Arial" charset="0"/>
+                        <a:ea typeface="Arial" charset="0"/>
+                        <a:cs typeface="Arial" charset="0"/>
+                      </a:endParaRPr>
+                    </a:p>
+                  </a:txBody>
+                  <a:tcPr marL="101600" marR="101600" marT="50800" marB="50800" anchor="ctr">
+                    <a:lnL w="6350" cap="flat" cmpd="sng" algn="ctr">
+                      <a:solidFill>
+                        <a:srgbClr val="E5E2DC"/>
+                      </a:solidFill>
+                      <a:prstDash val="solid"/>
+                      <a:round/>
+                      <a:headEnd type="none" w="med" len="med"/>
+                      <a:tailEnd type="none" w="med" len="med"/>
+                    </a:lnL>
+                    <a:lnR w="6350" cap="flat" cmpd="sng" algn="ctr">
+                      <a:solidFill>
+                        <a:srgbClr val="E5E2DC"/>
+                      </a:solidFill>
+                      <a:prstDash val="solid"/>
+                      <a:round/>
+                      <a:headEnd type="none" w="med" len="med"/>
+                      <a:tailEnd type="none" w="med" len="med"/>
+                    </a:lnR>
+                    <a:lnT w="6350" cap="flat" cmpd="sng" algn="ctr">
+                      <a:solidFill>
+                        <a:srgbClr val="E5E2DC"/>
+                      </a:solidFill>
+                      <a:prstDash val="solid"/>
+                      <a:round/>
+                      <a:headEnd type="none" w="med" len="med"/>
+                      <a:tailEnd type="none" w="med" len="med"/>
+                    </a:lnT>
+                    <a:lnB w="6350" cap="flat" cmpd="sng" algn="ctr">
+                      <a:solidFill>
+                        <a:srgbClr val="E5E2DC"/>
+                      </a:solidFill>
+                      <a:prstDash val="solid"/>
+                      <a:round/>
+                      <a:headEnd type="none" w="med" len="med"/>
+                      <a:tailEnd type="none" w="med" len="med"/>
+                    </a:lnB>
+                    <a:solidFill>
+                      <a:srgbClr val="2A9D8F"/>
+                    </a:solidFill>
+                  </a:tcPr>
+                </a:tc>
+                <a:tc>
+                  <a:txBody>
+                    <a:bodyPr/>
+                    <a:lstStyle/>
+                    <a:p>
+                      <a:pPr algn="ctr" indent="0" marL="0">
+                        <a:buNone/>
+                      </a:pPr>
+                      <a:r>
+                        <a:rPr lang="en-US" sz="1200" b="1" dirty="0">
+                          <a:solidFill>
+                            <a:srgbClr val="FFFFFF"/>
+                          </a:solidFill>
+                          <a:latin typeface="Arial" pitchFamily="34" charset="0"/>
+                          <a:ea typeface="Arial" pitchFamily="34" charset="-122"/>
+                          <a:cs typeface="Arial" pitchFamily="34" charset="-120"/>
+                        </a:rPr>
+                        <a:t>Mean (cm)</a:t>
+                      </a:r>
+                      <a:endParaRPr lang="en-US" sz="1200" dirty="0">
+                        <a:latin typeface="Arial" charset="0"/>
+                        <a:ea typeface="Arial" charset="0"/>
+                        <a:cs typeface="Arial" charset="0"/>
+                      </a:endParaRPr>
+                    </a:p>
+                  </a:txBody>
+                  <a:tcPr marL="101600" marR="101600" marT="50800" marB="50800" anchor="ctr">
                     <a:lnL w="6350" cap="flat" cmpd="sng" algn="ctr">
                       <a:solidFill>
                         <a:srgbClr val="E5E2DC"/>
@@ -4166,7 +3875,7 @@
                   </a:tcPr>
                 </a:tc>
               </a:tr>
-              <a:tr h="502920">
+              <a:tr h="365760">
                 <a:tc>
                   <a:txBody>
                     <a:bodyPr/>
@@ -4180,20 +3889,20 @@
                           <a:solidFill>
                             <a:srgbClr val="3D3A36"/>
                           </a:solidFill>
-                          <a:latin typeface="Calibri" pitchFamily="34" charset="0"/>
-                          <a:ea typeface="Calibri" pitchFamily="34" charset="-122"/>
-                          <a:cs typeface="Calibri" pitchFamily="34" charset="-120"/>
+                          <a:latin typeface="Arial" pitchFamily="34" charset="0"/>
+                          <a:ea typeface="Arial" pitchFamily="34" charset="-122"/>
+                          <a:cs typeface="Arial" pitchFamily="34" charset="-120"/>
                         </a:rPr>
-                        <a:t>Headings</a:t>
+                        <a:t>1</a:t>
                       </a:r>
                       <a:endParaRPr lang="en-US" sz="1200" dirty="0">
-                        <a:latin typeface="Calibri" charset="0"/>
-                        <a:ea typeface="Calibri" charset="0"/>
-                        <a:cs typeface="Calibri" charset="0"/>
+                        <a:latin typeface="Arial" charset="0"/>
+                        <a:ea typeface="Arial" charset="0"/>
+                        <a:cs typeface="Arial" charset="0"/>
                       </a:endParaRPr>
                     </a:p>
                   </a:txBody>
-                  <a:tcPr marL="91440" marR="91440" marT="45720" marB="45720">
+                  <a:tcPr marL="101600" marR="101600" marT="50800" marB="50800" anchor="ctr">
                     <a:lnL w="6350" cap="flat" cmpd="sng" algn="ctr">
                       <a:solidFill>
                         <a:srgbClr val="E5E2DC"/>
@@ -4248,20 +3957,20 @@
                           <a:solidFill>
                             <a:srgbClr val="3D3A36"/>
                           </a:solidFill>
-                          <a:latin typeface="Calibri" pitchFamily="34" charset="0"/>
-                          <a:ea typeface="Calibri" pitchFamily="34" charset="-122"/>
-                          <a:cs typeface="Calibri" pitchFamily="34" charset="-120"/>
+                          <a:latin typeface="Arial" pitchFamily="34" charset="0"/>
+                          <a:ea typeface="Arial" pitchFamily="34" charset="-122"/>
+                          <a:cs typeface="Arial" pitchFamily="34" charset="-120"/>
                         </a:rPr>
-                        <a:t>Clear with units (e.g. Mass / g)</a:t>
+                        <a:t>3.2</a:t>
                       </a:r>
                       <a:endParaRPr lang="en-US" sz="1200" dirty="0">
-                        <a:latin typeface="Calibri" charset="0"/>
-                        <a:ea typeface="Calibri" charset="0"/>
-                        <a:cs typeface="Calibri" charset="0"/>
+                        <a:latin typeface="Arial" charset="0"/>
+                        <a:ea typeface="Arial" charset="0"/>
+                        <a:cs typeface="Arial" charset="0"/>
                       </a:endParaRPr>
                     </a:p>
                   </a:txBody>
-                  <a:tcPr marL="91440" marR="91440" marT="45720" marB="45720">
+                  <a:tcPr marL="101600" marR="101600" marT="50800" marB="50800" anchor="ctr">
                     <a:lnL w="6350" cap="flat" cmpd="sng" algn="ctr">
                       <a:solidFill>
                         <a:srgbClr val="E5E2DC"/>
@@ -4316,20 +4025,20 @@
                           <a:solidFill>
                             <a:srgbClr val="3D3A36"/>
                           </a:solidFill>
-                          <a:latin typeface="Calibri" pitchFamily="34" charset="0"/>
-                          <a:ea typeface="Calibri" pitchFamily="34" charset="-122"/>
-                          <a:cs typeface="Calibri" pitchFamily="34" charset="-120"/>
+                          <a:latin typeface="Arial" pitchFamily="34" charset="0"/>
+                          <a:ea typeface="Arial" pitchFamily="34" charset="-122"/>
+                          <a:cs typeface="Arial" pitchFamily="34" charset="-120"/>
                         </a:rPr>
-                        <a:t>Missing units</a:t>
+                        <a:t>2.8</a:t>
                       </a:r>
                       <a:endParaRPr lang="en-US" sz="1200" dirty="0">
-                        <a:latin typeface="Calibri" charset="0"/>
-                        <a:ea typeface="Calibri" charset="0"/>
-                        <a:cs typeface="Calibri" charset="0"/>
+                        <a:latin typeface="Arial" charset="0"/>
+                        <a:ea typeface="Arial" charset="0"/>
+                        <a:cs typeface="Arial" charset="0"/>
                       </a:endParaRPr>
                     </a:p>
                   </a:txBody>
-                  <a:tcPr marL="91440" marR="91440" marT="45720" marB="45720">
+                  <a:tcPr marL="101600" marR="101600" marT="50800" marB="50800" anchor="ctr">
                     <a:lnL w="6350" cap="flat" cmpd="sng" algn="ctr">
                       <a:solidFill>
                         <a:srgbClr val="E5E2DC"/>
@@ -4371,8 +4080,6 @@
                     </a:solidFill>
                   </a:tcPr>
                 </a:tc>
-              </a:tr>
-              <a:tr h="502920">
                 <a:tc>
                   <a:txBody>
                     <a:bodyPr/>
@@ -4386,20 +4093,158 @@
                           <a:solidFill>
                             <a:srgbClr val="3D3A36"/>
                           </a:solidFill>
-                          <a:latin typeface="Calibri" pitchFamily="34" charset="0"/>
-                          <a:ea typeface="Calibri" pitchFamily="34" charset="-122"/>
-                          <a:cs typeface="Calibri" pitchFamily="34" charset="-120"/>
+                          <a:latin typeface="Arial" pitchFamily="34" charset="0"/>
+                          <a:ea typeface="Arial" pitchFamily="34" charset="-122"/>
+                          <a:cs typeface="Arial" pitchFamily="34" charset="-120"/>
                         </a:rPr>
-                        <a:t>Values</a:t>
+                        <a:t>3.1</a:t>
                       </a:r>
                       <a:endParaRPr lang="en-US" sz="1200" dirty="0">
-                        <a:latin typeface="Calibri" charset="0"/>
-                        <a:ea typeface="Calibri" charset="0"/>
-                        <a:cs typeface="Calibri" charset="0"/>
+                        <a:latin typeface="Arial" charset="0"/>
+                        <a:ea typeface="Arial" charset="0"/>
+                        <a:cs typeface="Arial" charset="0"/>
                       </a:endParaRPr>
                     </a:p>
                   </a:txBody>
-                  <a:tcPr marL="91440" marR="91440" marT="45720" marB="45720">
+                  <a:tcPr marL="101600" marR="101600" marT="50800" marB="50800" anchor="ctr">
+                    <a:lnL w="6350" cap="flat" cmpd="sng" algn="ctr">
+                      <a:solidFill>
+                        <a:srgbClr val="E5E2DC"/>
+                      </a:solidFill>
+                      <a:prstDash val="solid"/>
+                      <a:round/>
+                      <a:headEnd type="none" w="med" len="med"/>
+                      <a:tailEnd type="none" w="med" len="med"/>
+                    </a:lnL>
+                    <a:lnR w="6350" cap="flat" cmpd="sng" algn="ctr">
+                      <a:solidFill>
+                        <a:srgbClr val="E5E2DC"/>
+                      </a:solidFill>
+                      <a:prstDash val="solid"/>
+                      <a:round/>
+                      <a:headEnd type="none" w="med" len="med"/>
+                      <a:tailEnd type="none" w="med" len="med"/>
+                    </a:lnR>
+                    <a:lnT w="6350" cap="flat" cmpd="sng" algn="ctr">
+                      <a:solidFill>
+                        <a:srgbClr val="E5E2DC"/>
+                      </a:solidFill>
+                      <a:prstDash val="solid"/>
+                      <a:round/>
+                      <a:headEnd type="none" w="med" len="med"/>
+                      <a:tailEnd type="none" w="med" len="med"/>
+                    </a:lnT>
+                    <a:lnB w="6350" cap="flat" cmpd="sng" algn="ctr">
+                      <a:solidFill>
+                        <a:srgbClr val="E5E2DC"/>
+                      </a:solidFill>
+                      <a:prstDash val="solid"/>
+                      <a:round/>
+                      <a:headEnd type="none" w="med" len="med"/>
+                      <a:tailEnd type="none" w="med" len="med"/>
+                    </a:lnB>
+                    <a:solidFill>
+                      <a:srgbClr val="FFFFFF"/>
+                    </a:solidFill>
+                  </a:tcPr>
+                </a:tc>
+                <a:tc>
+                  <a:txBody>
+                    <a:bodyPr/>
+                    <a:lstStyle/>
+                    <a:p>
+                      <a:pPr indent="0" marL="0">
+                        <a:buNone/>
+                      </a:pPr>
+                      <a:r>
+                        <a:rPr lang="en-US" sz="1200" dirty="0">
+                          <a:solidFill>
+                            <a:srgbClr val="3D3A36"/>
+                          </a:solidFill>
+                          <a:latin typeface="Arial" pitchFamily="34" charset="0"/>
+                          <a:ea typeface="Arial" pitchFamily="34" charset="-122"/>
+                          <a:cs typeface="Arial" pitchFamily="34" charset="-120"/>
+                        </a:rPr>
+                        <a:t>3.0</a:t>
+                      </a:r>
+                      <a:endParaRPr lang="en-US" sz="1200" dirty="0">
+                        <a:latin typeface="Arial" charset="0"/>
+                        <a:ea typeface="Arial" charset="0"/>
+                        <a:cs typeface="Arial" charset="0"/>
+                      </a:endParaRPr>
+                    </a:p>
+                  </a:txBody>
+                  <a:tcPr marL="101600" marR="101600" marT="50800" marB="50800" anchor="ctr">
+                    <a:lnL w="6350" cap="flat" cmpd="sng" algn="ctr">
+                      <a:solidFill>
+                        <a:srgbClr val="E5E2DC"/>
+                      </a:solidFill>
+                      <a:prstDash val="solid"/>
+                      <a:round/>
+                      <a:headEnd type="none" w="med" len="med"/>
+                      <a:tailEnd type="none" w="med" len="med"/>
+                    </a:lnL>
+                    <a:lnR w="6350" cap="flat" cmpd="sng" algn="ctr">
+                      <a:solidFill>
+                        <a:srgbClr val="E5E2DC"/>
+                      </a:solidFill>
+                      <a:prstDash val="solid"/>
+                      <a:round/>
+                      <a:headEnd type="none" w="med" len="med"/>
+                      <a:tailEnd type="none" w="med" len="med"/>
+                    </a:lnR>
+                    <a:lnT w="6350" cap="flat" cmpd="sng" algn="ctr">
+                      <a:solidFill>
+                        <a:srgbClr val="E5E2DC"/>
+                      </a:solidFill>
+                      <a:prstDash val="solid"/>
+                      <a:round/>
+                      <a:headEnd type="none" w="med" len="med"/>
+                      <a:tailEnd type="none" w="med" len="med"/>
+                    </a:lnT>
+                    <a:lnB w="6350" cap="flat" cmpd="sng" algn="ctr">
+                      <a:solidFill>
+                        <a:srgbClr val="E5E2DC"/>
+                      </a:solidFill>
+                      <a:prstDash val="solid"/>
+                      <a:round/>
+                      <a:headEnd type="none" w="med" len="med"/>
+                      <a:tailEnd type="none" w="med" len="med"/>
+                    </a:lnB>
+                    <a:solidFill>
+                      <a:srgbClr val="FFFFFF"/>
+                    </a:solidFill>
+                  </a:tcPr>
+                </a:tc>
+              </a:tr>
+              <a:tr h="365760">
+                <a:tc>
+                  <a:txBody>
+                    <a:bodyPr/>
+                    <a:lstStyle/>
+                    <a:p>
+                      <a:pPr indent="0" marL="0">
+                        <a:buNone/>
+                      </a:pPr>
+                      <a:r>
+                        <a:rPr lang="en-US" sz="1200" dirty="0">
+                          <a:solidFill>
+                            <a:srgbClr val="3D3A36"/>
+                          </a:solidFill>
+                          <a:latin typeface="Arial" pitchFamily="34" charset="0"/>
+                          <a:ea typeface="Arial" pitchFamily="34" charset="-122"/>
+                          <a:cs typeface="Arial" pitchFamily="34" charset="-120"/>
+                        </a:rPr>
+                        <a:t>2</a:t>
+                      </a:r>
+                      <a:endParaRPr lang="en-US" sz="1200" dirty="0">
+                        <a:latin typeface="Arial" charset="0"/>
+                        <a:ea typeface="Arial" charset="0"/>
+                        <a:cs typeface="Arial" charset="0"/>
+                      </a:endParaRPr>
+                    </a:p>
+                  </a:txBody>
+                  <a:tcPr marL="101600" marR="101600" marT="50800" marB="50800" anchor="ctr">
                     <a:lnL w="6350" cap="flat" cmpd="sng" algn="ctr">
                       <a:solidFill>
                         <a:srgbClr val="E5E2DC"/>
@@ -4454,20 +4299,20 @@
                           <a:solidFill>
                             <a:srgbClr val="3D3A36"/>
                           </a:solidFill>
-                          <a:latin typeface="Calibri" pitchFamily="34" charset="0"/>
-                          <a:ea typeface="Calibri" pitchFamily="34" charset="-122"/>
-                          <a:cs typeface="Calibri" pitchFamily="34" charset="-120"/>
+                          <a:latin typeface="Arial" pitchFamily="34" charset="0"/>
+                          <a:ea typeface="Arial" pitchFamily="34" charset="-122"/>
+                          <a:cs typeface="Arial" pitchFamily="34" charset="-120"/>
                         </a:rPr>
-                        <a:t>Neat, aligned numbers</a:t>
+                        <a:t>5.4</a:t>
                       </a:r>
                       <a:endParaRPr lang="en-US" sz="1200" dirty="0">
-                        <a:latin typeface="Calibri" charset="0"/>
-                        <a:ea typeface="Calibri" charset="0"/>
-                        <a:cs typeface="Calibri" charset="0"/>
+                        <a:latin typeface="Arial" charset="0"/>
+                        <a:ea typeface="Arial" charset="0"/>
+                        <a:cs typeface="Arial" charset="0"/>
                       </a:endParaRPr>
                     </a:p>
                   </a:txBody>
-                  <a:tcPr marL="91440" marR="91440" marT="45720" marB="45720">
+                  <a:tcPr marL="101600" marR="101600" marT="50800" marB="50800" anchor="ctr">
                     <a:lnL w="6350" cap="flat" cmpd="sng" algn="ctr">
                       <a:solidFill>
                         <a:srgbClr val="E5E2DC"/>
@@ -4522,20 +4367,20 @@
                           <a:solidFill>
                             <a:srgbClr val="3D3A36"/>
                           </a:solidFill>
-                          <a:latin typeface="Calibri" pitchFamily="34" charset="0"/>
-                          <a:ea typeface="Calibri" pitchFamily="34" charset="-122"/>
-                          <a:cs typeface="Calibri" pitchFamily="34" charset="-120"/>
+                          <a:latin typeface="Arial" pitchFamily="34" charset="0"/>
+                          <a:ea typeface="Arial" pitchFamily="34" charset="-122"/>
+                          <a:cs typeface="Arial" pitchFamily="34" charset="-120"/>
                         </a:rPr>
-                        <a:t>Messy, scattered</a:t>
+                        <a:t>5.1</a:t>
                       </a:r>
                       <a:endParaRPr lang="en-US" sz="1200" dirty="0">
-                        <a:latin typeface="Calibri" charset="0"/>
-                        <a:ea typeface="Calibri" charset="0"/>
-                        <a:cs typeface="Calibri" charset="0"/>
+                        <a:latin typeface="Arial" charset="0"/>
+                        <a:ea typeface="Arial" charset="0"/>
+                        <a:cs typeface="Arial" charset="0"/>
                       </a:endParaRPr>
                     </a:p>
                   </a:txBody>
-                  <a:tcPr marL="91440" marR="91440" marT="45720" marB="45720">
+                  <a:tcPr marL="101600" marR="101600" marT="50800" marB="50800" anchor="ctr">
                     <a:lnL w="6350" cap="flat" cmpd="sng" algn="ctr">
                       <a:solidFill>
                         <a:srgbClr val="E5E2DC"/>
@@ -4577,8 +4422,6 @@
                     </a:solidFill>
                   </a:tcPr>
                 </a:tc>
-              </a:tr>
-              <a:tr h="502920">
                 <a:tc>
                   <a:txBody>
                     <a:bodyPr/>
@@ -4592,20 +4435,158 @@
                           <a:solidFill>
                             <a:srgbClr val="3D3A36"/>
                           </a:solidFill>
-                          <a:latin typeface="Calibri" pitchFamily="34" charset="0"/>
-                          <a:ea typeface="Calibri" pitchFamily="34" charset="-122"/>
-                          <a:cs typeface="Calibri" pitchFamily="34" charset="-120"/>
+                          <a:latin typeface="Arial" pitchFamily="34" charset="0"/>
+                          <a:ea typeface="Arial" pitchFamily="34" charset="-122"/>
+                          <a:cs typeface="Arial" pitchFamily="34" charset="-120"/>
                         </a:rPr>
-                        <a:t>Repeats</a:t>
+                        <a:t>5.6</a:t>
                       </a:r>
                       <a:endParaRPr lang="en-US" sz="1200" dirty="0">
-                        <a:latin typeface="Calibri" charset="0"/>
-                        <a:ea typeface="Calibri" charset="0"/>
-                        <a:cs typeface="Calibri" charset="0"/>
+                        <a:latin typeface="Arial" charset="0"/>
+                        <a:ea typeface="Arial" charset="0"/>
+                        <a:cs typeface="Arial" charset="0"/>
                       </a:endParaRPr>
                     </a:p>
                   </a:txBody>
-                  <a:tcPr marL="91440" marR="91440" marT="45720" marB="45720">
+                  <a:tcPr marL="101600" marR="101600" marT="50800" marB="50800" anchor="ctr">
+                    <a:lnL w="6350" cap="flat" cmpd="sng" algn="ctr">
+                      <a:solidFill>
+                        <a:srgbClr val="E5E2DC"/>
+                      </a:solidFill>
+                      <a:prstDash val="solid"/>
+                      <a:round/>
+                      <a:headEnd type="none" w="med" len="med"/>
+                      <a:tailEnd type="none" w="med" len="med"/>
+                    </a:lnL>
+                    <a:lnR w="6350" cap="flat" cmpd="sng" algn="ctr">
+                      <a:solidFill>
+                        <a:srgbClr val="E5E2DC"/>
+                      </a:solidFill>
+                      <a:prstDash val="solid"/>
+                      <a:round/>
+                      <a:headEnd type="none" w="med" len="med"/>
+                      <a:tailEnd type="none" w="med" len="med"/>
+                    </a:lnR>
+                    <a:lnT w="6350" cap="flat" cmpd="sng" algn="ctr">
+                      <a:solidFill>
+                        <a:srgbClr val="E5E2DC"/>
+                      </a:solidFill>
+                      <a:prstDash val="solid"/>
+                      <a:round/>
+                      <a:headEnd type="none" w="med" len="med"/>
+                      <a:tailEnd type="none" w="med" len="med"/>
+                    </a:lnT>
+                    <a:lnB w="6350" cap="flat" cmpd="sng" algn="ctr">
+                      <a:solidFill>
+                        <a:srgbClr val="E5E2DC"/>
+                      </a:solidFill>
+                      <a:prstDash val="solid"/>
+                      <a:round/>
+                      <a:headEnd type="none" w="med" len="med"/>
+                      <a:tailEnd type="none" w="med" len="med"/>
+                    </a:lnB>
+                    <a:solidFill>
+                      <a:srgbClr val="F8F6F3"/>
+                    </a:solidFill>
+                  </a:tcPr>
+                </a:tc>
+                <a:tc>
+                  <a:txBody>
+                    <a:bodyPr/>
+                    <a:lstStyle/>
+                    <a:p>
+                      <a:pPr indent="0" marL="0">
+                        <a:buNone/>
+                      </a:pPr>
+                      <a:r>
+                        <a:rPr lang="en-US" sz="1200" dirty="0">
+                          <a:solidFill>
+                            <a:srgbClr val="3D3A36"/>
+                          </a:solidFill>
+                          <a:latin typeface="Arial" pitchFamily="34" charset="0"/>
+                          <a:ea typeface="Arial" pitchFamily="34" charset="-122"/>
+                          <a:cs typeface="Arial" pitchFamily="34" charset="-120"/>
+                        </a:rPr>
+                        <a:t>5.4</a:t>
+                      </a:r>
+                      <a:endParaRPr lang="en-US" sz="1200" dirty="0">
+                        <a:latin typeface="Arial" charset="0"/>
+                        <a:ea typeface="Arial" charset="0"/>
+                        <a:cs typeface="Arial" charset="0"/>
+                      </a:endParaRPr>
+                    </a:p>
+                  </a:txBody>
+                  <a:tcPr marL="101600" marR="101600" marT="50800" marB="50800" anchor="ctr">
+                    <a:lnL w="6350" cap="flat" cmpd="sng" algn="ctr">
+                      <a:solidFill>
+                        <a:srgbClr val="E5E2DC"/>
+                      </a:solidFill>
+                      <a:prstDash val="solid"/>
+                      <a:round/>
+                      <a:headEnd type="none" w="med" len="med"/>
+                      <a:tailEnd type="none" w="med" len="med"/>
+                    </a:lnL>
+                    <a:lnR w="6350" cap="flat" cmpd="sng" algn="ctr">
+                      <a:solidFill>
+                        <a:srgbClr val="E5E2DC"/>
+                      </a:solidFill>
+                      <a:prstDash val="solid"/>
+                      <a:round/>
+                      <a:headEnd type="none" w="med" len="med"/>
+                      <a:tailEnd type="none" w="med" len="med"/>
+                    </a:lnR>
+                    <a:lnT w="6350" cap="flat" cmpd="sng" algn="ctr">
+                      <a:solidFill>
+                        <a:srgbClr val="E5E2DC"/>
+                      </a:solidFill>
+                      <a:prstDash val="solid"/>
+                      <a:round/>
+                      <a:headEnd type="none" w="med" len="med"/>
+                      <a:tailEnd type="none" w="med" len="med"/>
+                    </a:lnT>
+                    <a:lnB w="6350" cap="flat" cmpd="sng" algn="ctr">
+                      <a:solidFill>
+                        <a:srgbClr val="E5E2DC"/>
+                      </a:solidFill>
+                      <a:prstDash val="solid"/>
+                      <a:round/>
+                      <a:headEnd type="none" w="med" len="med"/>
+                      <a:tailEnd type="none" w="med" len="med"/>
+                    </a:lnB>
+                    <a:solidFill>
+                      <a:srgbClr val="F8F6F3"/>
+                    </a:solidFill>
+                  </a:tcPr>
+                </a:tc>
+              </a:tr>
+              <a:tr h="365760">
+                <a:tc>
+                  <a:txBody>
+                    <a:bodyPr/>
+                    <a:lstStyle/>
+                    <a:p>
+                      <a:pPr indent="0" marL="0">
+                        <a:buNone/>
+                      </a:pPr>
+                      <a:r>
+                        <a:rPr lang="en-US" sz="1200" dirty="0">
+                          <a:solidFill>
+                            <a:srgbClr val="3D3A36"/>
+                          </a:solidFill>
+                          <a:latin typeface="Arial" pitchFamily="34" charset="0"/>
+                          <a:ea typeface="Arial" pitchFamily="34" charset="-122"/>
+                          <a:cs typeface="Arial" pitchFamily="34" charset="-120"/>
+                        </a:rPr>
+                        <a:t>3</a:t>
+                      </a:r>
+                      <a:endParaRPr lang="en-US" sz="1200" dirty="0">
+                        <a:latin typeface="Arial" charset="0"/>
+                        <a:ea typeface="Arial" charset="0"/>
+                        <a:cs typeface="Arial" charset="0"/>
+                      </a:endParaRPr>
+                    </a:p>
+                  </a:txBody>
+                  <a:tcPr marL="101600" marR="101600" marT="50800" marB="50800" anchor="ctr">
                     <a:lnL w="6350" cap="flat" cmpd="sng" algn="ctr">
                       <a:solidFill>
                         <a:srgbClr val="E5E2DC"/>
@@ -4660,20 +4641,20 @@
                           <a:solidFill>
                             <a:srgbClr val="3D3A36"/>
                           </a:solidFill>
-                          <a:latin typeface="Calibri" pitchFamily="34" charset="0"/>
-                          <a:ea typeface="Calibri" pitchFamily="34" charset="-122"/>
-                          <a:cs typeface="Calibri" pitchFamily="34" charset="-120"/>
+                          <a:latin typeface="Arial" pitchFamily="34" charset="0"/>
+                          <a:ea typeface="Arial" pitchFamily="34" charset="-122"/>
+                          <a:cs typeface="Arial" pitchFamily="34" charset="-120"/>
                         </a:rPr>
-                        <a:t>Space for 3 trials + mean</a:t>
+                        <a:t>8.1</a:t>
                       </a:r>
                       <a:endParaRPr lang="en-US" sz="1200" dirty="0">
-                        <a:latin typeface="Calibri" charset="0"/>
-                        <a:ea typeface="Calibri" charset="0"/>
-                        <a:cs typeface="Calibri" charset="0"/>
+                        <a:latin typeface="Arial" charset="0"/>
+                        <a:ea typeface="Arial" charset="0"/>
+                        <a:cs typeface="Arial" charset="0"/>
                       </a:endParaRPr>
                     </a:p>
                   </a:txBody>
-                  <a:tcPr marL="91440" marR="91440" marT="45720" marB="45720">
+                  <a:tcPr marL="101600" marR="101600" marT="50800" marB="50800" anchor="ctr">
                     <a:lnL w="6350" cap="flat" cmpd="sng" algn="ctr">
                       <a:solidFill>
                         <a:srgbClr val="E5E2DC"/>
@@ -4728,20 +4709,20 @@
                           <a:solidFill>
                             <a:srgbClr val="3D3A36"/>
                           </a:solidFill>
-                          <a:latin typeface="Calibri" pitchFamily="34" charset="0"/>
-                          <a:ea typeface="Calibri" pitchFamily="34" charset="-122"/>
-                          <a:cs typeface="Calibri" pitchFamily="34" charset="-120"/>
+                          <a:latin typeface="Arial" pitchFamily="34" charset="0"/>
+                          <a:ea typeface="Arial" pitchFamily="34" charset="-122"/>
+                          <a:cs typeface="Arial" pitchFamily="34" charset="-120"/>
                         </a:rPr>
-                        <a:t>Only 1 trial</a:t>
+                        <a:t>7.5</a:t>
                       </a:r>
                       <a:endParaRPr lang="en-US" sz="1200" dirty="0">
-                        <a:latin typeface="Calibri" charset="0"/>
-                        <a:ea typeface="Calibri" charset="0"/>
-                        <a:cs typeface="Calibri" charset="0"/>
+                        <a:latin typeface="Arial" charset="0"/>
+                        <a:ea typeface="Arial" charset="0"/>
+                        <a:cs typeface="Arial" charset="0"/>
                       </a:endParaRPr>
                     </a:p>
                   </a:txBody>
-                  <a:tcPr marL="91440" marR="91440" marT="45720" marB="45720">
+                  <a:tcPr marL="101600" marR="101600" marT="50800" marB="50800" anchor="ctr">
                     <a:lnL w="6350" cap="flat" cmpd="sng" algn="ctr">
                       <a:solidFill>
                         <a:srgbClr val="E5E2DC"/>
@@ -4783,8 +4764,6 @@
                     </a:solidFill>
                   </a:tcPr>
                 </a:tc>
-              </a:tr>
-              <a:tr h="502920">
                 <a:tc>
                   <a:txBody>
                     <a:bodyPr/>
@@ -4798,20 +4777,158 @@
                           <a:solidFill>
                             <a:srgbClr val="3D3A36"/>
                           </a:solidFill>
-                          <a:latin typeface="Calibri" pitchFamily="34" charset="0"/>
-                          <a:ea typeface="Calibri" pitchFamily="34" charset="-122"/>
-                          <a:cs typeface="Calibri" pitchFamily="34" charset="-120"/>
+                          <a:latin typeface="Arial" pitchFamily="34" charset="0"/>
+                          <a:ea typeface="Arial" pitchFamily="34" charset="-122"/>
+                          <a:cs typeface="Arial" pitchFamily="34" charset="-120"/>
                         </a:rPr>
-                        <a:t>Organisation</a:t>
+                        <a:t>8.3</a:t>
                       </a:r>
                       <a:endParaRPr lang="en-US" sz="1200" dirty="0">
-                        <a:latin typeface="Calibri" charset="0"/>
-                        <a:ea typeface="Calibri" charset="0"/>
-                        <a:cs typeface="Calibri" charset="0"/>
+                        <a:latin typeface="Arial" charset="0"/>
+                        <a:ea typeface="Arial" charset="0"/>
+                        <a:cs typeface="Arial" charset="0"/>
                       </a:endParaRPr>
                     </a:p>
                   </a:txBody>
-                  <a:tcPr marL="91440" marR="91440" marT="45720" marB="45720">
+                  <a:tcPr marL="101600" marR="101600" marT="50800" marB="50800" anchor="ctr">
+                    <a:lnL w="6350" cap="flat" cmpd="sng" algn="ctr">
+                      <a:solidFill>
+                        <a:srgbClr val="E5E2DC"/>
+                      </a:solidFill>
+                      <a:prstDash val="solid"/>
+                      <a:round/>
+                      <a:headEnd type="none" w="med" len="med"/>
+                      <a:tailEnd type="none" w="med" len="med"/>
+                    </a:lnL>
+                    <a:lnR w="6350" cap="flat" cmpd="sng" algn="ctr">
+                      <a:solidFill>
+                        <a:srgbClr val="E5E2DC"/>
+                      </a:solidFill>
+                      <a:prstDash val="solid"/>
+                      <a:round/>
+                      <a:headEnd type="none" w="med" len="med"/>
+                      <a:tailEnd type="none" w="med" len="med"/>
+                    </a:lnR>
+                    <a:lnT w="6350" cap="flat" cmpd="sng" algn="ctr">
+                      <a:solidFill>
+                        <a:srgbClr val="E5E2DC"/>
+                      </a:solidFill>
+                      <a:prstDash val="solid"/>
+                      <a:round/>
+                      <a:headEnd type="none" w="med" len="med"/>
+                      <a:tailEnd type="none" w="med" len="med"/>
+                    </a:lnT>
+                    <a:lnB w="6350" cap="flat" cmpd="sng" algn="ctr">
+                      <a:solidFill>
+                        <a:srgbClr val="E5E2DC"/>
+                      </a:solidFill>
+                      <a:prstDash val="solid"/>
+                      <a:round/>
+                      <a:headEnd type="none" w="med" len="med"/>
+                      <a:tailEnd type="none" w="med" len="med"/>
+                    </a:lnB>
+                    <a:solidFill>
+                      <a:srgbClr val="FFFFFF"/>
+                    </a:solidFill>
+                  </a:tcPr>
+                </a:tc>
+                <a:tc>
+                  <a:txBody>
+                    <a:bodyPr/>
+                    <a:lstStyle/>
+                    <a:p>
+                      <a:pPr indent="0" marL="0">
+                        <a:buNone/>
+                      </a:pPr>
+                      <a:r>
+                        <a:rPr lang="en-US" sz="1200" dirty="0">
+                          <a:solidFill>
+                            <a:srgbClr val="3D3A36"/>
+                          </a:solidFill>
+                          <a:latin typeface="Arial" pitchFamily="34" charset="0"/>
+                          <a:ea typeface="Arial" pitchFamily="34" charset="-122"/>
+                          <a:cs typeface="Arial" pitchFamily="34" charset="-120"/>
+                        </a:rPr>
+                        <a:t>8.0</a:t>
+                      </a:r>
+                      <a:endParaRPr lang="en-US" sz="1200" dirty="0">
+                        <a:latin typeface="Arial" charset="0"/>
+                        <a:ea typeface="Arial" charset="0"/>
+                        <a:cs typeface="Arial" charset="0"/>
+                      </a:endParaRPr>
+                    </a:p>
+                  </a:txBody>
+                  <a:tcPr marL="101600" marR="101600" marT="50800" marB="50800" anchor="ctr">
+                    <a:lnL w="6350" cap="flat" cmpd="sng" algn="ctr">
+                      <a:solidFill>
+                        <a:srgbClr val="E5E2DC"/>
+                      </a:solidFill>
+                      <a:prstDash val="solid"/>
+                      <a:round/>
+                      <a:headEnd type="none" w="med" len="med"/>
+                      <a:tailEnd type="none" w="med" len="med"/>
+                    </a:lnL>
+                    <a:lnR w="6350" cap="flat" cmpd="sng" algn="ctr">
+                      <a:solidFill>
+                        <a:srgbClr val="E5E2DC"/>
+                      </a:solidFill>
+                      <a:prstDash val="solid"/>
+                      <a:round/>
+                      <a:headEnd type="none" w="med" len="med"/>
+                      <a:tailEnd type="none" w="med" len="med"/>
+                    </a:lnR>
+                    <a:lnT w="6350" cap="flat" cmpd="sng" algn="ctr">
+                      <a:solidFill>
+                        <a:srgbClr val="E5E2DC"/>
+                      </a:solidFill>
+                      <a:prstDash val="solid"/>
+                      <a:round/>
+                      <a:headEnd type="none" w="med" len="med"/>
+                      <a:tailEnd type="none" w="med" len="med"/>
+                    </a:lnT>
+                    <a:lnB w="6350" cap="flat" cmpd="sng" algn="ctr">
+                      <a:solidFill>
+                        <a:srgbClr val="E5E2DC"/>
+                      </a:solidFill>
+                      <a:prstDash val="solid"/>
+                      <a:round/>
+                      <a:headEnd type="none" w="med" len="med"/>
+                      <a:tailEnd type="none" w="med" len="med"/>
+                    </a:lnB>
+                    <a:solidFill>
+                      <a:srgbClr val="FFFFFF"/>
+                    </a:solidFill>
+                  </a:tcPr>
+                </a:tc>
+              </a:tr>
+              <a:tr h="365760">
+                <a:tc>
+                  <a:txBody>
+                    <a:bodyPr/>
+                    <a:lstStyle/>
+                    <a:p>
+                      <a:pPr indent="0" marL="0">
+                        <a:buNone/>
+                      </a:pPr>
+                      <a:r>
+                        <a:rPr lang="en-US" sz="1200" dirty="0">
+                          <a:solidFill>
+                            <a:srgbClr val="3D3A36"/>
+                          </a:solidFill>
+                          <a:latin typeface="Arial" pitchFamily="34" charset="0"/>
+                          <a:ea typeface="Arial" pitchFamily="34" charset="-122"/>
+                          <a:cs typeface="Arial" pitchFamily="34" charset="-120"/>
+                        </a:rPr>
+                        <a:t>4</a:t>
+                      </a:r>
+                      <a:endParaRPr lang="en-US" sz="1200" dirty="0">
+                        <a:latin typeface="Arial" charset="0"/>
+                        <a:ea typeface="Arial" charset="0"/>
+                        <a:cs typeface="Arial" charset="0"/>
+                      </a:endParaRPr>
+                    </a:p>
+                  </a:txBody>
+                  <a:tcPr marL="101600" marR="101600" marT="50800" marB="50800" anchor="ctr">
                     <a:lnL w="6350" cap="flat" cmpd="sng" algn="ctr">
                       <a:solidFill>
                         <a:srgbClr val="E5E2DC"/>
@@ -4866,20 +4983,20 @@
                           <a:solidFill>
                             <a:srgbClr val="3D3A36"/>
                           </a:solidFill>
-                          <a:latin typeface="Calibri" pitchFamily="34" charset="0"/>
-                          <a:ea typeface="Calibri" pitchFamily="34" charset="-122"/>
-                          <a:cs typeface="Calibri" pitchFamily="34" charset="-120"/>
+                          <a:latin typeface="Arial" pitchFamily="34" charset="0"/>
+                          <a:ea typeface="Arial" pitchFamily="34" charset="-122"/>
+                          <a:cs typeface="Arial" pitchFamily="34" charset="-120"/>
                         </a:rPr>
-                        <a:t>IV in left column, DV in right</a:t>
+                        <a:t>10.7</a:t>
                       </a:r>
                       <a:endParaRPr lang="en-US" sz="1200" dirty="0">
-                        <a:latin typeface="Calibri" charset="0"/>
-                        <a:ea typeface="Calibri" charset="0"/>
-                        <a:cs typeface="Calibri" charset="0"/>
+                        <a:latin typeface="Arial" charset="0"/>
+                        <a:ea typeface="Arial" charset="0"/>
+                        <a:cs typeface="Arial" charset="0"/>
                       </a:endParaRPr>
                     </a:p>
                   </a:txBody>
-                  <a:tcPr marL="91440" marR="91440" marT="45720" marB="45720">
+                  <a:tcPr marL="101600" marR="101600" marT="50800" marB="50800" anchor="ctr">
                     <a:lnL w="6350" cap="flat" cmpd="sng" algn="ctr">
                       <a:solidFill>
                         <a:srgbClr val="E5E2DC"/>
@@ -4934,20 +5051,156 @@
                           <a:solidFill>
                             <a:srgbClr val="3D3A36"/>
                           </a:solidFill>
-                          <a:latin typeface="Calibri" pitchFamily="34" charset="0"/>
-                          <a:ea typeface="Calibri" pitchFamily="34" charset="-122"/>
-                          <a:cs typeface="Calibri" pitchFamily="34" charset="-120"/>
+                          <a:latin typeface="Arial" pitchFamily="34" charset="0"/>
+                          <a:ea typeface="Arial" pitchFamily="34" charset="-122"/>
+                          <a:cs typeface="Arial" pitchFamily="34" charset="-120"/>
                         </a:rPr>
-                        <a:t>Random order</a:t>
+                        <a:t>10.2</a:t>
                       </a:r>
                       <a:endParaRPr lang="en-US" sz="1200" dirty="0">
-                        <a:latin typeface="Calibri" charset="0"/>
-                        <a:ea typeface="Calibri" charset="0"/>
-                        <a:cs typeface="Calibri" charset="0"/>
+                        <a:latin typeface="Arial" charset="0"/>
+                        <a:ea typeface="Arial" charset="0"/>
+                        <a:cs typeface="Arial" charset="0"/>
                       </a:endParaRPr>
                     </a:p>
                   </a:txBody>
-                  <a:tcPr marL="91440" marR="91440" marT="45720" marB="45720">
+                  <a:tcPr marL="101600" marR="101600" marT="50800" marB="50800" anchor="ctr">
+                    <a:lnL w="6350" cap="flat" cmpd="sng" algn="ctr">
+                      <a:solidFill>
+                        <a:srgbClr val="E5E2DC"/>
+                      </a:solidFill>
+                      <a:prstDash val="solid"/>
+                      <a:round/>
+                      <a:headEnd type="none" w="med" len="med"/>
+                      <a:tailEnd type="none" w="med" len="med"/>
+                    </a:lnL>
+                    <a:lnR w="6350" cap="flat" cmpd="sng" algn="ctr">
+                      <a:solidFill>
+                        <a:srgbClr val="E5E2DC"/>
+                      </a:solidFill>
+                      <a:prstDash val="solid"/>
+                      <a:round/>
+                      <a:headEnd type="none" w="med" len="med"/>
+                      <a:tailEnd type="none" w="med" len="med"/>
+                    </a:lnR>
+                    <a:lnT w="6350" cap="flat" cmpd="sng" algn="ctr">
+                      <a:solidFill>
+                        <a:srgbClr val="E5E2DC"/>
+                      </a:solidFill>
+                      <a:prstDash val="solid"/>
+                      <a:round/>
+                      <a:headEnd type="none" w="med" len="med"/>
+                      <a:tailEnd type="none" w="med" len="med"/>
+                    </a:lnT>
+                    <a:lnB w="6350" cap="flat" cmpd="sng" algn="ctr">
+                      <a:solidFill>
+                        <a:srgbClr val="E5E2DC"/>
+                      </a:solidFill>
+                      <a:prstDash val="solid"/>
+                      <a:round/>
+                      <a:headEnd type="none" w="med" len="med"/>
+                      <a:tailEnd type="none" w="med" len="med"/>
+                    </a:lnB>
+                    <a:solidFill>
+                      <a:srgbClr val="F8F6F3"/>
+                    </a:solidFill>
+                  </a:tcPr>
+                </a:tc>
+                <a:tc>
+                  <a:txBody>
+                    <a:bodyPr/>
+                    <a:lstStyle/>
+                    <a:p>
+                      <a:pPr indent="0" marL="0">
+                        <a:buNone/>
+                      </a:pPr>
+                      <a:r>
+                        <a:rPr lang="en-US" sz="1200" dirty="0">
+                          <a:solidFill>
+                            <a:srgbClr val="3D3A36"/>
+                          </a:solidFill>
+                          <a:latin typeface="Arial" pitchFamily="34" charset="0"/>
+                          <a:ea typeface="Arial" pitchFamily="34" charset="-122"/>
+                          <a:cs typeface="Arial" pitchFamily="34" charset="-120"/>
+                        </a:rPr>
+                        <a:t>11.0</a:t>
+                      </a:r>
+                      <a:endParaRPr lang="en-US" sz="1200" dirty="0">
+                        <a:latin typeface="Arial" charset="0"/>
+                        <a:ea typeface="Arial" charset="0"/>
+                        <a:cs typeface="Arial" charset="0"/>
+                      </a:endParaRPr>
+                    </a:p>
+                  </a:txBody>
+                  <a:tcPr marL="101600" marR="101600" marT="50800" marB="50800" anchor="ctr">
+                    <a:lnL w="6350" cap="flat" cmpd="sng" algn="ctr">
+                      <a:solidFill>
+                        <a:srgbClr val="E5E2DC"/>
+                      </a:solidFill>
+                      <a:prstDash val="solid"/>
+                      <a:round/>
+                      <a:headEnd type="none" w="med" len="med"/>
+                      <a:tailEnd type="none" w="med" len="med"/>
+                    </a:lnL>
+                    <a:lnR w="6350" cap="flat" cmpd="sng" algn="ctr">
+                      <a:solidFill>
+                        <a:srgbClr val="E5E2DC"/>
+                      </a:solidFill>
+                      <a:prstDash val="solid"/>
+                      <a:round/>
+                      <a:headEnd type="none" w="med" len="med"/>
+                      <a:tailEnd type="none" w="med" len="med"/>
+                    </a:lnR>
+                    <a:lnT w="6350" cap="flat" cmpd="sng" algn="ctr">
+                      <a:solidFill>
+                        <a:srgbClr val="E5E2DC"/>
+                      </a:solidFill>
+                      <a:prstDash val="solid"/>
+                      <a:round/>
+                      <a:headEnd type="none" w="med" len="med"/>
+                      <a:tailEnd type="none" w="med" len="med"/>
+                    </a:lnT>
+                    <a:lnB w="6350" cap="flat" cmpd="sng" algn="ctr">
+                      <a:solidFill>
+                        <a:srgbClr val="E5E2DC"/>
+                      </a:solidFill>
+                      <a:prstDash val="solid"/>
+                      <a:round/>
+                      <a:headEnd type="none" w="med" len="med"/>
+                      <a:tailEnd type="none" w="med" len="med"/>
+                    </a:lnB>
+                    <a:solidFill>
+                      <a:srgbClr val="F8F6F3"/>
+                    </a:solidFill>
+                  </a:tcPr>
+                </a:tc>
+                <a:tc>
+                  <a:txBody>
+                    <a:bodyPr/>
+                    <a:lstStyle/>
+                    <a:p>
+                      <a:pPr indent="0" marL="0">
+                        <a:buNone/>
+                      </a:pPr>
+                      <a:r>
+                        <a:rPr lang="en-US" sz="1200" dirty="0">
+                          <a:solidFill>
+                            <a:srgbClr val="3D3A36"/>
+                          </a:solidFill>
+                          <a:latin typeface="Arial" pitchFamily="34" charset="0"/>
+                          <a:ea typeface="Arial" pitchFamily="34" charset="-122"/>
+                          <a:cs typeface="Arial" pitchFamily="34" charset="-120"/>
+                        </a:rPr>
+                        <a:t>10.6</a:t>
+                      </a:r>
+                      <a:endParaRPr lang="en-US" sz="1200" dirty="0">
+                        <a:latin typeface="Arial" charset="0"/>
+                        <a:ea typeface="Arial" charset="0"/>
+                        <a:cs typeface="Arial" charset="0"/>
+                      </a:endParaRPr>
+                    </a:p>
+                  </a:txBody>
+                  <a:tcPr marL="101600" marR="101600" marT="50800" marB="50800" anchor="ctr">
                     <a:lnL w="6350" cap="flat" cmpd="sng" algn="ctr">
                       <a:solidFill>
                         <a:srgbClr val="E5E2DC"/>
@@ -5035,47 +5288,7 @@
         <p:spPr>
           <a:xfrm>
             <a:off x="0" y="0"/>
-            <a:ext cx="9144000" cy="822960"/>
-          </a:xfrm>
-          <a:prstGeom prst="rect">
-            <a:avLst/>
-          </a:prstGeom>
-          <a:solidFill>
-            <a:srgbClr val="FFFFFF"/>
-          </a:solidFill>
-          <a:ln/>
-        </p:spPr>
-      </p:sp>
-      <p:sp>
-        <p:nvSpPr>
-          <p:cNvPr id="3" name="Shape 1"/>
-          <p:cNvSpPr/>
-          <p:nvPr/>
-        </p:nvSpPr>
-        <p:spPr>
-          <a:xfrm>
-            <a:off x="0" y="804672"/>
-            <a:ext cx="9144000" cy="27432"/>
-          </a:xfrm>
-          <a:prstGeom prst="rect">
-            <a:avLst/>
-          </a:prstGeom>
-          <a:solidFill>
-            <a:srgbClr val="E5E2DC"/>
-          </a:solidFill>
-          <a:ln/>
-        </p:spPr>
-      </p:sp>
-      <p:sp>
-        <p:nvSpPr>
-          <p:cNvPr id="4" name="Shape 2"/>
-          <p:cNvSpPr/>
-          <p:nvPr/>
-        </p:nvSpPr>
-        <p:spPr>
-          <a:xfrm>
-            <a:off x="548640" y="201168"/>
-            <a:ext cx="54864" cy="420624"/>
+            <a:ext cx="73152" cy="5148072"/>
           </a:xfrm>
           <a:prstGeom prst="rect">
             <a:avLst/>
@@ -5088,14 +5301,14 @@
       </p:sp>
       <p:sp>
         <p:nvSpPr>
-          <p:cNvPr id="5" name="Text 3"/>
+          <p:cNvPr id="3" name="Text 1"/>
           <p:cNvSpPr/>
           <p:nvPr/>
         </p:nvSpPr>
         <p:spPr>
           <a:xfrm>
-            <a:off x="777240" y="137160"/>
-            <a:ext cx="7772400" cy="548640"/>
+            <a:off x="548640" y="274320"/>
+            <a:ext cx="9144000" cy="640080"/>
           </a:xfrm>
           <a:prstGeom prst="rect">
             <a:avLst/>
@@ -5104,14 +5317,14 @@
           <a:ln/>
         </p:spPr>
         <p:txBody>
-          <a:bodyPr wrap="square" lIns="0" tIns="0" rIns="0" bIns="0" rtlCol="0" anchor="ctr"/>
+          <a:bodyPr wrap="square" rtlCol="0" anchor="ctr"/>
           <a:lstStyle/>
           <a:p>
             <a:pPr indent="0" marL="0">
               <a:buNone/>
             </a:pPr>
             <a:r>
-              <a:rPr lang="en-US" sz="2000" b="1" dirty="0">
+              <a:rPr lang="en-US" sz="2400" b="1" dirty="0">
                 <a:solidFill>
                   <a:srgbClr val="1B2A4A"/>
                 </a:solidFill>
@@ -5121,29 +5334,110 @@
               </a:rPr>
               <a:t>Check Your Understanding</a:t>
             </a:r>
-            <a:endParaRPr lang="en-US" sz="2000" dirty="0"/>
+            <a:endParaRPr lang="en-US" sz="2400" dirty="0"/>
           </a:p>
         </p:txBody>
       </p:sp>
       <p:sp>
         <p:nvSpPr>
-          <p:cNvPr id="6" name="Shape 4"/>
+          <p:cNvPr id="4" name="Shape 2"/>
           <p:cNvSpPr/>
           <p:nvPr/>
         </p:nvSpPr>
         <p:spPr>
           <a:xfrm>
-            <a:off x="731520" y="1051560"/>
-            <a:ext cx="7680960" cy="438912"/>
+            <a:off x="548640" y="960120"/>
+            <a:ext cx="2286000" cy="36576"/>
           </a:xfrm>
           <a:prstGeom prst="rect">
             <a:avLst/>
           </a:prstGeom>
           <a:solidFill>
-            <a:srgbClr val="FFFFFF"/>
+            <a:srgbClr val="2A9D8F"/>
           </a:solidFill>
           <a:ln/>
         </p:spPr>
+      </p:sp>
+      <p:sp>
+        <p:nvSpPr>
+          <p:cNvPr id="5" name="Text 3"/>
+          <p:cNvSpPr/>
+          <p:nvPr/>
+        </p:nvSpPr>
+        <p:spPr>
+          <a:xfrm>
+            <a:off x="548640" y="1188720"/>
+            <a:ext cx="365760" cy="457200"/>
+          </a:xfrm>
+          <a:prstGeom prst="rect">
+            <a:avLst/>
+          </a:prstGeom>
+          <a:noFill/>
+          <a:ln/>
+        </p:spPr>
+        <p:txBody>
+          <a:bodyPr wrap="square" rtlCol="0" anchor="ctr"/>
+          <a:lstStyle/>
+          <a:p>
+            <a:pPr indent="0" marL="0">
+              <a:buNone/>
+            </a:pPr>
+            <a:r>
+              <a:rPr lang="en-US" sz="1600" dirty="0">
+                <a:solidFill>
+                  <a:srgbClr val="2A9D8F"/>
+                </a:solidFill>
+                <a:latin typeface="Arial" pitchFamily="34" charset="0"/>
+                <a:ea typeface="Arial" pitchFamily="34" charset="-122"/>
+                <a:cs typeface="Arial" pitchFamily="34" charset="-120"/>
+              </a:rPr>
+              <a:t>☐</a:t>
+            </a:r>
+            <a:endParaRPr lang="en-US" sz="1600" dirty="0"/>
+          </a:p>
+        </p:txBody>
+      </p:sp>
+      <p:sp>
+        <p:nvSpPr>
+          <p:cNvPr id="6" name="Text 4"/>
+          <p:cNvSpPr/>
+          <p:nvPr/>
+        </p:nvSpPr>
+        <p:spPr>
+          <a:xfrm>
+            <a:off x="1005840" y="1188720"/>
+            <a:ext cx="9601200" cy="457200"/>
+          </a:xfrm>
+          <a:prstGeom prst="rect">
+            <a:avLst/>
+          </a:prstGeom>
+          <a:noFill/>
+          <a:ln/>
+        </p:spPr>
+        <p:txBody>
+          <a:bodyPr wrap="square" rtlCol="0" anchor="ctr"/>
+          <a:lstStyle/>
+          <a:p>
+            <a:pPr indent="0" marL="0">
+              <a:lnSpc>
+                <a:spcPct val="130000"/>
+              </a:lnSpc>
+              <a:buNone/>
+            </a:pPr>
+            <a:r>
+              <a:rPr lang="en-US" sz="1400" dirty="0">
+                <a:solidFill>
+                  <a:srgbClr val="3D3A36"/>
+                </a:solidFill>
+                <a:latin typeface="Arial" pitchFamily="34" charset="0"/>
+                <a:ea typeface="Arial" pitchFamily="34" charset="-122"/>
+                <a:cs typeface="Arial" pitchFamily="34" charset="-120"/>
+              </a:rPr>
+              <a:t>I can choose the right type of graph for my data.</a:t>
+            </a:r>
+            <a:endParaRPr lang="en-US" sz="1400" dirty="0"/>
+          </a:p>
+        </p:txBody>
       </p:sp>
       <p:sp>
         <p:nvSpPr>
@@ -5153,8 +5447,8 @@
         </p:nvSpPr>
         <p:spPr>
           <a:xfrm>
-            <a:off x="868680" y="1051560"/>
-            <a:ext cx="320040" cy="438912"/>
+            <a:off x="548640" y="1783080"/>
+            <a:ext cx="365760" cy="457200"/>
           </a:xfrm>
           <a:prstGeom prst="rect">
             <a:avLst/>
@@ -5170,14 +5464,17 @@
               <a:buNone/>
             </a:pPr>
             <a:r>
-              <a:rPr lang="en-US" sz="1400" dirty="0">
+              <a:rPr lang="en-US" sz="1600" dirty="0">
                 <a:solidFill>
                   <a:srgbClr val="2A9D8F"/>
                 </a:solidFill>
+                <a:latin typeface="Arial" pitchFamily="34" charset="0"/>
+                <a:ea typeface="Arial" pitchFamily="34" charset="-122"/>
+                <a:cs typeface="Arial" pitchFamily="34" charset="-120"/>
               </a:rPr>
               <a:t>☐</a:t>
             </a:r>
-            <a:endParaRPr lang="en-US" sz="1400" dirty="0"/>
+            <a:endParaRPr lang="en-US" sz="1600" dirty="0"/>
           </a:p>
         </p:txBody>
       </p:sp>
@@ -5189,8 +5486,8 @@
         </p:nvSpPr>
         <p:spPr>
           <a:xfrm>
-            <a:off x="1234440" y="1051560"/>
-            <a:ext cx="6949440" cy="438912"/>
+            <a:off x="1005840" y="1783080"/>
+            <a:ext cx="9601200" cy="457200"/>
           </a:xfrm>
           <a:prstGeom prst="rect">
             <a:avLst/>
@@ -5203,42 +5500,64 @@
           <a:lstStyle/>
           <a:p>
             <a:pPr indent="0" marL="0">
+              <a:lnSpc>
+                <a:spcPct val="130000"/>
+              </a:lnSpc>
               <a:buNone/>
             </a:pPr>
             <a:r>
-              <a:rPr lang="en-US" sz="1300" dirty="0">
+              <a:rPr lang="en-US" sz="1400" dirty="0">
                 <a:solidFill>
                   <a:srgbClr val="3D3A36"/>
                 </a:solidFill>
-                <a:latin typeface="Calibri" pitchFamily="34" charset="0"/>
-                <a:ea typeface="Calibri" pitchFamily="34" charset="-122"/>
-                <a:cs typeface="Calibri" pitchFamily="34" charset="-120"/>
+                <a:latin typeface="Arial" pitchFamily="34" charset="0"/>
+                <a:ea typeface="Arial" pitchFamily="34" charset="-122"/>
+                <a:cs typeface="Arial" pitchFamily="34" charset="-120"/>
               </a:rPr>
-              <a:t>I can choose the right graph type for my data</a:t>
-            </a:r>
-            <a:endParaRPr lang="en-US" sz="1300" dirty="0"/>
+              <a:t>I can draw a graph with correct SALT rules.</a:t>
+            </a:r>
+            <a:endParaRPr lang="en-US" sz="1400" dirty="0"/>
           </a:p>
         </p:txBody>
       </p:sp>
       <p:sp>
         <p:nvSpPr>
-          <p:cNvPr id="9" name="Shape 7"/>
+          <p:cNvPr id="9" name="Text 7"/>
           <p:cNvSpPr/>
           <p:nvPr/>
         </p:nvSpPr>
         <p:spPr>
           <a:xfrm>
-            <a:off x="731520" y="1554480"/>
-            <a:ext cx="7680960" cy="438912"/>
+            <a:off x="548640" y="2377440"/>
+            <a:ext cx="365760" cy="457200"/>
           </a:xfrm>
           <a:prstGeom prst="rect">
             <a:avLst/>
           </a:prstGeom>
-          <a:solidFill>
-            <a:srgbClr val="F8F6F3"/>
-          </a:solidFill>
+          <a:noFill/>
           <a:ln/>
         </p:spPr>
+        <p:txBody>
+          <a:bodyPr wrap="square" rtlCol="0" anchor="ctr"/>
+          <a:lstStyle/>
+          <a:p>
+            <a:pPr indent="0" marL="0">
+              <a:buNone/>
+            </a:pPr>
+            <a:r>
+              <a:rPr lang="en-US" sz="1600" dirty="0">
+                <a:solidFill>
+                  <a:srgbClr val="2A9D8F"/>
+                </a:solidFill>
+                <a:latin typeface="Arial" pitchFamily="34" charset="0"/>
+                <a:ea typeface="Arial" pitchFamily="34" charset="-122"/>
+                <a:cs typeface="Arial" pitchFamily="34" charset="-120"/>
+              </a:rPr>
+              <a:t>☐</a:t>
+            </a:r>
+            <a:endParaRPr lang="en-US" sz="1600" dirty="0"/>
+          </a:p>
+        </p:txBody>
       </p:sp>
       <p:sp>
         <p:nvSpPr>
@@ -5248,8 +5567,8 @@
         </p:nvSpPr>
         <p:spPr>
           <a:xfrm>
-            <a:off x="868680" y="1554480"/>
-            <a:ext cx="320040" cy="438912"/>
+            <a:off x="1005840" y="2377440"/>
+            <a:ext cx="9601200" cy="457200"/>
           </a:xfrm>
           <a:prstGeom prst="rect">
             <a:avLst/>
@@ -5262,30 +5581,75 @@
           <a:lstStyle/>
           <a:p>
             <a:pPr indent="0" marL="0">
+              <a:lnSpc>
+                <a:spcPct val="130000"/>
+              </a:lnSpc>
               <a:buNone/>
             </a:pPr>
             <a:r>
               <a:rPr lang="en-US" sz="1400" dirty="0">
+                <a:solidFill>
+                  <a:srgbClr val="3D3A36"/>
+                </a:solidFill>
+                <a:latin typeface="Arial" pitchFamily="34" charset="0"/>
+                <a:ea typeface="Arial" pitchFamily="34" charset="-122"/>
+                <a:cs typeface="Arial" pitchFamily="34" charset="-120"/>
+              </a:rPr>
+              <a:t>I can describe a trend using numbers from the graph.</a:t>
+            </a:r>
+            <a:endParaRPr lang="en-US" sz="1400" dirty="0"/>
+          </a:p>
+        </p:txBody>
+      </p:sp>
+      <p:sp>
+        <p:nvSpPr>
+          <p:cNvPr id="11" name="Text 9"/>
+          <p:cNvSpPr/>
+          <p:nvPr/>
+        </p:nvSpPr>
+        <p:spPr>
+          <a:xfrm>
+            <a:off x="548640" y="2971800"/>
+            <a:ext cx="365760" cy="457200"/>
+          </a:xfrm>
+          <a:prstGeom prst="rect">
+            <a:avLst/>
+          </a:prstGeom>
+          <a:noFill/>
+          <a:ln/>
+        </p:spPr>
+        <p:txBody>
+          <a:bodyPr wrap="square" rtlCol="0" anchor="ctr"/>
+          <a:lstStyle/>
+          <a:p>
+            <a:pPr indent="0" marL="0">
+              <a:buNone/>
+            </a:pPr>
+            <a:r>
+              <a:rPr lang="en-US" sz="1600" dirty="0">
                 <a:solidFill>
                   <a:srgbClr val="2A9D8F"/>
                 </a:solidFill>
+                <a:latin typeface="Arial" pitchFamily="34" charset="0"/>
+                <a:ea typeface="Arial" pitchFamily="34" charset="-122"/>
+                <a:cs typeface="Arial" pitchFamily="34" charset="-120"/>
               </a:rPr>
               <a:t>☐</a:t>
             </a:r>
-            <a:endParaRPr lang="en-US" sz="1400" dirty="0"/>
+            <a:endParaRPr lang="en-US" sz="1600" dirty="0"/>
           </a:p>
         </p:txBody>
       </p:sp>
       <p:sp>
         <p:nvSpPr>
-          <p:cNvPr id="11" name="Text 9"/>
+          <p:cNvPr id="12" name="Text 10"/>
           <p:cNvSpPr/>
           <p:nvPr/>
         </p:nvSpPr>
         <p:spPr>
           <a:xfrm>
-            <a:off x="1234440" y="1554480"/>
-            <a:ext cx="6949440" cy="438912"/>
+            <a:off x="1005840" y="2971800"/>
+            <a:ext cx="9601200" cy="457200"/>
           </a:xfrm>
           <a:prstGeom prst="rect">
             <a:avLst/>
@@ -5298,42 +5662,25 @@
           <a:lstStyle/>
           <a:p>
             <a:pPr indent="0" marL="0">
+              <a:lnSpc>
+                <a:spcPct val="130000"/>
+              </a:lnSpc>
               <a:buNone/>
             </a:pPr>
             <a:r>
-              <a:rPr lang="en-US" sz="1300" dirty="0">
+              <a:rPr lang="en-US" sz="1400" dirty="0">
                 <a:solidFill>
                   <a:srgbClr val="3D3A36"/>
                 </a:solidFill>
-                <a:latin typeface="Calibri" pitchFamily="34" charset="0"/>
-                <a:ea typeface="Calibri" pitchFamily="34" charset="-122"/>
-                <a:cs typeface="Calibri" pitchFamily="34" charset="-120"/>
+                <a:latin typeface="Arial" pitchFamily="34" charset="0"/>
+                <a:ea typeface="Arial" pitchFamily="34" charset="-122"/>
+                <a:cs typeface="Arial" pitchFamily="34" charset="-120"/>
               </a:rPr>
-              <a:t>I can draw a graph with labelled axes and a title</a:t>
-            </a:r>
-            <a:endParaRPr lang="en-US" sz="1300" dirty="0"/>
+              <a:t>I can identify an outlier in a data set.</a:t>
+            </a:r>
+            <a:endParaRPr lang="en-US" sz="1400" dirty="0"/>
           </a:p>
         </p:txBody>
-      </p:sp>
-      <p:sp>
-        <p:nvSpPr>
-          <p:cNvPr id="12" name="Shape 10"/>
-          <p:cNvSpPr/>
-          <p:nvPr/>
-        </p:nvSpPr>
-        <p:spPr>
-          <a:xfrm>
-            <a:off x="731520" y="2057400"/>
-            <a:ext cx="7680960" cy="438912"/>
-          </a:xfrm>
-          <a:prstGeom prst="rect">
-            <a:avLst/>
-          </a:prstGeom>
-          <a:solidFill>
-            <a:srgbClr val="FFFFFF"/>
-          </a:solidFill>
-          <a:ln/>
-        </p:spPr>
       </p:sp>
       <p:sp>
         <p:nvSpPr>
@@ -5343,8 +5690,8 @@
         </p:nvSpPr>
         <p:spPr>
           <a:xfrm>
-            <a:off x="868680" y="2057400"/>
-            <a:ext cx="320040" cy="438912"/>
+            <a:off x="548640" y="3566160"/>
+            <a:ext cx="365760" cy="457200"/>
           </a:xfrm>
           <a:prstGeom prst="rect">
             <a:avLst/>
@@ -5360,14 +5707,17 @@
               <a:buNone/>
             </a:pPr>
             <a:r>
-              <a:rPr lang="en-US" sz="1400" dirty="0">
+              <a:rPr lang="en-US" sz="1600" dirty="0">
                 <a:solidFill>
                   <a:srgbClr val="2A9D8F"/>
                 </a:solidFill>
+                <a:latin typeface="Arial" pitchFamily="34" charset="0"/>
+                <a:ea typeface="Arial" pitchFamily="34" charset="-122"/>
+                <a:cs typeface="Arial" pitchFamily="34" charset="-120"/>
               </a:rPr>
               <a:t>☐</a:t>
             </a:r>
-            <a:endParaRPr lang="en-US" sz="1400" dirty="0"/>
+            <a:endParaRPr lang="en-US" sz="1600" dirty="0"/>
           </a:p>
         </p:txBody>
       </p:sp>
@@ -5379,8 +5729,8 @@
         </p:nvSpPr>
         <p:spPr>
           <a:xfrm>
-            <a:off x="1234440" y="2057400"/>
-            <a:ext cx="6949440" cy="438912"/>
+            <a:off x="1005840" y="3566160"/>
+            <a:ext cx="9601200" cy="457200"/>
           </a:xfrm>
           <a:prstGeom prst="rect">
             <a:avLst/>
@@ -5393,290 +5743,23 @@
           <a:lstStyle/>
           <a:p>
             <a:pPr indent="0" marL="0">
+              <a:lnSpc>
+                <a:spcPct val="130000"/>
+              </a:lnSpc>
               <a:buNone/>
             </a:pPr>
             <a:r>
-              <a:rPr lang="en-US" sz="1300" dirty="0">
+              <a:rPr lang="en-US" sz="1400" dirty="0">
                 <a:solidFill>
                   <a:srgbClr val="3D3A36"/>
                 </a:solidFill>
-                <a:latin typeface="Calibri" pitchFamily="34" charset="0"/>
-                <a:ea typeface="Calibri" pitchFamily="34" charset="-122"/>
-                <a:cs typeface="Calibri" pitchFamily="34" charset="-120"/>
+                <a:latin typeface="Arial" pitchFamily="34" charset="0"/>
+                <a:ea typeface="Arial" pitchFamily="34" charset="-122"/>
+                <a:cs typeface="Arial" pitchFamily="34" charset="-120"/>
               </a:rPr>
-              <a:t>I can describe the trend shown in a graph</a:t>
-            </a:r>
-            <a:endParaRPr lang="en-US" sz="1300" dirty="0"/>
-          </a:p>
-        </p:txBody>
-      </p:sp>
-      <p:sp>
-        <p:nvSpPr>
-          <p:cNvPr id="15" name="Shape 13"/>
-          <p:cNvSpPr/>
-          <p:nvPr/>
-        </p:nvSpPr>
-        <p:spPr>
-          <a:xfrm>
-            <a:off x="731520" y="2560320"/>
-            <a:ext cx="7680960" cy="438912"/>
-          </a:xfrm>
-          <a:prstGeom prst="rect">
-            <a:avLst/>
-          </a:prstGeom>
-          <a:solidFill>
-            <a:srgbClr val="F8F6F3"/>
-          </a:solidFill>
-          <a:ln/>
-        </p:spPr>
-      </p:sp>
-      <p:sp>
-        <p:nvSpPr>
-          <p:cNvPr id="16" name="Text 14"/>
-          <p:cNvSpPr/>
-          <p:nvPr/>
-        </p:nvSpPr>
-        <p:spPr>
-          <a:xfrm>
-            <a:off x="868680" y="2560320"/>
-            <a:ext cx="320040" cy="438912"/>
-          </a:xfrm>
-          <a:prstGeom prst="rect">
-            <a:avLst/>
-          </a:prstGeom>
-          <a:noFill/>
-          <a:ln/>
-        </p:spPr>
-        <p:txBody>
-          <a:bodyPr wrap="square" rtlCol="0" anchor="ctr"/>
-          <a:lstStyle/>
-          <a:p>
-            <a:pPr indent="0" marL="0">
-              <a:buNone/>
-            </a:pPr>
-            <a:r>
-              <a:rPr lang="en-US" sz="1400" dirty="0">
-                <a:solidFill>
-                  <a:srgbClr val="2A9D8F"/>
-                </a:solidFill>
-              </a:rPr>
-              <a:t>☐</a:t>
+              <a:t>I can calculate the mean from repeated measurements.</a:t>
             </a:r>
             <a:endParaRPr lang="en-US" sz="1400" dirty="0"/>
-          </a:p>
-        </p:txBody>
-      </p:sp>
-      <p:sp>
-        <p:nvSpPr>
-          <p:cNvPr id="17" name="Text 15"/>
-          <p:cNvSpPr/>
-          <p:nvPr/>
-        </p:nvSpPr>
-        <p:spPr>
-          <a:xfrm>
-            <a:off x="1234440" y="2560320"/>
-            <a:ext cx="6949440" cy="438912"/>
-          </a:xfrm>
-          <a:prstGeom prst="rect">
-            <a:avLst/>
-          </a:prstGeom>
-          <a:noFill/>
-          <a:ln/>
-        </p:spPr>
-        <p:txBody>
-          <a:bodyPr wrap="square" rtlCol="0" anchor="ctr"/>
-          <a:lstStyle/>
-          <a:p>
-            <a:pPr indent="0" marL="0">
-              <a:buNone/>
-            </a:pPr>
-            <a:r>
-              <a:rPr lang="en-US" sz="1300" dirty="0">
-                <a:solidFill>
-                  <a:srgbClr val="3D3A36"/>
-                </a:solidFill>
-                <a:latin typeface="Calibri" pitchFamily="34" charset="0"/>
-                <a:ea typeface="Calibri" pitchFamily="34" charset="-122"/>
-                <a:cs typeface="Calibri" pitchFamily="34" charset="-120"/>
-              </a:rPr>
-              <a:t>I can identify anomalies in data</a:t>
-            </a:r>
-            <a:endParaRPr lang="en-US" sz="1300" dirty="0"/>
-          </a:p>
-        </p:txBody>
-      </p:sp>
-      <p:sp>
-        <p:nvSpPr>
-          <p:cNvPr id="18" name="Shape 16"/>
-          <p:cNvSpPr/>
-          <p:nvPr/>
-        </p:nvSpPr>
-        <p:spPr>
-          <a:xfrm>
-            <a:off x="731520" y="3063240"/>
-            <a:ext cx="7680960" cy="438912"/>
-          </a:xfrm>
-          <a:prstGeom prst="rect">
-            <a:avLst/>
-          </a:prstGeom>
-          <a:solidFill>
-            <a:srgbClr val="FFFFFF"/>
-          </a:solidFill>
-          <a:ln/>
-        </p:spPr>
-      </p:sp>
-      <p:sp>
-        <p:nvSpPr>
-          <p:cNvPr id="19" name="Text 17"/>
-          <p:cNvSpPr/>
-          <p:nvPr/>
-        </p:nvSpPr>
-        <p:spPr>
-          <a:xfrm>
-            <a:off x="868680" y="3063240"/>
-            <a:ext cx="320040" cy="438912"/>
-          </a:xfrm>
-          <a:prstGeom prst="rect">
-            <a:avLst/>
-          </a:prstGeom>
-          <a:noFill/>
-          <a:ln/>
-        </p:spPr>
-        <p:txBody>
-          <a:bodyPr wrap="square" rtlCol="0" anchor="ctr"/>
-          <a:lstStyle/>
-          <a:p>
-            <a:pPr indent="0" marL="0">
-              <a:buNone/>
-            </a:pPr>
-            <a:r>
-              <a:rPr lang="en-US" sz="1400" dirty="0">
-                <a:solidFill>
-                  <a:srgbClr val="2A9D8F"/>
-                </a:solidFill>
-              </a:rPr>
-              <a:t>☐</a:t>
-            </a:r>
-            <a:endParaRPr lang="en-US" sz="1400" dirty="0"/>
-          </a:p>
-        </p:txBody>
-      </p:sp>
-      <p:sp>
-        <p:nvSpPr>
-          <p:cNvPr id="20" name="Text 18"/>
-          <p:cNvSpPr/>
-          <p:nvPr/>
-        </p:nvSpPr>
-        <p:spPr>
-          <a:xfrm>
-            <a:off x="1234440" y="3063240"/>
-            <a:ext cx="6949440" cy="438912"/>
-          </a:xfrm>
-          <a:prstGeom prst="rect">
-            <a:avLst/>
-          </a:prstGeom>
-          <a:noFill/>
-          <a:ln/>
-        </p:spPr>
-        <p:txBody>
-          <a:bodyPr wrap="square" rtlCol="0" anchor="ctr"/>
-          <a:lstStyle/>
-          <a:p>
-            <a:pPr indent="0" marL="0">
-              <a:buNone/>
-            </a:pPr>
-            <a:r>
-              <a:rPr lang="en-US" sz="1300" dirty="0">
-                <a:solidFill>
-                  <a:srgbClr val="3D3A36"/>
-                </a:solidFill>
-                <a:latin typeface="Calibri" pitchFamily="34" charset="0"/>
-                <a:ea typeface="Calibri" pitchFamily="34" charset="-122"/>
-                <a:cs typeface="Calibri" pitchFamily="34" charset="-120"/>
-              </a:rPr>
-              <a:t>I can organise data in a proper results table</a:t>
-            </a:r>
-            <a:endParaRPr lang="en-US" sz="1300" dirty="0"/>
-          </a:p>
-        </p:txBody>
-      </p:sp>
-      <p:sp>
-        <p:nvSpPr>
-          <p:cNvPr id="21" name="Shape 19"/>
-          <p:cNvSpPr/>
-          <p:nvPr/>
-        </p:nvSpPr>
-        <p:spPr>
-          <a:xfrm>
-            <a:off x="731520" y="3749040"/>
-            <a:ext cx="7680960" cy="594360"/>
-          </a:xfrm>
-          <a:prstGeom prst="rect">
-            <a:avLst/>
-          </a:prstGeom>
-          <a:solidFill>
-            <a:srgbClr val="E8F5F3"/>
-          </a:solidFill>
-          <a:ln/>
-          <a:effectLst>
-            <a:outerShdw sx="100000" sy="100000" kx="0" ky="0" algn="bl" rotWithShape="0" blurRad="50800" dist="25400" dir="8100000">
-              <a:srgbClr val="000000">
-                <a:alpha val="10000"/>
-              </a:srgbClr>
-            </a:outerShdw>
-          </a:effectLst>
-        </p:spPr>
-      </p:sp>
-      <p:sp>
-        <p:nvSpPr>
-          <p:cNvPr id="22" name="Text 20"/>
-          <p:cNvSpPr/>
-          <p:nvPr/>
-        </p:nvSpPr>
-        <p:spPr>
-          <a:xfrm>
-            <a:off x="914400" y="3749040"/>
-            <a:ext cx="7315200" cy="594360"/>
-          </a:xfrm>
-          <a:prstGeom prst="rect">
-            <a:avLst/>
-          </a:prstGeom>
-          <a:noFill/>
-          <a:ln/>
-        </p:spPr>
-        <p:txBody>
-          <a:bodyPr wrap="square" rtlCol="0" anchor="ctr"/>
-          <a:lstStyle/>
-          <a:p>
-            <a:pPr indent="0" marL="0">
-              <a:buNone/>
-            </a:pPr>
-            <a:r>
-              <a:rPr lang="en-US" sz="1200" b="1" dirty="0">
-                <a:solidFill>
-                  <a:srgbClr val="2A9D8F"/>
-                </a:solidFill>
-                <a:latin typeface="Calibri" pitchFamily="34" charset="0"/>
-                <a:ea typeface="Calibri" pitchFamily="34" charset="-122"/>
-                <a:cs typeface="Calibri" pitchFamily="34" charset="-120"/>
-              </a:rPr>
-              <a:t>Key Idea: </a:t>
-            </a:r>
-            <a:pPr indent="0" marL="0">
-              <a:buNone/>
-            </a:pPr>
-            <a:r>
-              <a:rPr lang="en-US" sz="1200" i="1" dirty="0">
-                <a:solidFill>
-                  <a:srgbClr val="3D3A36"/>
-                </a:solidFill>
-                <a:latin typeface="Calibri" pitchFamily="34" charset="0"/>
-                <a:ea typeface="Calibri" pitchFamily="34" charset="-122"/>
-                <a:cs typeface="Calibri" pitchFamily="34" charset="-120"/>
-              </a:rPr>
-              <a:t>Data without a graph is hard to understand — a graph tells the story.</a:t>
-            </a:r>
-            <a:endParaRPr lang="en-US" sz="1200" dirty="0"/>
           </a:p>
         </p:txBody>
       </p:sp>
@@ -5691,6 +5774,13 @@
 <file path=ppt/slides/slide8.xml><?xml version="1.0" encoding="utf-8"?>
 <p:sld xmlns:a="http://schemas.openxmlformats.org/drawingml/2006/main" xmlns:r="http://schemas.openxmlformats.org/officeDocument/2006/relationships" xmlns:p="http://schemas.openxmlformats.org/presentationml/2006/main">
   <p:cSld name="Slide 8">
+    <p:bg>
+      <p:bgPr>
+        <a:solidFill>
+          <a:srgbClr val="111D35"/>
+        </a:solidFill>
+      </p:bgPr>
+    </p:bg>
     <p:spTree>
       <p:nvGrpSpPr>
         <p:cNvPr id="1" name=""/>
@@ -5707,76 +5797,14 @@
       </p:grpSpPr>
       <p:sp>
         <p:nvSpPr>
-          <p:cNvPr id="2" name="Shape 0"/>
+          <p:cNvPr id="2" name="Text 0"/>
           <p:cNvSpPr/>
           <p:nvPr/>
         </p:nvSpPr>
         <p:spPr>
           <a:xfrm>
-            <a:off x="0" y="0"/>
-            <a:ext cx="9144000" cy="5143500"/>
-          </a:xfrm>
-          <a:prstGeom prst="rect">
-            <a:avLst/>
-          </a:prstGeom>
-          <a:solidFill>
-            <a:srgbClr val="1B2A4A"/>
-          </a:solidFill>
-          <a:ln/>
-        </p:spPr>
-      </p:sp>
-      <p:sp>
-        <p:nvSpPr>
-          <p:cNvPr id="3" name="Shape 1"/>
-          <p:cNvSpPr/>
-          <p:nvPr/>
-        </p:nvSpPr>
-        <p:spPr>
-          <a:xfrm>
-            <a:off x="0" y="4777740"/>
-            <a:ext cx="9144000" cy="365760"/>
-          </a:xfrm>
-          <a:prstGeom prst="rect">
-            <a:avLst/>
-          </a:prstGeom>
-          <a:solidFill>
-            <a:srgbClr val="2A9D8F"/>
-          </a:solidFill>
-          <a:ln/>
-        </p:spPr>
-      </p:sp>
-      <p:sp>
-        <p:nvSpPr>
-          <p:cNvPr id="4" name="Shape 2"/>
-          <p:cNvSpPr/>
-          <p:nvPr/>
-        </p:nvSpPr>
-        <p:spPr>
-          <a:xfrm>
-            <a:off x="-914400" y="-914400"/>
-            <a:ext cx="3657600" cy="3657600"/>
-          </a:xfrm>
-          <a:prstGeom prst="ellipse">
-            <a:avLst/>
-          </a:prstGeom>
-          <a:solidFill>
-            <a:srgbClr val="2A9D8F">
-              <a:alpha val="10000"/>
-            </a:srgbClr>
-          </a:solidFill>
-          <a:ln/>
-        </p:spPr>
-      </p:sp>
-      <p:sp>
-        <p:nvSpPr>
-          <p:cNvPr id="5" name="Text 3"/>
-          <p:cNvSpPr/>
-          <p:nvPr/>
-        </p:nvSpPr>
-        <p:spPr>
-          <a:xfrm>
-            <a:off x="731520" y="1463040"/>
-            <a:ext cx="7680960" cy="822960"/>
+            <a:off x="731520" y="1371600"/>
+            <a:ext cx="9144000" cy="914400"/>
           </a:xfrm>
           <a:prstGeom prst="rect">
             <a:avLst/>
@@ -5788,11 +5816,11 @@
           <a:bodyPr wrap="square" rtlCol="0" anchor="ctr"/>
           <a:lstStyle/>
           <a:p>
-            <a:pPr algn="ctr" indent="0" marL="0">
+            <a:pPr indent="0" marL="0">
               <a:buNone/>
             </a:pPr>
             <a:r>
-              <a:rPr lang="en-US" sz="3400" b="1" dirty="0">
+              <a:rPr lang="en-US" sz="3200" b="1" dirty="0">
                 <a:solidFill>
                   <a:srgbClr val="FFFFFF"/>
                 </a:solidFill>
@@ -5802,20 +5830,20 @@
               </a:rPr>
               <a:t>Review &amp; Practise</a:t>
             </a:r>
-            <a:endParaRPr lang="en-US" sz="3400" dirty="0"/>
+            <a:endParaRPr lang="en-US" sz="3200" dirty="0"/>
           </a:p>
         </p:txBody>
       </p:sp>
       <p:sp>
         <p:nvSpPr>
-          <p:cNvPr id="6" name="Text 4"/>
+          <p:cNvPr id="3" name="Text 1"/>
           <p:cNvSpPr/>
           <p:nvPr/>
         </p:nvSpPr>
         <p:spPr>
           <a:xfrm>
-            <a:off x="731520" y="2468880"/>
-            <a:ext cx="7680960" cy="457200"/>
+            <a:off x="731520" y="2377440"/>
+            <a:ext cx="7315200" cy="548640"/>
           </a:xfrm>
           <a:prstGeom prst="rect">
             <a:avLst/>
@@ -5827,34 +5855,36 @@
           <a:bodyPr wrap="square" rtlCol="0" anchor="ctr"/>
           <a:lstStyle/>
           <a:p>
-            <a:pPr algn="ctr" indent="0" marL="0">
+            <a:pPr indent="0" marL="0">
               <a:buNone/>
             </a:pPr>
             <a:r>
-              <a:rPr lang="en-US" sz="1800" dirty="0">
+              <a:rPr lang="en-US" sz="1500" dirty="0">
                 <a:solidFill>
-                  <a:srgbClr val="2A9D8F"/>
+                  <a:srgbClr val="FFFFFF">
+                    <a:alpha val="60000"/>
+                  </a:srgbClr>
                 </a:solidFill>
-                <a:latin typeface="Calibri" pitchFamily="34" charset="0"/>
-                <a:ea typeface="Calibri" pitchFamily="34" charset="-122"/>
-                <a:cs typeface="Calibri" pitchFamily="34" charset="-120"/>
+                <a:latin typeface="Arial" pitchFamily="34" charset="0"/>
+                <a:ea typeface="Arial" pitchFamily="34" charset="-122"/>
+                <a:cs typeface="Arial" pitchFamily="34" charset="-120"/>
               </a:rPr>
-              <a:t>mrzocchi.com</a:t>
-            </a:r>
-            <a:endParaRPr lang="en-US" sz="1800" dirty="0"/>
+              <a:t>Use the Self-Quiz, Review Games, and Practice Builder to test yourself.</a:t>
+            </a:r>
+            <a:endParaRPr lang="en-US" sz="1500" dirty="0"/>
           </a:p>
         </p:txBody>
       </p:sp>
       <p:sp>
         <p:nvSpPr>
-          <p:cNvPr id="7" name="Text 5"/>
+          <p:cNvPr id="4" name="Text 2"/>
           <p:cNvSpPr/>
           <p:nvPr/>
         </p:nvSpPr>
         <p:spPr>
           <a:xfrm>
-            <a:off x="731520" y="3108960"/>
-            <a:ext cx="7680960" cy="457200"/>
+            <a:off x="731520" y="3291840"/>
+            <a:ext cx="3657600" cy="457200"/>
           </a:xfrm>
           <a:prstGeom prst="rect">
             <a:avLst/>
@@ -5866,21 +5896,21 @@
           <a:bodyPr wrap="square" rtlCol="0" anchor="ctr"/>
           <a:lstStyle/>
           <a:p>
-            <a:pPr algn="ctr" indent="0" marL="0">
+            <a:pPr indent="0" marL="0">
               <a:buNone/>
             </a:pPr>
             <a:r>
-              <a:rPr lang="en-US" sz="1300" dirty="0">
+              <a:rPr lang="en-US" sz="1800" b="1" dirty="0">
                 <a:solidFill>
-                  <a:srgbClr val="9B9690"/>
+                  <a:srgbClr val="E9C46A"/>
                 </a:solidFill>
-                <a:latin typeface="Calibri" pitchFamily="34" charset="0"/>
-                <a:ea typeface="Calibri" pitchFamily="34" charset="-122"/>
-                <a:cs typeface="Calibri" pitchFamily="34" charset="-120"/>
+                <a:latin typeface="Georgia" pitchFamily="34" charset="0"/>
+                <a:ea typeface="Georgia" pitchFamily="34" charset="-122"/>
+                <a:cs typeface="Georgia" pitchFamily="34" charset="-120"/>
               </a:rPr>
-              <a:t>Use the Self-Quiz, Review Games, and Practice Builder to test yourself.</a:t>
-            </a:r>
-            <a:endParaRPr lang="en-US" sz="1300" dirty="0"/>
+              <a:t>mrzocchi.com</a:t>
+            </a:r>
+            <a:endParaRPr lang="en-US" sz="1800" dirty="0"/>
           </a:p>
         </p:txBody>
       </p:sp>
